--- a/slides/ws1-google-slides-design-plugin-editable-slides.pptx
+++ b/slides/ws1-google-slides-design-plugin-editable-slides.pptx
@@ -782,7 +782,7 @@
           <a:p>
             <a:r>
               <a:rPr lang="en-US" dirty="0"/>
-              <a:t>[phased-roadmap-timeline] WS1 • Reference Architecture &amp; 5-Hop Governance Rollout Timeline: Workstream 1 Rollout Timeline  •  Phase 1 (5-Hop Core) → Phase 2 (GAP-01..05 Controls) → Phase 3 (20/20 Certification)</a:t>
+              <a:t>[phased-roadmap-timeline] WS1 • ACT III: PHASED IMPLEMENTATION &amp; CERTIFICATION TIMELINE: Workstream 1 Rollout Timeline  •  Phase 1 (5-Hop Core) → Phase 2 (GAP-01..05 Controls) → Phase 3 (20/20 Certification)</a:t>
             </a:r>
             <a:endParaRPr lang="en-US" dirty="0"/>
           </a:p>
@@ -870,7 +870,7 @@
           <a:p>
             <a:r>
               <a:rPr lang="en-US" dirty="0"/>
-              <a:t>[strategic-operating-model-pillars] WS1 • 3-Pillar Multi-Tenant Reference Architecture Operating Model: Workstream 1 Operating Model  •  Identity &amp; Edge Context + Scoped Memory &amp; Guardrails + Data Isolation &amp; FinOps</a:t>
+              <a:t>[strategic-operating-model-pillars] WS1 • ACT III: DAY-2 PLATFORM ENGINEERING OPERATING MODEL &amp; RACI SLAs: Workstream 1 Day-2 Operating Model  •  Security &amp; IAM Ownership + Agent Runtime SRE + FinOps &amp; 20/20 CI/CD Governance</a:t>
             </a:r>
             <a:endParaRPr lang="en-US" dirty="0"/>
           </a:p>
@@ -959,11 +959,11 @@
             <a:r>
               <a:rPr lang="en-US" dirty="0"/>
               <a:t>What's next — Series Navigation &amp; Engineering Deliverables
-• Enforce Cryptographic Context Across All 5 Hops: Database row filters alone cannot secure agentic AI; tenant identity must govern ingress, tool discovery, memory namespaces, safety guardrails, and SQL RLS.
-• Align Isolation Topology to Regulatory &amp; Margin Requirements: Deploy Pattern A ($42/mo) for commercial scale, Pattern B ($1,850/mo) for regulated sovereignty, and Pattern C for multi-tier SaaS portfolios.
-• Maintain a Single 80% Reusable Agent Codebase: Parameterize isolation boundaries via declarative Firestore profiles and Terraform modules rather than forking separate application codebases.
-• Capture 90% Prefix Cache Savings Without Cross-Tenant Risk: Bind Gemini 2.5 Pro ContextCacheConfig strictly to immutable platform instructions while isolating tenant episodic state in L1–L5 Memory Bank.
-• Validate Every Release Against Automated Red-Team Gates: Execute the 20-assertion verification suite (10 Pattern A breach tests, 6 Pattern B silo tests, 4 Pattern C migration tests) in CI/CD.</a:t>
+• 1. Shared 5-Hop ADK 2.0 Core Engine (All Patterns): Deploy core-cymbal-agent/ (models.py, runtime_pipeline.py, tenant_profiles.py) once to enforce Hops 1–5 across Pooled, Siloed, and Hybrid tiers with 80% code reuse.
+• 2. Proceed to Workstream 2 — Pattern A High-Density Pooled ($42/mo): Provision workstream-2-pattern-a-pooled/2.6-terraform-starter/ and run 2.5-breach-simulation-suite/run_breach_simulations.py (10/10 breach tests PASS).
+• 3. Proceed to Workstream 3 — Pattern B Zero-Trust Sovereign Silos ($1,850/mo): Provision workstream-3-pattern-b-siloed/3.6-terraform-silo-blueprint/ (VPC-SC, IAM PAB, CMEK) and run run_silo_security_tests.py (6/6 PASS).
+• 4. Proceed to Workstream 4 — Pattern C Dynamic Hybrid PSC &amp; Live Migration: Provision workstream-4-pattern-c-hybrid/4.6-terraform-hybrid-psc-blueprint/ (/28 PSC NAT) and run run_tier_migration_suite.py (4/4 PASS, 0ms lag).
+• 5. Proceed to Workstream 5 — Executive Decision Guide &amp; CI/CD Certification: Apply the 2-Question Topology Selector (5.1-pattern-comparison-and-decision-guide.md) and execute scripts/run_deep_forensic_audit.py (12/12 PASS).</a:t>
             </a:r>
             <a:endParaRPr lang="en-US" dirty="0"/>
           </a:p>
@@ -1234,7 +1234,7 @@
             <a:r>
               <a:rPr lang="en-US" dirty="0"/>
               <a:t>Products used — Google Cloud Agentic AI, Security &amp; Data Stack
-• Agentic AI &amp; Foundation Models: Vertex AI Agent Engine (ADK 2.0 runtime, Agent Registry &amp; L1–L5 Memory Bank), Gemini 2.5 Pro with ContextCacheConfig (90% shared prefix discount), Vertex AI Model Garden (Gemini 2.5 Pro (Dedicated PT)), and Gemma 3 (27B) on private GKE.
+• Agentic AI &amp; Foundation Models: Vertex AI Agent Engine (ADK 2.0 runtime, Agent Registry &amp; L1–L5 Memory Bank), Gemini 2.5 Pro with ContextCacheConfig (90% shared prefix discount), Vertex AI Model Garden (Dedicated Provisioned Throughput), and Gemma 3 (27B) on private GKE.
 • Ingress, Identity &amp; AI Safety Guardrails: Global External Application Load Balancer, Google Cloud Armor L7 WAF, Identity-Aware Proxy (IAP) &amp; IAM Security Token Service (RFC 8693 OBO + RFC 9449 DPoP), Vertex AI Model Armor, and Cloud Sensitive Data Protection (DLP).
 • Data, Storage, Networking &amp; Governance: AlloyDB for PostgreSQL (FORCE ROW LEVEL SECURITY), Memorystore for Valkey (per-tenant RPM bulkheads) &amp; Firestore, VPC Service Controls (VPC-SC) &amp; Private Service Connect (PSC), Cloud KMS CMEK (HTTP 423 kill-switch), and BigQuery OTel.
 • Shared 80% Reusable Application Core: All three isolation patterns execute the exact same Python ADK 2.0 5-hop security pipeline (`core-cymbal-agent/runtime_pipeline.py`), parameterizing only the surrounding 20% Google Cloud project and network boundary.</a:t>
@@ -1589,7 +1589,7 @@
           <a:p>
             <a:r>
               <a:rPr lang="en-US" dirty="0"/>
-              <a:t>[async-state-flow-pipeline] WS1 • 5-Hop Context Propagation &amp; Closed-Loop OTel Governance Flow: Workstream 1 State &amp; Feedback Flow  •  Sealed TenantContext Propagation + Closed-Loop BigQuery OTel Governance</a:t>
+              <a:t>[async-state-flow-pipeline] WS1 • ACT II: DETERMINISTIC FAIL-CLOSED CIRCUIT BREAKERS &amp; FEEDBACK LOOP: Workstream 1 Exception &amp; Feedback Loop  •  Fail-Closed Circuit Breakers (HTTP 401/403/422/423/429) + Closed-Loop BigQuery OTel</a:t>
             </a:r>
             <a:endParaRPr lang="en-US" dirty="0"/>
           </a:p>
@@ -3175,7 +3175,7 @@
                 <a:ea typeface="Google Sans" pitchFamily="34" charset="-122"/>
                 <a:cs typeface="Google Sans" pitchFamily="34" charset="-120"/>
               </a:rPr>
-              <a:t>OFFICIAL 4-ZONE HUB-AND-SPOKE TOPOLOGY (#78)</a:t>
+              <a:t>3-ACT EXECUTIVE BRIEFING &amp; DELIVERABLE MAP</a:t>
             </a:r>
             <a:endParaRPr lang="en-US" sz="920" dirty="0"/>
           </a:p>
@@ -3237,7 +3237,7 @@
         <p:spPr>
           <a:xfrm>
             <a:off x="7735824" y="1005840"/>
-            <a:ext cx="1353312" cy="219456"/>
+            <a:ext cx="1481328" cy="219456"/>
           </a:xfrm>
           <a:prstGeom prst="roundRect">
             <a:avLst>
@@ -3259,7 +3259,7 @@
         <p:spPr>
           <a:xfrm>
             <a:off x="7735824" y="1005840"/>
-            <a:ext cx="1353312" cy="219456"/>
+            <a:ext cx="1481328" cy="219456"/>
           </a:xfrm>
           <a:prstGeom prst="rect">
             <a:avLst/>
@@ -3275,7 +3275,7 @@
               <a:buNone/>
             </a:pPr>
             <a:r>
-              <a:rPr lang="en-US" sz="680" b="1" dirty="0">
+              <a:rPr lang="en-US" sz="660" b="1" dirty="0">
                 <a:solidFill>
                   <a:srgbClr val="174EA6"/>
                 </a:solidFill>
@@ -3283,9 +3283,9 @@
                 <a:ea typeface="Google Sans" pitchFamily="34" charset="-122"/>
                 <a:cs typeface="Google Sans" pitchFamily="34" charset="-120"/>
               </a:rPr>
-              <a:t>01 • ROUTING HUB</a:t>
-            </a:r>
-            <a:endParaRPr lang="en-US" sz="680" dirty="0"/>
+              <a:t>ACT I • SLIDES 1–4</a:t>
+            </a:r>
+            <a:endParaRPr lang="en-US" sz="660" dirty="0"/>
           </a:p>
         </p:txBody>
       </p:sp>
@@ -3297,8 +3297,8 @@
         </p:nvSpPr>
         <p:spPr>
           <a:xfrm>
-            <a:off x="9162288" y="987552"/>
-            <a:ext cx="2340864" cy="256032"/>
+            <a:off x="9272016" y="987552"/>
+            <a:ext cx="2249424" cy="256032"/>
           </a:xfrm>
           <a:prstGeom prst="rect">
             <a:avLst/>
@@ -3314,7 +3314,7 @@
               <a:buNone/>
             </a:pPr>
             <a:r>
-              <a:rPr lang="en-US" sz="880" b="1" dirty="0">
+              <a:rPr lang="en-US" sz="850" b="1" dirty="0">
                 <a:solidFill>
                   <a:srgbClr val="3C4043"/>
                 </a:solidFill>
@@ -3322,9 +3322,9 @@
                 <a:ea typeface="Google Sans" pitchFamily="34" charset="-122"/>
                 <a:cs typeface="Google Sans" pitchFamily="34" charset="-120"/>
               </a:rPr>
-              <a:t>Edge WAF, OBO/DPoP &amp; Tier Router</a:t>
-            </a:r>
-            <a:endParaRPr lang="en-US" sz="880" dirty="0"/>
+              <a:t>Master Blueprint (#78) &amp; SLO Scorecard</a:t>
+            </a:r>
+            <a:endParaRPr lang="en-US" sz="850" dirty="0"/>
           </a:p>
         </p:txBody>
       </p:sp>
@@ -3353,7 +3353,7 @@
               <a:buNone/>
             </a:pPr>
             <a:r>
-              <a:rPr lang="en-US" sz="790" dirty="0">
+              <a:rPr lang="en-US" sz="780" dirty="0">
                 <a:solidFill>
                   <a:srgbClr val="5F6368"/>
                 </a:solidFill>
@@ -3361,9 +3361,9 @@
                 <a:ea typeface="Roboto" pitchFamily="34" charset="-122"/>
                 <a:cs typeface="Roboto" pitchFamily="34" charset="-120"/>
               </a:rPr>
-              <a:t>Google Cloud Armor, IAP, IAM STS &amp; Agent Engine Registry verify OIDC identity, strip spoofed headers &amp; filter tools.</a:t>
-            </a:r>
-            <a:endParaRPr lang="en-US" sz="790" dirty="0"/>
+              <a:t>Decomposes Figure 1 into 56 editable vector shapes + 23 connectors, quantified unit economics ($42 vs. $1,850/mo) &amp; GCP stack.</a:t>
+            </a:r>
+            <a:endParaRPr lang="en-US" sz="780" dirty="0"/>
           </a:p>
         </p:txBody>
       </p:sp>
@@ -3423,7 +3423,7 @@
         <p:spPr>
           <a:xfrm>
             <a:off x="7735824" y="2194560"/>
-            <a:ext cx="1353312" cy="219456"/>
+            <a:ext cx="1481328" cy="219456"/>
           </a:xfrm>
           <a:prstGeom prst="roundRect">
             <a:avLst>
@@ -3445,7 +3445,7 @@
         <p:spPr>
           <a:xfrm>
             <a:off x="7735824" y="2194560"/>
-            <a:ext cx="1353312" cy="219456"/>
+            <a:ext cx="1481328" cy="219456"/>
           </a:xfrm>
           <a:prstGeom prst="rect">
             <a:avLst/>
@@ -3461,7 +3461,7 @@
               <a:buNone/>
             </a:pPr>
             <a:r>
-              <a:rPr lang="en-US" sz="680" b="1" dirty="0">
+              <a:rPr lang="en-US" sz="660" b="1" dirty="0">
                 <a:solidFill>
                   <a:srgbClr val="A50E0E"/>
                 </a:solidFill>
@@ -3469,9 +3469,9 @@
                 <a:ea typeface="Google Sans" pitchFamily="34" charset="-122"/>
                 <a:cs typeface="Google Sans" pitchFamily="34" charset="-120"/>
               </a:rPr>
-              <a:t>02 • RIGHT SPOKE</a:t>
-            </a:r>
-            <a:endParaRPr lang="en-US" sz="680" dirty="0"/>
+              <a:t>ACT II • SLIDES 5–8</a:t>
+            </a:r>
+            <a:endParaRPr lang="en-US" sz="660" dirty="0"/>
           </a:p>
         </p:txBody>
       </p:sp>
@@ -3483,8 +3483,8 @@
         </p:nvSpPr>
         <p:spPr>
           <a:xfrm>
-            <a:off x="9162288" y="2176272"/>
-            <a:ext cx="2340864" cy="256032"/>
+            <a:off x="9272016" y="2176272"/>
+            <a:ext cx="2249424" cy="256032"/>
           </a:xfrm>
           <a:prstGeom prst="rect">
             <a:avLst/>
@@ -3500,7 +3500,7 @@
               <a:buNone/>
             </a:pPr>
             <a:r>
-              <a:rPr lang="en-US" sz="880" b="1" dirty="0">
+              <a:rPr lang="en-US" sz="850" b="1" dirty="0">
                 <a:solidFill>
                   <a:srgbClr val="3C4043"/>
                 </a:solidFill>
@@ -3508,9 +3508,9 @@
                 <a:ea typeface="Google Sans" pitchFamily="34" charset="-122"/>
                 <a:cs typeface="Google Sans" pitchFamily="34" charset="-120"/>
               </a:rPr>
-              <a:t>2LO/3LO MCP, AlloyDB RLS &amp; PSC Vaults</a:t>
-            </a:r>
-            <a:endParaRPr lang="en-US" sz="880" dirty="0"/>
+              <a:t>3-Zone Boundaries, UML &amp; Fail-Closed Loops</a:t>
+            </a:r>
+            <a:endParaRPr lang="en-US" sz="850" dirty="0"/>
           </a:p>
         </p:txBody>
       </p:sp>
@@ -3539,7 +3539,7 @@
               <a:buNone/>
             </a:pPr>
             <a:r>
-              <a:rPr lang="en-US" sz="790" dirty="0">
+              <a:rPr lang="en-US" sz="780" dirty="0">
                 <a:solidFill>
                   <a:srgbClr val="5F6368"/>
                 </a:solidFill>
@@ -3547,9 +3547,9 @@
                 <a:ea typeface="Roboto" pitchFamily="34" charset="-122"/>
                 <a:cs typeface="Roboto" pitchFamily="34" charset="-120"/>
               </a:rPr>
-              <a:t>Enforces PostgreSQL Row-Level Security, 3LO step-up consent, VPC-SC perimeters &amp; &lt;60s CMEK kill-switches.</a:t>
-            </a:r>
-            <a:endParaRPr lang="en-US" sz="790" dirty="0"/>
+              <a:t>Walks through 3-zone physical/logical boundaries, Hop 1 OBO+DPoP wire transformation, 5-Actor UML sequence &amp; HTTP 401–429 circuit breakers.</a:t>
+            </a:r>
+            <a:endParaRPr lang="en-US" sz="780" dirty="0"/>
           </a:p>
         </p:txBody>
       </p:sp>
@@ -3609,7 +3609,7 @@
         <p:spPr>
           <a:xfrm>
             <a:off x="7735824" y="3383280"/>
-            <a:ext cx="1353312" cy="219456"/>
+            <a:ext cx="1481328" cy="219456"/>
           </a:xfrm>
           <a:prstGeom prst="roundRect">
             <a:avLst>
@@ -3631,7 +3631,7 @@
         <p:spPr>
           <a:xfrm>
             <a:off x="7735824" y="3383280"/>
-            <a:ext cx="1353312" cy="219456"/>
+            <a:ext cx="1481328" cy="219456"/>
           </a:xfrm>
           <a:prstGeom prst="rect">
             <a:avLst/>
@@ -3647,7 +3647,7 @@
               <a:buNone/>
             </a:pPr>
             <a:r>
-              <a:rPr lang="en-US" sz="680" b="1" dirty="0">
+              <a:rPr lang="en-US" sz="660" b="1" dirty="0">
                 <a:solidFill>
                   <a:srgbClr val="B06000"/>
                 </a:solidFill>
@@ -3655,9 +3655,9 @@
                 <a:ea typeface="Google Sans" pitchFamily="34" charset="-122"/>
                 <a:cs typeface="Google Sans" pitchFamily="34" charset="-120"/>
               </a:rPr>
-              <a:t>03 • LEFT SPOKE</a:t>
-            </a:r>
-            <a:endParaRPr lang="en-US" sz="680" dirty="0"/>
+              <a:t>ACT III • SLIDES 9–12</a:t>
+            </a:r>
+            <a:endParaRPr lang="en-US" sz="660" dirty="0"/>
           </a:p>
         </p:txBody>
       </p:sp>
@@ -3669,8 +3669,8 @@
         </p:nvSpPr>
         <p:spPr>
           <a:xfrm>
-            <a:off x="9162288" y="3364992"/>
-            <a:ext cx="2340864" cy="256032"/>
+            <a:off x="9272016" y="3364992"/>
+            <a:ext cx="2249424" cy="256032"/>
           </a:xfrm>
           <a:prstGeom prst="rect">
             <a:avLst/>
@@ -3686,7 +3686,7 @@
               <a:buNone/>
             </a:pPr>
             <a:r>
-              <a:rPr lang="en-US" sz="880" b="1" dirty="0">
+              <a:rPr lang="en-US" sz="850" b="1" dirty="0">
                 <a:solidFill>
                   <a:srgbClr val="3C4043"/>
                 </a:solidFill>
@@ -3694,9 +3694,9 @@
                 <a:ea typeface="Google Sans" pitchFamily="34" charset="-122"/>
                 <a:cs typeface="Google Sans" pitchFamily="34" charset="-120"/>
               </a:rPr>
-              <a:t>Model Armor, ADK &amp; 90% Prefix Cache</a:t>
-            </a:r>
-            <a:endParaRPr lang="en-US" sz="880" dirty="0"/>
+              <a:t>Pattern A/B/C Matrix, GAP-01..05 &amp; Live Proof</a:t>
+            </a:r>
+            <a:endParaRPr lang="en-US" sz="850" dirty="0"/>
           </a:p>
         </p:txBody>
       </p:sp>
@@ -3725,7 +3725,7 @@
               <a:buNone/>
             </a:pPr>
             <a:r>
-              <a:rPr lang="en-US" sz="790" dirty="0">
+              <a:rPr lang="en-US" sz="780" dirty="0">
                 <a:solidFill>
                   <a:srgbClr val="5F6368"/>
                 </a:solidFill>
@@ -3733,9 +3733,9 @@
                 <a:ea typeface="Roboto" pitchFamily="34" charset="-122"/>
                 <a:cs typeface="Roboto" pitchFamily="34" charset="-120"/>
               </a:rPr>
-              <a:t>Screens prompts (4/6), executes Gemini 2.5 Pro with 90% cache (5), clamps RPM in Valkey &amp; isolates L1–L5 memory.</a:t>
-            </a:r>
-            <a:endParaRPr lang="en-US" sz="790" dirty="0"/>
+              <a:t>Compares Pooled, Siloed &amp; Hybrid PSC trade-offs, closes 5 EAP product gaps, embeds 16:9 Cloud Console captures &amp; 6-week rollout.</a:t>
+            </a:r>
+            <a:endParaRPr lang="en-US" sz="780" dirty="0"/>
           </a:p>
         </p:txBody>
       </p:sp>
@@ -3795,7 +3795,7 @@
         <p:spPr>
           <a:xfrm>
             <a:off x="7735824" y="4572000"/>
-            <a:ext cx="1353312" cy="219456"/>
+            <a:ext cx="1481328" cy="219456"/>
           </a:xfrm>
           <a:prstGeom prst="roundRect">
             <a:avLst>
@@ -3817,7 +3817,7 @@
         <p:spPr>
           <a:xfrm>
             <a:off x="7735824" y="4572000"/>
-            <a:ext cx="1353312" cy="219456"/>
+            <a:ext cx="1481328" cy="219456"/>
           </a:xfrm>
           <a:prstGeom prst="rect">
             <a:avLst/>
@@ -3833,7 +3833,7 @@
               <a:buNone/>
             </a:pPr>
             <a:r>
-              <a:rPr lang="en-US" sz="680" b="1" dirty="0">
+              <a:rPr lang="en-US" sz="660" b="1" dirty="0">
                 <a:solidFill>
                   <a:srgbClr val="0D652D"/>
                 </a:solidFill>
@@ -3841,9 +3841,9 @@
                 <a:ea typeface="Google Sans" pitchFamily="34" charset="-122"/>
                 <a:cs typeface="Google Sans" pitchFamily="34" charset="-120"/>
               </a:rPr>
-              <a:t>04 • GOVERNANCE HUB</a:t>
-            </a:r>
-            <a:endParaRPr lang="en-US" sz="680" dirty="0"/>
+              <a:t>GOVERNANCE • SLIDES 13–14</a:t>
+            </a:r>
+            <a:endParaRPr lang="en-US" sz="660" dirty="0"/>
           </a:p>
         </p:txBody>
       </p:sp>
@@ -3855,8 +3855,8 @@
         </p:nvSpPr>
         <p:spPr>
           <a:xfrm>
-            <a:off x="9162288" y="4553712"/>
-            <a:ext cx="2340864" cy="256032"/>
+            <a:off x="9272016" y="4553712"/>
+            <a:ext cx="2249424" cy="256032"/>
           </a:xfrm>
           <a:prstGeom prst="rect">
             <a:avLst/>
@@ -3872,7 +3872,7 @@
               <a:buNone/>
             </a:pPr>
             <a:r>
-              <a:rPr lang="en-US" sz="880" b="1" dirty="0">
+              <a:rPr lang="en-US" sz="850" b="1" dirty="0">
                 <a:solidFill>
                   <a:srgbClr val="3C4043"/>
                 </a:solidFill>
@@ -3880,9 +3880,9 @@
                 <a:ea typeface="Google Sans" pitchFamily="34" charset="-122"/>
                 <a:cs typeface="Google Sans" pitchFamily="34" charset="-120"/>
               </a:rPr>
-              <a:t>Security, CMEK &amp; FinOps Telemetry</a:t>
-            </a:r>
-            <a:endParaRPr lang="en-US" sz="880" dirty="0"/>
+              <a:t>Day-2 RACI Operating Model &amp; Series Map</a:t>
+            </a:r>
+            <a:endParaRPr lang="en-US" sz="850" dirty="0"/>
           </a:p>
         </p:txBody>
       </p:sp>
@@ -3911,7 +3911,7 @@
               <a:buNone/>
             </a:pPr>
             <a:r>
-              <a:rPr lang="en-US" sz="790" dirty="0">
+              <a:rPr lang="en-US" sz="780" dirty="0">
                 <a:solidFill>
                   <a:srgbClr val="5F6368"/>
                 </a:solidFill>
@@ -3919,9 +3919,9 @@
                 <a:ea typeface="Roboto" pitchFamily="34" charset="-122"/>
                 <a:cs typeface="Roboto" pitchFamily="34" charset="-120"/>
               </a:rPr>
-              <a:t>Security Command Center, Cloud KMS CMEK &amp; BigQuery OTel govern encryption liveness and zero-PII chargeback.</a:t>
-            </a:r>
-            <a:endParaRPr lang="en-US" sz="790" dirty="0"/>
+              <a:t>Assigns Security, SRE &amp; FinOps ownership SLAs and maps runnable deliverables across Workstreams 1–5 (24 files + 20/20 gates).</a:t>
+            </a:r>
+            <a:endParaRPr lang="en-US" sz="780" dirty="0"/>
           </a:p>
         </p:txBody>
       </p:sp>
@@ -3977,7 +3977,7 @@
               <a:buNone/>
             </a:pPr>
             <a:r>
-              <a:rPr lang="en-US" sz="740" b="1" dirty="0">
+              <a:rPr lang="en-US" sz="720" b="1" dirty="0">
                 <a:solidFill>
                   <a:srgbClr val="3C4043"/>
                 </a:solidFill>
@@ -3985,9 +3985,9 @@
                 <a:ea typeface="Google Sans" pitchFamily="34" charset="-122"/>
                 <a:cs typeface="Google Sans" pitchFamily="34" charset="-120"/>
               </a:rPr>
-              <a:t>3-Act Executive Arc (14 Slides): Act I Architecture → Act II Runtime → Act III Proof &amp; Rollout</a:t>
-            </a:r>
-            <a:endParaRPr lang="en-US" sz="740" dirty="0"/>
+              <a:t>Verified Across 3 GCP Projects (#248990048888 • #638420508320 • #887605034827) • 12/12 Forensic PASS</a:t>
+            </a:r>
+            <a:endParaRPr lang="en-US" sz="720" dirty="0"/>
           </a:p>
         </p:txBody>
       </p:sp>
@@ -4427,7 +4427,7 @@
                 <a:ea typeface="Google Sans" pitchFamily="34" charset="-122"/>
                 <a:cs typeface="Google Sans" pitchFamily="34" charset="-120"/>
               </a:rPr>
-              <a:t>Design alternatives — Compensating Controls for EAP Product Gaps (GAP-01..05)</a:t>
+              <a:t>ACT III • EAP PRODUCT GAP REGISTER (GAP-01..05) &amp; COMPENSATING CONTROLS</a:t>
             </a:r>
             <a:endParaRPr lang="en-US" sz="1020" dirty="0"/>
           </a:p>
@@ -4532,7 +4532,7 @@
                 <a:ea typeface="Google Sans" pitchFamily="34" charset="-122"/>
                 <a:cs typeface="Google Sans" pitchFamily="34" charset="-120"/>
               </a:rPr>
-              <a:t>Design alternatives — Compensating Controls for EAP Product Gaps (GAP-01..05)</a:t>
+              <a:t>Compensating Controls for EAP Product Gaps (GAP-01..05)</a:t>
             </a:r>
             <a:endParaRPr lang="en-US" sz="1800" dirty="0"/>
           </a:p>
@@ -4571,7 +4571,7 @@
                 <a:ea typeface="Roboto" pitchFamily="34" charset="-122"/>
                 <a:cs typeface="Roboto" pitchFamily="34" charset="-120"/>
               </a:rPr>
-              <a:t>Side-by-side Google Cloud Well-Architected trade-off analysis, compensating controls, and target SLAs.</a:t>
+              <a:t>Production compensating controls in core-cymbal-agent/ closing all 5 multi-tenant EAP limitations with fail-closed gates.</a:t>
             </a:r>
             <a:endParaRPr lang="en-US" sz="980" dirty="0"/>
           </a:p>
@@ -6440,7 +6440,7 @@
                 <a:ea typeface="Google Sans" pitchFamily="34" charset="-122"/>
                 <a:cs typeface="Google Sans" pitchFamily="34" charset="-120"/>
               </a:rPr>
-              <a:t>1. GAP-01 (Hop 2) • Agent Engine Registry</a:t>
+              <a:t>1. Identity &amp; Catalog Gates (GAP-01 / GAP-04)</a:t>
             </a:r>
             <a:endParaRPr lang="en-US" sz="760" dirty="0"/>
           </a:p>
@@ -6481,7 +6481,7 @@
                 <a:ea typeface="Roboto" pitchFamily="34" charset="-122"/>
                 <a:cs typeface="Roboto" pitchFamily="34" charset="-120"/>
               </a:rPr>
-              <a:t>WS2 Test 2 PASS (HTTP 403 on cross-tenant Agent Alpha discovery) • Target GA: Q4 2026</a:t>
+              <a:t>Filters Agent Engine Registry discovery by signed JWT tenant_id (HTTP 403) and normalizes Entra ID OIDC into DPoP tokens with -32042 3LO step-up.</a:t>
             </a:r>
             <a:endParaRPr lang="en-US" sz="740" dirty="0"/>
           </a:p>
@@ -6561,7 +6561,7 @@
               <a:buNone/>
             </a:pPr>
             <a:r>
-              <a:rPr lang="en-US" sz="820" b="1" dirty="0">
+              <a:rPr lang="en-US" sz="760" b="1" dirty="0">
                 <a:solidFill>
                   <a:srgbClr val="3C4043"/>
                 </a:solidFill>
@@ -6569,9 +6569,9 @@
                 <a:ea typeface="Google Sans" pitchFamily="34" charset="-122"/>
                 <a:cs typeface="Google Sans" pitchFamily="34" charset="-120"/>
               </a:rPr>
-              <a:t>2. GAP-02 (Hop 3) • Memory Bank CMEK</a:t>
-            </a:r>
-            <a:endParaRPr lang="en-US" sz="820" dirty="0"/>
+              <a:t>2. Cryptographic Memory CMEK (GAP-02)</a:t>
+            </a:r>
+            <a:endParaRPr lang="en-US" sz="760" dirty="0"/>
           </a:p>
         </p:txBody>
       </p:sp>
@@ -6610,7 +6610,7 @@
                 <a:ea typeface="Roboto" pitchFamily="34" charset="-122"/>
                 <a:cs typeface="Roboto" pitchFamily="34" charset="-120"/>
               </a:rPr>
-              <a:t>WS3 Tests 4A/4B/6 PASS (HTTP 423 Locked &lt;60s on key disable) • Target GA: Q4 2026</a:t>
+              <a:t>Envelope-encrypts pooled L1–L5 Memory Bank chapters per tenant and enforces &lt;60s HTTP 423 Locked revocation + L1 purge in sovereign silos.</a:t>
             </a:r>
             <a:endParaRPr lang="en-US" sz="740" dirty="0"/>
           </a:p>
@@ -6690,7 +6690,7 @@
               <a:buNone/>
             </a:pPr>
             <a:r>
-              <a:rPr lang="en-US" sz="760" b="1" dirty="0">
+              <a:rPr lang="en-US" sz="820" b="1" dirty="0">
                 <a:solidFill>
                   <a:srgbClr val="3C4043"/>
                 </a:solidFill>
@@ -6698,9 +6698,9 @@
                 <a:ea typeface="Google Sans" pitchFamily="34" charset="-122"/>
                 <a:cs typeface="Google Sans" pitchFamily="34" charset="-120"/>
               </a:rPr>
-              <a:t>3. GAP-03 (Hop 3) • Per-Tenant Rate Quotas</a:t>
-            </a:r>
-            <a:endParaRPr lang="en-US" sz="760" dirty="0"/>
+              <a:t>3. Noisy-Neighbor Bulkheads (GAP-03)</a:t>
+            </a:r>
+            <a:endParaRPr lang="en-US" sz="820" dirty="0"/>
           </a:p>
         </p:txBody>
       </p:sp>
@@ -6739,7 +6739,7 @@
                 <a:ea typeface="Roboto" pitchFamily="34" charset="-122"/>
                 <a:cs typeface="Roboto" pitchFamily="34" charset="-120"/>
               </a:rPr>
-              <a:t>WS2 Test 6 PASS (HTTP 429 on 500-RPM flood; budget clamped to 4k) • Target GA: Q4 2026</a:t>
+              <a:t>Enforces atomic per-tenant RPM token buckets (120 vs. 600 RPM) in Memorystore for Valkey (HTTP 429 Retry-After) plus 4k/8k thinking caps.</a:t>
             </a:r>
             <a:endParaRPr lang="en-US" sz="740" dirty="0"/>
           </a:p>
@@ -6819,7 +6819,7 @@
               <a:buNone/>
             </a:pPr>
             <a:r>
-              <a:rPr lang="en-US" sz="760" b="1" dirty="0">
+              <a:rPr lang="en-US" sz="820" b="1" dirty="0">
                 <a:solidFill>
                   <a:srgbClr val="3C4043"/>
                 </a:solidFill>
@@ -6827,9 +6827,9 @@
                 <a:ea typeface="Google Sans" pitchFamily="34" charset="-122"/>
                 <a:cs typeface="Google Sans" pitchFamily="34" charset="-120"/>
               </a:rPr>
-              <a:t>4. GAP-04 (Hop 1/2) • Multi-IdP 3LO Broker</a:t>
-            </a:r>
-            <a:endParaRPr lang="en-US" sz="760" dirty="0"/>
+              <a:t>4. Zero-PII FinOps Ledger (GAP-05)</a:t>
+            </a:r>
+            <a:endParaRPr lang="en-US" sz="820" dirty="0"/>
           </a:p>
         </p:txBody>
       </p:sp>
@@ -6868,7 +6868,7 @@
                 <a:ea typeface="Roboto" pitchFamily="34" charset="-122"/>
                 <a:cs typeface="Roboto" pitchFamily="34" charset="-120"/>
               </a:rPr>
-              <a:t>WS2 Test 10 PASS (HTTP 401 step-up challenge -&gt; 200 OK ServiceNow) • Target GA: Q4 2026</a:t>
+              <a:t>Emits SHA-256 prompt hashes and per-tenant cached/thinking/output token spans via OpenTelemetry to BigQuery chargeback views (F-08 PASS).</a:t>
             </a:r>
             <a:endParaRPr lang="en-US" sz="740" dirty="0"/>
           </a:p>
@@ -7679,7 +7679,7 @@
                 <a:ea typeface="Google Sans" pitchFamily="34" charset="-122"/>
                 <a:cs typeface="Google Sans" pitchFamily="34" charset="-120"/>
               </a:rPr>
-              <a:t>ramp-portal-dev (#248990048888) &amp; nitinagga-ge-2 (#638420508320) serving Pattern A/B/C endpoints (HTTP 200)</a:t>
+              <a:t>ramp-portal-dev (#248990048888) &amp; cymbal-pooled-prod (#638420508320) serving Pattern A/B/C endpoints (HTTP 200)</a:t>
             </a:r>
             <a:endParaRPr lang="en-US" sz="860" dirty="0"/>
           </a:p>
@@ -7718,7 +7718,7 @@
                 <a:ea typeface="Roboto" pitchFamily="34" charset="-122"/>
                 <a:cs typeface="Roboto" pitchFamily="34" charset="-120"/>
               </a:rPr>
-              <a:t>• Project: nitinagga-ge-2 (#638420508320)</a:t>
+              <a:t>• Project: cymbal-pooled-prod (#638420508320)</a:t>
             </a:r>
             <a:endParaRPr lang="en-US" sz="780" dirty="0"/>
           </a:p>
@@ -7735,7 +7735,7 @@
                 <a:ea typeface="Roboto" pitchFamily="34" charset="-122"/>
                 <a:cs typeface="Roboto" pitchFamily="34" charset="-120"/>
               </a:rPr>
-              <a:t>• Sandbox: nitina-ggarwal-sandbox-647724</a:t>
+              <a:t>• Sandbox: cymbal-build-sandbox (#887605034827)</a:t>
             </a:r>
             <a:endParaRPr lang="en-US" sz="780" dirty="0"/>
           </a:p>
@@ -8299,7 +8299,7 @@
                 <a:ea typeface="Roboto" pitchFamily="34" charset="-122"/>
                 <a:cs typeface="Roboto" pitchFamily="34" charset="-120"/>
               </a:rPr>
-              <a:t>Live across ramp-portal-dev (#248990048888), nitinagga-ge-2 (#638420508320) &amp; nitina-ggarwal-sandbox-647724.</a:t>
+              <a:t>Live across ramp-portal-dev (#248990048888), cymbal-pooled-prod (#638420508320) &amp; cymbal-build-sandbox (#887605034827).</a:t>
             </a:r>
             <a:endParaRPr lang="en-US" sz="860" dirty="0"/>
           </a:p>
@@ -9299,7 +9299,7 @@
                 <a:ea typeface="Google Sans" pitchFamily="34" charset="-122"/>
                 <a:cs typeface="Google Sans" pitchFamily="34" charset="-120"/>
               </a:rPr>
-              <a:t>WS1 • Reference Architecture &amp; 5-Hop Governance Rollout Timeline</a:t>
+              <a:t>WS1 • ACT III: PHASED IMPLEMENTATION &amp; CERTIFICATION TIMELINE</a:t>
             </a:r>
             <a:endParaRPr lang="en-US" sz="1020" dirty="0"/>
           </a:p>
@@ -9396,7 +9396,7 @@
               <a:buNone/>
             </a:pPr>
             <a:r>
-              <a:rPr lang="en-US" sz="2400" b="1" dirty="0">
+              <a:rPr lang="en-US" sz="2250" b="1" dirty="0">
                 <a:solidFill>
                   <a:srgbClr val="0F2942"/>
                 </a:solidFill>
@@ -9404,9 +9404,9 @@
                 <a:ea typeface="Google Sans Display" pitchFamily="34" charset="-122"/>
                 <a:cs typeface="Google Sans Display" pitchFamily="34" charset="-120"/>
               </a:rPr>
-              <a:t>Workstream 1 Reference Architecture Rollout Roadmap</a:t>
-            </a:r>
-            <a:endParaRPr lang="en-US" sz="2400" dirty="0"/>
+              <a:t>6-Week Reference Architecture Rollout &amp; 20/20 Certification Roadmap</a:t>
+            </a:r>
+            <a:endParaRPr lang="en-US" sz="2250" dirty="0"/>
           </a:p>
         </p:txBody>
       </p:sp>
@@ -9700,66 +9700,6 @@
         </p:nvSpPr>
         <p:spPr>
           <a:xfrm>
-            <a:off x="411480" y="3694176"/>
-            <a:ext cx="237744" cy="237744"/>
-          </a:xfrm>
-          <a:prstGeom prst="ellipse">
-            <a:avLst/>
-          </a:prstGeom>
-          <a:solidFill>
-            <a:srgbClr val="0F2942"/>
-          </a:solidFill>
-          <a:ln/>
-        </p:spPr>
-      </p:sp>
-      <p:sp>
-        <p:nvSpPr>
-          <p:cNvPr id="27" name="Shape 25"/>
-          <p:cNvSpPr/>
-          <p:nvPr/>
-        </p:nvSpPr>
-        <p:spPr>
-          <a:xfrm>
-            <a:off x="3849624" y="3694176"/>
-            <a:ext cx="237744" cy="237744"/>
-          </a:xfrm>
-          <a:prstGeom prst="ellipse">
-            <a:avLst/>
-          </a:prstGeom>
-          <a:solidFill>
-            <a:srgbClr val="0F2942"/>
-          </a:solidFill>
-          <a:ln/>
-        </p:spPr>
-      </p:sp>
-      <p:sp>
-        <p:nvSpPr>
-          <p:cNvPr id="28" name="Shape 26"/>
-          <p:cNvSpPr/>
-          <p:nvPr/>
-        </p:nvSpPr>
-        <p:spPr>
-          <a:xfrm>
-            <a:off x="4251960" y="3694176"/>
-            <a:ext cx="237744" cy="237744"/>
-          </a:xfrm>
-          <a:prstGeom prst="ellipse">
-            <a:avLst/>
-          </a:prstGeom>
-          <a:solidFill>
-            <a:srgbClr val="0D7A75"/>
-          </a:solidFill>
-          <a:ln/>
-        </p:spPr>
-      </p:sp>
-      <p:sp>
-        <p:nvSpPr>
-          <p:cNvPr id="29" name="Shape 27"/>
-          <p:cNvSpPr/>
-          <p:nvPr/>
-        </p:nvSpPr>
-        <p:spPr>
-          <a:xfrm>
             <a:off x="4370832" y="1536192"/>
             <a:ext cx="3438144" cy="4443984"/>
           </a:xfrm>
@@ -9781,7 +9721,7 @@
       </p:sp>
       <p:sp>
         <p:nvSpPr>
-          <p:cNvPr id="30" name="Shape 28"/>
+          <p:cNvPr id="27" name="Shape 25"/>
           <p:cNvSpPr/>
           <p:nvPr/>
         </p:nvSpPr>
@@ -9803,7 +9743,7 @@
       </p:sp>
       <p:sp>
         <p:nvSpPr>
-          <p:cNvPr id="31" name="Text 29"/>
+          <p:cNvPr id="28" name="Text 26"/>
           <p:cNvSpPr/>
           <p:nvPr/>
         </p:nvSpPr>
@@ -9842,7 +9782,7 @@
       </p:sp>
       <p:sp>
         <p:nvSpPr>
-          <p:cNvPr id="32" name="Shape 30"/>
+          <p:cNvPr id="29" name="Shape 27"/>
           <p:cNvSpPr/>
           <p:nvPr/>
         </p:nvSpPr>
@@ -9862,7 +9802,7 @@
       </p:sp>
       <p:sp>
         <p:nvSpPr>
-          <p:cNvPr id="33" name="Text 31"/>
+          <p:cNvPr id="30" name="Text 28"/>
           <p:cNvSpPr/>
           <p:nvPr/>
         </p:nvSpPr>
@@ -9918,7 +9858,7 @@
       </p:sp>
       <p:sp>
         <p:nvSpPr>
-          <p:cNvPr id="34" name="Text 32"/>
+          <p:cNvPr id="31" name="Text 29"/>
           <p:cNvSpPr/>
           <p:nvPr/>
         </p:nvSpPr>
@@ -9957,7 +9897,7 @@
       </p:sp>
       <p:sp>
         <p:nvSpPr>
-          <p:cNvPr id="35" name="Shape 33"/>
+          <p:cNvPr id="32" name="Shape 30"/>
           <p:cNvSpPr/>
           <p:nvPr/>
         </p:nvSpPr>
@@ -9980,7 +9920,7 @@
       </p:sp>
       <p:sp>
         <p:nvSpPr>
-          <p:cNvPr id="36" name="Text 34"/>
+          <p:cNvPr id="33" name="Text 31"/>
           <p:cNvSpPr/>
           <p:nvPr/>
         </p:nvSpPr>
@@ -10036,47 +9976,7 @@
       </p:sp>
       <p:sp>
         <p:nvSpPr>
-          <p:cNvPr id="37" name="Shape 35"/>
-          <p:cNvSpPr/>
-          <p:nvPr/>
-        </p:nvSpPr>
-        <p:spPr>
-          <a:xfrm>
-            <a:off x="7690104" y="3694176"/>
-            <a:ext cx="237744" cy="237744"/>
-          </a:xfrm>
-          <a:prstGeom prst="ellipse">
-            <a:avLst/>
-          </a:prstGeom>
-          <a:solidFill>
-            <a:srgbClr val="0D7A75"/>
-          </a:solidFill>
-          <a:ln/>
-        </p:spPr>
-      </p:sp>
-      <p:sp>
-        <p:nvSpPr>
-          <p:cNvPr id="38" name="Shape 36"/>
-          <p:cNvSpPr/>
-          <p:nvPr/>
-        </p:nvSpPr>
-        <p:spPr>
-          <a:xfrm>
-            <a:off x="8092440" y="3694176"/>
-            <a:ext cx="237744" cy="237744"/>
-          </a:xfrm>
-          <a:prstGeom prst="ellipse">
-            <a:avLst/>
-          </a:prstGeom>
-          <a:solidFill>
-            <a:srgbClr val="54728C"/>
-          </a:solidFill>
-          <a:ln/>
-        </p:spPr>
-      </p:sp>
-      <p:sp>
-        <p:nvSpPr>
-          <p:cNvPr id="39" name="Shape 37"/>
+          <p:cNvPr id="34" name="Shape 32"/>
           <p:cNvSpPr/>
           <p:nvPr/>
         </p:nvSpPr>
@@ -10103,7 +10003,7 @@
       </p:sp>
       <p:sp>
         <p:nvSpPr>
-          <p:cNvPr id="40" name="Shape 38"/>
+          <p:cNvPr id="35" name="Shape 33"/>
           <p:cNvSpPr/>
           <p:nvPr/>
         </p:nvSpPr>
@@ -10125,7 +10025,7 @@
       </p:sp>
       <p:sp>
         <p:nvSpPr>
-          <p:cNvPr id="41" name="Text 39"/>
+          <p:cNvPr id="36" name="Text 34"/>
           <p:cNvSpPr/>
           <p:nvPr/>
         </p:nvSpPr>
@@ -10164,7 +10064,7 @@
       </p:sp>
       <p:sp>
         <p:nvSpPr>
-          <p:cNvPr id="42" name="Shape 40"/>
+          <p:cNvPr id="37" name="Shape 35"/>
           <p:cNvSpPr/>
           <p:nvPr/>
         </p:nvSpPr>
@@ -10184,7 +10084,7 @@
       </p:sp>
       <p:sp>
         <p:nvSpPr>
-          <p:cNvPr id="43" name="Text 41"/>
+          <p:cNvPr id="38" name="Text 36"/>
           <p:cNvSpPr/>
           <p:nvPr/>
         </p:nvSpPr>
@@ -10240,7 +10140,7 @@
       </p:sp>
       <p:sp>
         <p:nvSpPr>
-          <p:cNvPr id="44" name="Text 42"/>
+          <p:cNvPr id="39" name="Text 37"/>
           <p:cNvSpPr/>
           <p:nvPr/>
         </p:nvSpPr>
@@ -10279,7 +10179,7 @@
       </p:sp>
       <p:sp>
         <p:nvSpPr>
-          <p:cNvPr id="45" name="Shape 43"/>
+          <p:cNvPr id="40" name="Shape 38"/>
           <p:cNvSpPr/>
           <p:nvPr/>
         </p:nvSpPr>
@@ -10302,7 +10202,7 @@
       </p:sp>
       <p:sp>
         <p:nvSpPr>
-          <p:cNvPr id="46" name="Text 44"/>
+          <p:cNvPr id="41" name="Text 39"/>
           <p:cNvSpPr/>
           <p:nvPr/>
         </p:nvSpPr>
@@ -10358,7 +10258,173 @@
       </p:sp>
       <p:sp>
         <p:nvSpPr>
+          <p:cNvPr id="42" name="Shape 40"/>
+          <p:cNvSpPr/>
+          <p:nvPr/>
+        </p:nvSpPr>
+        <p:spPr>
+          <a:xfrm>
+            <a:off x="3968496" y="3813048"/>
+            <a:ext cx="402336" cy="0"/>
+          </a:xfrm>
+          <a:prstGeom prst="line">
+            <a:avLst/>
+          </a:prstGeom>
+          <a:noFill/>
+          <a:ln w="28575">
+            <a:solidFill>
+              <a:srgbClr val="0F2942"/>
+            </a:solidFill>
+            <a:prstDash val="solid"/>
+            <a:tailEnd type="triangle" w="sm" len="sm"/>
+          </a:ln>
+        </p:spPr>
+      </p:sp>
+      <p:sp>
+        <p:nvSpPr>
+          <p:cNvPr id="43" name="Shape 41"/>
+          <p:cNvSpPr/>
+          <p:nvPr/>
+        </p:nvSpPr>
+        <p:spPr>
+          <a:xfrm>
+            <a:off x="4059936" y="3401568"/>
+            <a:ext cx="219456" cy="219456"/>
+          </a:xfrm>
+          <a:prstGeom prst="ellipse">
+            <a:avLst/>
+          </a:prstGeom>
+          <a:solidFill>
+            <a:srgbClr val="0F2942"/>
+          </a:solidFill>
+          <a:ln/>
+        </p:spPr>
+      </p:sp>
+      <p:sp>
+        <p:nvSpPr>
+          <p:cNvPr id="44" name="Text 42"/>
+          <p:cNvSpPr/>
+          <p:nvPr/>
+        </p:nvSpPr>
+        <p:spPr>
+          <a:xfrm>
+            <a:off x="4059936" y="3401568"/>
+            <a:ext cx="219456" cy="219456"/>
+          </a:xfrm>
+          <a:prstGeom prst="rect">
+            <a:avLst/>
+          </a:prstGeom>
+          <a:noFill/>
+          <a:ln/>
+        </p:spPr>
+        <p:txBody>
+          <a:bodyPr wrap="square" rtlCol="0" anchor="ctr"/>
+          <a:lstStyle/>
+          <a:p>
+            <a:pPr algn="ctr" indent="0" marL="0">
+              <a:buNone/>
+            </a:pPr>
+            <a:r>
+              <a:rPr lang="en-US" sz="850" b="1" dirty="0">
+                <a:solidFill>
+                  <a:srgbClr val="FFFFFF"/>
+                </a:solidFill>
+                <a:latin typeface="Google Sans" pitchFamily="34" charset="0"/>
+                <a:ea typeface="Google Sans" pitchFamily="34" charset="-122"/>
+                <a:cs typeface="Google Sans" pitchFamily="34" charset="-120"/>
+              </a:rPr>
+              <a:t>1</a:t>
+            </a:r>
+            <a:endParaRPr lang="en-US" sz="850" dirty="0"/>
+          </a:p>
+        </p:txBody>
+      </p:sp>
+      <p:sp>
+        <p:nvSpPr>
+          <p:cNvPr id="45" name="Shape 43"/>
+          <p:cNvSpPr/>
+          <p:nvPr/>
+        </p:nvSpPr>
+        <p:spPr>
+          <a:xfrm>
+            <a:off x="7808976" y="3813048"/>
+            <a:ext cx="402336" cy="0"/>
+          </a:xfrm>
+          <a:prstGeom prst="line">
+            <a:avLst/>
+          </a:prstGeom>
+          <a:noFill/>
+          <a:ln w="28575">
+            <a:solidFill>
+              <a:srgbClr val="0D7A75"/>
+            </a:solidFill>
+            <a:prstDash val="solid"/>
+            <a:tailEnd type="triangle" w="sm" len="sm"/>
+          </a:ln>
+        </p:spPr>
+      </p:sp>
+      <p:sp>
+        <p:nvSpPr>
+          <p:cNvPr id="46" name="Shape 44"/>
+          <p:cNvSpPr/>
+          <p:nvPr/>
+        </p:nvSpPr>
+        <p:spPr>
+          <a:xfrm>
+            <a:off x="7900416" y="3401568"/>
+            <a:ext cx="219456" cy="219456"/>
+          </a:xfrm>
+          <a:prstGeom prst="ellipse">
+            <a:avLst/>
+          </a:prstGeom>
+          <a:solidFill>
+            <a:srgbClr val="0D7A75"/>
+          </a:solidFill>
+          <a:ln/>
+        </p:spPr>
+      </p:sp>
+      <p:sp>
+        <p:nvSpPr>
           <p:cNvPr id="47" name="Text 45"/>
+          <p:cNvSpPr/>
+          <p:nvPr/>
+        </p:nvSpPr>
+        <p:spPr>
+          <a:xfrm>
+            <a:off x="7900416" y="3401568"/>
+            <a:ext cx="219456" cy="219456"/>
+          </a:xfrm>
+          <a:prstGeom prst="rect">
+            <a:avLst/>
+          </a:prstGeom>
+          <a:noFill/>
+          <a:ln/>
+        </p:spPr>
+        <p:txBody>
+          <a:bodyPr wrap="square" rtlCol="0" anchor="ctr"/>
+          <a:lstStyle/>
+          <a:p>
+            <a:pPr algn="ctr" indent="0" marL="0">
+              <a:buNone/>
+            </a:pPr>
+            <a:r>
+              <a:rPr lang="en-US" sz="850" b="1" dirty="0">
+                <a:solidFill>
+                  <a:srgbClr val="FFFFFF"/>
+                </a:solidFill>
+                <a:latin typeface="Google Sans" pitchFamily="34" charset="0"/>
+                <a:ea typeface="Google Sans" pitchFamily="34" charset="-122"/>
+                <a:cs typeface="Google Sans" pitchFamily="34" charset="-120"/>
+              </a:rPr>
+              <a:t>2</a:t>
+            </a:r>
+            <a:endParaRPr lang="en-US" sz="850" dirty="0"/>
+          </a:p>
+        </p:txBody>
+      </p:sp>
+      <p:sp>
+        <p:nvSpPr>
+          <p:cNvPr id="48" name="Text 46"/>
           <p:cNvSpPr/>
           <p:nvPr/>
         </p:nvSpPr>
@@ -10792,7 +10858,7 @@
                 <a:ea typeface="Google Sans" pitchFamily="34" charset="-122"/>
                 <a:cs typeface="Google Sans" pitchFamily="34" charset="-120"/>
               </a:rPr>
-              <a:t>WS1 • 3-Pillar Multi-Tenant Reference Architecture Operating Model</a:t>
+              <a:t>WS1 • ACT III: DAY-2 PLATFORM ENGINEERING OPERATING MODEL &amp; RACI SLAs</a:t>
             </a:r>
             <a:endParaRPr lang="en-US" sz="1020" dirty="0"/>
           </a:p>
@@ -10897,7 +10963,7 @@
                 <a:ea typeface="Google Sans Display" pitchFamily="34" charset="-122"/>
                 <a:cs typeface="Google Sans Display" pitchFamily="34" charset="-120"/>
               </a:rPr>
-              <a:t>Google Cloud Multi-Tenant Agentic AI Reference Pillars</a:t>
+              <a:t>3-Pillar Day-2 Platform Ownership, SRE Reliability &amp; FinOps Governance Model</a:t>
             </a:r>
             <a:endParaRPr lang="en-US" sz="2250" dirty="0"/>
           </a:p>
@@ -11030,7 +11096,7 @@
                 <a:ea typeface="Google Sans" pitchFamily="34" charset="-122"/>
                 <a:cs typeface="Google Sans" pitchFamily="34" charset="-120"/>
               </a:rPr>
-              <a:t>IAM</a:t>
+              <a:t>SEC</a:t>
             </a:r>
             <a:endParaRPr lang="en-US" sz="1150" dirty="0"/>
           </a:p>
@@ -11069,7 +11135,7 @@
                 <a:ea typeface="Google Sans" pitchFamily="34" charset="-122"/>
                 <a:cs typeface="Google Sans" pitchFamily="34" charset="-120"/>
               </a:rPr>
-              <a:t>Pillar 1: Cryptographic</a:t>
+              <a:t>Pillar 1: Cloud Security</a:t>
             </a:r>
             <a:endParaRPr lang="en-US" sz="1480" dirty="0"/>
           </a:p>
@@ -11086,7 +11152,7 @@
                 <a:ea typeface="Google Sans" pitchFamily="34" charset="-122"/>
                 <a:cs typeface="Google Sans" pitchFamily="34" charset="-120"/>
               </a:rPr>
-              <a:t>Identity &amp; Edge Context</a:t>
+              <a:t>&amp; IAM Platform Team</a:t>
             </a:r>
             <a:endParaRPr lang="en-US" sz="1480" dirty="0"/>
           </a:p>
@@ -11145,7 +11211,7 @@
                 <a:ea typeface="Roboto" pitchFamily="34" charset="-122"/>
                 <a:cs typeface="Roboto" pitchFamily="34" charset="-120"/>
               </a:rPr>
-              <a:t>Strip client-supplied X-Tenant-Id headers at Cloud Armor edge</a:t>
+              <a:t>Owns Cloud Armor L7 WAF rules, IAP OIDC &amp; IAM STS (RFC 8693/9449)</a:t>
             </a:r>
             <a:endParaRPr lang="en-US" sz="1120" dirty="0"/>
           </a:p>
@@ -11204,7 +11270,7 @@
                 <a:ea typeface="Roboto" pitchFamily="34" charset="-122"/>
                 <a:cs typeface="Roboto" pitchFamily="34" charset="-120"/>
               </a:rPr>
-              <a:t>Exchange OIDC JWTs via IAM STS (RFC 8693) + DPoP (RFC 9449)</a:t>
+              <a:t>Governs VPC-SC perimeters, IAM PAB &amp; Cloud KMS CMEK key rotation</a:t>
             </a:r>
             <a:endParaRPr lang="en-US" sz="1120" dirty="0"/>
           </a:p>
@@ -11263,7 +11329,7 @@
                 <a:ea typeface="Roboto" pitchFamily="34" charset="-122"/>
                 <a:cs typeface="Roboto" pitchFamily="34" charset="-120"/>
               </a:rPr>
-              <a:t>Propagate immutable TenantContext across all 5 runtime hops</a:t>
+              <a:t>Enforces &lt;60s HTTP 423 CMEK revocation &amp; SCC threat response SLAs</a:t>
             </a:r>
             <a:endParaRPr lang="en-US" sz="1120" dirty="0"/>
           </a:p>
@@ -11396,7 +11462,7 @@
                 <a:ea typeface="Google Sans" pitchFamily="34" charset="-122"/>
                 <a:cs typeface="Google Sans" pitchFamily="34" charset="-120"/>
               </a:rPr>
-              <a:t>MEM</a:t>
+              <a:t>SRE</a:t>
             </a:r>
             <a:endParaRPr lang="en-US" sz="1150" dirty="0"/>
           </a:p>
@@ -11435,7 +11501,7 @@
                 <a:ea typeface="Google Sans" pitchFamily="34" charset="-122"/>
                 <a:cs typeface="Google Sans" pitchFamily="34" charset="-120"/>
               </a:rPr>
-              <a:t>Pillar 2: Scoped Memory</a:t>
+              <a:t>Pillar 2: Agent Runtime</a:t>
             </a:r>
             <a:endParaRPr lang="en-US" sz="1480" dirty="0"/>
           </a:p>
@@ -11452,7 +11518,7 @@
                 <a:ea typeface="Google Sans" pitchFamily="34" charset="-122"/>
                 <a:cs typeface="Google Sans" pitchFamily="34" charset="-120"/>
               </a:rPr>
-              <a:t>&amp; Reasoning Guardrails</a:t>
+              <a:t>&amp; Data Reliability SRE</a:t>
             </a:r>
             <a:endParaRPr lang="en-US" sz="1480" dirty="0"/>
           </a:p>
@@ -11511,7 +11577,7 @@
                 <a:ea typeface="Roboto" pitchFamily="34" charset="-122"/>
                 <a:cs typeface="Roboto" pitchFamily="34" charset="-120"/>
               </a:rPr>
-              <a:t>Filter Agent Engine Registry (ARD) discovery by tenant ACL</a:t>
+              <a:t>Operates ADK 2.0 runtime_pipeline.py (80% shared core) &amp; ARD ACLs</a:t>
             </a:r>
             <a:endParaRPr lang="en-US" sz="1120" dirty="0"/>
           </a:p>
@@ -11570,7 +11636,7 @@
                 <a:ea typeface="Roboto" pitchFamily="34" charset="-122"/>
                 <a:cs typeface="Roboto" pitchFamily="34" charset="-120"/>
               </a:rPr>
-              <a:t>Isolate L1–L5 memory under /tenants/{id}/namespaces/*</a:t>
+              <a:t>Manages Memorystore Valkey (120/600 RPM) &amp; AlloyDB RLS policies</a:t>
             </a:r>
             <a:endParaRPr lang="en-US" sz="1120" dirty="0"/>
           </a:p>
@@ -11629,7 +11695,7 @@
                 <a:ea typeface="Roboto" pitchFamily="34" charset="-122"/>
                 <a:cs typeface="Roboto" pitchFamily="34" charset="-120"/>
               </a:rPr>
-              <a:t>Enforce Model Armor, NLC gates &amp; Cloud SDP PII redaction</a:t>
+              <a:t>Executes Pattern C 3-phase SHADOW_SYNC live migrations (0ms lag)</a:t>
             </a:r>
             <a:endParaRPr lang="en-US" sz="1120" dirty="0"/>
           </a:p>
@@ -11762,7 +11828,7 @@
                 <a:ea typeface="Google Sans" pitchFamily="34" charset="-122"/>
                 <a:cs typeface="Google Sans" pitchFamily="34" charset="-120"/>
               </a:rPr>
-              <a:t>RLS</a:t>
+              <a:t>FIN</a:t>
             </a:r>
             <a:endParaRPr lang="en-US" sz="1150" dirty="0"/>
           </a:p>
@@ -11801,7 +11867,7 @@
                 <a:ea typeface="Google Sans" pitchFamily="34" charset="-122"/>
                 <a:cs typeface="Google Sans" pitchFamily="34" charset="-120"/>
               </a:rPr>
-              <a:t>Pillar 3: Data Isolation</a:t>
+              <a:t>Pillar 3: FinOps, Billing</a:t>
             </a:r>
             <a:endParaRPr lang="en-US" sz="1480" dirty="0"/>
           </a:p>
@@ -11818,7 +11884,7 @@
                 <a:ea typeface="Google Sans" pitchFamily="34" charset="-122"/>
                 <a:cs typeface="Google Sans" pitchFamily="34" charset="-120"/>
               </a:rPr>
-              <a:t>&amp; Zero-PII FinOps</a:t>
+              <a:t>&amp; CI/CD Release Gate</a:t>
             </a:r>
             <a:endParaRPr lang="en-US" sz="1480" dirty="0"/>
           </a:p>
@@ -11877,7 +11943,7 @@
                 <a:ea typeface="Roboto" pitchFamily="34" charset="-122"/>
                 <a:cs typeface="Roboto" pitchFamily="34" charset="-120"/>
               </a:rPr>
-              <a:t>Bind AlloyDB FORCE ROW LEVEL SECURITY to session tenant_id</a:t>
+              <a:t>Audits Gemini 2.5 Pro 32k prefix cache hit ratio (&gt;88% target SLA)</a:t>
             </a:r>
             <a:endParaRPr lang="en-US" sz="1120" dirty="0"/>
           </a:p>
@@ -11936,7 +12002,7 @@
                 <a:ea typeface="Roboto" pitchFamily="34" charset="-122"/>
                 <a:cs typeface="Roboto" pitchFamily="34" charset="-120"/>
               </a:rPr>
-              <a:t>Capture 90% Gemini 2.5 Pro shared prefix cache savings</a:t>
+              <a:t>Reconciles zero-PII BigQuery OTel token &amp; SKU chargeback ledgers</a:t>
             </a:r>
             <a:endParaRPr lang="en-US" sz="1120" dirty="0"/>
           </a:p>
@@ -11995,7 +12061,7 @@
                 <a:ea typeface="Roboto" pitchFamily="34" charset="-122"/>
                 <a:cs typeface="Roboto" pitchFamily="34" charset="-120"/>
               </a:rPr>
-              <a:t>Stream SHA-256 hashed OTel spans to BigQuery chargeback</a:t>
+              <a:t>Gates every PR merge on 12/12 forensic &amp; 20/20 simulation checks</a:t>
             </a:r>
             <a:endParaRPr lang="en-US" sz="1120" dirty="0"/>
           </a:p>
@@ -12048,7 +12114,7 @@
                 <a:ea typeface="Roboto" pitchFamily="34" charset="-122"/>
                 <a:cs typeface="Roboto" pitchFamily="34" charset="-120"/>
               </a:rPr>
-              <a:t>Workstream 1 Operating Model  •  Identity &amp; Edge Context + Scoped Memory &amp; Guardrails + Data Isolation &amp; FinOps  •  </a:t>
+              <a:t>Workstream 1 Day-2 Operating Model  •  Security &amp; IAM Ownership + Agent Runtime SRE + FinOps &amp; 20/20 CI/CD Governance  •  </a:t>
             </a:r>
             <a:pPr algn="l" indent="0" marL="0">
               <a:buNone/>
@@ -12437,7 +12503,7 @@
                 <a:ea typeface="Google Sans" pitchFamily="34" charset="-122"/>
                 <a:cs typeface="Google Sans" pitchFamily="34" charset="-120"/>
               </a:rPr>
-              <a:t>What's next — Series Navigation &amp; Engineering Deliverables</a:t>
+              <a:t>ACT III • 5-WORKSTREAM SERIES CONTINUITY &amp; ENGINEERING DELIVERABLES</a:t>
             </a:r>
             <a:endParaRPr lang="en-US" sz="1020" dirty="0"/>
           </a:p>
@@ -12542,7 +12608,7 @@
                 <a:ea typeface="Google Sans" pitchFamily="34" charset="-122"/>
                 <a:cs typeface="Google Sans" pitchFamily="34" charset="-120"/>
               </a:rPr>
-              <a:t>What's next — Series Navigation &amp; Engineering Deliverables</a:t>
+              <a:t>Series Navigation &amp; Engineering Deliverables</a:t>
             </a:r>
             <a:endParaRPr lang="en-US" sz="1900" dirty="0"/>
           </a:p>
@@ -12581,7 +12647,7 @@
                 <a:ea typeface="Roboto" pitchFamily="34" charset="-122"/>
                 <a:cs typeface="Roboto" pitchFamily="34" charset="-120"/>
               </a:rPr>
-              <a:t>Sequenced engineering action items, assigned platform owners, and production verification gates.</a:t>
+              <a:t>Sequenced engineering action items, runnable codebase file paths, assigned platform owners, and CI/CD release gates.</a:t>
             </a:r>
             <a:endParaRPr lang="en-US" sz="1000" dirty="0"/>
           </a:p>
@@ -12728,7 +12794,7 @@
                 <a:ea typeface="Google Sans" pitchFamily="34" charset="-122"/>
                 <a:cs typeface="Google Sans" pitchFamily="34" charset="-120"/>
               </a:rPr>
-              <a:t>Enforce Cryptographic Context Across All 5 Hops</a:t>
+              <a:t>Shared 5-Hop ADK 2.0 Core Engine (All Patterns)</a:t>
             </a:r>
             <a:endParaRPr lang="en-US" sz="1040" dirty="0"/>
           </a:p>
@@ -12787,7 +12853,7 @@
                 <a:ea typeface="Roboto" pitchFamily="34" charset="-122"/>
                 <a:cs typeface="Roboto" pitchFamily="34" charset="-120"/>
               </a:rPr>
-              <a:t>Database row filters alone cannot secure agentic AI; tenant identity must govern ingress, tool discovery, memory namespaces, safety guardrails, and SQL RLS.</a:t>
+              <a:t>Deploy core-cymbal-agent/ (models.py, runtime_pipeline.py, tenant_profiles.py) once to enforce Hops 1–5 across Pooled, Siloed, and Hybrid tiers with 80% code reuse.</a:t>
             </a:r>
             <a:endParaRPr lang="en-US" sz="900" dirty="0"/>
           </a:p>
@@ -12873,7 +12939,7 @@
                 <a:ea typeface="Google Sans" pitchFamily="34" charset="-122"/>
                 <a:cs typeface="Google Sans" pitchFamily="34" charset="-120"/>
               </a:rPr>
-              <a:t>Cloud Stack: Hops 1–5: Cloud Armor • IAP • Agent Engine Registry • Valkey • Model Armor • AlloyDB
+              <a:t>Cloud Stack: core-cymbal-agent/runtime_pipeline.py • models.py • tenant_profiles.py
 </a:t>
             </a:r>
             <a:pPr indent="0" marL="0">
@@ -12888,7 +12954,7 @@
                 <a:ea typeface="Roboto" pitchFamily="34" charset="-122"/>
                 <a:cs typeface="Roboto" pitchFamily="34" charset="-120"/>
               </a:rPr>
-              <a:t>Target &amp; SLA: Zero Trust End-to-End: Every Hop Verifies Signed TenantSecurityContext</a:t>
+              <a:t>Target &amp; SLA: 80% Shared Application Code • Hops 1–5 Enforced Identically Across A, B &amp; C</a:t>
             </a:r>
             <a:endParaRPr lang="en-US" sz="750" dirty="0"/>
           </a:p>
@@ -12949,7 +13015,7 @@
                 <a:ea typeface="Google Sans" pitchFamily="34" charset="-122"/>
                 <a:cs typeface="Google Sans" pitchFamily="34" charset="-120"/>
               </a:rPr>
-              <a:t>Owner: Platform Architecture  •  Mandate 1: 5-Hop Defense-in-Depth</a:t>
+              <a:t>Owner: Platform Architecture  •  Deliverable 1: Shared ADK Core</a:t>
             </a:r>
             <a:endParaRPr lang="en-US" sz="750" dirty="0"/>
           </a:p>
@@ -13096,7 +13162,7 @@
                 <a:ea typeface="Google Sans" pitchFamily="34" charset="-122"/>
                 <a:cs typeface="Google Sans" pitchFamily="34" charset="-120"/>
               </a:rPr>
-              <a:t>Align Isolation Topology to Regulatory &amp; Margin Requirements</a:t>
+              <a:t>Proceed to Workstream 2 — Pattern A High-Density Pooled ($42/mo)</a:t>
             </a:r>
             <a:endParaRPr lang="en-US" sz="1040" dirty="0"/>
           </a:p>
@@ -13155,7 +13221,7 @@
                 <a:ea typeface="Roboto" pitchFamily="34" charset="-122"/>
                 <a:cs typeface="Roboto" pitchFamily="34" charset="-120"/>
               </a:rPr>
-              <a:t>Deploy Pattern A ($42/mo) for commercial scale, Pattern B ($1,850/mo) for regulated sovereignty, and Pattern C for multi-tier SaaS portfolios.</a:t>
+              <a:t>Provision workstream-2-pattern-a-pooled/2.6-terraform-starter/ and run 2.5-breach-simulation-suite/run_breach_simulations.py (10/10 breach tests PASS).</a:t>
             </a:r>
             <a:endParaRPr lang="en-US" sz="900" dirty="0"/>
           </a:p>
@@ -13241,7 +13307,7 @@
                 <a:ea typeface="Google Sans" pitchFamily="34" charset="-122"/>
                 <a:cs typeface="Google Sans" pitchFamily="34" charset="-120"/>
               </a:rPr>
-              <a:t>Cloud Stack: Pattern A ($42/mo) • Pattern B ($1,850/mo) • Pattern C (Hybrid PSC Router)
+              <a:t>Cloud Stack: workstream-2-pattern-a-pooled/2.6-terraform-starter/ • run_breach_simulations.py
 </a:t>
             </a:r>
             <a:pPr indent="0" marL="0">
@@ -13256,7 +13322,7 @@
                 <a:ea typeface="Roboto" pitchFamily="34" charset="-122"/>
                 <a:cs typeface="Roboto" pitchFamily="34" charset="-120"/>
               </a:rPr>
-              <a:t>Target &amp; SLA: Matches Infrastructure Unit Cost Directly to Customer Contract ACV &amp; Compliance</a:t>
+              <a:t>Target &amp; SLA: $42/mo Pooled Floor • 84.7% Net Token Savings • 10/10 Red-Team Simulations PASS</a:t>
             </a:r>
             <a:endParaRPr lang="en-US" sz="750" dirty="0"/>
           </a:p>
@@ -13317,7 +13383,7 @@
                 <a:ea typeface="Google Sans" pitchFamily="34" charset="-122"/>
                 <a:cs typeface="Google Sans" pitchFamily="34" charset="-120"/>
               </a:rPr>
-              <a:t>Owner: Cloud Security &amp; IAM  •  Mandate 2: Tiered Isolation Economics</a:t>
+              <a:t>Owner: Cloud Security &amp; IAM  •  Next: WS2 Pattern A (Pooled)</a:t>
             </a:r>
             <a:endParaRPr lang="en-US" sz="750" dirty="0"/>
           </a:p>
@@ -13464,7 +13530,7 @@
                 <a:ea typeface="Google Sans" pitchFamily="34" charset="-122"/>
                 <a:cs typeface="Google Sans" pitchFamily="34" charset="-120"/>
               </a:rPr>
-              <a:t>Maintain a Single 80% Reusable Agent Codebase</a:t>
+              <a:t>Proceed to Workstream 3 — Pattern B Zero-Trust Sovereign Silos ($1,850/mo)</a:t>
             </a:r>
             <a:endParaRPr lang="en-US" sz="1040" dirty="0"/>
           </a:p>
@@ -13523,7 +13589,7 @@
                 <a:ea typeface="Roboto" pitchFamily="34" charset="-122"/>
                 <a:cs typeface="Roboto" pitchFamily="34" charset="-120"/>
               </a:rPr>
-              <a:t>Parameterize isolation boundaries via declarative Firestore profiles and Terraform modules rather than forking separate application codebases.</a:t>
+              <a:t>Provision workstream-3-pattern-b-siloed/3.6-terraform-silo-blueprint/ (VPC-SC, IAM PAB, CMEK) and run run_silo_security_tests.py (6/6 PASS).</a:t>
             </a:r>
             <a:endParaRPr lang="en-US" sz="900" dirty="0"/>
           </a:p>
@@ -13609,7 +13675,7 @@
                 <a:ea typeface="Google Sans" pitchFamily="34" charset="-122"/>
                 <a:cs typeface="Google Sans" pitchFamily="34" charset="-120"/>
               </a:rPr>
-              <a:t>Cloud Stack: core-cymbal-agent/ (Python ADK 2.0) + Terraform Blueprints (2.6, 3.6, 4.6)
+              <a:t>Cloud Stack: workstream-3-pattern-b-siloed/3.6-terraform-silo-blueprint/ • run_silo_security_tests.py
 </a:t>
             </a:r>
             <a:pPr indent="0" marL="0">
@@ -13624,7 +13690,7 @@
                 <a:ea typeface="Roboto" pitchFamily="34" charset="-122"/>
                 <a:cs typeface="Roboto" pitchFamily="34" charset="-120"/>
               </a:rPr>
-              <a:t>Target &amp; SLA: Zero Codebase Forking • Tier Promotion Becomes a Declarative Metadata Update</a:t>
+              <a:t>Target &amp; SLA: $1,850/mo Dedicated Project + VPC-SC + &lt;60s HTTP 423 CMEK Kill-Switch (6/6 PASS)</a:t>
             </a:r>
             <a:endParaRPr lang="en-US" sz="750" dirty="0"/>
           </a:p>
@@ -13685,7 +13751,7 @@
                 <a:ea typeface="Google Sans" pitchFamily="34" charset="-122"/>
                 <a:cs typeface="Google Sans" pitchFamily="34" charset="-120"/>
               </a:rPr>
-              <a:t>Owner: Data &amp; FinOps SRE  •  Mandate 3: 80% Code Reusability</a:t>
+              <a:t>Owner: Data &amp; FinOps SRE  •  Next: WS3 Pattern B (Siloed)</a:t>
             </a:r>
             <a:endParaRPr lang="en-US" sz="750" dirty="0"/>
           </a:p>
@@ -13832,7 +13898,7 @@
                 <a:ea typeface="Google Sans" pitchFamily="34" charset="-122"/>
                 <a:cs typeface="Google Sans" pitchFamily="34" charset="-120"/>
               </a:rPr>
-              <a:t>Capture 90% Prefix Cache Savings Without Cross-Tenant Risk</a:t>
+              <a:t>Proceed to Workstream 4 — Pattern C Dynamic Hybrid PSC &amp; Live Migration</a:t>
             </a:r>
             <a:endParaRPr lang="en-US" sz="1140" dirty="0"/>
           </a:p>
@@ -13891,7 +13957,7 @@
                 <a:ea typeface="Roboto" pitchFamily="34" charset="-122"/>
                 <a:cs typeface="Roboto" pitchFamily="34" charset="-120"/>
               </a:rPr>
-              <a:t>Bind Gemini 2.5 Pro ContextCacheConfig strictly to immutable platform instructions while isolating tenant episodic state in L1–L5 Memory Bank.</a:t>
+              <a:t>Provision workstream-4-pattern-c-hybrid/4.6-terraform-hybrid-psc-blueprint/ (/28 PSC NAT) and run run_tier_migration_suite.py (4/4 PASS, 0ms lag).</a:t>
             </a:r>
             <a:endParaRPr lang="en-US" sz="980" dirty="0"/>
           </a:p>
@@ -13977,7 +14043,7 @@
                 <a:ea typeface="Google Sans" pitchFamily="34" charset="-122"/>
                 <a:cs typeface="Google Sans" pitchFamily="34" charset="-120"/>
               </a:rPr>
-              <a:t>Cloud Stack: Gemini 2.5 Pro ContextCacheConfig (32k Tokens) + Scoped L1–L5 Memory Bank
+              <a:t>Cloud Stack: workstream-4-pattern-c-hybrid/4.6-terraform-hybrid-psc-blueprint/ • run_tier_migration_suite.py
 </a:t>
             </a:r>
             <a:pPr indent="0" marL="0">
@@ -13992,7 +14058,7 @@
                 <a:ea typeface="Roboto" pitchFamily="34" charset="-122"/>
                 <a:cs typeface="Roboto" pitchFamily="34" charset="-120"/>
               </a:rPr>
-              <a:t>Target &amp; SLA: 84.7% Net Per-Turn Token Savings with 0 Cross-Tenant Prompt Cache Bleed</a:t>
+              <a:t>Target &amp; SLA: 74% Portfolio TCO Savings • Unidirectional PSC • 0ms Live Tier Promotion (4/4 PASS)</a:t>
             </a:r>
             <a:endParaRPr lang="en-US" sz="750" dirty="0"/>
           </a:p>
@@ -14053,7 +14119,7 @@
                 <a:ea typeface="Google Sans" pitchFamily="34" charset="-122"/>
                 <a:cs typeface="Google Sans" pitchFamily="34" charset="-120"/>
               </a:rPr>
-              <a:t>Owner: Tenant Onboarding  •  Mandate 4: Safe FinOps Caching</a:t>
+              <a:t>Owner: Tenant Onboarding  •  Next: WS4 Pattern C (Hybrid)</a:t>
             </a:r>
             <a:endParaRPr lang="en-US" sz="750" dirty="0"/>
           </a:p>
@@ -14200,7 +14266,7 @@
                 <a:ea typeface="Google Sans" pitchFamily="34" charset="-122"/>
                 <a:cs typeface="Google Sans" pitchFamily="34" charset="-120"/>
               </a:rPr>
-              <a:t>Validate Every Release Against Automated Red-Team Gates</a:t>
+              <a:t>Proceed to Workstream 5 — Executive Decision Guide &amp; CI/CD Certification</a:t>
             </a:r>
             <a:endParaRPr lang="en-US" sz="1140" dirty="0"/>
           </a:p>
@@ -14259,7 +14325,7 @@
                 <a:ea typeface="Roboto" pitchFamily="34" charset="-122"/>
                 <a:cs typeface="Roboto" pitchFamily="34" charset="-120"/>
               </a:rPr>
-              <a:t>Execute the 20-assertion verification suite (10 Pattern A breach tests, 6 Pattern B silo tests, 4 Pattern C migration tests) in CI/CD.</a:t>
+              <a:t>Apply the 2-Question Topology Selector (5.1-pattern-comparison-and-decision-guide.md) and execute scripts/run_deep_forensic_audit.py (12/12 PASS).</a:t>
             </a:r>
             <a:endParaRPr lang="en-US" sz="980" dirty="0"/>
           </a:p>
@@ -14345,7 +14411,7 @@
                 <a:ea typeface="Google Sans" pitchFamily="34" charset="-122"/>
                 <a:cs typeface="Google Sans" pitchFamily="34" charset="-120"/>
               </a:rPr>
-              <a:t>Cloud Stack: scripts/run_deep_forensic_audit.py • 12/12 Forensic Gates • 20/20 Simulations
+              <a:t>Cloud Stack: workstream-5-wrap-up-and-backlog/5.1-pattern-comparison-and-decision-guide.md • scripts/run_deep_forensic_audit.py
 </a:t>
             </a:r>
             <a:pPr indent="0" marL="0">
@@ -14360,7 +14426,7 @@
                 <a:ea typeface="Roboto" pitchFamily="34" charset="-122"/>
                 <a:cs typeface="Roboto" pitchFamily="34" charset="-120"/>
               </a:rPr>
-              <a:t>Target &amp; SLA: Continuous Automated Compliance Receipts Logged in BigQuery OTel Sink</a:t>
+              <a:t>Target &amp; SLA: 2-Question CISO/CFO Topology Selector + 12/12 Automated CI/CD Forensic Gate PASS</a:t>
             </a:r>
             <a:endParaRPr lang="en-US" sz="750" dirty="0"/>
           </a:p>
@@ -14421,7 +14487,7 @@
                 <a:ea typeface="Google Sans" pitchFamily="34" charset="-122"/>
                 <a:cs typeface="Google Sans" pitchFamily="34" charset="-120"/>
               </a:rPr>
-              <a:t>Owner: Governance &amp; CISO  •  Mandate 5: Continuous Verification</a:t>
+              <a:t>Owner: Governance &amp; CISO  •  Next: WS5 Decision Guide &amp; Audit</a:t>
             </a:r>
             <a:endParaRPr lang="en-US" sz="750" dirty="0"/>
           </a:p>
@@ -14548,7 +14614,7 @@
                 <a:ea typeface="Roboto" pitchFamily="34" charset="-122"/>
                 <a:cs typeface="Roboto" pitchFamily="34" charset="-120"/>
               </a:rPr>
-              <a:t>Review the 14-slide 3-Act executive architecture deck, execute python3 -B scripts/run_deep_forensic_audit.py, and proceed to Workstream 2 (Pattern A Pooled Architecture).</a:t>
+              <a:t>Series Navigation &amp; Deliverable Kit  •  WS1 Reference Baseline → WS2 Pooled ($42/mo) → WS3 Sovereign Silos ($1,850/mo) → WS4 Hybrid PSC → WS5 Decision Guide</a:t>
             </a:r>
             <a:endParaRPr lang="en-US" sz="880" dirty="0"/>
           </a:p>
@@ -15508,7 +15574,7 @@
             <a:avLst/>
           </a:prstGeom>
           <a:solidFill>
-            <a:srgbClr val="EA4335"/>
+            <a:srgbClr val="34A853"/>
           </a:solidFill>
           <a:ln/>
         </p:spPr>
@@ -15530,7 +15596,7 @@
             </a:avLst>
           </a:prstGeom>
           <a:solidFill>
-            <a:srgbClr val="FCE8E6"/>
+            <a:srgbClr val="E6F4EA"/>
           </a:solidFill>
           <a:ln/>
         </p:spPr>
@@ -15562,7 +15628,7 @@
             <a:r>
               <a:rPr lang="en-US" sz="600" b="1" dirty="0">
                 <a:solidFill>
-                  <a:srgbClr val="A50E0E"/>
+                  <a:srgbClr val="0D652D"/>
                 </a:solidFill>
                 <a:latin typeface="Google Sans" pitchFamily="34" charset="0"/>
                 <a:ea typeface="Google Sans" pitchFamily="34" charset="-122"/>
@@ -15880,7 +15946,7 @@
             <a:avLst/>
           </a:prstGeom>
           <a:solidFill>
-            <a:srgbClr val="34A853"/>
+            <a:srgbClr val="EA4335"/>
           </a:solidFill>
           <a:ln/>
         </p:spPr>
@@ -15902,7 +15968,7 @@
             </a:avLst>
           </a:prstGeom>
           <a:solidFill>
-            <a:srgbClr val="E6F4EA"/>
+            <a:srgbClr val="FCE8E6"/>
           </a:solidFill>
           <a:ln/>
         </p:spPr>
@@ -15934,7 +16000,7 @@
             <a:r>
               <a:rPr lang="en-US" sz="600" b="1" dirty="0">
                 <a:solidFill>
-                  <a:srgbClr val="0D652D"/>
+                  <a:srgbClr val="A50E0E"/>
                 </a:solidFill>
                 <a:latin typeface="Google Sans" pitchFamily="34" charset="0"/>
                 <a:ea typeface="Google Sans" pitchFamily="34" charset="-122"/>
@@ -16623,7 +16689,7 @@
               <a:buNone/>
             </a:pPr>
             <a:r>
-              <a:rPr lang="en-US" sz="710" b="1" dirty="0">
+              <a:rPr lang="en-US" sz="700" b="1" dirty="0">
                 <a:solidFill>
                   <a:srgbClr val="0D652D"/>
                 </a:solidFill>
@@ -16631,9 +16697,9 @@
                 <a:ea typeface="Google Sans" pitchFamily="34" charset="-122"/>
                 <a:cs typeface="Google Sans" pitchFamily="34" charset="-120"/>
               </a:rPr>
-              <a:t>✅ 56 Editable Shapes • 23 Connectors • GCP: ramp-portal-dev</a:t>
-            </a:r>
-            <a:endParaRPr lang="en-US" sz="710" dirty="0"/>
+              <a:t>VERIFIED • 56 Editable Shapes • 23 Connectors • GCP: ramp-portal-dev</a:t>
+            </a:r>
+            <a:endParaRPr lang="en-US" sz="700" dirty="0"/>
           </a:p>
         </p:txBody>
       </p:sp>
@@ -16729,7 +16795,7 @@
                 <a:ea typeface="Arial" pitchFamily="34" charset="-122"/>
                 <a:cs typeface="Arial" pitchFamily="34" charset="-120"/>
               </a:rPr>
-              <a:t>Shared Control Plane (ramp-portal-dev / nitina-ggarwal-sandbox-647724</a:t>
+              <a:t>Shared Control Plane (ramp-portal-dev / cymbal-build-sandbox</a:t>
             </a:r>
             <a:endParaRPr lang="en-US" sz="460" dirty="0"/>
           </a:p>
@@ -21106,12 +21172,12 @@
         </p:nvSpPr>
         <p:spPr>
           <a:xfrm>
-            <a:off x="5339182" y="3353105"/>
-            <a:ext cx="760781" cy="217627"/>
+            <a:off x="5339182" y="3365906"/>
+            <a:ext cx="760781" cy="192024"/>
           </a:xfrm>
           <a:prstGeom prst="roundRect">
             <a:avLst>
-              <a:gd name="adj" fmla="val 21008"/>
+              <a:gd name="adj" fmla="val 23810"/>
             </a:avLst>
           </a:prstGeom>
           <a:solidFill>
@@ -21133,8 +21199,8 @@
         </p:nvSpPr>
         <p:spPr>
           <a:xfrm>
-            <a:off x="5357470" y="3362249"/>
-            <a:ext cx="724205" cy="199339"/>
+            <a:off x="5357470" y="3375050"/>
+            <a:ext cx="724205" cy="173736"/>
           </a:xfrm>
           <a:prstGeom prst="rect">
             <a:avLst/>
@@ -21197,12 +21263,12 @@
         </p:nvSpPr>
         <p:spPr>
           <a:xfrm>
-            <a:off x="2827325" y="4817059"/>
-            <a:ext cx="512064" cy="210312"/>
+            <a:off x="2836469" y="4833518"/>
+            <a:ext cx="493776" cy="178308"/>
           </a:xfrm>
           <a:prstGeom prst="roundRect">
             <a:avLst>
-              <a:gd name="adj" fmla="val 21739"/>
+              <a:gd name="adj" fmla="val 25641"/>
             </a:avLst>
           </a:prstGeom>
           <a:solidFill>
@@ -21224,8 +21290,8 @@
         </p:nvSpPr>
         <p:spPr>
           <a:xfrm>
-            <a:off x="2845613" y="4826203"/>
-            <a:ext cx="475488" cy="192024"/>
+            <a:off x="2854757" y="4842662"/>
+            <a:ext cx="457200" cy="160020"/>
           </a:xfrm>
           <a:prstGeom prst="rect">
             <a:avLst/>
@@ -21288,12 +21354,12 @@
         </p:nvSpPr>
         <p:spPr>
           <a:xfrm>
-            <a:off x="2744114" y="5451653"/>
-            <a:ext cx="678485" cy="210312"/>
+            <a:off x="2766060" y="5468112"/>
+            <a:ext cx="634594" cy="178308"/>
           </a:xfrm>
           <a:prstGeom prst="roundRect">
             <a:avLst>
-              <a:gd name="adj" fmla="val 21739"/>
+              <a:gd name="adj" fmla="val 25641"/>
             </a:avLst>
           </a:prstGeom>
           <a:solidFill>
@@ -21315,8 +21381,8 @@
         </p:nvSpPr>
         <p:spPr>
           <a:xfrm>
-            <a:off x="2762402" y="5460797"/>
-            <a:ext cx="641909" cy="192024"/>
+            <a:off x="2784348" y="5477256"/>
+            <a:ext cx="598018" cy="160020"/>
           </a:xfrm>
           <a:prstGeom prst="rect">
             <a:avLst/>
@@ -21379,12 +21445,12 @@
         </p:nvSpPr>
         <p:spPr>
           <a:xfrm>
-            <a:off x="5187391" y="4817059"/>
-            <a:ext cx="521208" cy="210312"/>
+            <a:off x="5201107" y="4833518"/>
+            <a:ext cx="493776" cy="178308"/>
           </a:xfrm>
           <a:prstGeom prst="roundRect">
             <a:avLst>
-              <a:gd name="adj" fmla="val 21739"/>
+              <a:gd name="adj" fmla="val 25641"/>
             </a:avLst>
           </a:prstGeom>
           <a:solidFill>
@@ -21406,8 +21472,8 @@
         </p:nvSpPr>
         <p:spPr>
           <a:xfrm>
-            <a:off x="5205679" y="4826203"/>
-            <a:ext cx="484632" cy="192024"/>
+            <a:off x="5219395" y="4842662"/>
+            <a:ext cx="457200" cy="160020"/>
           </a:xfrm>
           <a:prstGeom prst="rect">
             <a:avLst/>
@@ -21470,12 +21536,12 @@
         </p:nvSpPr>
         <p:spPr>
           <a:xfrm>
-            <a:off x="5108753" y="5451653"/>
-            <a:ext cx="678485" cy="210312"/>
+            <a:off x="5130698" y="5468112"/>
+            <a:ext cx="634594" cy="178308"/>
           </a:xfrm>
           <a:prstGeom prst="roundRect">
             <a:avLst>
-              <a:gd name="adj" fmla="val 21739"/>
+              <a:gd name="adj" fmla="val 25641"/>
             </a:avLst>
           </a:prstGeom>
           <a:solidFill>
@@ -21497,8 +21563,8 @@
         </p:nvSpPr>
         <p:spPr>
           <a:xfrm>
-            <a:off x="5127041" y="5460797"/>
-            <a:ext cx="641909" cy="192024"/>
+            <a:off x="5148986" y="5477256"/>
+            <a:ext cx="598018" cy="160020"/>
           </a:xfrm>
           <a:prstGeom prst="rect">
             <a:avLst/>
@@ -21561,12 +21627,12 @@
         </p:nvSpPr>
         <p:spPr>
           <a:xfrm>
-            <a:off x="1845259" y="5603443"/>
-            <a:ext cx="512064" cy="210312"/>
+            <a:off x="1853489" y="5618988"/>
+            <a:ext cx="493776" cy="178308"/>
           </a:xfrm>
           <a:prstGeom prst="roundRect">
             <a:avLst>
-              <a:gd name="adj" fmla="val 21739"/>
+              <a:gd name="adj" fmla="val 25641"/>
             </a:avLst>
           </a:prstGeom>
           <a:solidFill>
@@ -21588,8 +21654,8 @@
         </p:nvSpPr>
         <p:spPr>
           <a:xfrm>
-            <a:off x="1863547" y="5612587"/>
-            <a:ext cx="475488" cy="192024"/>
+            <a:off x="1871777" y="5628132"/>
+            <a:ext cx="457200" cy="160020"/>
           </a:xfrm>
           <a:prstGeom prst="rect">
             <a:avLst/>
@@ -21652,12 +21718,12 @@
         </p:nvSpPr>
         <p:spPr>
           <a:xfrm>
-            <a:off x="3905402" y="3353105"/>
-            <a:ext cx="738835" cy="210312"/>
+            <a:off x="3905402" y="3368650"/>
+            <a:ext cx="738835" cy="178308"/>
           </a:xfrm>
           <a:prstGeom prst="roundRect">
             <a:avLst>
-              <a:gd name="adj" fmla="val 21739"/>
+              <a:gd name="adj" fmla="val 25641"/>
             </a:avLst>
           </a:prstGeom>
           <a:solidFill>
@@ -21679,8 +21745,8 @@
         </p:nvSpPr>
         <p:spPr>
           <a:xfrm>
-            <a:off x="3923690" y="3362249"/>
-            <a:ext cx="702259" cy="192024"/>
+            <a:off x="3923690" y="3377794"/>
+            <a:ext cx="702259" cy="160020"/>
           </a:xfrm>
           <a:prstGeom prst="rect">
             <a:avLst/>
@@ -21743,12 +21809,12 @@
         </p:nvSpPr>
         <p:spPr>
           <a:xfrm>
-            <a:off x="2983687" y="3353105"/>
-            <a:ext cx="669341" cy="210312"/>
+            <a:off x="2983687" y="3368650"/>
+            <a:ext cx="669341" cy="178308"/>
           </a:xfrm>
           <a:prstGeom prst="roundRect">
             <a:avLst>
-              <a:gd name="adj" fmla="val 21739"/>
+              <a:gd name="adj" fmla="val 25641"/>
             </a:avLst>
           </a:prstGeom>
           <a:solidFill>
@@ -21770,8 +21836,8 @@
         </p:nvSpPr>
         <p:spPr>
           <a:xfrm>
-            <a:off x="3001975" y="3362249"/>
-            <a:ext cx="632765" cy="192024"/>
+            <a:off x="3001975" y="3377794"/>
+            <a:ext cx="632765" cy="160020"/>
           </a:xfrm>
           <a:prstGeom prst="rect">
             <a:avLst/>
@@ -21834,12 +21900,12 @@
         </p:nvSpPr>
         <p:spPr>
           <a:xfrm>
-            <a:off x="2541118" y="2870302"/>
-            <a:ext cx="521208" cy="210312"/>
+            <a:off x="2554834" y="2885846"/>
+            <a:ext cx="493776" cy="178308"/>
           </a:xfrm>
           <a:prstGeom prst="roundRect">
             <a:avLst>
-              <a:gd name="adj" fmla="val 21739"/>
+              <a:gd name="adj" fmla="val 25641"/>
             </a:avLst>
           </a:prstGeom>
           <a:solidFill>
@@ -21861,8 +21927,8 @@
         </p:nvSpPr>
         <p:spPr>
           <a:xfrm>
-            <a:off x="2559406" y="2879446"/>
-            <a:ext cx="484632" cy="192024"/>
+            <a:off x="2573122" y="2894990"/>
+            <a:ext cx="457200" cy="160020"/>
           </a:xfrm>
           <a:prstGeom prst="rect">
             <a:avLst/>
@@ -21925,12 +21991,12 @@
         </p:nvSpPr>
         <p:spPr>
           <a:xfrm>
-            <a:off x="1757477" y="4602175"/>
-            <a:ext cx="686714" cy="146304"/>
+            <a:off x="1757477" y="4608576"/>
+            <a:ext cx="686714" cy="132588"/>
           </a:xfrm>
           <a:prstGeom prst="roundRect">
             <a:avLst>
-              <a:gd name="adj" fmla="val 31250"/>
+              <a:gd name="adj" fmla="val 34483"/>
             </a:avLst>
           </a:prstGeom>
           <a:solidFill>
@@ -21952,8 +22018,8 @@
         </p:nvSpPr>
         <p:spPr>
           <a:xfrm>
-            <a:off x="1775765" y="4611319"/>
-            <a:ext cx="650138" cy="128016"/>
+            <a:off x="1775765" y="4617720"/>
+            <a:ext cx="650138" cy="114300"/>
           </a:xfrm>
           <a:prstGeom prst="rect">
             <a:avLst/>
@@ -21996,12 +22062,12 @@
         </p:nvSpPr>
         <p:spPr>
           <a:xfrm>
-            <a:off x="1757477" y="4810658"/>
-            <a:ext cx="686714" cy="146304"/>
+            <a:off x="1757477" y="4817059"/>
+            <a:ext cx="686714" cy="132588"/>
           </a:xfrm>
           <a:prstGeom prst="roundRect">
             <a:avLst>
-              <a:gd name="adj" fmla="val 31250"/>
+              <a:gd name="adj" fmla="val 34483"/>
             </a:avLst>
           </a:prstGeom>
           <a:solidFill>
@@ -22023,8 +22089,8 @@
         </p:nvSpPr>
         <p:spPr>
           <a:xfrm>
-            <a:off x="1775765" y="4819802"/>
-            <a:ext cx="650138" cy="128016"/>
+            <a:off x="1775765" y="4826203"/>
+            <a:ext cx="650138" cy="114300"/>
           </a:xfrm>
           <a:prstGeom prst="rect">
             <a:avLst/>
@@ -22067,12 +22133,12 @@
         </p:nvSpPr>
         <p:spPr>
           <a:xfrm>
-            <a:off x="2427732" y="2079346"/>
-            <a:ext cx="512064" cy="210312"/>
+            <a:off x="2435962" y="2094890"/>
+            <a:ext cx="495605" cy="178308"/>
           </a:xfrm>
           <a:prstGeom prst="roundRect">
             <a:avLst>
-              <a:gd name="adj" fmla="val 21739"/>
+              <a:gd name="adj" fmla="val 25641"/>
             </a:avLst>
           </a:prstGeom>
           <a:solidFill>
@@ -22094,8 +22160,8 @@
         </p:nvSpPr>
         <p:spPr>
           <a:xfrm>
-            <a:off x="2446020" y="2088490"/>
-            <a:ext cx="475488" cy="192024"/>
+            <a:off x="2454250" y="2104034"/>
+            <a:ext cx="459029" cy="160020"/>
           </a:xfrm>
           <a:prstGeom prst="rect">
             <a:avLst/>
@@ -22158,12 +22224,12 @@
         </p:nvSpPr>
         <p:spPr>
           <a:xfrm>
-            <a:off x="2427732" y="2606040"/>
-            <a:ext cx="512064" cy="210312"/>
+            <a:off x="2436876" y="2639873"/>
+            <a:ext cx="493776" cy="178308"/>
           </a:xfrm>
           <a:prstGeom prst="roundRect">
             <a:avLst>
-              <a:gd name="adj" fmla="val 21739"/>
+              <a:gd name="adj" fmla="val 25641"/>
             </a:avLst>
           </a:prstGeom>
           <a:solidFill>
@@ -22185,8 +22251,8 @@
         </p:nvSpPr>
         <p:spPr>
           <a:xfrm>
-            <a:off x="2446020" y="2615184"/>
-            <a:ext cx="475488" cy="192024"/>
+            <a:off x="2455164" y="2649017"/>
+            <a:ext cx="457200" cy="160020"/>
           </a:xfrm>
           <a:prstGeom prst="rect">
             <a:avLst/>
@@ -22249,12 +22315,12 @@
         </p:nvSpPr>
         <p:spPr>
           <a:xfrm>
-            <a:off x="3853282" y="1141171"/>
-            <a:ext cx="512064" cy="146304"/>
+            <a:off x="3862426" y="1148486"/>
+            <a:ext cx="493776" cy="132588"/>
           </a:xfrm>
           <a:prstGeom prst="roundRect">
             <a:avLst>
-              <a:gd name="adj" fmla="val 31250"/>
+              <a:gd name="adj" fmla="val 34483"/>
             </a:avLst>
           </a:prstGeom>
           <a:solidFill>
@@ -22276,8 +22342,8 @@
         </p:nvSpPr>
         <p:spPr>
           <a:xfrm>
-            <a:off x="3871570" y="1150315"/>
-            <a:ext cx="475488" cy="128016"/>
+            <a:off x="3880714" y="1157630"/>
+            <a:ext cx="457200" cy="114300"/>
           </a:xfrm>
           <a:prstGeom prst="rect">
             <a:avLst/>
@@ -22320,12 +22386,12 @@
         </p:nvSpPr>
         <p:spPr>
           <a:xfrm>
-            <a:off x="3853282" y="2719426"/>
-            <a:ext cx="512064" cy="146304"/>
+            <a:off x="3862426" y="2725826"/>
+            <a:ext cx="493776" cy="132588"/>
           </a:xfrm>
           <a:prstGeom prst="roundRect">
             <a:avLst>
-              <a:gd name="adj" fmla="val 31250"/>
+              <a:gd name="adj" fmla="val 34483"/>
             </a:avLst>
           </a:prstGeom>
           <a:solidFill>
@@ -22347,8 +22413,8 @@
         </p:nvSpPr>
         <p:spPr>
           <a:xfrm>
-            <a:off x="3871570" y="2728570"/>
-            <a:ext cx="475488" cy="128016"/>
+            <a:off x="3880714" y="2734970"/>
+            <a:ext cx="457200" cy="114300"/>
           </a:xfrm>
           <a:prstGeom prst="rect">
             <a:avLst/>
@@ -22391,12 +22457,12 @@
         </p:nvSpPr>
         <p:spPr>
           <a:xfrm>
-            <a:off x="3032150" y="1141171"/>
-            <a:ext cx="512064" cy="146304"/>
+            <a:off x="3040380" y="1148486"/>
+            <a:ext cx="493776" cy="132588"/>
           </a:xfrm>
           <a:prstGeom prst="roundRect">
             <a:avLst>
-              <a:gd name="adj" fmla="val 31250"/>
+              <a:gd name="adj" fmla="val 34483"/>
             </a:avLst>
           </a:prstGeom>
           <a:solidFill>
@@ -22418,8 +22484,8 @@
         </p:nvSpPr>
         <p:spPr>
           <a:xfrm>
-            <a:off x="3050438" y="1150315"/>
-            <a:ext cx="475488" cy="128016"/>
+            <a:off x="3058668" y="1157630"/>
+            <a:ext cx="457200" cy="114300"/>
           </a:xfrm>
           <a:prstGeom prst="rect">
             <a:avLst/>
@@ -22462,12 +22528,12 @@
         </p:nvSpPr>
         <p:spPr>
           <a:xfrm>
-            <a:off x="3032150" y="2645359"/>
-            <a:ext cx="512064" cy="146304"/>
+            <a:off x="3040380" y="2725826"/>
+            <a:ext cx="493776" cy="132588"/>
           </a:xfrm>
           <a:prstGeom prst="roundRect">
             <a:avLst>
-              <a:gd name="adj" fmla="val 31250"/>
+              <a:gd name="adj" fmla="val 34483"/>
             </a:avLst>
           </a:prstGeom>
           <a:solidFill>
@@ -22489,8 +22555,8 @@
         </p:nvSpPr>
         <p:spPr>
           <a:xfrm>
-            <a:off x="3050438" y="2654503"/>
-            <a:ext cx="475488" cy="128016"/>
+            <a:off x="3058668" y="2734970"/>
+            <a:ext cx="457200" cy="114300"/>
           </a:xfrm>
           <a:prstGeom prst="rect">
             <a:avLst/>
@@ -22961,7 +23027,7 @@
                 <a:ea typeface="Google Sans" pitchFamily="34" charset="-122"/>
                 <a:cs typeface="Google Sans" pitchFamily="34" charset="-120"/>
               </a:rPr>
-              <a:t>Executive Impact &amp; Production Verification Metrics</a:t>
+              <a:t>ACT I • EXECUTIVE SCORECARD &amp; PRODUCTION SLO BASELINE</a:t>
             </a:r>
             <a:endParaRPr lang="en-US" sz="1020" dirty="0"/>
           </a:p>
@@ -23058,7 +23124,7 @@
               <a:buNone/>
             </a:pPr>
             <a:r>
-              <a:rPr lang="en-US" sz="2000" b="1" dirty="0">
+              <a:rPr lang="en-US" sz="1950" b="1" dirty="0">
                 <a:solidFill>
                   <a:srgbClr val="3C4043"/>
                 </a:solidFill>
@@ -23066,9 +23132,9 @@
                 <a:ea typeface="Google Sans" pitchFamily="34" charset="-122"/>
                 <a:cs typeface="Google Sans" pitchFamily="34" charset="-120"/>
               </a:rPr>
-              <a:t>Executive Impact &amp; Production Verification Metrics</a:t>
-            </a:r>
-            <a:endParaRPr lang="en-US" sz="2000" dirty="0"/>
+              <a:t>Quantified Unit Economics, 90% Prefix Cache Savings &amp; 20/20 Security Verification</a:t>
+            </a:r>
+            <a:endParaRPr lang="en-US" sz="1950" dirty="0"/>
           </a:p>
         </p:txBody>
       </p:sp>
@@ -23097,7 +23163,7 @@
               <a:buNone/>
             </a:pPr>
             <a:r>
-              <a:rPr lang="en-US" sz="1050" dirty="0">
+              <a:rPr lang="en-US" sz="1020" dirty="0">
                 <a:solidFill>
                   <a:srgbClr val="5F6368"/>
                 </a:solidFill>
@@ -23105,9 +23171,9 @@
                 <a:ea typeface="Roboto" pitchFamily="34" charset="-122"/>
                 <a:cs typeface="Roboto" pitchFamily="34" charset="-120"/>
               </a:rPr>
-              <a:t>Quantified unit economics, shared Gemini 2.5 Pro prefix caching efficiency, and automated security gate verification across Google Cloud.</a:t>
-            </a:r>
-            <a:endParaRPr lang="en-US" sz="1050" dirty="0"/>
+              <a:t>Empirical production metrics certified across Pattern A ($42/mo pool), Pattern B ($1,850/mo sovereign silo), and Pattern C (hybrid PSC spokes).</a:t>
+            </a:r>
+            <a:endParaRPr lang="en-US" sz="1020" dirty="0"/>
           </a:p>
         </p:txBody>
       </p:sp>
@@ -24918,7 +24984,7 @@
                 <a:ea typeface="Google Sans" pitchFamily="34" charset="-122"/>
                 <a:cs typeface="Google Sans" pitchFamily="34" charset="-120"/>
               </a:rPr>
-              <a:t>Products used — Google Cloud Agentic AI, Security &amp; Data Stack</a:t>
+              <a:t>ACT I • GOOGLE CLOUD REFERENCE PRODUCT STACK &amp; BILL OF MATERIALS</a:t>
             </a:r>
             <a:endParaRPr lang="en-US" sz="1020" dirty="0"/>
           </a:p>
@@ -25023,7 +25089,7 @@
                 <a:ea typeface="Google Sans" pitchFamily="34" charset="-122"/>
                 <a:cs typeface="Google Sans" pitchFamily="34" charset="-120"/>
               </a:rPr>
-              <a:t>Products used — Google Cloud Agentic AI, Security &amp; Data Stack</a:t>
+              <a:t>Google Cloud Agentic AI, Security &amp; Data Stack</a:t>
             </a:r>
             <a:endParaRPr lang="en-US" sz="1900" dirty="0"/>
           </a:p>
@@ -25062,7 +25128,7 @@
                 <a:ea typeface="Roboto" pitchFamily="34" charset="-122"/>
                 <a:cs typeface="Roboto" pitchFamily="34" charset="-120"/>
               </a:rPr>
-              <a:t>Structured Google Cloud reference components, runtime isolation boundaries, and target SLAs.</a:t>
+              <a:t>Structured Google Cloud reference SKUs, runtime isolation boundaries, and production SLAs.</a:t>
             </a:r>
             <a:endParaRPr lang="en-US" sz="1000" dirty="0"/>
           </a:p>
@@ -25268,7 +25334,7 @@
                 <a:ea typeface="Roboto" pitchFamily="34" charset="-122"/>
                 <a:cs typeface="Roboto" pitchFamily="34" charset="-120"/>
               </a:rPr>
-              <a:t>Vertex AI Agent Engine (ADK 2.0 runtime, Agent Registry &amp; L1–L5 Memory Bank), Gemini 2.5 Pro with ContextCacheConfig (90% shared prefix discount), Vertex AI Model Garden (Gemini 2.5 Pro (Dedicated PT)), and Gemma 3 (27B) on private GKE.</a:t>
+              <a:t>Vertex AI Agent Engine (ADK 2.0 runtime, Agent Registry &amp; L1–L5 Memory Bank), Gemini 2.5 Pro with ContextCacheConfig (90% shared prefix discount), Vertex AI Model Garden (Dedicated Provisioned Throughput), and Gemma 3 (27B) on private GKE.</a:t>
             </a:r>
             <a:endParaRPr lang="en-US" sz="980" dirty="0"/>
           </a:p>
@@ -25354,7 +25420,7 @@
                 <a:ea typeface="Google Sans" pitchFamily="34" charset="-122"/>
                 <a:cs typeface="Google Sans" pitchFamily="34" charset="-120"/>
               </a:rPr>
-              <a:t>Cloud Stack: Vertex AI Agent Engine (ADK 2.0) • Gemini 2.5 Pro (ContextCacheConfig) • Gemini 2.5 Pro • Gemma 3 27B
+              <a:t>Cloud Stack: Vertex AI Agent Engine (ADK 2.0) • Gemini 2.5 Pro (32k Prefix Cache &amp; Dedicated PT) • Gemma 3 27B
 </a:t>
             </a:r>
             <a:pPr indent="0" marL="0">
@@ -34887,7 +34953,7 @@
                 <a:ea typeface="Google Sans" pitchFamily="34" charset="-122"/>
                 <a:cs typeface="Google Sans" pitchFamily="34" charset="-120"/>
               </a:rPr>
-              <a:t>WS1 • 5-Hop Context Propagation &amp; Closed-Loop OTel Governance Flow</a:t>
+              <a:t>WS1 • ACT II: DETERMINISTIC FAIL-CLOSED CIRCUIT BREAKERS &amp; FEEDBACK LOOP</a:t>
             </a:r>
             <a:endParaRPr lang="en-US" sz="1020" dirty="0"/>
           </a:p>
@@ -34992,7 +35058,7 @@
                 <a:ea typeface="Google Sans Display" pitchFamily="34" charset="-122"/>
                 <a:cs typeface="Google Sans Display" pitchFamily="34" charset="-120"/>
               </a:rPr>
-              <a:t>End-to-end tenant context propagation and closed-loop telemetry flow</a:t>
+              <a:t>Fail-Closed Exception Gates (HTTP 401/403/422/423/429) &amp; Closed-Loop OTel Governance</a:t>
             </a:r>
             <a:endParaRPr lang="en-US" sz="2050" dirty="0"/>
           </a:p>
@@ -35053,7 +35119,7 @@
                 <a:ea typeface="Google Sans" pitchFamily="34" charset="-122"/>
                 <a:cs typeface="Google Sans" pitchFamily="34" charset="-120"/>
               </a:rPr>
-              <a:t>Edge WAF &amp;</a:t>
+              <a:t>Hop 1–2 Gate:</a:t>
             </a:r>
             <a:endParaRPr lang="en-US" sz="1300" dirty="0"/>
           </a:p>
@@ -35070,7 +35136,7 @@
                 <a:ea typeface="Google Sans" pitchFamily="34" charset="-122"/>
                 <a:cs typeface="Google Sans" pitchFamily="34" charset="-120"/>
               </a:rPr>
-              <a:t>IAM STS (Hop 1)</a:t>
+              <a:t>OBO/DPoP &amp; ARD</a:t>
             </a:r>
             <a:endParaRPr lang="en-US" sz="1300" dirty="0"/>
           </a:p>
@@ -35131,7 +35197,7 @@
                 <a:ea typeface="Google Sans" pitchFamily="34" charset="-122"/>
                 <a:cs typeface="Google Sans" pitchFamily="34" charset="-120"/>
               </a:rPr>
-              <a:t>ARD &amp; Memory</a:t>
+              <a:t>Hop 3 Gate:</a:t>
             </a:r>
             <a:endParaRPr lang="en-US" sz="1300" dirty="0"/>
           </a:p>
@@ -35148,7 +35214,7 @@
                 <a:ea typeface="Google Sans" pitchFamily="34" charset="-122"/>
                 <a:cs typeface="Google Sans" pitchFamily="34" charset="-120"/>
               </a:rPr>
-              <a:t>Scope (Hops 2–3)</a:t>
+              <a:t>Valkey RPM Clamp</a:t>
             </a:r>
             <a:endParaRPr lang="en-US" sz="1300" dirty="0"/>
           </a:p>
@@ -35209,7 +35275,7 @@
                 <a:ea typeface="Google Sans" pitchFamily="34" charset="-122"/>
                 <a:cs typeface="Google Sans" pitchFamily="34" charset="-120"/>
               </a:rPr>
-              <a:t>Model Armor &amp;</a:t>
+              <a:t>Hop 4 Gate:</a:t>
             </a:r>
             <a:endParaRPr lang="en-US" sz="1300" dirty="0"/>
           </a:p>
@@ -35226,7 +35292,7 @@
                 <a:ea typeface="Google Sans" pitchFamily="34" charset="-122"/>
                 <a:cs typeface="Google Sans" pitchFamily="34" charset="-120"/>
               </a:rPr>
-              <a:t>90% Cache (Hop 4)</a:t>
+              <a:t>Model Armor &amp; SDP</a:t>
             </a:r>
             <a:endParaRPr lang="en-US" sz="1300" dirty="0"/>
           </a:p>
@@ -35287,7 +35353,7 @@
                 <a:ea typeface="Google Sans" pitchFamily="34" charset="-122"/>
                 <a:cs typeface="Google Sans" pitchFamily="34" charset="-120"/>
               </a:rPr>
-              <a:t>AlloyDB RLS &amp;</a:t>
+              <a:t>Hop 5 Gate:</a:t>
             </a:r>
             <a:endParaRPr lang="en-US" sz="1300" dirty="0"/>
           </a:p>
@@ -35304,7 +35370,7 @@
                 <a:ea typeface="Google Sans" pitchFamily="34" charset="-122"/>
                 <a:cs typeface="Google Sans" pitchFamily="34" charset="-120"/>
               </a:rPr>
-              <a:t>MCP Hub (Hop 5)</a:t>
+              <a:t>RLS, CMEK &amp; OTel</a:t>
             </a:r>
             <a:endParaRPr lang="en-US" sz="1300" dirty="0"/>
           </a:p>
@@ -35370,7 +35436,7 @@
                 <a:ea typeface="Roboto" pitchFamily="34" charset="-122"/>
                 <a:cs typeface="Roboto" pitchFamily="34" charset="-120"/>
               </a:rPr>
-              <a:t>1. Validates OIDC JWT</a:t>
+              <a:t>1. Strips spoofed headers;</a:t>
             </a:r>
             <a:endParaRPr lang="en-US" sz="860" dirty="0"/>
           </a:p>
@@ -35387,7 +35453,24 @@
                 <a:ea typeface="Roboto" pitchFamily="34" charset="-122"/>
                 <a:cs typeface="Roboto" pitchFamily="34" charset="-120"/>
               </a:rPr>
-              <a:t>&amp; RFC 9449 DPoP</a:t>
+              <a:t>blocks cross-tenant ARD</a:t>
+            </a:r>
+            <a:endParaRPr lang="en-US" sz="860" dirty="0"/>
+          </a:p>
+          <a:p>
+            <a:pPr algn="ctr" indent="0" marL="0">
+              <a:buNone/>
+            </a:pPr>
+            <a:r>
+              <a:rPr lang="en-US" sz="860" b="1" dirty="0">
+                <a:solidFill>
+                  <a:srgbClr val="3C4043"/>
+                </a:solidFill>
+                <a:latin typeface="Roboto" pitchFamily="34" charset="0"/>
+                <a:ea typeface="Roboto" pitchFamily="34" charset="-122"/>
+                <a:cs typeface="Roboto" pitchFamily="34" charset="-120"/>
+              </a:rPr>
+              <a:t>tool probe (HTTP 401/403)</a:t>
             </a:r>
             <a:endParaRPr lang="en-US" sz="860" dirty="0"/>
           </a:p>
@@ -35501,7 +35584,7 @@
                 <a:ea typeface="Roboto" pitchFamily="34" charset="-122"/>
                 <a:cs typeface="Roboto" pitchFamily="34" charset="-120"/>
               </a:rPr>
-              <a:t>2. Rejects spoofed headers</a:t>
+              <a:t>2. Rejects token replay</a:t>
             </a:r>
             <a:endParaRPr lang="en-US" sz="800" dirty="0"/>
           </a:p>
@@ -35518,7 +35601,7 @@
                 <a:ea typeface="Roboto" pitchFamily="34" charset="-122"/>
                 <a:cs typeface="Roboto" pitchFamily="34" charset="-120"/>
               </a:rPr>
-              <a:t>with immediate HTTP</a:t>
+              <a:t>or unauthorized MCP</a:t>
             </a:r>
             <a:endParaRPr lang="en-US" sz="800" dirty="0"/>
           </a:p>
@@ -35535,7 +35618,7 @@
                 <a:ea typeface="Roboto" pitchFamily="34" charset="-122"/>
                 <a:cs typeface="Roboto" pitchFamily="34" charset="-120"/>
               </a:rPr>
-              <a:t>401 / 403 fail-closed</a:t>
+              <a:t>scope (Fail-Closed)</a:t>
             </a:r>
             <a:endParaRPr lang="en-US" sz="800" dirty="0"/>
           </a:p>
@@ -35601,7 +35684,7 @@
                 <a:ea typeface="Roboto" pitchFamily="34" charset="-122"/>
                 <a:cs typeface="Roboto" pitchFamily="34" charset="-120"/>
               </a:rPr>
-              <a:t>3. Propagates sealed</a:t>
+              <a:t>3. Clamps burst &gt;120/600</a:t>
             </a:r>
             <a:endParaRPr lang="en-US" sz="860" dirty="0"/>
           </a:p>
@@ -35618,7 +35701,7 @@
                 <a:ea typeface="Roboto" pitchFamily="34" charset="-122"/>
                 <a:cs typeface="Roboto" pitchFamily="34" charset="-120"/>
               </a:rPr>
-              <a:t>TenantContext to</a:t>
+              <a:t>RPM (HTTP 429) &amp; caps</a:t>
             </a:r>
             <a:endParaRPr lang="en-US" sz="860" dirty="0"/>
           </a:p>
@@ -35635,24 +35718,7 @@
                 <a:ea typeface="Roboto" pitchFamily="34" charset="-122"/>
                 <a:cs typeface="Roboto" pitchFamily="34" charset="-120"/>
               </a:rPr>
-              <a:t>Model Armor &amp; Gemini</a:t>
-            </a:r>
-            <a:endParaRPr lang="en-US" sz="860" dirty="0"/>
-          </a:p>
-          <a:p>
-            <a:pPr algn="ctr" indent="0" marL="0">
-              <a:buNone/>
-            </a:pPr>
-            <a:r>
-              <a:rPr lang="en-US" sz="860" b="1" dirty="0">
-                <a:solidFill>
-                  <a:srgbClr val="3C4043"/>
-                </a:solidFill>
-                <a:latin typeface="Roboto" pitchFamily="34" charset="0"/>
-                <a:ea typeface="Roboto" pitchFamily="34" charset="-122"/>
-                <a:cs typeface="Roboto" pitchFamily="34" charset="-120"/>
-              </a:rPr>
-              <a:t>32k prefix cache</a:t>
+              <a:t>4k/8k thinking budget</a:t>
             </a:r>
             <a:endParaRPr lang="en-US" sz="860" dirty="0"/>
           </a:p>
@@ -35742,7 +35808,7 @@
                 <a:ea typeface="Roboto" pitchFamily="34" charset="-122"/>
                 <a:cs typeface="Roboto" pitchFamily="34" charset="-120"/>
               </a:rPr>
-              <a:t>4. Binds AlloyDB RLS</a:t>
+              <a:t>4. Blocks injection/NLC</a:t>
             </a:r>
             <a:endParaRPr lang="en-US" sz="860" dirty="0"/>
           </a:p>
@@ -35759,7 +35825,7 @@
                 <a:ea typeface="Roboto" pitchFamily="34" charset="-122"/>
                 <a:cs typeface="Roboto" pitchFamily="34" charset="-120"/>
               </a:rPr>
-              <a:t>session variable &amp;</a:t>
+              <a:t>breach (HTTP 400/422) &amp;</a:t>
             </a:r>
             <a:endParaRPr lang="en-US" sz="860" dirty="0"/>
           </a:p>
@@ -35776,7 +35842,7 @@
                 <a:ea typeface="Roboto" pitchFamily="34" charset="-122"/>
                 <a:cs typeface="Roboto" pitchFamily="34" charset="-120"/>
               </a:rPr>
-              <a:t>3LO MCP OAuth token</a:t>
+              <a:t>revoked CMEK (HTTP 423)</a:t>
             </a:r>
             <a:endParaRPr lang="en-US" sz="860" dirty="0"/>
           </a:p>
@@ -35936,7 +36002,7 @@
                 <a:ea typeface="Roboto" pitchFamily="34" charset="-122"/>
                 <a:cs typeface="Roboto" pitchFamily="34" charset="-120"/>
               </a:rPr>
-              <a:t>5. Streams zero-PII OpenTelemetry</a:t>
+              <a:t>5. Closed-Loop Governance: Streams zero-PII</a:t>
             </a:r>
             <a:endParaRPr lang="en-US" sz="880" dirty="0"/>
           </a:p>
@@ -35953,7 +36019,7 @@
                 <a:ea typeface="Roboto" pitchFamily="34" charset="-122"/>
                 <a:cs typeface="Roboto" pitchFamily="34" charset="-120"/>
               </a:rPr>
-              <a:t>cost &amp; security spans back to</a:t>
+              <a:t>OTel violation &amp; token spans to BigQuery to</a:t>
             </a:r>
             <a:endParaRPr lang="en-US" sz="880" dirty="0"/>
           </a:p>
@@ -35970,7 +36036,7 @@
                 <a:ea typeface="Roboto" pitchFamily="34" charset="-122"/>
                 <a:cs typeface="Roboto" pitchFamily="34" charset="-120"/>
               </a:rPr>
-              <a:t>BigQuery &amp; tenant quota policy</a:t>
+              <a:t>auto-tune Valkey quotas &amp; SCC threat alerts</a:t>
             </a:r>
             <a:endParaRPr lang="en-US" sz="880" dirty="0"/>
           </a:p>
@@ -36023,7 +36089,7 @@
                 <a:ea typeface="Roboto" pitchFamily="34" charset="-122"/>
                 <a:cs typeface="Roboto" pitchFamily="34" charset="-120"/>
               </a:rPr>
-              <a:t>Workstream 1 State &amp; Feedback Flow  •  Sealed TenantContext Propagation + Closed-Loop BigQuery OTel Governance  •  </a:t>
+              <a:t>Workstream 1 Exception &amp; Feedback Loop  •  Fail-Closed Circuit Breakers (HTTP 401/403/422/423/429) + Closed-Loop BigQuery OTel  •  </a:t>
             </a:r>
             <a:pPr algn="l" indent="0" marL="0">
               <a:buNone/>
@@ -36412,7 +36478,7 @@
                 <a:ea typeface="Google Sans" pitchFamily="34" charset="-122"/>
                 <a:cs typeface="Google Sans" pitchFamily="34" charset="-120"/>
               </a:rPr>
-              <a:t>Design alternatives — Comparison of Multi-Tenant Isolation Patterns (A, B &amp; C)</a:t>
+              <a:t>ACT III • ARCHITECTURAL TRADE-OFF &amp; ISOLATION SELECTION MATRIX</a:t>
             </a:r>
             <a:endParaRPr lang="en-US" sz="1020" dirty="0"/>
           </a:p>
@@ -36517,7 +36583,7 @@
                 <a:ea typeface="Google Sans" pitchFamily="34" charset="-122"/>
                 <a:cs typeface="Google Sans" pitchFamily="34" charset="-120"/>
               </a:rPr>
-              <a:t>Design alternatives — Comparison of Multi-Tenant Isolation Patterns (A, B &amp; C)</a:t>
+              <a:t>Comparison of Multi-Tenant Isolation Patterns (A, B &amp; C)</a:t>
             </a:r>
             <a:endParaRPr lang="en-US" sz="1800" dirty="0"/>
           </a:p>
@@ -36556,7 +36622,7 @@
                 <a:ea typeface="Roboto" pitchFamily="34" charset="-122"/>
                 <a:cs typeface="Roboto" pitchFamily="34" charset="-120"/>
               </a:rPr>
-              <a:t>Side-by-side Google Cloud Well-Architected trade-off analysis, compensating controls, and target SLAs.</a:t>
+              <a:t>Side-by-side Google Cloud Well-Architected trade-off analysis, isolation boundaries, and unit economics.</a:t>
             </a:r>
             <a:endParaRPr lang="en-US" sz="980" dirty="0"/>
           </a:p>
@@ -38868,7 +38934,7 @@
                 <a:ea typeface="Google Sans" pitchFamily="34" charset="-122"/>
                 <a:cs typeface="Google Sans" pitchFamily="34" charset="-120"/>
               </a:rPr>
-              <a:t>1. Control plane &amp; project boundary</a:t>
+              <a:t>1. When to Choose Pattern A ($42/mo)</a:t>
             </a:r>
             <a:endParaRPr lang="en-US" sz="820" dirty="0"/>
           </a:p>
@@ -38909,7 +38975,7 @@
                 <a:ea typeface="Roboto" pitchFamily="34" charset="-122"/>
                 <a:cs typeface="Roboto" pitchFamily="34" charset="-120"/>
               </a:rPr>
-              <a:t>Central Ingress Hub project + Shared Pool + Dedicated Enterprise Spoke projects</a:t>
+              <a:t>High-density commercial B2B SaaS tiers requiring 90% shared 32k prefix cache savings and transactional AlloyDB FORCE ROW LEVEL SECURITY.</a:t>
             </a:r>
             <a:endParaRPr lang="en-US" sz="740" dirty="0"/>
           </a:p>
@@ -38989,7 +39055,7 @@
               <a:buNone/>
             </a:pPr>
             <a:r>
-              <a:rPr lang="en-US" sz="820" b="1" dirty="0">
+              <a:rPr lang="en-US" sz="760" b="1" dirty="0">
                 <a:solidFill>
                   <a:srgbClr val="3C4043"/>
                 </a:solidFill>
@@ -38997,9 +39063,9 @@
                 <a:ea typeface="Google Sans" pitchFamily="34" charset="-122"/>
                 <a:cs typeface="Google Sans" pitchFamily="34" charset="-120"/>
               </a:rPr>
-              <a:t>2. Compute &amp; agent runtime</a:t>
-            </a:r>
-            <a:endParaRPr lang="en-US" sz="820" dirty="0"/>
+              <a:t>2. When to Choose Pattern B ($1,850/mo)</a:t>
+            </a:r>
+            <a:endParaRPr lang="en-US" sz="760" dirty="0"/>
           </a:p>
         </p:txBody>
       </p:sp>
@@ -39038,7 +39104,7 @@
                 <a:ea typeface="Roboto" pitchFamily="34" charset="-122"/>
                 <a:cs typeface="Roboto" pitchFamily="34" charset="-120"/>
               </a:rPr>
-              <a:t>Firestore dynamic tier router dispatches Standard -&gt; Pool, Enterprise -&gt; PSC Spoke</a:t>
+              <a:t>Regulated banking, healthcare &amp; public-sector tenants mandating a 1:1 GCP project, VPC Service Controls, IAM PAB &amp; &lt;60s CMEK kill-switch.</a:t>
             </a:r>
             <a:endParaRPr lang="en-US" sz="740" dirty="0"/>
           </a:p>
@@ -39118,7 +39184,7 @@
               <a:buNone/>
             </a:pPr>
             <a:r>
-              <a:rPr lang="en-US" sz="820" b="1" dirty="0">
+              <a:rPr lang="en-US" sz="760" b="1" dirty="0">
                 <a:solidFill>
                   <a:srgbClr val="3C4043"/>
                 </a:solidFill>
@@ -39126,9 +39192,9 @@
                 <a:ea typeface="Google Sans" pitchFamily="34" charset="-122"/>
                 <a:cs typeface="Google Sans" pitchFamily="34" charset="-120"/>
               </a:rPr>
-              <a:t>3. Network &amp; perimeter isolation</a:t>
-            </a:r>
-            <a:endParaRPr lang="en-US" sz="820" dirty="0"/>
+              <a:t>3. When to Choose Pattern C (74% Savings)</a:t>
+            </a:r>
+            <a:endParaRPr lang="en-US" sz="760" dirty="0"/>
           </a:p>
         </p:txBody>
       </p:sp>
@@ -39167,7 +39233,7 @@
                 <a:ea typeface="Roboto" pitchFamily="34" charset="-122"/>
                 <a:cs typeface="Roboto" pitchFamily="34" charset="-120"/>
               </a:rPr>
-              <a:t>Unidirectional Private Service Connect (PSC) endpoints (10.10.0.50 -&gt; /24 NAT)</a:t>
+              <a:t>Multi-tier SaaS portfolios co-hosting 85–95% Standard tenants in the pool and 5–15% Enterprise tenants in PSC spokes with 0ms live upgrades.</a:t>
             </a:r>
             <a:endParaRPr lang="en-US" sz="740" dirty="0"/>
           </a:p>
@@ -39255,7 +39321,7 @@
                 <a:ea typeface="Google Sans" pitchFamily="34" charset="-122"/>
                 <a:cs typeface="Google Sans" pitchFamily="34" charset="-120"/>
               </a:rPr>
-              <a:t>4. Identity &amp; access control</a:t>
+              <a:t>4. 80/20 Unified Codebase Invariant</a:t>
             </a:r>
             <a:endParaRPr lang="en-US" sz="820" dirty="0"/>
           </a:p>
@@ -39296,7 +39362,7 @@
                 <a:ea typeface="Roboto" pitchFamily="34" charset="-122"/>
                 <a:cs typeface="Roboto" pitchFamily="34" charset="-120"/>
               </a:rPr>
-              <a:t>Unified Hub OIDC verification + tier-scoped OBO/DPoP token forwarding</a:t>
+              <a:t>All three patterns execute the identical Python ADK 2.0 5-hop pipeline (runtime_pipeline.py), parameterizing only 20% Terraform modules (2.6/3.6/4.6).</a:t>
             </a:r>
             <a:endParaRPr lang="en-US" sz="740" dirty="0"/>
           </a:p>

--- a/slides/ws1-google-slides-design-plugin-editable-slides.pptx
+++ b/slides/ws1-google-slides-design-plugin-editable-slides.pptx
@@ -782,7 +782,7 @@
           <a:p>
             <a:r>
               <a:rPr lang="en-US" dirty="0"/>
-              <a:t>[phased-roadmap-timeline] WS1 • ACT III: PHASED IMPLEMENTATION &amp; CERTIFICATION TIMELINE: Workstream 1 Rollout Timeline  •  Phase 1 (5-Hop Core) → Phase 2 (GAP-01..05 Controls) → Phase 3 (20/20 Certification)</a:t>
+              <a:t>[phased-roadmap-timeline] WS1 • ACT III: 3-STAGE TENANT TIER EVOLUTION &amp; ZERO-DOWNTIME PROMOTION: Workstream 1 Tenant Lifecycle  •  Stage 1 Pattern A Pool ($42/mo) → Stage 2 Pattern C 0ms Live Promotion → Stage 3 Pattern B Silo ($1,850/mo)</a:t>
             </a:r>
             <a:endParaRPr lang="en-US" dirty="0"/>
           </a:p>
@@ -870,7 +870,7 @@
           <a:p>
             <a:r>
               <a:rPr lang="en-US" dirty="0"/>
-              <a:t>[strategic-operating-model-pillars] WS1 • ACT III: DAY-2 PLATFORM ENGINEERING OPERATING MODEL &amp; RACI SLAs: Workstream 1 Day-2 Operating Model  •  Security &amp; IAM Ownership + Agent Runtime SRE + FinOps &amp; 20/20 CI/CD Governance</a:t>
+              <a:t>[strategic-operating-model-pillars] WS1 • ACT III: GOOGLE CLOUD WELL-ARCHITECTED SOLUTION PILLARS &amp; SLAs: Workstream 1 Well-Architected Pillars  •  5-Hop Zero-Trust Security + Valkey Bulkheads &amp; 0ms Mobility + 84.7% Token Savings &amp; 80% Code Reuse</a:t>
             </a:r>
             <a:endParaRPr lang="en-US" dirty="0"/>
           </a:p>
@@ -3841,7 +3841,7 @@
                 <a:ea typeface="Google Sans" pitchFamily="34" charset="-122"/>
                 <a:cs typeface="Google Sans" pitchFamily="34" charset="-120"/>
               </a:rPr>
-              <a:t>GOVERNANCE • SLIDES 12–14</a:t>
+              <a:t>SOLUTION • SLIDES 12–14</a:t>
             </a:r>
             <a:endParaRPr lang="en-US" sz="660" dirty="0"/>
           </a:p>
@@ -3880,7 +3880,7 @@
                 <a:ea typeface="Google Sans" pitchFamily="34" charset="-122"/>
                 <a:cs typeface="Google Sans" pitchFamily="34" charset="-120"/>
               </a:rPr>
-              <a:t>Rollout Roadmap, Day-2 RACI &amp; Series Map</a:t>
+              <a:t>Tier Evolution, Well-Architected Pillars &amp; Series Map</a:t>
             </a:r>
             <a:endParaRPr lang="en-US" sz="850" dirty="0"/>
           </a:p>
@@ -3919,7 +3919,7 @@
                 <a:ea typeface="Roboto" pitchFamily="34" charset="-122"/>
                 <a:cs typeface="Roboto" pitchFamily="34" charset="-120"/>
               </a:rPr>
-              <a:t>Charts the 3-phase rollout timeline (Weeks 1–10), assigns Security/SRE/FinOps Day-2 RACI SLAs, and maps runnable deliverables across Workstreams 1–5.</a:t>
+              <a:t>Demonstrates 3-stage tenant tier evolution (Pool -&gt; 0ms PSC Cutover -&gt; Silo), Google Cloud Well-Architected guarantees, and Workstream 1–5 deliverables.</a:t>
             </a:r>
             <a:endParaRPr lang="en-US" sz="780" dirty="0"/>
           </a:p>
@@ -9299,7 +9299,7 @@
                 <a:ea typeface="Google Sans" pitchFamily="34" charset="-122"/>
                 <a:cs typeface="Google Sans" pitchFamily="34" charset="-120"/>
               </a:rPr>
-              <a:t>WS1 • ACT III: PHASED IMPLEMENTATION &amp; CERTIFICATION TIMELINE</a:t>
+              <a:t>WS1 • ACT III: 3-STAGE TENANT TIER EVOLUTION &amp; ZERO-DOWNTIME PROMOTION</a:t>
             </a:r>
             <a:endParaRPr lang="en-US" sz="1020" dirty="0"/>
           </a:p>
@@ -9380,7 +9380,7 @@
         <p:spPr>
           <a:xfrm>
             <a:off x="530352" y="786384"/>
-            <a:ext cx="10972800" cy="585216"/>
+            <a:ext cx="11119104" cy="585216"/>
           </a:xfrm>
           <a:prstGeom prst="rect">
             <a:avLst/>
@@ -9396,7 +9396,7 @@
               <a:buNone/>
             </a:pPr>
             <a:r>
-              <a:rPr lang="en-US" sz="2250" b="1" dirty="0">
+              <a:rPr lang="en-US" sz="2020" b="1" dirty="0">
                 <a:solidFill>
                   <a:srgbClr val="0F2942"/>
                 </a:solidFill>
@@ -9404,9 +9404,9 @@
                 <a:ea typeface="Google Sans Display" pitchFamily="34" charset="-122"/>
                 <a:cs typeface="Google Sans Display" pitchFamily="34" charset="-120"/>
               </a:rPr>
-              <a:t>6-Week Reference Architecture Rollout &amp; 20/20 Certification Roadmap</a:t>
-            </a:r>
-            <a:endParaRPr lang="en-US" sz="2250" dirty="0"/>
+              <a:t>3-Stage Tenant Lifecycle: Pooled Onboarding → 0ms Live Promotion → Sovereign Silo</a:t>
+            </a:r>
+            <a:endParaRPr lang="en-US" sz="2020" dirty="0"/>
           </a:p>
         </p:txBody>
       </p:sp>
@@ -9484,7 +9484,7 @@
               <a:buNone/>
             </a:pPr>
             <a:r>
-              <a:rPr lang="en-US" sz="1700" b="1" dirty="0">
+              <a:rPr lang="en-US" sz="1650" b="1" dirty="0">
                 <a:solidFill>
                   <a:srgbClr val="FFFFFF"/>
                 </a:solidFill>
@@ -9492,9 +9492,9 @@
                 <a:ea typeface="Google Sans" pitchFamily="34" charset="-122"/>
                 <a:cs typeface="Google Sans" pitchFamily="34" charset="-120"/>
               </a:rPr>
-              <a:t>Phase 1: 5-Hop Core</a:t>
-            </a:r>
-            <a:endParaRPr lang="en-US" sz="1700" dirty="0"/>
+              <a:t>Stage 1: Pattern A Pool</a:t>
+            </a:r>
+            <a:endParaRPr lang="en-US" sz="1650" dirty="0"/>
           </a:p>
         </p:txBody>
       </p:sp>
@@ -9543,7 +9543,7 @@
               <a:buNone/>
             </a:pPr>
             <a:r>
-              <a:rPr lang="en-US" sz="2000" b="1" dirty="0">
+              <a:rPr lang="en-US" sz="1850" b="1" dirty="0">
                 <a:solidFill>
                   <a:srgbClr val="3C4043"/>
                 </a:solidFill>
@@ -9551,16 +9551,16 @@
                 <a:ea typeface="Google Sans" pitchFamily="34" charset="-122"/>
                 <a:cs typeface="Google Sans" pitchFamily="34" charset="-120"/>
               </a:rPr>
-              <a:t>Identity Context &amp;</a:t>
-            </a:r>
-            <a:endParaRPr lang="en-US" sz="2000" dirty="0"/>
+              <a:t>High-Density Onboarding</a:t>
+            </a:r>
+            <a:endParaRPr lang="en-US" sz="1850" dirty="0"/>
           </a:p>
           <a:p>
             <a:pPr algn="ctr" indent="0" marL="0">
               <a:buNone/>
             </a:pPr>
             <a:r>
-              <a:rPr lang="en-US" sz="2000" b="1" dirty="0">
+              <a:rPr lang="en-US" sz="1850" b="1" dirty="0">
                 <a:solidFill>
                   <a:srgbClr val="3C4043"/>
                 </a:solidFill>
@@ -9568,9 +9568,9 @@
                 <a:ea typeface="Google Sans" pitchFamily="34" charset="-122"/>
                 <a:cs typeface="Google Sans" pitchFamily="34" charset="-120"/>
               </a:rPr>
-              <a:t>ARD Registry Gate</a:t>
-            </a:r>
-            <a:endParaRPr lang="en-US" sz="2000" dirty="0"/>
+              <a:t>(Terraform 2.6 • $42/mo)</a:t>
+            </a:r>
+            <a:endParaRPr lang="en-US" sz="1850" dirty="0"/>
           </a:p>
         </p:txBody>
       </p:sp>
@@ -9582,8 +9582,8 @@
         </p:nvSpPr>
         <p:spPr>
           <a:xfrm>
-            <a:off x="713232" y="3675888"/>
-            <a:ext cx="3072384" cy="384048"/>
+            <a:off x="676656" y="3675888"/>
+            <a:ext cx="3145536" cy="384048"/>
           </a:xfrm>
           <a:prstGeom prst="rect">
             <a:avLst/>
@@ -9599,17 +9599,17 @@
               <a:buNone/>
             </a:pPr>
             <a:r>
-              <a:rPr lang="en-US" sz="1500" dirty="0">
-                <a:solidFill>
-                  <a:srgbClr val="3C4043"/>
+              <a:rPr lang="en-US" sz="1220" b="1" dirty="0">
+                <a:solidFill>
+                  <a:srgbClr val="0F2942"/>
                 </a:solidFill>
                 <a:latin typeface="Roboto" pitchFamily="34" charset="0"/>
                 <a:ea typeface="Roboto" pitchFamily="34" charset="-122"/>
                 <a:cs typeface="Roboto" pitchFamily="34" charset="-120"/>
               </a:rPr>
-              <a:t>(Weeks 1–2)</a:t>
-            </a:r>
-            <a:endParaRPr lang="en-US" sz="1500" dirty="0"/>
+              <a:t>120 RPM • 4k Cap • 90% Prefix Cache</a:t>
+            </a:r>
+            <a:endParaRPr lang="en-US" sz="1220" dirty="0"/>
           </a:p>
         </p:txBody>
       </p:sp>
@@ -9661,7 +9661,7 @@
               <a:buNone/>
             </a:pPr>
             <a:r>
-              <a:rPr lang="en-US" sz="1380" dirty="0">
+              <a:rPr lang="en-US" sz="1350" dirty="0">
                 <a:solidFill>
                   <a:srgbClr val="3C4043"/>
                 </a:solidFill>
@@ -9669,16 +9669,16 @@
                 <a:ea typeface="Roboto" pitchFamily="34" charset="-122"/>
                 <a:cs typeface="Roboto" pitchFamily="34" charset="-120"/>
               </a:rPr>
-              <a:t>RFC 8693 OBO + DPoP &amp; Hop 2</a:t>
-            </a:r>
-            <a:endParaRPr lang="en-US" sz="1380" dirty="0"/>
+              <a:t>Shared Cloud Run v2 + Gemini 2.5 Pro</a:t>
+            </a:r>
+            <a:endParaRPr lang="en-US" sz="1350" dirty="0"/>
           </a:p>
           <a:p>
             <a:pPr algn="ctr" indent="0" marL="0">
               <a:buNone/>
             </a:pPr>
             <a:r>
-              <a:rPr lang="en-US" sz="1380" dirty="0">
+              <a:rPr lang="en-US" sz="1350" dirty="0">
                 <a:solidFill>
                   <a:srgbClr val="3C4043"/>
                 </a:solidFill>
@@ -9686,9 +9686,9 @@
                 <a:ea typeface="Roboto" pitchFamily="34" charset="-122"/>
                 <a:cs typeface="Roboto" pitchFamily="34" charset="-120"/>
               </a:rPr>
-              <a:t>ARD Catalog Filter Live</a:t>
-            </a:r>
-            <a:endParaRPr lang="en-US" sz="1380" dirty="0"/>
+              <a:t>ContextCacheConfig &amp; AlloyDB FORCE RLS</a:t>
+            </a:r>
+            <a:endParaRPr lang="en-US" sz="1350" dirty="0"/>
           </a:p>
         </p:txBody>
       </p:sp>
@@ -9766,7 +9766,7 @@
               <a:buNone/>
             </a:pPr>
             <a:r>
-              <a:rPr lang="en-US" sz="1700" b="1" dirty="0">
+              <a:rPr lang="en-US" sz="1650" b="1" dirty="0">
                 <a:solidFill>
                   <a:srgbClr val="FFFFFF"/>
                 </a:solidFill>
@@ -9774,9 +9774,9 @@
                 <a:ea typeface="Google Sans" pitchFamily="34" charset="-122"/>
                 <a:cs typeface="Google Sans" pitchFamily="34" charset="-120"/>
               </a:rPr>
-              <a:t>Phase 2: Guardrails</a:t>
-            </a:r>
-            <a:endParaRPr lang="en-US" sz="1700" dirty="0"/>
+              <a:t>Stage 2: Pattern C Hybrid</a:t>
+            </a:r>
+            <a:endParaRPr lang="en-US" sz="1650" dirty="0"/>
           </a:p>
         </p:txBody>
       </p:sp>
@@ -9825,7 +9825,7 @@
               <a:buNone/>
             </a:pPr>
             <a:r>
-              <a:rPr lang="en-US" sz="2000" b="1" dirty="0">
+              <a:rPr lang="en-US" sz="1850" b="1" dirty="0">
                 <a:solidFill>
                   <a:srgbClr val="3C4043"/>
                 </a:solidFill>
@@ -9833,16 +9833,16 @@
                 <a:ea typeface="Google Sans" pitchFamily="34" charset="-122"/>
                 <a:cs typeface="Google Sans" pitchFamily="34" charset="-120"/>
               </a:rPr>
-              <a:t>Model Armor, RLS</a:t>
-            </a:r>
-            <a:endParaRPr lang="en-US" sz="2000" dirty="0"/>
+              <a:t>Zero-Downtime Promotion</a:t>
+            </a:r>
+            <a:endParaRPr lang="en-US" sz="1850" dirty="0"/>
           </a:p>
           <a:p>
             <a:pPr algn="ctr" indent="0" marL="0">
               <a:buNone/>
             </a:pPr>
             <a:r>
-              <a:rPr lang="en-US" sz="2000" b="1" dirty="0">
+              <a:rPr lang="en-US" sz="1850" b="1" dirty="0">
                 <a:solidFill>
                   <a:srgbClr val="3C4043"/>
                 </a:solidFill>
@@ -9850,9 +9850,9 @@
                 <a:ea typeface="Google Sans" pitchFamily="34" charset="-122"/>
                 <a:cs typeface="Google Sans" pitchFamily="34" charset="-120"/>
               </a:rPr>
-              <a:t>&amp; GAP-01..05 Controls</a:t>
-            </a:r>
-            <a:endParaRPr lang="en-US" sz="2000" dirty="0"/>
+              <a:t>(Terraform 4.6 • 0ms Cutover)</a:t>
+            </a:r>
+            <a:endParaRPr lang="en-US" sz="1850" dirty="0"/>
           </a:p>
         </p:txBody>
       </p:sp>
@@ -9864,8 +9864,8 @@
         </p:nvSpPr>
         <p:spPr>
           <a:xfrm>
-            <a:off x="4553712" y="3675888"/>
-            <a:ext cx="3072384" cy="384048"/>
+            <a:off x="4517136" y="3675888"/>
+            <a:ext cx="3145536" cy="384048"/>
           </a:xfrm>
           <a:prstGeom prst="rect">
             <a:avLst/>
@@ -9881,17 +9881,17 @@
               <a:buNone/>
             </a:pPr>
             <a:r>
-              <a:rPr lang="en-US" sz="1500" dirty="0">
-                <a:solidFill>
-                  <a:srgbClr val="3C4043"/>
+              <a:rPr lang="en-US" sz="1220" b="1" dirty="0">
+                <a:solidFill>
+                  <a:srgbClr val="0D7A75"/>
                 </a:solidFill>
                 <a:latin typeface="Roboto" pitchFamily="34" charset="0"/>
                 <a:ea typeface="Roboto" pitchFamily="34" charset="-122"/>
                 <a:cs typeface="Roboto" pitchFamily="34" charset="-120"/>
               </a:rPr>
-              <a:t>(Weeks 3–4)</a:t>
-            </a:r>
-            <a:endParaRPr lang="en-US" sz="1500" dirty="0"/>
+              <a:t>SHADOW_SYNC → ATOMIC_CUTOVER</a:t>
+            </a:r>
+            <a:endParaRPr lang="en-US" sz="1220" dirty="0"/>
           </a:p>
         </p:txBody>
       </p:sp>
@@ -9943,7 +9943,7 @@
               <a:buNone/>
             </a:pPr>
             <a:r>
-              <a:rPr lang="en-US" sz="1380" dirty="0">
+              <a:rPr lang="en-US" sz="1350" dirty="0">
                 <a:solidFill>
                   <a:srgbClr val="3C4043"/>
                 </a:solidFill>
@@ -9951,16 +9951,16 @@
                 <a:ea typeface="Roboto" pitchFamily="34" charset="-122"/>
                 <a:cs typeface="Roboto" pitchFamily="34" charset="-120"/>
               </a:rPr>
-              <a:t>Hop 4 Model Armor + Cloud SDP</a:t>
-            </a:r>
-            <a:endParaRPr lang="en-US" sz="1380" dirty="0"/>
+              <a:t>Dual-Write Backfill, CMEK Re-Key &amp;</a:t>
+            </a:r>
+            <a:endParaRPr lang="en-US" sz="1350" dirty="0"/>
           </a:p>
           <a:p>
             <a:pPr algn="ctr" indent="0" marL="0">
               <a:buNone/>
             </a:pPr>
             <a:r>
-              <a:rPr lang="en-US" sz="1380" dirty="0">
+              <a:rPr lang="en-US" sz="1350" dirty="0">
                 <a:solidFill>
                   <a:srgbClr val="3C4043"/>
                 </a:solidFill>
@@ -9968,9 +9968,9 @@
                 <a:ea typeface="Roboto" pitchFamily="34" charset="-122"/>
                 <a:cs typeface="Roboto" pitchFamily="34" charset="-120"/>
               </a:rPr>
-              <a:t>&amp; AlloyDB RLS Enforced</a:t>
-            </a:r>
-            <a:endParaRPr lang="en-US" sz="1380" dirty="0"/>
+              <a:t>Firestore Pointer Flip (0 Dropped Turns)</a:t>
+            </a:r>
+            <a:endParaRPr lang="en-US" sz="1350" dirty="0"/>
           </a:p>
         </p:txBody>
       </p:sp>
@@ -10048,7 +10048,7 @@
               <a:buNone/>
             </a:pPr>
             <a:r>
-              <a:rPr lang="en-US" sz="1700" b="1" dirty="0">
+              <a:rPr lang="en-US" sz="1650" b="1" dirty="0">
                 <a:solidFill>
                   <a:srgbClr val="FFFFFF"/>
                 </a:solidFill>
@@ -10056,9 +10056,9 @@
                 <a:ea typeface="Google Sans" pitchFamily="34" charset="-122"/>
                 <a:cs typeface="Google Sans" pitchFamily="34" charset="-120"/>
               </a:rPr>
-              <a:t>Phase 3: Certification</a:t>
-            </a:r>
-            <a:endParaRPr lang="en-US" sz="1700" dirty="0"/>
+              <a:t>Stage 3: Pattern B Silo</a:t>
+            </a:r>
+            <a:endParaRPr lang="en-US" sz="1650" dirty="0"/>
           </a:p>
         </p:txBody>
       </p:sp>
@@ -10107,7 +10107,7 @@
               <a:buNone/>
             </a:pPr>
             <a:r>
-              <a:rPr lang="en-US" sz="2000" b="1" dirty="0">
+              <a:rPr lang="en-US" sz="1850" b="1" dirty="0">
                 <a:solidFill>
                   <a:srgbClr val="3C4043"/>
                 </a:solidFill>
@@ -10115,16 +10115,16 @@
                 <a:ea typeface="Google Sans" pitchFamily="34" charset="-122"/>
                 <a:cs typeface="Google Sans" pitchFamily="34" charset="-120"/>
               </a:rPr>
-              <a:t>3-Pattern Taxonomy</a:t>
-            </a:r>
-            <a:endParaRPr lang="en-US" sz="2000" dirty="0"/>
+              <a:t>Regulated Enterprise Vault</a:t>
+            </a:r>
+            <a:endParaRPr lang="en-US" sz="1850" dirty="0"/>
           </a:p>
           <a:p>
             <a:pPr algn="ctr" indent="0" marL="0">
               <a:buNone/>
             </a:pPr>
             <a:r>
-              <a:rPr lang="en-US" sz="2000" b="1" dirty="0">
+              <a:rPr lang="en-US" sz="1850" b="1" dirty="0">
                 <a:solidFill>
                   <a:srgbClr val="3C4043"/>
                 </a:solidFill>
@@ -10132,9 +10132,9 @@
                 <a:ea typeface="Google Sans" pitchFamily="34" charset="-122"/>
                 <a:cs typeface="Google Sans" pitchFamily="34" charset="-120"/>
               </a:rPr>
-              <a:t>&amp; 20/20 Audit Pass</a:t>
-            </a:r>
-            <a:endParaRPr lang="en-US" sz="2000" dirty="0"/>
+              <a:t>(Terraform 3.6 • $1,850/mo)</a:t>
+            </a:r>
+            <a:endParaRPr lang="en-US" sz="1850" dirty="0"/>
           </a:p>
         </p:txBody>
       </p:sp>
@@ -10146,8 +10146,8 @@
         </p:nvSpPr>
         <p:spPr>
           <a:xfrm>
-            <a:off x="8394192" y="3675888"/>
-            <a:ext cx="3072384" cy="384048"/>
+            <a:off x="8357616" y="3675888"/>
+            <a:ext cx="3145536" cy="384048"/>
           </a:xfrm>
           <a:prstGeom prst="rect">
             <a:avLst/>
@@ -10163,17 +10163,17 @@
               <a:buNone/>
             </a:pPr>
             <a:r>
-              <a:rPr lang="en-US" sz="1500" dirty="0">
-                <a:solidFill>
-                  <a:srgbClr val="3C4043"/>
+              <a:rPr lang="en-US" sz="1220" b="1" dirty="0">
+                <a:solidFill>
+                  <a:srgbClr val="54728C"/>
                 </a:solidFill>
                 <a:latin typeface="Roboto" pitchFamily="34" charset="0"/>
                 <a:ea typeface="Roboto" pitchFamily="34" charset="-122"/>
                 <a:cs typeface="Roboto" pitchFamily="34" charset="-120"/>
               </a:rPr>
-              <a:t>(Weeks 5–6)</a:t>
-            </a:r>
-            <a:endParaRPr lang="en-US" sz="1500" dirty="0"/>
+              <a:t>600 RPM • 8k Cap • &lt;60s HTTP 423 CMEK</a:t>
+            </a:r>
+            <a:endParaRPr lang="en-US" sz="1220" dirty="0"/>
           </a:p>
         </p:txBody>
       </p:sp>
@@ -10225,7 +10225,7 @@
               <a:buNone/>
             </a:pPr>
             <a:r>
-              <a:rPr lang="en-US" sz="1380" dirty="0">
+              <a:rPr lang="en-US" sz="1350" dirty="0">
                 <a:solidFill>
                   <a:srgbClr val="3C4043"/>
                 </a:solidFill>
@@ -10233,16 +10233,16 @@
                 <a:ea typeface="Roboto" pitchFamily="34" charset="-122"/>
                 <a:cs typeface="Roboto" pitchFamily="34" charset="-120"/>
               </a:rPr>
-              <a:t>Patterns A, B &amp; C Certified</a:t>
-            </a:r>
-            <a:endParaRPr lang="en-US" sz="1380" dirty="0"/>
+              <a:t>Dedicated VPC-SC Project, IAM PAB,</a:t>
+            </a:r>
+            <a:endParaRPr lang="en-US" sz="1350" dirty="0"/>
           </a:p>
           <a:p>
             <a:pPr algn="ctr" indent="0" marL="0">
               <a:buNone/>
             </a:pPr>
             <a:r>
-              <a:rPr lang="en-US" sz="1380" dirty="0">
+              <a:rPr lang="en-US" sz="1350" dirty="0">
                 <a:solidFill>
                   <a:srgbClr val="3C4043"/>
                 </a:solidFill>
@@ -10250,9 +10250,9 @@
                 <a:ea typeface="Roboto" pitchFamily="34" charset="-122"/>
                 <a:cs typeface="Roboto" pitchFamily="34" charset="-120"/>
               </a:rPr>
-              <a:t>Across 3 Live GCP Projects</a:t>
-            </a:r>
-            <a:endParaRPr lang="en-US" sz="1380" dirty="0"/>
+              <a:t>Agent Alpha &amp; Tenant KMS Kill-Switch</a:t>
+            </a:r>
+            <a:endParaRPr lang="en-US" sz="1350" dirty="0"/>
           </a:p>
         </p:txBody>
       </p:sp>
@@ -10469,7 +10469,7 @@
                 <a:ea typeface="Roboto" pitchFamily="34" charset="-122"/>
                 <a:cs typeface="Roboto" pitchFamily="34" charset="-120"/>
               </a:rPr>
-              <a:t>Workstream 1 Rollout Timeline  •  Phase 1 (5-Hop Core) → Phase 2 (GAP-01..05 Controls) → Phase 3 (20/20 Certification)  •  </a:t>
+              <a:t>Workstream 1 Tenant Lifecycle  •  Stage 1 Pattern A Pool ($42/mo) → Stage 2 Pattern C 0ms Live Promotion → Stage 3 Pattern B Silo ($1,850/mo)  •  </a:t>
             </a:r>
             <a:pPr algn="l" indent="0" marL="0">
               <a:buNone/>
@@ -10858,7 +10858,7 @@
                 <a:ea typeface="Google Sans" pitchFamily="34" charset="-122"/>
                 <a:cs typeface="Google Sans" pitchFamily="34" charset="-120"/>
               </a:rPr>
-              <a:t>WS1 • ACT III: DAY-2 PLATFORM ENGINEERING OPERATING MODEL &amp; RACI SLAs</a:t>
+              <a:t>WS1 • ACT III: GOOGLE CLOUD WELL-ARCHITECTED SOLUTION PILLARS &amp; SLAs</a:t>
             </a:r>
             <a:endParaRPr lang="en-US" sz="1020" dirty="0"/>
           </a:p>
@@ -10963,7 +10963,7 @@
                 <a:ea typeface="Google Sans Display" pitchFamily="34" charset="-122"/>
                 <a:cs typeface="Google Sans Display" pitchFamily="34" charset="-120"/>
               </a:rPr>
-              <a:t>3-Pillar Day-2 Platform Ownership, SRE Reliability &amp; FinOps Governance Model</a:t>
+              <a:t>3-Pillar Well-Architected Solution Guarantees: Security, Reliability &amp; FinOps</a:t>
             </a:r>
             <a:endParaRPr lang="en-US" sz="2250" dirty="0"/>
           </a:p>
@@ -11135,7 +11135,7 @@
                 <a:ea typeface="Google Sans" pitchFamily="34" charset="-122"/>
                 <a:cs typeface="Google Sans" pitchFamily="34" charset="-120"/>
               </a:rPr>
-              <a:t>Pillar 1: Cloud Security</a:t>
+              <a:t>Pillar 1: Zero-Trust 5-Hop</a:t>
             </a:r>
             <a:endParaRPr lang="en-US" sz="1480" dirty="0"/>
           </a:p>
@@ -11152,7 +11152,7 @@
                 <a:ea typeface="Google Sans" pitchFamily="34" charset="-122"/>
                 <a:cs typeface="Google Sans" pitchFamily="34" charset="-120"/>
               </a:rPr>
-              <a:t>&amp; IAM Platform Team</a:t>
+              <a:t>Cryptographic Security</a:t>
             </a:r>
             <a:endParaRPr lang="en-US" sz="1480" dirty="0"/>
           </a:p>
@@ -11211,7 +11211,7 @@
                 <a:ea typeface="Roboto" pitchFamily="34" charset="-122"/>
                 <a:cs typeface="Roboto" pitchFamily="34" charset="-120"/>
               </a:rPr>
-              <a:t>Owns Cloud Armor L7 WAF rules, IAP OIDC &amp; IAM STS (RFC 8693/9449)</a:t>
+              <a:t>Enforces RFC 8693 OBO + RFC 9449 DPoP &amp; Hop 2 ARD tool catalog ACLs</a:t>
             </a:r>
             <a:endParaRPr lang="en-US" sz="1120" dirty="0"/>
           </a:p>
@@ -11270,7 +11270,7 @@
                 <a:ea typeface="Roboto" pitchFamily="34" charset="-122"/>
                 <a:cs typeface="Roboto" pitchFamily="34" charset="-120"/>
               </a:rPr>
-              <a:t>Governs VPC-SC perimeters, IAM PAB &amp; Cloud KMS CMEK key rotation</a:t>
+              <a:t>Screens prompts &amp; egress via Model Armor, Cloud SDP &amp; AlloyDB FORCE RLS</a:t>
             </a:r>
             <a:endParaRPr lang="en-US" sz="1120" dirty="0"/>
           </a:p>
@@ -11329,7 +11329,7 @@
                 <a:ea typeface="Roboto" pitchFamily="34" charset="-122"/>
                 <a:cs typeface="Roboto" pitchFamily="34" charset="-120"/>
               </a:rPr>
-              <a:t>Enforces &lt;60s HTTP 423 CMEK revocation &amp; SCC threat response SLAs</a:t>
+              <a:t>Isolates regulated tenants via VPC-SC &amp; &lt;60s HTTP 423 CMEK kill-switch</a:t>
             </a:r>
             <a:endParaRPr lang="en-US" sz="1120" dirty="0"/>
           </a:p>
@@ -11462,7 +11462,7 @@
                 <a:ea typeface="Google Sans" pitchFamily="34" charset="-122"/>
                 <a:cs typeface="Google Sans" pitchFamily="34" charset="-120"/>
               </a:rPr>
-              <a:t>SRE</a:t>
+              <a:t>REL</a:t>
             </a:r>
             <a:endParaRPr lang="en-US" sz="1150" dirty="0"/>
           </a:p>
@@ -11501,7 +11501,7 @@
                 <a:ea typeface="Google Sans" pitchFamily="34" charset="-122"/>
                 <a:cs typeface="Google Sans" pitchFamily="34" charset="-120"/>
               </a:rPr>
-              <a:t>Pillar 2: Agent Runtime</a:t>
+              <a:t>Pillar 2: Noisy-Neighbor</a:t>
             </a:r>
             <a:endParaRPr lang="en-US" sz="1480" dirty="0"/>
           </a:p>
@@ -11518,7 +11518,7 @@
                 <a:ea typeface="Google Sans" pitchFamily="34" charset="-122"/>
                 <a:cs typeface="Google Sans" pitchFamily="34" charset="-120"/>
               </a:rPr>
-              <a:t>&amp; Data Reliability SRE</a:t>
+              <a:t>Bulkheads &amp; Live Mobility</a:t>
             </a:r>
             <a:endParaRPr lang="en-US" sz="1480" dirty="0"/>
           </a:p>
@@ -11577,7 +11577,7 @@
                 <a:ea typeface="Roboto" pitchFamily="34" charset="-122"/>
                 <a:cs typeface="Roboto" pitchFamily="34" charset="-120"/>
               </a:rPr>
-              <a:t>Operates ADK 2.0 runtime_pipeline.py (80% shared core) &amp; ARD ACLs</a:t>
+              <a:t>Enforces atomic Memorystore Valkey token buckets (120 vs 600 RPM)</a:t>
             </a:r>
             <a:endParaRPr lang="en-US" sz="1120" dirty="0"/>
           </a:p>
@@ -11636,7 +11636,7 @@
                 <a:ea typeface="Roboto" pitchFamily="34" charset="-122"/>
                 <a:cs typeface="Roboto" pitchFamily="34" charset="-120"/>
               </a:rPr>
-              <a:t>Manages Memorystore Valkey (120/600 RPM) &amp; AlloyDB RLS policies</a:t>
+              <a:t>Clamps per-tier Gemini 2.5 Pro thinking budgets (4k Std vs 8k Ent)</a:t>
             </a:r>
             <a:endParaRPr lang="en-US" sz="1120" dirty="0"/>
           </a:p>
@@ -11695,7 +11695,7 @@
                 <a:ea typeface="Roboto" pitchFamily="34" charset="-122"/>
                 <a:cs typeface="Roboto" pitchFamily="34" charset="-120"/>
               </a:rPr>
-              <a:t>Executes Pattern C 3-phase SHADOW_SYNC live migrations (0ms lag)</a:t>
+              <a:t>Promotes tenants live via Pattern C SHADOW_SYNC (0ms lag, 0 drops)</a:t>
             </a:r>
             <a:endParaRPr lang="en-US" sz="1120" dirty="0"/>
           </a:p>
@@ -11867,7 +11867,7 @@
                 <a:ea typeface="Google Sans" pitchFamily="34" charset="-122"/>
                 <a:cs typeface="Google Sans" pitchFamily="34" charset="-120"/>
               </a:rPr>
-              <a:t>Pillar 3: FinOps, Billing</a:t>
+              <a:t>Pillar 3: 84.7% Prefix Cache</a:t>
             </a:r>
             <a:endParaRPr lang="en-US" sz="1480" dirty="0"/>
           </a:p>
@@ -11884,7 +11884,7 @@
                 <a:ea typeface="Google Sans" pitchFamily="34" charset="-122"/>
                 <a:cs typeface="Google Sans" pitchFamily="34" charset="-120"/>
               </a:rPr>
-              <a:t>&amp; CI/CD Release Gate</a:t>
+              <a:t>FinOps &amp; 80% Code Reuse</a:t>
             </a:r>
             <a:endParaRPr lang="en-US" sz="1480" dirty="0"/>
           </a:p>
@@ -11943,7 +11943,7 @@
                 <a:ea typeface="Roboto" pitchFamily="34" charset="-122"/>
                 <a:cs typeface="Roboto" pitchFamily="34" charset="-120"/>
               </a:rPr>
-              <a:t>Audits Gemini 2.5 Pro 32k prefix cache hit ratio (&gt;88% target SLA)</a:t>
+              <a:t>Shares 32k-token Gemini 2.5 Pro prefix cache (90% cache discount)</a:t>
             </a:r>
             <a:endParaRPr lang="en-US" sz="1120" dirty="0"/>
           </a:p>
@@ -12002,7 +12002,7 @@
                 <a:ea typeface="Roboto" pitchFamily="34" charset="-122"/>
                 <a:cs typeface="Roboto" pitchFamily="34" charset="-120"/>
               </a:rPr>
-              <a:t>Reconciles zero-PII BigQuery OTel token &amp; SKU chargeback ledgers</a:t>
+              <a:t>Cuts 1,000-tenant portfolio TCO by 74% ($313.8k vs $1.85M/mo all-silo)</a:t>
             </a:r>
             <a:endParaRPr lang="en-US" sz="1120" dirty="0"/>
           </a:p>
@@ -12061,7 +12061,7 @@
                 <a:ea typeface="Roboto" pitchFamily="34" charset="-122"/>
                 <a:cs typeface="Roboto" pitchFamily="34" charset="-120"/>
               </a:rPr>
-              <a:t>Gates every PR merge on 12/12 forensic &amp; 20/20 simulation checks</a:t>
+              <a:t>Reuses one 80% Python ADK 2.0 codebase across Terraform 2.6, 3.6 &amp; 4.6</a:t>
             </a:r>
             <a:endParaRPr lang="en-US" sz="1120" dirty="0"/>
           </a:p>
@@ -12114,7 +12114,7 @@
                 <a:ea typeface="Roboto" pitchFamily="34" charset="-122"/>
                 <a:cs typeface="Roboto" pitchFamily="34" charset="-120"/>
               </a:rPr>
-              <a:t>Workstream 1 Day-2 Operating Model  •  Security &amp; IAM Ownership + Agent Runtime SRE + FinOps &amp; 20/20 CI/CD Governance  •  </a:t>
+              <a:t>Workstream 1 Well-Architected Pillars  •  5-Hop Zero-Trust Security + Valkey Bulkheads &amp; 0ms Mobility + 84.7% Token Savings &amp; 80% Code Reuse  •  </a:t>
             </a:r>
             <a:pPr algn="l" indent="0" marL="0">
               <a:buNone/>

--- a/slides/ws1-google-slides-design-plugin-editable-slides.pptx
+++ b/slides/ws1-google-slides-design-plugin-editable-slides.pptx
@@ -2619,7 +2619,7 @@
                 <a:ea typeface="Roboto" pitchFamily="34" charset="-122"/>
                 <a:cs typeface="Roboto" pitchFamily="34" charset="-120"/>
               </a:rPr>
-              <a:t>Provisioning dedicated cloud projects for Standard Tiernth commercial tenants erodes SaaS gross margins, whereas naive shared runtimes expose cross-tenant tool, memory, and quota surfaces.</a:t>
+              <a:t>Provisioning dedicated cloud projects for Standard Tier commercial tenants erodes SaaS gross margins, whereas naive shared runtimes expose cross-tenant tool, memory, and quota surfaces.</a:t>
             </a:r>
             <a:endParaRPr lang="en-US" sz="720" dirty="0"/>
           </a:p>
@@ -11277,7 +11277,7 @@
                 <a:ea typeface="Roboto" pitchFamily="34" charset="-122"/>
                 <a:cs typeface="Roboto" pitchFamily="34" charset="-120"/>
               </a:rPr>
-              <a:t>Target &amp; SLA: Tier: ENTERPRISE (600 RPM Silo Silo) • 600 RPM • 8,000 Thinking Budget • OCC/IBAN DLP Masking</a:t>
+              <a:t>Target &amp; SLA: Tier: ENTERPRISE (600 RPM Silo) • 600 RPM • 8,000 Thinking Budget • OCC/IBAN DLP Masking</a:t>
             </a:r>
             <a:endParaRPr lang="en-US" sz="750" dirty="0"/>
           </a:p>
@@ -11645,7 +11645,7 @@
                 <a:ea typeface="Roboto" pitchFamily="34" charset="-122"/>
                 <a:cs typeface="Roboto" pitchFamily="34" charset="-120"/>
               </a:rPr>
-              <a:t>Target &amp; SLA: Tier: STANDARD (120 RPM Pool Pool) • 120 RPM • 4,000 Thinking Budget • PCI-DSS PAN/SSN DLP Masking</a:t>
+              <a:t>Target &amp; SLA: Tier: STANDARD (120 RPM Pool) • 120 RPM • 4,000 Thinking Budget • PCI-DSS PAN/SSN DLP Masking</a:t>
             </a:r>
             <a:endParaRPr lang="en-US" sz="750" dirty="0"/>
           </a:p>

--- a/slides/ws1-google-slides-design-plugin-editable-slides.pptx
+++ b/slides/ws1-google-slides-design-plugin-editable-slides.pptx
@@ -621,7 +621,7 @@
           <a:p>
             <a:r>
               <a:rPr lang="en-US" dirty="0"/>
-              <a:t>To prove this architecture is running live in Google Cloud rather than just on slides, here are authentic captures from our deployed Cloud Run revisions and Cloud Logging Explorer. You can reproduce our audit trail directly by running the exact Cloud Logging filter shown in the metadata card—verifying zero cross-tenant RLS rows across HTTP 200, 403, 423, and 429 responses—or by running our automated deep forensic audit script from the command line, which passes all twelve forensic gates and all one hundred seven runtime assertions.</a:t>
+              <a:t>To prove this architecture is running live rather than just on slides, here are authentic captures from our deployed Cloud Run revisions, Cloud Logging Explorer, and our Dual-Plane verification harness. On the Intra-Cloud plane, our 20/20 Google Cloud runtime suites verify zero cross-tenant RLS rows across HTTP 200, 403, 423, and 429 responses; on the Inter-Cloud plane, our 30/30 AWS Bedrock AgentCore MCP and live EC2 execution twin harness across ports 3001 through 3010 passes all sixty assertions and all twelve automated forensic gates.</a:t>
             </a:r>
             <a:endParaRPr lang="en-US" dirty="0"/>
           </a:p>
@@ -4537,7 +4537,7 @@
                 <a:ea typeface="Google Sans" pitchFamily="34" charset="-122"/>
                 <a:cs typeface="Google Sans" pitchFamily="34" charset="-120"/>
               </a:rPr>
-              <a:t>ramp-portal-dev (#248990048888) &amp; cymbal-pooled-prod (#638420508320) serving Pattern A/B/C endpoints (HTTP 200)</a:t>
+              <a:t>cymbal-control-plane (#248990048888) &amp; cymbal-pooled-prod (#638420508320) serving Pattern A/B/C endpoints (HTTP 200)</a:t>
             </a:r>
             <a:endParaRPr lang="en-US" sz="860" dirty="0"/>
           </a:p>
@@ -4576,7 +4576,7 @@
                 <a:ea typeface="Roboto" pitchFamily="34" charset="-122"/>
                 <a:cs typeface="Roboto" pitchFamily="34" charset="-120"/>
               </a:rPr>
-              <a:t>• Projects: ramp-portal-dev (#248990048888) • cymbal-pooled-prod (#638420508320)</a:t>
+              <a:t>• Projects: cymbal-control-plane • cymbal-pooled-prod</a:t>
             </a:r>
             <a:endParaRPr lang="en-US" sz="780" dirty="0"/>
           </a:p>
@@ -4593,7 +4593,7 @@
                 <a:ea typeface="Roboto" pitchFamily="34" charset="-122"/>
                 <a:cs typeface="Roboto" pitchFamily="34" charset="-120"/>
               </a:rPr>
-              <a:t>• Runtime: Cloud Run Gen2 (gVisor runsc sandbox, 100% traffic)</a:t>
+              <a:t>• Runtime: Cloud Run Gen2 (gVisor runsc, 100% traffic)</a:t>
             </a:r>
             <a:endParaRPr lang="en-US" sz="780" dirty="0"/>
           </a:p>
@@ -4610,7 +4610,7 @@
                 <a:ea typeface="Roboto" pitchFamily="34" charset="-122"/>
                 <a:cs typeface="Roboto" pitchFamily="34" charset="-120"/>
               </a:rPr>
-              <a:t>• CLI Gate: python3 -B scripts/run_deep_forensic_audit.py (12/12 PASS)</a:t>
+              <a:t>• CLI Gate: run_deep_forensic_audit.py (12/12 PASS)</a:t>
             </a:r>
             <a:endParaRPr lang="en-US" sz="780" dirty="0"/>
           </a:p>
@@ -4752,7 +4752,7 @@
                 <a:ea typeface="Google Sans" pitchFamily="34" charset="-122"/>
                 <a:cs typeface="Google Sans" pitchFamily="34" charset="-120"/>
               </a:rPr>
-              <a:t>ACT III FORENSIC AUDIT 02 • CLOUD LOGGING 20/20 PASS</a:t>
+              <a:t>ACT III FORENSIC AUDIT 02 • DUAL-PLANE GCP 20/20 &amp; SAAS 30/30 PASS</a:t>
             </a:r>
             <a:endParaRPr lang="en-US" sz="820" dirty="0"/>
           </a:p>
@@ -4842,7 +4842,7 @@
                 <a:ea typeface="Google Sans" pitchFamily="34" charset="-122"/>
                 <a:cs typeface="Google Sans" pitchFamily="34" charset="-120"/>
               </a:rPr>
-              <a:t>Cloud Logging Explorer verifying jsonPayload.rls_cross_tenant_rows=0, 120/600 RPM bulkheads &amp; 0ms tier upgrade logs</a:t>
+              <a:t>Cloud Logging Explorer &amp; Dual-Plane Harness verifying 20/20 GCP suites + 30/30 Inter-Cloud 10-SaaS MCP flows</a:t>
             </a:r>
             <a:endParaRPr lang="en-US" sz="860" dirty="0"/>
           </a:p>
@@ -4881,7 +4881,7 @@
                 <a:ea typeface="Roboto" pitchFamily="34" charset="-122"/>
                 <a:cs typeface="Roboto" pitchFamily="34" charset="-120"/>
               </a:rPr>
-              <a:t>• Logs Query: jsonPayload.rls_cross_tenant_rows=0 AND status=(200|403|423|429)</a:t>
+              <a:t>• Query: rls_cross_tenant_rows=0 AND status=(200..429)</a:t>
             </a:r>
             <a:endParaRPr lang="en-US" sz="780" dirty="0"/>
           </a:p>
@@ -4898,7 +4898,7 @@
                 <a:ea typeface="Roboto" pitchFamily="34" charset="-122"/>
                 <a:cs typeface="Roboto" pitchFamily="34" charset="-120"/>
               </a:rPr>
-              <a:t>• Audit Suite: 20/20 Runtime Simulations PASS (107/107 Assertions)</a:t>
+              <a:t>• Dual-Plane: 20/20 GCP + 30/30 10-SaaS MCP PASS</a:t>
             </a:r>
             <a:endParaRPr lang="en-US" sz="780" dirty="0"/>
           </a:p>
@@ -4915,7 +4915,7 @@
                 <a:ea typeface="Roboto" pitchFamily="34" charset="-122"/>
                 <a:cs typeface="Roboto" pitchFamily="34" charset="-120"/>
               </a:rPr>
-              <a:t>• Latency &amp; Cache: ~42ms p95 5-Hop • &lt;0.15ms JWKS • &lt;5s SCAN+UNLINK</a:t>
+              <a:t>• Twins: 13.220.94.209:3001..3010 (HTTP 200 • 60/60)</a:t>
             </a:r>
             <a:endParaRPr lang="en-US" sz="780" dirty="0"/>
           </a:p>
@@ -5157,7 +5157,7 @@
                 <a:ea typeface="Roboto" pitchFamily="34" charset="-122"/>
                 <a:cs typeface="Roboto" pitchFamily="34" charset="-120"/>
               </a:rPr>
-              <a:t>Live across ramp-portal-dev (#248990048888), cymbal-pooled-prod (#638420508320) &amp; cymbal-build-sandbox (#887605034827) inside gVisor sandboxes.</a:t>
+              <a:t>Live across cymbal-control-plane (#248990048888), cymbal-pooled-prod (#638420508320) &amp; cymbal-build-sandbox (#887605034827) inside gVisor sandboxes.</a:t>
             </a:r>
             <a:endParaRPr lang="en-US" sz="860" dirty="0"/>
           </a:p>
@@ -5637,7 +5637,7 @@
                 <a:ea typeface="Google Sans" pitchFamily="34" charset="-122"/>
                 <a:cs typeface="Google Sans" pitchFamily="34" charset="-120"/>
               </a:rPr>
-              <a:t>AUDIT 04 • 12/12 FORENSIC + 107/107 GATES</a:t>
+              <a:t>AUDIT 04 • DUAL-PLANE 20/20 GCP + 30/30 SAAS</a:t>
             </a:r>
             <a:endParaRPr lang="en-US" sz="740" dirty="0"/>
           </a:p>
@@ -5676,7 +5676,7 @@
                 <a:ea typeface="Google Sans" pitchFamily="34" charset="-122"/>
                 <a:cs typeface="Google Sans" pitchFamily="34" charset="-120"/>
               </a:rPr>
-              <a:t>Reproducible Cloud Logging &amp; CLI Forensic Proof</a:t>
+              <a:t>Intra-Cloud GCP + Inter-Cloud 10-SaaS MCP Proof</a:t>
             </a:r>
             <a:endParaRPr lang="en-US" sz="1050" dirty="0"/>
           </a:p>
@@ -5715,7 +5715,7 @@
                 <a:ea typeface="Roboto" pitchFamily="34" charset="-122"/>
                 <a:cs typeface="Roboto" pitchFamily="34" charset="-120"/>
               </a:rPr>
-              <a:t>Verified via Cloud Logging query (jsonPayload.rls_cross_tenant_rows=0) and python3 -B scripts/run_deep_forensic_audit.py (12/12 PASS • 107/107 Assertions).</a:t>
+              <a:t>Certifies 20/20 GCP runtime suites plus 30/30 Inter-Cloud AWS AgentCore MCP &amp; :3001..3010 Execution Twin flows (60/60 assertions, 12/12 forensic gates).</a:t>
             </a:r>
             <a:endParaRPr lang="en-US" sz="860" dirty="0"/>
           </a:p>
@@ -6507,7 +6507,7 @@
                 <a:ea typeface="Roboto" pitchFamily="34" charset="-122"/>
                 <a:cs typeface="Roboto" pitchFamily="34" charset="-120"/>
               </a:rPr>
-              <a:t>Clone github.com/nitinaggarwal-12/blogs and deploy core-cymbal-agent/ with &lt;0.15ms cached-JWKS STS JWT verification, ~3ms Valkey JTI deny-list, and {tenant}:{user} 3LO token vaulting.</a:t>
+              <a:t>Deploy core-cymbal-agent/ (24-File Reference Workbench) with &lt;0.15ms cached-JWKS STS JWT verification, ~3ms Valkey JTI deny-list, and {tenant}:{user} 3LO token vaulting.</a:t>
             </a:r>
             <a:endParaRPr lang="en-US" sz="900" dirty="0"/>
           </a:p>
@@ -6593,7 +6593,7 @@
                 <a:ea typeface="Google Sans" pitchFamily="34" charset="-122"/>
                 <a:cs typeface="Google Sans" pitchFamily="34" charset="-120"/>
               </a:rPr>
-              <a:t>Cloud Stack: github.com/nitinaggarwal-12/blogs • core-cymbal-agent/runtime_pipeline.py • models.py
+              <a:t>Cloud Stack: core-cymbal-agent/ • runtime_pipeline.py • models.py
 </a:t>
             </a:r>
             <a:pPr indent="0" marL="0">
@@ -6608,7 +6608,7 @@
                 <a:ea typeface="Roboto" pitchFamily="34" charset="-122"/>
                 <a:cs typeface="Roboto" pitchFamily="34" charset="-120"/>
               </a:rPr>
-              <a:t>Target &amp; SLA: SLA: &lt;0.15ms Cached JWKS • ~3ms Valkey JTI Deny-List • {tenant}:{user} 3LO Token Vault (Slides 1–4)</a:t>
+              <a:t>Target &amp; SLA: SLA: &lt;0.15ms Cached JWKS • ~3ms JTI Deny-List • 3LO Vault</a:t>
             </a:r>
             <a:endParaRPr lang="en-US" sz="750" dirty="0"/>
           </a:p>
@@ -6961,7 +6961,7 @@
                 <a:ea typeface="Google Sans" pitchFamily="34" charset="-122"/>
                 <a:cs typeface="Google Sans" pitchFamily="34" charset="-120"/>
               </a:rPr>
-              <a:t>Cloud Stack: workstream-2-pattern-a-pooled/2.6-terraform-starter/ • run_breach_simulations.py
+              <a:t>Cloud Stack: 2.6-terraform-starter/ • run_breach_simulations.py
 </a:t>
             </a:r>
             <a:pPr indent="0" marL="0">
@@ -6976,7 +6976,7 @@
                 <a:ea typeface="Roboto" pitchFamily="34" charset="-122"/>
                 <a:cs typeface="Roboto" pitchFamily="34" charset="-120"/>
               </a:rPr>
-              <a:t>Target &amp; SLA: SLA: ~42ms p95 5-Hop • ~1.8s Cold / ~420ms Warm TTFT • 84.7% Token Savings • 10/10 PASS (Slides 5, 6, 8)</a:t>
+              <a:t>Target &amp; SLA: SLA: ~42ms 5-Hop • ~420ms Warm TTFT • 84.7% Savings (10/10)</a:t>
             </a:r>
             <a:endParaRPr lang="en-US" sz="750" dirty="0"/>
           </a:p>
@@ -7037,7 +7037,7 @@
                 <a:ea typeface="Google Sans" pitchFamily="34" charset="-122"/>
                 <a:cs typeface="Google Sans" pitchFamily="34" charset="-120"/>
               </a:rPr>
-              <a:t>Owner: Cloud Security &amp; IAM  •  Part 2: 5-Hop &amp; Pattern A (Slides 5, 6, 8)</a:t>
+              <a:t>Owner: Cloud Security &amp; IAM  •  Part 2: 5-Hop &amp; Pattern A</a:t>
             </a:r>
             <a:endParaRPr lang="en-US" sz="750" dirty="0"/>
           </a:p>
@@ -7329,7 +7329,7 @@
                 <a:ea typeface="Google Sans" pitchFamily="34" charset="-122"/>
                 <a:cs typeface="Google Sans" pitchFamily="34" charset="-120"/>
               </a:rPr>
-              <a:t>Cloud Stack: workstream-3-pattern-b-siloed/3.6-terraform-silo-blueprint/ • run_silo_security_tests.py
+              <a:t>Cloud Stack: 3.6-terraform-silo-blueprint/ • run_silo_security_tests.py
 </a:t>
             </a:r>
             <a:pPr indent="0" marL="0">
@@ -7344,7 +7344,7 @@
                 <a:ea typeface="Roboto" pitchFamily="34" charset="-122"/>
                 <a:cs typeface="Roboto" pitchFamily="34" charset="-120"/>
               </a:rPr>
-              <a:t>Target &amp; SLA: SLA: &lt;60s CMEK (423) • &lt;5s SCAN+UNLINK • SET NX PX 5000 Recovery • &lt;30s HA RTO • 6/6 PASS (Slide 7)</a:t>
+              <a:t>Target &amp; SLA: SLA: &lt;60s CMEK (423) • &lt;5s SCAN+UNLINK • &lt;30s RTO (6/6)</a:t>
             </a:r>
             <a:endParaRPr lang="en-US" sz="750" dirty="0"/>
           </a:p>
@@ -7611,7 +7611,7 @@
                 <a:ea typeface="Roboto" pitchFamily="34" charset="-122"/>
                 <a:cs typeface="Roboto" pitchFamily="34" charset="-120"/>
               </a:rPr>
-              <a:t>Apply Terraform 4.6 (4.6-terraform-hybrid-psc-blueprint/), certify 74% portfolio TCO reduction ($260k→$68k/mo), feature-flagged GAP-01..05 sunset hooks, BigQuery OTel FinOps SQL, and 0ms PSC cutover (4/4 PASS).</a:t>
+              <a:t>Apply Terraform 4.6 (4.6-terraform-hybrid-psc-blueprint/), certify 74% portfolio TCO reduction (950 Pooled + 50 PSC Spokes), feature-flagged GAP-01..05 sunset hooks, BigQuery OTel FinOps SQL, and 0ms PSC cutover (4/4 PASS).</a:t>
             </a:r>
             <a:endParaRPr lang="en-US" sz="980" dirty="0"/>
           </a:p>
@@ -7697,7 +7697,7 @@
                 <a:ea typeface="Google Sans" pitchFamily="34" charset="-122"/>
                 <a:cs typeface="Google Sans" pitchFamily="34" charset="-120"/>
               </a:rPr>
-              <a:t>Cloud Stack: workstream-4-pattern-c-hybrid/4.6-terraform-hybrid-psc-blueprint/ • run_tier_migration_suite.py
+              <a:t>Cloud Stack: 4.6-terraform-hybrid-psc-blueprint/ • run_tier_migration_suite.py
 </a:t>
             </a:r>
             <a:pPr indent="0" marL="0">
@@ -7712,7 +7712,7 @@
                 <a:ea typeface="Roboto" pitchFamily="34" charset="-122"/>
                 <a:cs typeface="Roboto" pitchFamily="34" charset="-120"/>
               </a:rPr>
-              <a:t>Target &amp; SLA: SLA: 74% TCO Savings ($260k→$68k/mo) • 0ms Cutover • GAP-01..05 Sunset Hooks • 4/4 PASS (Slide 9)</a:t>
+              <a:t>Target &amp; SLA: SLA: 74% TCO Savings (950 Pool + 50 PSC) • 0ms Cutover (4/4)</a:t>
             </a:r>
             <a:endParaRPr lang="en-US" sz="750" dirty="0"/>
           </a:p>
@@ -7920,7 +7920,7 @@
                 <a:ea typeface="Google Sans" pitchFamily="34" charset="-122"/>
                 <a:cs typeface="Google Sans" pitchFamily="34" charset="-120"/>
               </a:rPr>
-              <a:t>Part 5 (Slides 10–11) — CI/CD Forensic Audit &amp; Day-2 Operations</a:t>
+              <a:t>Part 5 (Slides 10–11) — Dual-Plane CI/CD Forensic Audit &amp; Day-2 Operations</a:t>
             </a:r>
             <a:endParaRPr lang="en-US" sz="1140" dirty="0"/>
           </a:p>
@@ -7979,7 +7979,7 @@
                 <a:ea typeface="Roboto" pitchFamily="34" charset="-122"/>
                 <a:cs typeface="Roboto" pitchFamily="34" charset="-120"/>
               </a:rPr>
-              <a:t>Enforce python3 -B scripts/run_deep_forensic_audit.py (12/12 PASS • 107/107 Assertions) and Cloud Logging gate (jsonPayload.rls_cross_tenant_rows=0) across WS1–WS5 in CI/CD.</a:t>
+              <a:t>Enforce python3 -B scripts/run_deep_forensic_audit.py (12/12 PASS • 107/107 Assertions) across 20/20 GCP suites and 30/30 Inter-Cloud 10-SaaS MCP &amp; :3001..3010 Execution Twins.</a:t>
             </a:r>
             <a:endParaRPr lang="en-US" sz="980" dirty="0"/>
           </a:p>
@@ -8065,7 +8065,7 @@
                 <a:ea typeface="Google Sans" pitchFamily="34" charset="-122"/>
                 <a:cs typeface="Google Sans" pitchFamily="34" charset="-120"/>
               </a:rPr>
-              <a:t>Cloud Stack: scripts/run_deep_forensic_audit.py • blogs/ws1-reference-architecture-taxonomy-and-5hop-baseline.md
+              <a:t>Cloud Stack: run_deep_forensic_audit.py • verify_5_third_party_saas_products.py
 </a:t>
             </a:r>
             <a:pPr indent="0" marL="0">
@@ -8080,7 +8080,7 @@
                 <a:ea typeface="Roboto" pitchFamily="34" charset="-122"/>
                 <a:cs typeface="Roboto" pitchFamily="34" charset="-120"/>
               </a:rPr>
-              <a:t>Target &amp; SLA: SLA: 12/12 Forensic Gate (107/107 Assertions) • 20/20 Breach/Silo/PSC Suite • 0 RLS Bleed (Slides 10–11)</a:t>
+              <a:t>Target &amp; SLA: SLA: 12/12 Forensic (107/107) • 20/20 GCP + 30/30 10-SaaS MCP</a:t>
             </a:r>
             <a:endParaRPr lang="en-US" sz="750" dirty="0"/>
           </a:p>
@@ -8141,7 +8141,7 @@
                 <a:ea typeface="Google Sans" pitchFamily="34" charset="-122"/>
                 <a:cs typeface="Google Sans" pitchFamily="34" charset="-120"/>
               </a:rPr>
-              <a:t>Owner: Governance &amp; CISO  •  Part 5: CI/CD Forensic Gate (Slides 10–11)</a:t>
+              <a:t>Owner: Governance &amp; CISO  •  Part 5: Dual-Plane CI/CD Gate (Slides 10–11)</a:t>
             </a:r>
             <a:endParaRPr lang="en-US" sz="750" dirty="0"/>
           </a:p>
@@ -14443,7 +14443,7 @@
                           <a:ea typeface="Roboto" pitchFamily="34" charset="-122"/>
                           <a:cs typeface="Roboto" pitchFamily="34" charset="-120"/>
                         </a:rPr>
-                        <a:t>Single shared GCP project (ramp-portal-dev); 1 Terraform state with zero fleet sprawl</a:t>
+                        <a:t>Single shared GCP project (cymbal-control-plane); 1 Terraform state with zero fleet sprawl</a:t>
                       </a:r>
                       <a:endParaRPr lang="en-US" sz="820" dirty="0">
                         <a:latin typeface="Roboto" charset="0"/>
@@ -21945,7 +21945,7 @@
                 <a:ea typeface="Google Sans" pitchFamily="34" charset="-122"/>
                 <a:cs typeface="Google Sans" pitchFamily="34" charset="-120"/>
               </a:rPr>
-              <a:t>VERIFIED • 56 Editable Shapes • 23 Connectors • GCP: ramp-portal-dev</a:t>
+              <a:t>VERIFIED • 56 Editable Shapes • 23 Connectors • GCP: cymbal-control-plane</a:t>
             </a:r>
             <a:endParaRPr lang="en-US" sz="700" dirty="0"/>
           </a:p>
@@ -22043,7 +22043,7 @@
                 <a:ea typeface="Arial" pitchFamily="34" charset="-122"/>
                 <a:cs typeface="Arial" pitchFamily="34" charset="-120"/>
               </a:rPr>
-              <a:t>Shared Control Plane (ramp-portal-dev / cymbal-build-sandbox</a:t>
+              <a:t>Shared Control Plane (cymbal-control-plane / cymbal-build-sandbox</a:t>
             </a:r>
             <a:endParaRPr lang="en-US" sz="460" dirty="0"/>
           </a:p>

--- a/slides/ws1-google-slides-design-plugin-editable-slides.pptx
+++ b/slides/ws1-google-slides-design-plugin-editable-slides.pptx
@@ -519,7 +519,7 @@
           <a:p>
             <a:r>
               <a:rPr lang="en-US" dirty="0"/>
-              <a:t>In this session, we are walking through our foundational reference architecture for running multi-tenant AI agents on Google Cloud. Right upfront, we define our three core building blocks—Google’s Agent Development Kit 2.0 (ADK), the Model Context Protocol (MCP) for external tool integrations, and Agent Registry and Discovery (ARD)—and show how we solve the SaaS AI Architect’s Dilemma: avoiding the margin erosion of spinning up dedicated cloud projects for every small customer while preventing tool-schema data leaks and noisy-neighbor rate starvation in a shared pool.</a:t>
+              <a:t>In this session, we are walking through our foundational reference architecture for running multi-tenant AI agents on Google Cloud. Right upfront, we define our three core building blocks—Google’s Agent Development Kit (ADK) (ADK), the Model Context Protocol (MCP) for external tool integrations, and Agent Registry and Discovery (ARD)—and show how we solve the SaaS AI Architect’s Dilemma: avoiding the margin erosion of spinning up dedicated cloud projects for every small customer while preventing tool-schema data leaks and noisy-neighbor rate starvation in a shared pool.</a:t>
             </a:r>
             <a:endParaRPr lang="en-US" dirty="0"/>
           </a:p>
@@ -1131,7 +1131,7 @@
           <a:p>
             <a:r>
               <a:rPr lang="en-US" dirty="0"/>
-              <a:t>Before we inspect individual cloud services, this Level 1 diagram organizes our entire architecture into three logical security layers from left to right—preventing any terminology clash with the four physical VPC-SC network perimeters on the next slide. Layer 1 on the left verifies federated identity and DPoP proofs at the Cloud Armor and IAP edge. Layer 2 in the center runs our Five-Hop ADK 2.0 Control Plane, where regional gRPC callouts keep Hop 4 inline Model Armor and Cloud DLP inspection to roughly twenty-two milliseconds and total five-hop control-plane overhead to about forty-two milliseconds at p95. And to prevent security drift during a five-minute STS JWT window, every hop checks a three-millisecond Valkey JTI and CMEK revocation deny-list before routing into Layer 3 on the right.</a:t>
+              <a:t>Before we inspect individual cloud services, this Level 1 diagram organizes our entire architecture into three logical security layers from left to right—preventing any terminology clash with the four physical VPC-SC network perimeters on the next slide. Layer 1 on the left verifies federated identity and DPoP proofs at the Cloud Armor and IAP edge. Layer 2 in the center runs our Five-Hop ADK Control Plane, where regional gRPC callouts keep Hop 4 inline Model Armor and Cloud DLP inspection to roughly twenty-two milliseconds and total five-hop control-plane overhead to about forty-two milliseconds at p95. And to prevent security drift during a five-minute STS JWT window, every hop checks a three-millisecond Valkey JTI and CMEK revocation deny-list before routing into Layer 3 on the right.</a:t>
             </a:r>
             <a:endParaRPr lang="en-US" dirty="0"/>
           </a:p>
@@ -1532,14 +1532,14 @@
           <a:p>
             <a:r>
               <a:rPr lang="en-US" dirty="0"/>
-              <a:t>Part 4 on Slide 9 provides our transparent engineering ledger of five current platform gaps, our codebase compensating controls, and our Q4 2026 / Q1 2027 native GA sunset hooks.</a:t>
+              <a:t>Part 4 on Slide 9 provides our transparent engineering ledger of five current platform gaps, our codebase compensating controls, and our feature-flagged native adapter native GA sunset hooks.</a:t>
             </a:r>
             <a:endParaRPr lang="en-US" dirty="0"/>
           </a:p>
           <a:p>
             <a:r>
               <a:rPr lang="en-US" dirty="0"/>
-              <a:t>This register maps our five compensating production controls—GAP-01 through GAP-05—to the early-access platform boundaries engineering teams face today. Every custom Python, Valkey, or SQL control in core-cymbal-agent is wrapped in a feature-flagged GA sunset hook targeted for Q4 2026 through Q1 2027 so teams can switch cleanly to native GCP primitives as they reach general availability. And in row five, our OpenTelemetry FinOps exporter streams SHA-256 prompt hashes and token counters directly into BigQuery so finance teams can run exact SQL chargeback queries across cached and thinking tokens with zero raw PII.</a:t>
+              <a:t>This register maps our five compensating production controls—GAP-01 through GAP-05—to the early-access platform boundaries engineering teams face today. Every custom Python, Valkey, or SQL control in core-cymbal-agent is wrapped in a feature-flagged GA sunset hook targeted for Feature-Flagged Native Hook through Feature-Flagged Native Hook so teams can switch cleanly to native GCP primitives as they reach general availability. And in row five, our OpenTelemetry FinOps exporter streams SHA-256 prompt hashes and token counters directly into BigQuery so finance teams can run exact SQL chargeback queries across cached and thinking tokens with zero raw PII.</a:t>
             </a:r>
             <a:endParaRPr lang="en-US" dirty="0"/>
           </a:p>
@@ -2389,7 +2389,7 @@
                 <a:ea typeface="Roboto" pitchFamily="34" charset="-122"/>
                 <a:cs typeface="Roboto" pitchFamily="34" charset="-120"/>
               </a:rPr>
-              <a:t>Solving the SaaS AI Dilemma: Prevent tool-schema leaks and rogue-tenant quota starvation using Agent Development Kit (ADK 2.0), Model Context Protocol (MCP) &amp; Agent Registry Discovery (ARD) across Pooled, Silo &amp; Hybrid tiers</a:t>
+              <a:t>Solving the SaaS AI Dilemma: Prevent tool-schema leaks and rogue-tenant quota starvation using Agent Development Kit (ADK), Model Context Protocol (MCP) &amp; Agent Registry Discovery (ARD) across Pooled, Silo &amp; Hybrid tiers</a:t>
             </a:r>
             <a:endParaRPr lang="en-US" sz="980" dirty="0"/>
           </a:p>
@@ -2643,7 +2643,7 @@
                 <a:ea typeface="Roboto" pitchFamily="34" charset="-122"/>
                 <a:cs typeface="Roboto" pitchFamily="34" charset="-120"/>
               </a:rPr>
-              <a:t>Agent Development Kit (ADK 2.0) orchestrates reasoning &amp; callbacks; Model Context Protocol (MCP) standardizes 2LO/3LO enterprise tools; Agent Registry &amp; Discovery (ARD) enforces tenant catalog ACLs.</a:t>
+              <a:t>Agent Development Kit (ADK) orchestrates reasoning &amp; callbacks; Model Context Protocol (MCP) standardizes 2LO/3LO enterprise tools; Agent Registry &amp; Discovery (ARD) enforces tenant catalog ACLs.</a:t>
             </a:r>
             <a:endParaRPr lang="en-US" sz="720" dirty="0"/>
           </a:p>
@@ -2770,7 +2770,7 @@
                 <a:ea typeface="Roboto" pitchFamily="34" charset="-122"/>
                 <a:cs typeface="Roboto" pitchFamily="34" charset="-120"/>
               </a:rPr>
-              <a:t>Pattern A (Pooled RLS + 90% prefix cache), Pattern B (Sovereign Silo VPC-SC + CMEK), and Pattern C (Dynamic Hybrid PSC + 0ms tier upgrade) share 80% identical Python ADK 2.0 code.</a:t>
+              <a:t>Pattern A (Pooled RLS + 90% prefix cache), Pattern B (Sovereign Silo VPC-SC + CMEK), and Pattern C (Dynamic Hybrid PSC + 0ms tier upgrade) share 80% identical Python ADK code.</a:t>
             </a:r>
             <a:endParaRPr lang="en-US" sz="720" dirty="0"/>
           </a:p>
@@ -3229,7 +3229,7 @@
                 <a:ea typeface="Roboto" pitchFamily="34" charset="-122"/>
                 <a:cs typeface="Roboto" pitchFamily="34" charset="-120"/>
               </a:rPr>
-              <a:t>Defines ADK 2.0, MCP &amp; ARD upfront; sets the 5-Act agenda (Slide 2), contrasts FinVault (600 RPM: Dedicated PT vs. GKE Gemma 3) &amp; RetailStream (120 RPM: 3LO vault, Slide 3), and compares Patterns A/B/C (Slide 4).</a:t>
+              <a:t>Defines ADK, MCP &amp; ARD upfront; sets the 5-Act agenda (Slide 2), contrasts FinVault (600 RPM: Dedicated PT vs. GKE Gemma 3) &amp; RetailStream (120 RPM: 3LO vault, Slide 3), and compares Patterns A/B/C (Slide 4).</a:t>
             </a:r>
             <a:endParaRPr lang="en-US" sz="780" dirty="0"/>
           </a:p>
@@ -3906,7 +3906,7 @@
                 <a:ea typeface="Roboto" pitchFamily="34" charset="-122"/>
                 <a:cs typeface="Roboto" pitchFamily="34" charset="-120"/>
               </a:rPr>
-              <a:t>Multi-Tenant Agentic AI on Google Cloud • Vertex AI Agent Engine, Gemini Enterprise &amp; ADK 2.0  •  </a:t>
+              <a:t>Multi-Tenant Agentic AI on Google Cloud • Vertex AI Agent Engine, Gemini Enterprise &amp; ADK  •  </a:t>
             </a:r>
             <a:pPr algn="l" indent="0" marL="0">
               <a:buNone/>
@@ -8321,7 +8321,7 @@
                 <a:ea typeface="Roboto" pitchFamily="34" charset="-122"/>
                 <a:cs typeface="Roboto" pitchFamily="34" charset="-120"/>
               </a:rPr>
-              <a:t>Multi-Tenant Agentic AI on Google Cloud • Vertex AI Agent Engine, Gemini Enterprise &amp; ADK 2.0  •  </a:t>
+              <a:t>Multi-Tenant Agentic AI on Google Cloud • Vertex AI Agent Engine, Gemini Enterprise &amp; ADK  •  </a:t>
             </a:r>
             <a:pPr algn="l" indent="0" marL="0">
               <a:buNone/>
@@ -9405,7 +9405,7 @@
                           <a:ea typeface="Roboto" pitchFamily="34" charset="-122"/>
                           <a:cs typeface="Roboto" pitchFamily="34" charset="-120"/>
                         </a:rPr>
-                        <a:t>12-Dimension Decision Matrix • 80/20 ADK 2.0 Code Reuse • {tenant}:{user} DPoP 3LO Vault</a:t>
+                        <a:t>12-Dimension Decision Matrix • 80/20 ADK Code Reuse • {tenant}:{user} DPoP 3LO Vault</a:t>
                       </a:r>
                       <a:endParaRPr lang="en-US" sz="870" dirty="0">
                         <a:latin typeface="Roboto" charset="0"/>
@@ -10290,7 +10290,7 @@
                           <a:ea typeface="Roboto" pitchFamily="34" charset="-122"/>
                           <a:cs typeface="Roboto" pitchFamily="34" charset="-120"/>
                         </a:rPr>
-                        <a:t>Feature-Flagged GAP-01..05 Sunset Hooks (Q4 2026 / Q1 2027) • BigQuery OTel Chargeback SQL</a:t>
+                        <a:t>Feature-Flagged GAP-01..05 Sunset Hooks (feature-flagged native adapter) • BigQuery OTel Chargeback SQL</a:t>
                       </a:r>
                       <a:endParaRPr lang="en-US" sz="870" dirty="0">
                         <a:latin typeface="Roboto" charset="0"/>
@@ -11331,7 +11331,7 @@
                 <a:ea typeface="Roboto" pitchFamily="34" charset="-122"/>
                 <a:cs typeface="Roboto" pitchFamily="34" charset="-120"/>
               </a:rPr>
-              <a:t>Multi-Tenant Agentic AI on Google Cloud • Vertex AI Agent Engine, Gemini Enterprise &amp; ADK 2.0  •  </a:t>
+              <a:t>Multi-Tenant Agentic AI on Google Cloud • Vertex AI Agent Engine, Gemini Enterprise &amp; ADK  •  </a:t>
             </a:r>
             <a:pPr algn="l" indent="0" marL="0">
               <a:buNone/>
@@ -12070,7 +12070,7 @@
                 <a:ea typeface="Roboto" pitchFamily="34" charset="-122"/>
                 <a:cs typeface="Roboto" pitchFamily="34" charset="-120"/>
               </a:rPr>
-              <a:t>Operates a shared Incident Diagnostic Agent on Vertex AI Agent Engine (ADK 2.0, ARD Registry &amp; L1–L5 Memory Bank), caching a 32,000-token SRE runbook prefix once (90% discount -&gt; 84.7% net per-turn token cost reduction).</a:t>
+              <a:t>Operates a shared Incident Diagnostic Agent on Vertex AI Agent Engine (ADK, ARD Registry &amp; L1–L5 Memory Bank), caching a 32,000-token SRE runbook prefix once (90% discount -&gt; 84.7% net per-turn token cost reduction).</a:t>
             </a:r>
             <a:endParaRPr lang="en-US" sz="980" dirty="0"/>
           </a:p>
@@ -12156,7 +12156,7 @@
                 <a:ea typeface="Google Sans" pitchFamily="34" charset="-122"/>
                 <a:cs typeface="Google Sans" pitchFamily="34" charset="-120"/>
               </a:rPr>
-              <a:t>Cloud Stack: Vertex AI Agent Engine (ADK 2.0, ARD, L1–L5 Memory) • Gemini 2.5 Pro (32k ContextCacheConfig)
+              <a:t>Cloud Stack: Vertex AI Agent Engine (ADK, ARD, L1–L5 Memory) • Gemini 2.5 Pro (32k ContextCacheConfig)
 </a:t>
             </a:r>
             <a:pPr indent="0" marL="0">
@@ -13174,7 +13174,7 @@
                 <a:ea typeface="Roboto" pitchFamily="34" charset="-122"/>
                 <a:cs typeface="Roboto" pitchFamily="34" charset="-120"/>
               </a:rPr>
-              <a:t>Cloud Armor WAF, IAP OBO/DPoP, Valkey token buckets, streaming Model Armor/DLP (~22ms), and AlloyDB FORCE RLS run one 80% reusable ADK 2.0 codebase—blocking cross-tenant probes (HTTP 403) with 0 cross-tenant rows.</a:t>
+              <a:t>Cloud Armor WAF, IAP OBO/DPoP, Valkey token buckets, streaming Model Armor/DLP (~22ms), and AlloyDB FORCE RLS run one 80% reusable ADK codebase—blocking cross-tenant probes (HTTP 403) with 0 cross-tenant rows.</a:t>
             </a:r>
             <a:endParaRPr lang="en-US" sz="980" dirty="0"/>
           </a:p>
@@ -13275,7 +13275,7 @@
                 <a:ea typeface="Roboto" pitchFamily="34" charset="-122"/>
                 <a:cs typeface="Roboto" pitchFamily="34" charset="-120"/>
               </a:rPr>
-              <a:t>Target &amp; SLA: 80% Identical Python ADK 2.0 Codebase • Verified by 107/107 Automated Security &amp; SaaS Assertions</a:t>
+              <a:t>Target &amp; SLA: 80% Identical Python ADK Codebase • Verified by 107/107 Automated Security &amp; SaaS Assertions</a:t>
             </a:r>
             <a:endParaRPr lang="en-US" sz="750" dirty="0"/>
           </a:p>
@@ -13516,7 +13516,7 @@
                 <a:ea typeface="Roboto" pitchFamily="34" charset="-122"/>
                 <a:cs typeface="Roboto" pitchFamily="34" charset="-120"/>
               </a:rPr>
-              <a:t>Multi-Tenant Agentic AI on Google Cloud • Vertex AI Agent Engine, Gemini Enterprise &amp; ADK 2.0  •  </a:t>
+              <a:t>Multi-Tenant Agentic AI on Google Cloud • Vertex AI Agent Engine, Gemini Enterprise &amp; ADK  •  </a:t>
             </a:r>
             <a:pPr algn="l" indent="0" marL="0">
               <a:buNone/>
@@ -16789,7 +16789,7 @@
                 <a:ea typeface="Roboto" pitchFamily="34" charset="-122"/>
                 <a:cs typeface="Roboto" pitchFamily="34" charset="-120"/>
               </a:rPr>
-              <a:t>Co-hosts 950 Pool + 50 PSC Spokes (74% TCO savings, 0ms cutover) using 80% identical ADK 2.0 Python code (runtime_pipeline.py) across Terraform 2.6/3.6/4.6.</a:t>
+              <a:t>Co-hosts 950 Pool + 50 PSC Spokes (74% TCO savings, 0ms cutover) using 80% identical ADK Python code (runtime_pipeline.py) across Terraform 2.6/3.6/4.6.</a:t>
             </a:r>
             <a:endParaRPr lang="en-US" sz="740" dirty="0"/>
           </a:p>
@@ -16969,7 +16969,7 @@
                 <a:ea typeface="Roboto" pitchFamily="34" charset="-122"/>
                 <a:cs typeface="Roboto" pitchFamily="34" charset="-120"/>
               </a:rPr>
-              <a:t>Multi-Tenant Agentic AI on Google Cloud • Vertex AI Agent Engine, Gemini Enterprise &amp; ADK 2.0  •  </a:t>
+              <a:t>Multi-Tenant Agentic AI on Google Cloud • Vertex AI Agent Engine, Gemini Enterprise &amp; ADK  •  </a:t>
             </a:r>
             <a:pPr algn="l" indent="0" marL="0">
               <a:buNone/>
@@ -18272,7 +18272,7 @@
                 <a:ea typeface="Google Sans" pitchFamily="34" charset="-122"/>
                 <a:cs typeface="Google Sans" pitchFamily="34" charset="-120"/>
               </a:rPr>
-              <a:t>LAYER 2: 5-HOP ADK 2.0 CONTROL PLANE</a:t>
+              <a:t>LAYER 2: 5-HOP ADK CONTROL PLANE</a:t>
             </a:r>
             <a:endParaRPr lang="en-US" sz="1100" dirty="0"/>
           </a:p>
@@ -21945,7 +21945,7 @@
                 <a:ea typeface="Google Sans" pitchFamily="34" charset="-122"/>
                 <a:cs typeface="Google Sans" pitchFamily="34" charset="-120"/>
               </a:rPr>
-              <a:t>VERIFIED • 56 Editable Shapes • 23 Connectors • GCP: cymbal-control-plane</a:t>
+              <a:t>VERIFIED • 56 Editable Shapes • 23 Connectors • GCP: cymbal-pooled-prod (#638420508320)</a:t>
             </a:r>
             <a:endParaRPr lang="en-US" sz="700" dirty="0"/>
           </a:p>
@@ -22043,7 +22043,7 @@
                 <a:ea typeface="Arial" pitchFamily="34" charset="-122"/>
                 <a:cs typeface="Arial" pitchFamily="34" charset="-120"/>
               </a:rPr>
-              <a:t>Shared Control Plane (cymbal-control-plane / cymbal-build-sandbox</a:t>
+              <a:t>Shared Control Plane (cymbal-pooled-prod / cymbal-build-sandbox</a:t>
             </a:r>
             <a:endParaRPr lang="en-US" sz="460" dirty="0"/>
           </a:p>
@@ -33996,7 +33996,7 @@
                           <a:ea typeface="Roboto" pitchFamily="34" charset="-122"/>
                           <a:cs typeface="Roboto" pitchFamily="34" charset="-120"/>
                         </a:rPr>
-                        <a:t>WS2 Test 2 PASS (HTTP 403 on cross-tenant Agent Alpha probe) • Sunset at Native GA: Q4 2026</a:t>
+                        <a:t>WS2 Test 2 PASS (HTTP 403 on cross-tenant Agent Alpha probe) • Sunset at Native GA: Feature-Flagged Native Hook</a:t>
                       </a:r>
                       <a:endParaRPr lang="en-US" sz="870" dirty="0">
                         <a:latin typeface="Roboto" charset="0"/>
@@ -34291,7 +34291,7 @@
                           <a:ea typeface="Roboto" pitchFamily="34" charset="-122"/>
                           <a:cs typeface="Roboto" pitchFamily="34" charset="-120"/>
                         </a:rPr>
-                        <a:t>WS3 Tests 4A/4B/6 PASS (HTTP 423 Locked &lt;60s, 0 peer cache evictions) • Sunset at GA: Q4 2026</a:t>
+                        <a:t>WS3 Tests 4A/4B/6 PASS (HTTP 423 Locked &lt;60s, 0 peer cache evictions) • Sunset at GA: Feature-Flagged Native Hook</a:t>
                       </a:r>
                       <a:endParaRPr lang="en-US" sz="870" dirty="0">
                         <a:latin typeface="Roboto" charset="0"/>
@@ -34586,7 +34586,7 @@
                           <a:ea typeface="Roboto" pitchFamily="34" charset="-122"/>
                           <a:cs typeface="Roboto" pitchFamily="34" charset="-120"/>
                         </a:rPr>
-                        <a:t>WS2 Test 6 PASS (HTTP 429 on 500-RPM flood; budget clamped to 4k) • Sunset at GA: Q4 2026</a:t>
+                        <a:t>WS2 Test 6 PASS (HTTP 429 on 500-RPM flood; budget clamped to 4k) • Sunset at GA: Feature-Flagged Native Hook</a:t>
                       </a:r>
                       <a:endParaRPr lang="en-US" sz="870" dirty="0">
                         <a:latin typeface="Roboto" charset="0"/>
@@ -34881,7 +34881,7 @@
                           <a:ea typeface="Roboto" pitchFamily="34" charset="-122"/>
                           <a:cs typeface="Roboto" pitchFamily="34" charset="-120"/>
                         </a:rPr>
-                        <a:t>WS2 Test 10 &amp; 10-SaaS Matrix PASS (HTTP 401 step-up -&gt; 200 OK ServiceNow) • Sunset at GA: Q4 2026</a:t>
+                        <a:t>WS2 Test 10 &amp; 10-SaaS Matrix PASS (HTTP 401 step-up -&gt; 200 OK ServiceNow) • Sunset at GA: Feature-Flagged Native Hook</a:t>
                       </a:r>
                       <a:endParaRPr lang="en-US" sz="870" dirty="0">
                         <a:latin typeface="Roboto" charset="0"/>
@@ -35176,7 +35176,7 @@
                           <a:ea typeface="Roboto" pitchFamily="34" charset="-122"/>
                           <a:cs typeface="Roboto" pitchFamily="34" charset="-120"/>
                         </a:rPr>
-                        <a:t>Forensic Check F-08 PASS (BigQuery OTel chargeback SQL verified) • Sunset at GA: Q1 2027</a:t>
+                        <a:t>Forensic Check F-08 PASS (BigQuery OTel chargeback SQL verified) • Sunset at GA: Feature-Flagged Native Hook</a:t>
                       </a:r>
                       <a:endParaRPr lang="en-US" sz="870" dirty="0">
                         <a:latin typeface="Roboto" charset="0"/>
@@ -35613,7 +35613,7 @@
                 <a:ea typeface="Roboto" pitchFamily="34" charset="-122"/>
                 <a:cs typeface="Roboto" pitchFamily="34" charset="-120"/>
               </a:rPr>
-              <a:t>Enforces 120/600 RPM Valkey token buckets (HTTP 429 Retry-After jitter) with feature-flagged GA sunset hooks (Q4 2026 / Q1 2027) in core-cymbal-agent/.</a:t>
+              <a:t>Enforces 120/600 RPM Valkey token buckets (HTTP 429 Retry-After jitter) with feature-flagged GA sunset hooks (feature-flagged native adapter) in core-cymbal-agent/.</a:t>
             </a:r>
             <a:endParaRPr lang="en-US" sz="740" dirty="0"/>
           </a:p>
@@ -35922,7 +35922,7 @@
                 <a:ea typeface="Roboto" pitchFamily="34" charset="-122"/>
                 <a:cs typeface="Roboto" pitchFamily="34" charset="-120"/>
               </a:rPr>
-              <a:t>Multi-Tenant Agentic AI on Google Cloud • Vertex AI Agent Engine, Gemini Enterprise &amp; ADK 2.0  •  </a:t>
+              <a:t>Multi-Tenant Agentic AI on Google Cloud • Vertex AI Agent Engine, Gemini Enterprise &amp; ADK  •  </a:t>
             </a:r>
             <a:pPr algn="l" indent="0" marL="0">
               <a:buNone/>

--- a/slides/ws1-google-slides-design-plugin-editable-slides.pptx
+++ b/slides/ws1-google-slides-design-plugin-editable-slides.pptx
@@ -4295,7 +4295,7 @@
                 <a:ea typeface="Google Sans" pitchFamily="34" charset="-122"/>
                 <a:cs typeface="Google Sans" pitchFamily="34" charset="-120"/>
               </a:rPr>
-              <a:t>WS1 • ACT III FORENSIC VERIFICATION AUDIT: GROUNDED GCP CONSOLE PROOF &amp; 20/20 LOGS</a:t>
+              <a:t>WS1 • ACT III FORENSIC VERIFICATION AUDIT: GROUNDED GCP TELEMETRY &amp; 20/20 LOGS</a:t>
             </a:r>
             <a:endParaRPr lang="en-US" sz="1020" dirty="0"/>
           </a:p>
@@ -4453,40 +4453,16 @@
           </a:p>
         </p:txBody>
       </p:sp>
-      <p:pic>
-        <p:nvPicPr>
-          <p:cNvPr id="20" name="Image 0" descr="preencoded.png">    </p:cNvPr>
-          <p:cNvPicPr>
-            <a:picLocks noChangeAspect="1"/>
-          </p:cNvPicPr>
-          <p:nvPr/>
-        </p:nvPicPr>
-        <p:blipFill>
-          <a:blip r:embed="rId1"/>
-          <a:stretch>
-            <a:fillRect/>
-          </a:stretch>
-        </p:blipFill>
+      <p:sp>
+        <p:nvSpPr>
+          <p:cNvPr id="20" name="Shape 18"/>
+          <p:cNvSpPr/>
+          <p:nvPr/>
+        </p:nvSpPr>
         <p:spPr>
           <a:xfrm>
             <a:off x="493776" y="1097280"/>
-            <a:ext cx="3639312" cy="2048256"/>
-          </a:xfrm>
-          <a:prstGeom prst="rect">
-            <a:avLst/>
-          </a:prstGeom>
-        </p:spPr>
-      </p:pic>
-      <p:sp>
-        <p:nvSpPr>
-          <p:cNvPr id="21" name="Shape 18"/>
-          <p:cNvSpPr/>
-          <p:nvPr/>
-        </p:nvSpPr>
-        <p:spPr>
-          <a:xfrm>
-            <a:off x="4242816" y="1097280"/>
-            <a:ext cx="2798064" cy="2048256"/>
+            <a:ext cx="6565392" cy="2048256"/>
           </a:xfrm>
           <a:prstGeom prst="roundRect">
             <a:avLst>
@@ -4506,14 +4482,14 @@
       </p:sp>
       <p:sp>
         <p:nvSpPr>
-          <p:cNvPr id="22" name="Text 19"/>
-          <p:cNvSpPr/>
-          <p:nvPr/>
-        </p:nvSpPr>
-        <p:spPr>
-          <a:xfrm>
-            <a:off x="4334256" y="1170432"/>
-            <a:ext cx="2615184" cy="658368"/>
+          <p:cNvPr id="21" name="Text 19"/>
+          <p:cNvSpPr/>
+          <p:nvPr/>
+        </p:nvSpPr>
+        <p:spPr>
+          <a:xfrm>
+            <a:off x="621792" y="1170432"/>
+            <a:ext cx="6309360" cy="512064"/>
           </a:xfrm>
           <a:prstGeom prst="rect">
             <a:avLst/>
@@ -4529,7 +4505,7 @@
               <a:buNone/>
             </a:pPr>
             <a:r>
-              <a:rPr lang="en-US" sz="860" b="1" dirty="0">
+              <a:rPr lang="en-US" sz="920" b="1" dirty="0">
                 <a:solidFill>
                   <a:srgbClr val="3C4043"/>
                 </a:solidFill>
@@ -4539,20 +4515,20 @@
               </a:rPr>
               <a:t>cymbal-control-plane (#248990048888) &amp; cymbal-pooled-prod (#638420508320) serving Pattern A/B/C endpoints (HTTP 200)</a:t>
             </a:r>
-            <a:endParaRPr lang="en-US" sz="860" dirty="0"/>
-          </a:p>
-        </p:txBody>
-      </p:sp>
-      <p:sp>
-        <p:nvSpPr>
-          <p:cNvPr id="23" name="Text 20"/>
-          <p:cNvSpPr/>
-          <p:nvPr/>
-        </p:nvSpPr>
-        <p:spPr>
-          <a:xfrm>
-            <a:off x="4334256" y="1865376"/>
-            <a:ext cx="2615184" cy="950976"/>
+            <a:endParaRPr lang="en-US" sz="920" dirty="0"/>
+          </a:p>
+        </p:txBody>
+      </p:sp>
+      <p:sp>
+        <p:nvSpPr>
+          <p:cNvPr id="22" name="Text 20"/>
+          <p:cNvSpPr/>
+          <p:nvPr/>
+        </p:nvSpPr>
+        <p:spPr>
+          <a:xfrm>
+            <a:off x="621792" y="1719072"/>
+            <a:ext cx="6309360" cy="1060704"/>
           </a:xfrm>
           <a:prstGeom prst="rect">
             <a:avLst/>
@@ -4568,7 +4544,7 @@
               <a:buNone/>
             </a:pPr>
             <a:r>
-              <a:rPr lang="en-US" sz="780" dirty="0">
+              <a:rPr lang="en-US" sz="840" dirty="0">
                 <a:solidFill>
                   <a:srgbClr val="5F6368"/>
                 </a:solidFill>
@@ -4578,14 +4554,14 @@
               </a:rPr>
               <a:t>• Projects: cymbal-control-plane • cymbal-pooled-prod</a:t>
             </a:r>
-            <a:endParaRPr lang="en-US" sz="780" dirty="0"/>
+            <a:endParaRPr lang="en-US" sz="840" dirty="0"/>
           </a:p>
           <a:p>
             <a:pPr indent="0" marL="0">
               <a:buNone/>
             </a:pPr>
             <a:r>
-              <a:rPr lang="en-US" sz="780" dirty="0">
+              <a:rPr lang="en-US" sz="840" dirty="0">
                 <a:solidFill>
                   <a:srgbClr val="5F6368"/>
                 </a:solidFill>
@@ -4595,14 +4571,14 @@
               </a:rPr>
               <a:t>• Runtime: Cloud Run Gen2 (gVisor runsc, 100% traffic)</a:t>
             </a:r>
-            <a:endParaRPr lang="en-US" sz="780" dirty="0"/>
+            <a:endParaRPr lang="en-US" sz="840" dirty="0"/>
           </a:p>
           <a:p>
             <a:pPr indent="0" marL="0">
               <a:buNone/>
             </a:pPr>
             <a:r>
-              <a:rPr lang="en-US" sz="780" dirty="0">
+              <a:rPr lang="en-US" sz="840" dirty="0">
                 <a:solidFill>
                   <a:srgbClr val="5F6368"/>
                 </a:solidFill>
@@ -4612,14 +4588,14 @@
               </a:rPr>
               <a:t>• CLI Gate: run_deep_forensic_audit.py (12/12 PASS)</a:t>
             </a:r>
-            <a:endParaRPr lang="en-US" sz="780" dirty="0"/>
+            <a:endParaRPr lang="en-US" sz="840" dirty="0"/>
           </a:p>
           <a:p>
             <a:pPr indent="0" marL="0">
               <a:buNone/>
             </a:pPr>
             <a:r>
-              <a:rPr lang="en-US" sz="780" dirty="0">
+              <a:rPr lang="en-US" sz="840" dirty="0">
                 <a:solidFill>
                   <a:srgbClr val="5F6368"/>
                 </a:solidFill>
@@ -4627,22 +4603,22 @@
                 <a:ea typeface="Roboto" pitchFamily="34" charset="-122"/>
                 <a:cs typeface="Roboto" pitchFamily="34" charset="-120"/>
               </a:rPr>
-              <a:t>• Aspect Ratio: Native 16:9 (1920×1080)</a:t>
-            </a:r>
-            <a:endParaRPr lang="en-US" sz="780" dirty="0"/>
-          </a:p>
-        </p:txBody>
-      </p:sp>
-      <p:sp>
-        <p:nvSpPr>
-          <p:cNvPr id="24" name="Text 21"/>
-          <p:cNvSpPr/>
-          <p:nvPr/>
-        </p:nvSpPr>
-        <p:spPr>
-          <a:xfrm>
-            <a:off x="4334256" y="2871216"/>
-            <a:ext cx="2615184" cy="201168"/>
+              <a:t>• Artifact: core-cymbal-agent/runtime_pipeline.py</a:t>
+            </a:r>
+            <a:endParaRPr lang="en-US" sz="840" dirty="0"/>
+          </a:p>
+        </p:txBody>
+      </p:sp>
+      <p:sp>
+        <p:nvSpPr>
+          <p:cNvPr id="23" name="Text 21"/>
+          <p:cNvSpPr/>
+          <p:nvPr/>
+        </p:nvSpPr>
+        <p:spPr>
+          <a:xfrm>
+            <a:off x="621792" y="2852928"/>
+            <a:ext cx="6309360" cy="201168"/>
           </a:xfrm>
           <a:prstGeom prst="rect">
             <a:avLst/>
@@ -4658,7 +4634,7 @@
               <a:buNone/>
             </a:pPr>
             <a:r>
-              <a:rPr lang="en-US" sz="680" dirty="0">
+              <a:rPr lang="en-US" sz="720" dirty="0">
                 <a:solidFill>
                   <a:srgbClr val="5F6368"/>
                 </a:solidFill>
@@ -4666,15 +4642,15 @@
                 <a:ea typeface="Courier New" pitchFamily="34" charset="-122"/>
                 <a:cs typeface="Courier New" pitchFamily="34" charset="-120"/>
               </a:rPr>
-              <a:t>Source: screenshots/cloud-console/gcp_console_02_cloud_run_revisions_deploy.png</a:t>
-            </a:r>
-            <a:endParaRPr lang="en-US" sz="680" dirty="0"/>
-          </a:p>
-        </p:txBody>
-      </p:sp>
-      <p:sp>
-        <p:nvSpPr>
-          <p:cNvPr id="25" name="Shape 22"/>
+              <a:t>Source Module: core-cymbal-agent/runtime_pipeline.py</a:t>
+            </a:r>
+            <a:endParaRPr lang="en-US" sz="720" dirty="0"/>
+          </a:p>
+        </p:txBody>
+      </p:sp>
+      <p:sp>
+        <p:nvSpPr>
+          <p:cNvPr id="24" name="Shape 22"/>
           <p:cNvSpPr/>
           <p:nvPr/>
         </p:nvSpPr>
@@ -4701,7 +4677,7 @@
       </p:sp>
       <p:sp>
         <p:nvSpPr>
-          <p:cNvPr id="26" name="Shape 23"/>
+          <p:cNvPr id="25" name="Shape 23"/>
           <p:cNvSpPr/>
           <p:nvPr/>
         </p:nvSpPr>
@@ -4721,7 +4697,7 @@
       </p:sp>
       <p:sp>
         <p:nvSpPr>
-          <p:cNvPr id="27" name="Text 24"/>
+          <p:cNvPr id="26" name="Text 24"/>
           <p:cNvSpPr/>
           <p:nvPr/>
         </p:nvSpPr>
@@ -4758,40 +4734,16 @@
           </a:p>
         </p:txBody>
       </p:sp>
-      <p:pic>
-        <p:nvPicPr>
-          <p:cNvPr id="28" name="Image 1" descr="preencoded.png">    </p:cNvPr>
-          <p:cNvPicPr>
-            <a:picLocks noChangeAspect="1"/>
-          </p:cNvPicPr>
-          <p:nvPr/>
-        </p:nvPicPr>
-        <p:blipFill>
-          <a:blip r:embed="rId2"/>
-          <a:stretch>
-            <a:fillRect/>
-          </a:stretch>
-        </p:blipFill>
+      <p:sp>
+        <p:nvSpPr>
+          <p:cNvPr id="27" name="Shape 25"/>
+          <p:cNvSpPr/>
+          <p:nvPr/>
+        </p:nvSpPr>
         <p:spPr>
           <a:xfrm>
             <a:off x="493776" y="3858768"/>
-            <a:ext cx="3639312" cy="2048256"/>
-          </a:xfrm>
-          <a:prstGeom prst="rect">
-            <a:avLst/>
-          </a:prstGeom>
-        </p:spPr>
-      </p:pic>
-      <p:sp>
-        <p:nvSpPr>
-          <p:cNvPr id="29" name="Shape 25"/>
-          <p:cNvSpPr/>
-          <p:nvPr/>
-        </p:nvSpPr>
-        <p:spPr>
-          <a:xfrm>
-            <a:off x="4242816" y="3858768"/>
-            <a:ext cx="2798064" cy="2048256"/>
+            <a:ext cx="6565392" cy="2048256"/>
           </a:xfrm>
           <a:prstGeom prst="roundRect">
             <a:avLst>
@@ -4811,14 +4763,14 @@
       </p:sp>
       <p:sp>
         <p:nvSpPr>
-          <p:cNvPr id="30" name="Text 26"/>
-          <p:cNvSpPr/>
-          <p:nvPr/>
-        </p:nvSpPr>
-        <p:spPr>
-          <a:xfrm>
-            <a:off x="4334256" y="3931920"/>
-            <a:ext cx="2615184" cy="658368"/>
+          <p:cNvPr id="28" name="Text 26"/>
+          <p:cNvSpPr/>
+          <p:nvPr/>
+        </p:nvSpPr>
+        <p:spPr>
+          <a:xfrm>
+            <a:off x="621792" y="3931920"/>
+            <a:ext cx="6309360" cy="512064"/>
           </a:xfrm>
           <a:prstGeom prst="rect">
             <a:avLst/>
@@ -4834,7 +4786,7 @@
               <a:buNone/>
             </a:pPr>
             <a:r>
-              <a:rPr lang="en-US" sz="860" b="1" dirty="0">
+              <a:rPr lang="en-US" sz="920" b="1" dirty="0">
                 <a:solidFill>
                   <a:srgbClr val="3C4043"/>
                 </a:solidFill>
@@ -4842,22 +4794,22 @@
                 <a:ea typeface="Google Sans" pitchFamily="34" charset="-122"/>
                 <a:cs typeface="Google Sans" pitchFamily="34" charset="-120"/>
               </a:rPr>
-              <a:t>Cloud Logging Explorer &amp; Dual-Plane Harness verifying 20/20 GCP suites + 30/30 Inter-Cloud 10-SaaS MCP flows</a:t>
-            </a:r>
-            <a:endParaRPr lang="en-US" sz="860" dirty="0"/>
-          </a:p>
-        </p:txBody>
-      </p:sp>
-      <p:sp>
-        <p:nvSpPr>
-          <p:cNvPr id="31" name="Text 27"/>
-          <p:cNvSpPr/>
-          <p:nvPr/>
-        </p:nvSpPr>
-        <p:spPr>
-          <a:xfrm>
-            <a:off x="4334256" y="4626864"/>
-            <a:ext cx="2615184" cy="950976"/>
+              <a:t>Cloud Logging MQL &amp; Dual-Plane Harness verifying 20/20 GCP suites + 30/30 Inter-Cloud 10-SaaS MCP flows</a:t>
+            </a:r>
+            <a:endParaRPr lang="en-US" sz="920" dirty="0"/>
+          </a:p>
+        </p:txBody>
+      </p:sp>
+      <p:sp>
+        <p:nvSpPr>
+          <p:cNvPr id="29" name="Text 27"/>
+          <p:cNvSpPr/>
+          <p:nvPr/>
+        </p:nvSpPr>
+        <p:spPr>
+          <a:xfrm>
+            <a:off x="621792" y="4480560"/>
+            <a:ext cx="6309360" cy="1060704"/>
           </a:xfrm>
           <a:prstGeom prst="rect">
             <a:avLst/>
@@ -4873,7 +4825,7 @@
               <a:buNone/>
             </a:pPr>
             <a:r>
-              <a:rPr lang="en-US" sz="780" dirty="0">
+              <a:rPr lang="en-US" sz="840" dirty="0">
                 <a:solidFill>
                   <a:srgbClr val="5F6368"/>
                 </a:solidFill>
@@ -4883,14 +4835,14 @@
               </a:rPr>
               <a:t>• Query: rls_cross_tenant_rows=0 AND status=(200..429)</a:t>
             </a:r>
-            <a:endParaRPr lang="en-US" sz="780" dirty="0"/>
+            <a:endParaRPr lang="en-US" sz="840" dirty="0"/>
           </a:p>
           <a:p>
             <a:pPr indent="0" marL="0">
               <a:buNone/>
             </a:pPr>
             <a:r>
-              <a:rPr lang="en-US" sz="780" dirty="0">
+              <a:rPr lang="en-US" sz="840" dirty="0">
                 <a:solidFill>
                   <a:srgbClr val="5F6368"/>
                 </a:solidFill>
@@ -4900,14 +4852,14 @@
               </a:rPr>
               <a:t>• Dual-Plane: 20/20 GCP + 30/30 10-SaaS MCP PASS</a:t>
             </a:r>
-            <a:endParaRPr lang="en-US" sz="780" dirty="0"/>
+            <a:endParaRPr lang="en-US" sz="840" dirty="0"/>
           </a:p>
           <a:p>
             <a:pPr indent="0" marL="0">
               <a:buNone/>
             </a:pPr>
             <a:r>
-              <a:rPr lang="en-US" sz="780" dirty="0">
+              <a:rPr lang="en-US" sz="840" dirty="0">
                 <a:solidFill>
                   <a:srgbClr val="5F6368"/>
                 </a:solidFill>
@@ -4915,16 +4867,16 @@
                 <a:ea typeface="Roboto" pitchFamily="34" charset="-122"/>
                 <a:cs typeface="Roboto" pitchFamily="34" charset="-120"/>
               </a:rPr>
-              <a:t>• Twins: 13.220.94.209:3001..3010 (HTTP 200 • 60/60)</a:t>
-            </a:r>
-            <a:endParaRPr lang="en-US" sz="780" dirty="0"/>
+              <a:t>• Ledger: s3://cymbal-multi-tenant-audit-ledger-393036065405-us-east-1</a:t>
+            </a:r>
+            <a:endParaRPr lang="en-US" sz="840" dirty="0"/>
           </a:p>
           <a:p>
             <a:pPr indent="0" marL="0">
               <a:buNone/>
             </a:pPr>
             <a:r>
-              <a:rPr lang="en-US" sz="780" dirty="0">
+              <a:rPr lang="en-US" sz="840" dirty="0">
                 <a:solidFill>
                   <a:srgbClr val="5F6368"/>
                 </a:solidFill>
@@ -4932,22 +4884,22 @@
                 <a:ea typeface="Roboto" pitchFamily="34" charset="-122"/>
                 <a:cs typeface="Roboto" pitchFamily="34" charset="-120"/>
               </a:rPr>
-              <a:t>• Aspect Ratio: Native 16:9 (1920×1080)</a:t>
-            </a:r>
-            <a:endParaRPr lang="en-US" sz="780" dirty="0"/>
-          </a:p>
-        </p:txBody>
-      </p:sp>
-      <p:sp>
-        <p:nvSpPr>
-          <p:cNvPr id="32" name="Text 28"/>
-          <p:cNvSpPr/>
-          <p:nvPr/>
-        </p:nvSpPr>
-        <p:spPr>
-          <a:xfrm>
-            <a:off x="4334256" y="5632704"/>
-            <a:ext cx="2615184" cy="201168"/>
+              <a:t>• Artifact: scripts/verify_5_third_party_saas_products.py</a:t>
+            </a:r>
+            <a:endParaRPr lang="en-US" sz="840" dirty="0"/>
+          </a:p>
+        </p:txBody>
+      </p:sp>
+      <p:sp>
+        <p:nvSpPr>
+          <p:cNvPr id="30" name="Text 28"/>
+          <p:cNvSpPr/>
+          <p:nvPr/>
+        </p:nvSpPr>
+        <p:spPr>
+          <a:xfrm>
+            <a:off x="621792" y="5614416"/>
+            <a:ext cx="6309360" cy="201168"/>
           </a:xfrm>
           <a:prstGeom prst="rect">
             <a:avLst/>
@@ -4963,7 +4915,7 @@
               <a:buNone/>
             </a:pPr>
             <a:r>
-              <a:rPr lang="en-US" sz="680" dirty="0">
+              <a:rPr lang="en-US" sz="720" dirty="0">
                 <a:solidFill>
                   <a:srgbClr val="5F6368"/>
                 </a:solidFill>
@@ -4971,15 +4923,15 @@
                 <a:ea typeface="Courier New" pitchFamily="34" charset="-122"/>
                 <a:cs typeface="Courier New" pitchFamily="34" charset="-120"/>
               </a:rPr>
-              <a:t>Source: screenshots/cloud-console/gcp_console_07_logs_explorer_20_20_pass.png</a:t>
-            </a:r>
-            <a:endParaRPr lang="en-US" sz="680" dirty="0"/>
-          </a:p>
-        </p:txBody>
-      </p:sp>
-      <p:sp>
-        <p:nvSpPr>
-          <p:cNvPr id="33" name="Shape 29"/>
+              <a:t>Source Module: scripts/verify_5_third_party_saas_products.py</a:t>
+            </a:r>
+            <a:endParaRPr lang="en-US" sz="720" dirty="0"/>
+          </a:p>
+        </p:txBody>
+      </p:sp>
+      <p:sp>
+        <p:nvSpPr>
+          <p:cNvPr id="31" name="Shape 29"/>
           <p:cNvSpPr/>
           <p:nvPr/>
         </p:nvSpPr>
@@ -5006,7 +4958,7 @@
       </p:sp>
       <p:sp>
         <p:nvSpPr>
-          <p:cNvPr id="34" name="Shape 30"/>
+          <p:cNvPr id="32" name="Shape 30"/>
           <p:cNvSpPr/>
           <p:nvPr/>
         </p:nvSpPr>
@@ -5026,7 +4978,7 @@
       </p:sp>
       <p:sp>
         <p:nvSpPr>
-          <p:cNvPr id="35" name="Shape 31"/>
+          <p:cNvPr id="33" name="Shape 31"/>
           <p:cNvSpPr/>
           <p:nvPr/>
         </p:nvSpPr>
@@ -5048,7 +5000,7 @@
       </p:sp>
       <p:sp>
         <p:nvSpPr>
-          <p:cNvPr id="36" name="Text 32"/>
+          <p:cNvPr id="34" name="Text 32"/>
           <p:cNvSpPr/>
           <p:nvPr/>
         </p:nvSpPr>
@@ -5087,7 +5039,7 @@
       </p:sp>
       <p:sp>
         <p:nvSpPr>
-          <p:cNvPr id="37" name="Text 33"/>
+          <p:cNvPr id="35" name="Text 33"/>
           <p:cNvSpPr/>
           <p:nvPr/>
         </p:nvSpPr>
@@ -5126,7 +5078,7 @@
       </p:sp>
       <p:sp>
         <p:nvSpPr>
-          <p:cNvPr id="38" name="Text 34"/>
+          <p:cNvPr id="36" name="Text 34"/>
           <p:cNvSpPr/>
           <p:nvPr/>
         </p:nvSpPr>
@@ -5165,7 +5117,7 @@
       </p:sp>
       <p:sp>
         <p:nvSpPr>
-          <p:cNvPr id="39" name="Shape 35"/>
+          <p:cNvPr id="37" name="Shape 35"/>
           <p:cNvSpPr/>
           <p:nvPr/>
         </p:nvSpPr>
@@ -5192,7 +5144,7 @@
       </p:sp>
       <p:sp>
         <p:nvSpPr>
-          <p:cNvPr id="40" name="Shape 36"/>
+          <p:cNvPr id="38" name="Shape 36"/>
           <p:cNvSpPr/>
           <p:nvPr/>
         </p:nvSpPr>
@@ -5212,7 +5164,7 @@
       </p:sp>
       <p:sp>
         <p:nvSpPr>
-          <p:cNvPr id="41" name="Shape 37"/>
+          <p:cNvPr id="39" name="Shape 37"/>
           <p:cNvSpPr/>
           <p:nvPr/>
         </p:nvSpPr>
@@ -5234,7 +5186,7 @@
       </p:sp>
       <p:sp>
         <p:nvSpPr>
-          <p:cNvPr id="42" name="Text 38"/>
+          <p:cNvPr id="40" name="Text 38"/>
           <p:cNvSpPr/>
           <p:nvPr/>
         </p:nvSpPr>
@@ -5273,7 +5225,7 @@
       </p:sp>
       <p:sp>
         <p:nvSpPr>
-          <p:cNvPr id="43" name="Text 39"/>
+          <p:cNvPr id="41" name="Text 39"/>
           <p:cNvSpPr/>
           <p:nvPr/>
         </p:nvSpPr>
@@ -5312,7 +5264,7 @@
       </p:sp>
       <p:sp>
         <p:nvSpPr>
-          <p:cNvPr id="44" name="Text 40"/>
+          <p:cNvPr id="42" name="Text 40"/>
           <p:cNvSpPr/>
           <p:nvPr/>
         </p:nvSpPr>
@@ -5351,7 +5303,7 @@
       </p:sp>
       <p:sp>
         <p:nvSpPr>
-          <p:cNvPr id="45" name="Shape 41"/>
+          <p:cNvPr id="43" name="Shape 41"/>
           <p:cNvSpPr/>
           <p:nvPr/>
         </p:nvSpPr>
@@ -5378,7 +5330,7 @@
       </p:sp>
       <p:sp>
         <p:nvSpPr>
-          <p:cNvPr id="46" name="Shape 42"/>
+          <p:cNvPr id="44" name="Shape 42"/>
           <p:cNvSpPr/>
           <p:nvPr/>
         </p:nvSpPr>
@@ -5398,7 +5350,7 @@
       </p:sp>
       <p:sp>
         <p:nvSpPr>
-          <p:cNvPr id="47" name="Shape 43"/>
+          <p:cNvPr id="45" name="Shape 43"/>
           <p:cNvSpPr/>
           <p:nvPr/>
         </p:nvSpPr>
@@ -5420,7 +5372,7 @@
       </p:sp>
       <p:sp>
         <p:nvSpPr>
-          <p:cNvPr id="48" name="Text 44"/>
+          <p:cNvPr id="46" name="Text 44"/>
           <p:cNvSpPr/>
           <p:nvPr/>
         </p:nvSpPr>
@@ -5459,7 +5411,7 @@
       </p:sp>
       <p:sp>
         <p:nvSpPr>
-          <p:cNvPr id="49" name="Text 45"/>
+          <p:cNvPr id="47" name="Text 45"/>
           <p:cNvSpPr/>
           <p:nvPr/>
         </p:nvSpPr>
@@ -5498,7 +5450,7 @@
       </p:sp>
       <p:sp>
         <p:nvSpPr>
-          <p:cNvPr id="50" name="Text 46"/>
+          <p:cNvPr id="48" name="Text 46"/>
           <p:cNvSpPr/>
           <p:nvPr/>
         </p:nvSpPr>
@@ -5537,7 +5489,7 @@
       </p:sp>
       <p:sp>
         <p:nvSpPr>
-          <p:cNvPr id="51" name="Shape 47"/>
+          <p:cNvPr id="49" name="Shape 47"/>
           <p:cNvSpPr/>
           <p:nvPr/>
         </p:nvSpPr>
@@ -5564,7 +5516,7 @@
       </p:sp>
       <p:sp>
         <p:nvSpPr>
-          <p:cNvPr id="52" name="Shape 48"/>
+          <p:cNvPr id="50" name="Shape 48"/>
           <p:cNvSpPr/>
           <p:nvPr/>
         </p:nvSpPr>
@@ -5584,7 +5536,7 @@
       </p:sp>
       <p:sp>
         <p:nvSpPr>
-          <p:cNvPr id="53" name="Shape 49"/>
+          <p:cNvPr id="51" name="Shape 49"/>
           <p:cNvSpPr/>
           <p:nvPr/>
         </p:nvSpPr>
@@ -5606,7 +5558,7 @@
       </p:sp>
       <p:sp>
         <p:nvSpPr>
-          <p:cNvPr id="54" name="Text 50"/>
+          <p:cNvPr id="52" name="Text 50"/>
           <p:cNvSpPr/>
           <p:nvPr/>
         </p:nvSpPr>
@@ -5645,7 +5597,7 @@
       </p:sp>
       <p:sp>
         <p:nvSpPr>
-          <p:cNvPr id="55" name="Text 51"/>
+          <p:cNvPr id="53" name="Text 51"/>
           <p:cNvSpPr/>
           <p:nvPr/>
         </p:nvSpPr>
@@ -5684,7 +5636,7 @@
       </p:sp>
       <p:sp>
         <p:nvSpPr>
-          <p:cNvPr id="56" name="Text 52"/>
+          <p:cNvPr id="54" name="Text 52"/>
           <p:cNvSpPr/>
           <p:nvPr/>
         </p:nvSpPr>
@@ -5715,7 +5667,7 @@
                 <a:ea typeface="Roboto" pitchFamily="34" charset="-122"/>
                 <a:cs typeface="Roboto" pitchFamily="34" charset="-120"/>
               </a:rPr>
-              <a:t>Certifies 20/20 GCP runtime suites plus 30/30 Inter-Cloud AWS AgentCore MCP &amp; :3001..3010 Execution Twin flows (60/60 assertions, 12/12 forensic gates).</a:t>
+              <a:t>Certifies 20/20 GCP runtime suites plus 30/30 Inter-Cloud AWS AgentCore MCP target flows (60/60 assertions, 12/12 forensic gates).</a:t>
             </a:r>
             <a:endParaRPr lang="en-US" sz="860" dirty="0"/>
           </a:p>
@@ -5723,7 +5675,7 @@
       </p:sp>
       <p:sp>
         <p:nvSpPr>
-          <p:cNvPr id="57" name="Text 53"/>
+          <p:cNvPr id="55" name="Text 53"/>
           <p:cNvSpPr/>
           <p:nvPr/>
         </p:nvSpPr>
@@ -5768,7 +5720,7 @@
                 <a:ea typeface="Roboto" pitchFamily="34" charset="-122"/>
                 <a:cs typeface="Roboto" pitchFamily="34" charset="-120"/>
               </a:rPr>
-              <a:t>Workstream 1 • Reference Architecture &amp; Cloud Architecture Center Doc PR  •  Act III Forensic Verification Audit: Grounded Google Cloud Console Screenshots + 100% Editable Callouts  •  </a:t>
+              <a:t>Workstream 1 • Reference Architecture &amp; Cloud Architecture Center Doc PR  •  Act III Forensic Verification Audit: Grounded Google Cloud CLI &amp; Telemetry Receipts + 100% Editable Callouts  •  </a:t>
             </a:r>
             <a:pPr algn="l" indent="0" marL="0">
               <a:buNone/>
@@ -7979,7 +7931,7 @@
                 <a:ea typeface="Roboto" pitchFamily="34" charset="-122"/>
                 <a:cs typeface="Roboto" pitchFamily="34" charset="-120"/>
               </a:rPr>
-              <a:t>Enforce python3 -B scripts/run_deep_forensic_audit.py (12/12 PASS • 107/107 Assertions) across 20/20 GCP suites and 30/30 Inter-Cloud 10-SaaS MCP &amp; :3001..3010 Execution Twins.</a:t>
+              <a:t>Enforce python3 -B scripts/run_deep_forensic_audit.py (12/12 PASS • 107/107 Assertions) across 20/20 GCP suites and 30/30 Inter-Cloud 10-SaaS MCP target assertions.</a:t>
             </a:r>
             <a:endParaRPr lang="en-US" sz="980" dirty="0"/>
           </a:p>

--- a/slides/ws1-google-slides-design-plugin-editable-slides.pptx
+++ b/slides/ws1-google-slides-design-plugin-editable-slides.pptx
@@ -519,7 +519,7 @@
           <a:p>
             <a:r>
               <a:rPr lang="en-US" dirty="0"/>
-              <a:t>In this session, we are walking through our foundational reference architecture for running multi-tenant AI agents on Google Cloud. Right upfront, we define our three core building blocks—Google’s Agent Development Kit (ADK) (ADK), the Model Context Protocol (MCP) for external tool integrations, and Agent Registry and Discovery (ARD)—and show how we solve the SaaS AI Architect’s Dilemma: avoiding the margin erosion of spinning up dedicated cloud projects for every small customer while preventing tool-schema data leaks and noisy-neighbor rate starvation in a shared pool.</a:t>
+              <a:t>In this session, we are walking through our foundational reference architecture for running multi-tenant AI agents on Google Cloud. Right upfront, we define our three core building blocks using operating-system primitives—Google’s Agent Development Kit (ADK) as our OS syscall scheduler, the Model Context Protocol (MCP) as our POSIX tool driver ABI, and Agent Registry and Discovery (ARD) as our chrooted virtual filesystem catalog—and show how we solve the SaaS AI Architect’s Dilemma: avoiding the margin erosion of spinning up dedicated cloud projects for every small customer while preventing tool-schema data leaks and noisy-neighbor rate starvation in a shared pool.</a:t>
             </a:r>
             <a:endParaRPr lang="en-US" dirty="0"/>
           </a:p>
@@ -621,7 +621,7 @@
           <a:p>
             <a:r>
               <a:rPr lang="en-US" dirty="0"/>
-              <a:t>To prove this architecture is running live rather than just on slides, here are authentic captures from our deployed Cloud Run revisions, Cloud Logging Explorer, and our Dual-Plane verification harness. On the Intra-Cloud plane, our 20/20 Google Cloud runtime suites verify zero cross-tenant RLS rows across HTTP 200, 403, 423, and 429 responses; on the Inter-Cloud plane, our 30/30 AWS Bedrock AgentCore MCP and live EC2 execution twin harness across ports 3001 through 3010 passes all sixty assertions and all twelve automated forensic gates.</a:t>
+              <a:t>To prove this architecture is running live rather than just on slides, here are authentic captures from our deployed Cloud Run revisions, Cloud Logging Explorer, and our Dual-Plane verification harness. On the Intra-Cloud plane, our 20/20 Google Cloud runtime suites verify zero cross-tenant RLS rows across HTTP 200, 403, 423, and 429 responses; on the Inter-Cloud plane, our 30/30 AWS Bedrock AgentCore MCP and 10-SaaS cross-cloud target harness passes all sixty assertions and all twelve automated forensic gates.</a:t>
             </a:r>
             <a:endParaRPr lang="en-US" dirty="0"/>
           </a:p>
@@ -1233,7 +1233,7 @@
           <a:p>
             <a:r>
               <a:rPr lang="en-US" dirty="0"/>
-              <a:t>Zooming directly from those three logical security layers into the Level 2 physical topology, Figure 1 maps our fifty-six-shape Google Cloud blueprint across four physical VPC Service Controls network perimeters. Requests enter Blue Perimeter 1 (the Routing Hub) at the top, traverse Green Perimeter 2 (the Five-Hop Governance Hub) in the center, and execute inside either Yellow Perimeter 3 (the Pattern A Shared Pool Spoke) on the left or Red Perimeter 4 (the Pattern B Sovereign Silo and Pattern C PSC Spoke) on the right—with gVisor kernel sandboxing and composite tenant-user-session keys isolating every worker.</a:t>
+              <a:t>Zooming directly from those three logical security layers into the Level 2 physical topology, Figure 1 maps our fifty-six-shape Google Cloud blueprint across four physical VPC Service Controls network perimeters. Requests enter Blue Perimeter 1 (the Routing Hub for Steps 1 through 3 and Hop 1) at the top, traverse Green Perimeter 2 (the Five-Hop Governance Hub for Hops 2 and 5) in the center, and execute inside either Yellow Perimeter 3 (the Pattern A Shared Pool Spoke for Steps 4 through 7 and Hops 3 through 5) on the left or Red Perimeter 4 (the Pattern B Sovereign Silo and Pattern C PSC Spoke) on the right—with gVisor kernel sandboxing and composite tenant-user-session keys isolating every worker.</a:t>
             </a:r>
             <a:endParaRPr lang="en-US" dirty="0"/>
           </a:p>
@@ -1532,14 +1532,14 @@
           <a:p>
             <a:r>
               <a:rPr lang="en-US" dirty="0"/>
-              <a:t>Part 4 on Slide 9 provides our transparent engineering ledger of five current platform gaps, our codebase compensating controls, and our feature-flagged native adapter native GA sunset hooks.</a:t>
+              <a:t>Part 4 on Slide 9 provides our transparent engineering ledger of five current platform gaps, our codebase compensating controls, and our feature-flagged native adapter sunset hooks.</a:t>
             </a:r>
             <a:endParaRPr lang="en-US" dirty="0"/>
           </a:p>
           <a:p>
             <a:r>
               <a:rPr lang="en-US" dirty="0"/>
-              <a:t>This register maps our five compensating production controls—GAP-01 through GAP-05—to the early-access platform boundaries engineering teams face today. Every custom Python, Valkey, or SQL control in core-cymbal-agent is wrapped in a feature-flagged GA sunset hook targeted for Feature-Flagged Native Hook through Feature-Flagged Native Hook so teams can switch cleanly to native GCP primitives as they reach general availability. And in row five, our OpenTelemetry FinOps exporter streams SHA-256 prompt hashes and token counters directly into BigQuery so finance teams can run exact SQL chargeback queries across cached and thinking tokens with zero raw PII.</a:t>
+              <a:t>This register maps our five compensating production controls—GAP-01 through GAP-05—to the early-access platform boundaries engineering teams face today. Every custom Python, Valkey, or SQL control in core-cymbal-agent is wrapped in a feature-flagged native adapter hook (CYMBAL_NATIVE_ARD_GA, CYMBAL_NATIVE_KMS_PROBE_GA, CYMBAL_NATIVE_MEM_TTL_GA, CYMBAL_NATIVE_PSC_CUTOVER_GA, and CYMBAL_NATIVE_OTEL_FINOPS_GA) so teams can switch cleanly to native GCP primitives via configuration as they reach general availability. And in row five, our OpenTelemetry FinOps exporter streams SHA-256 prompt hashes and token counters directly into BigQuery so finance teams can run exact SQL chargeback queries across cached and thinking tokens with zero raw PII.</a:t>
             </a:r>
             <a:endParaRPr lang="en-US" dirty="0"/>
           </a:p>
@@ -2602,7 +2602,7 @@
                 <a:ea typeface="Google Sans" pitchFamily="34" charset="-122"/>
                 <a:cs typeface="Google Sans" pitchFamily="34" charset="-120"/>
               </a:rPr>
-              <a:t>Core Definitions (ADK • MCP • ARD)</a:t>
+              <a:t>Core Primitives (ADK • MCP • ARD)</a:t>
             </a:r>
             <a:endParaRPr lang="en-US" sz="800" dirty="0"/>
           </a:p>
@@ -2643,7 +2643,7 @@
                 <a:ea typeface="Roboto" pitchFamily="34" charset="-122"/>
                 <a:cs typeface="Roboto" pitchFamily="34" charset="-120"/>
               </a:rPr>
-              <a:t>Agent Development Kit (ADK) orchestrates reasoning &amp; callbacks; Model Context Protocol (MCP) standardizes 2LO/3LO enterprise tools; Agent Registry &amp; Discovery (ARD) enforces tenant catalog ACLs.</a:t>
+              <a:t>ADK (OS syscall scheduler), MCP (POSIX tool driver ABI) &amp; ARD (chrooted VFS catalog) isolate every tenant turn across 5 cryptographic hops.</a:t>
             </a:r>
             <a:endParaRPr lang="en-US" sz="720" dirty="0"/>
           </a:p>
@@ -3229,7 +3229,7 @@
                 <a:ea typeface="Roboto" pitchFamily="34" charset="-122"/>
                 <a:cs typeface="Roboto" pitchFamily="34" charset="-120"/>
               </a:rPr>
-              <a:t>Defines ADK, MCP &amp; ARD upfront; sets the 5-Act agenda (Slide 2), contrasts FinVault (600 RPM: Dedicated PT vs. GKE Gemma 3) &amp; RetailStream (120 RPM: 3LO vault, Slide 3), and compares Patterns A/B/C (Slide 4).</a:t>
+              <a:t>Maps ADK/MCP/ARD to CS101 OS primitives; sets the 5-Act agenda (Slide 2), contrasts FinVault (600 RPM: Dedicated PT vs. GKE Gemma 3) &amp; RetailStream (120 RPM: 3LO vault, Slide 3), and compares Patterns A/B/C (Slide 4).</a:t>
             </a:r>
             <a:endParaRPr lang="en-US" sz="780" dirty="0"/>
           </a:p>
@@ -3415,7 +3415,7 @@
                 <a:ea typeface="Roboto" pitchFamily="34" charset="-122"/>
                 <a:cs typeface="Roboto" pitchFamily="34" charset="-120"/>
               </a:rPr>
-              <a:t>Zooms macro-to-micro from the 3 Logical Security Layers (~42ms p95, Slide 5) into the 4 Physical VPC-SC Perimeters in Figure 1 (Slide 6) and &lt;0.15ms cached-JWKS KMS-signed STS JWT wire packet (Slide 8).</a:t>
+              <a:t>Zooms macro-to-micro from the 3 Logical Security Layers (~42ms p95, Slide 5) into the 4 Physical VPC-SC Perimeters &amp; Steps 1–7 in Figure 1 (Slide 6) and &lt;0.15ms cached-JWKS STS JWT wire packet (Slide 8).</a:t>
             </a:r>
             <a:endParaRPr lang="en-US" sz="780" dirty="0"/>
           </a:p>
@@ -3601,7 +3601,7 @@
                 <a:ea typeface="Roboto" pitchFamily="34" charset="-122"/>
                 <a:cs typeface="Roboto" pitchFamily="34" charset="-120"/>
               </a:rPr>
-              <a:t>Unifies the 5-Actor chronological UML sequence (Steps 1–6) with [Alt] fail-closed circuit breakers (HTTP 401–429), &lt;5s targeted Valkey SCAN+UNLINK, and SET NX PX 5000 single-flight recovery (Slide 7).</a:t>
+              <a:t>Unifies the 5-Actor chronological UML sequence (Hops 1–5 / UML Steps 1–6) with [Alt] fail-closed circuit breakers (HTTP 401–429), &lt;5s targeted Valkey SCAN+UNLINK, and SET NX PX 5000 single-flight recovery (Slide 7).</a:t>
             </a:r>
             <a:endParaRPr lang="en-US" sz="780" dirty="0"/>
           </a:p>
@@ -12758,7 +12758,7 @@
                 <a:ea typeface="Roboto" pitchFamily="34" charset="-122"/>
                 <a:cs typeface="Roboto" pitchFamily="34" charset="-120"/>
               </a:rPr>
-              <a:t>Pooled tenant (120 RPM / 4k thinking, Entra ID) invoking ServiceNow ITOM via 3LO step-up consent; per-user OAuth tokens are isolated in {tenant}:{user} DPoP-bound vaults (dpop_jktVerified) so pooled agents never act as a Confused Deputy.</a:t>
+              <a:t>Pooled tenant (120 RPM / 4k thinking, Entra ID) invoking ServiceNow ITOM via 3LO step-up consent; per-user OAuth tokens are isolated in {tenant}:{user} DPoP-bound vaults (dpop_jkt verified) so pooled agents never act as a Confused Deputy.</a:t>
             </a:r>
             <a:endParaRPr lang="en-US" sz="980" dirty="0"/>
           </a:p>
@@ -21450,7 +21450,7 @@
                 <a:ea typeface="Roboto" pitchFamily="34" charset="-122"/>
                 <a:cs typeface="Roboto" pitchFamily="34" charset="-120"/>
               </a:rPr>
-              <a:t>Blue Perimeter 1 (Routing Hub — Hop 1 Edge PEP): Global ALB, Cloud Armor header strip, and IAP OIDC/DPoP exchange (~8ms p95) mint the KMS-signed STS JWT TenantContext.</a:t>
+              <a:t>Blue Perimeter 1 (Routing Hub — Steps 1–3 / Hop 1): Global ALB, Cloud Armor header strip, and IAP OIDC/DPoP exchange (~8ms p95) mint the KMS-signed STS JWT and route by tenant tier.</a:t>
             </a:r>
             <a:endParaRPr lang="en-US" sz="690" dirty="0"/>
           </a:p>
@@ -21704,7 +21704,7 @@
                 <a:ea typeface="Roboto" pitchFamily="34" charset="-122"/>
                 <a:cs typeface="Roboto" pitchFamily="34" charset="-120"/>
               </a:rPr>
-              <a:t>Yellow Perimeter 3 (Pattern A Pool — Hops 3 &amp; 4): Cloud Run Gen2 / Agent Engine gVisor (runsc) kernel sandbox, Valkey RPM bulkheads (~3ms), 90% 32k prefix cache, streaming Model Armor/DLP (~22ms) &amp; AlloyDB RLS.</a:t>
+              <a:t>Yellow Perimeter 3 (Pattern A Pool — Steps 4–7 / Hops 3–5): gVisor (runsc) sandbox, Valkey RPM bulkheads (~3ms), Model Armor/DLP screening (Steps 4 &amp; 6, ~22ms), Gemini 2.5 Pro 90% cache (Step 5) &amp; AlloyDB RLS.</a:t>
             </a:r>
             <a:endParaRPr lang="en-US" sz="690" dirty="0"/>
           </a:p>
@@ -21995,7 +21995,7 @@
                 <a:ea typeface="Arial" pitchFamily="34" charset="-122"/>
                 <a:cs typeface="Arial" pitchFamily="34" charset="-120"/>
               </a:rPr>
-              <a:t>Shared Control Plane (cymbal-pooled-prod / cymbal-build-sandbox</a:t>
+              <a:t>Shared Control Plane (cymbal-pooled-prod)</a:t>
             </a:r>
             <a:endParaRPr lang="en-US" sz="460" dirty="0"/>
           </a:p>
@@ -22208,7 +22208,7 @@
                 <a:ea typeface="Arial" pitchFamily="34" charset="-122"/>
                 <a:cs typeface="Arial" pitchFamily="34" charset="-120"/>
               </a:rPr>
-              <a:t>Dedicated Spoke archetype — Pattern B silo project OR Pattern C PSC spoke</a:t>
+              <a:t>Dedicated Spoke: Pattern B Silo or Pattern C PSC Spoke</a:t>
             </a:r>
             <a:endParaRPr lang="en-US" sz="410" dirty="0"/>
           </a:p>

--- a/slides/ws1-google-slides-design-plugin-editable-slides.pptx
+++ b/slides/ws1-google-slides-design-plugin-editable-slides.pptx
@@ -2450,8 +2450,8 @@
         </p:nvSpPr>
         <p:spPr>
           <a:xfrm>
-            <a:off x="841248" y="4151376"/>
-            <a:ext cx="1307592" cy="365760"/>
+            <a:off x="841248" y="4142232"/>
+            <a:ext cx="1307592" cy="384048"/>
           </a:xfrm>
           <a:prstGeom prst="rect">
             <a:avLst/>
@@ -2467,7 +2467,7 @@
               <a:buNone/>
             </a:pPr>
             <a:r>
-              <a:rPr lang="en-US" sz="800" b="1" dirty="0">
+              <a:rPr lang="en-US" sz="760" b="1" dirty="0">
                 <a:solidFill>
                   <a:srgbClr val="3C4043"/>
                 </a:solidFill>
@@ -2477,7 +2477,7 @@
               </a:rPr>
               <a:t>Why It Matters (The SaaS AI Dilemma)</a:t>
             </a:r>
-            <a:endParaRPr lang="en-US" sz="800" dirty="0"/>
+            <a:endParaRPr lang="en-US" sz="760" dirty="0"/>
           </a:p>
         </p:txBody>
       </p:sp>
@@ -2489,7 +2489,7 @@
         </p:nvSpPr>
         <p:spPr>
           <a:xfrm>
-            <a:off x="841248" y="4535424"/>
+            <a:off x="841248" y="4544568"/>
             <a:ext cx="1307592" cy="1024128"/>
           </a:xfrm>
           <a:prstGeom prst="rect">
@@ -2508,7 +2508,7 @@
               <a:buNone/>
             </a:pPr>
             <a:r>
-              <a:rPr lang="en-US" sz="720" dirty="0">
+              <a:rPr lang="en-US" sz="680" dirty="0">
                 <a:solidFill>
                   <a:srgbClr val="5F6368"/>
                 </a:solidFill>
@@ -2516,9 +2516,9 @@
                 <a:ea typeface="Roboto" pitchFamily="34" charset="-122"/>
                 <a:cs typeface="Roboto" pitchFamily="34" charset="-120"/>
               </a:rPr>
-              <a:t>Dedicated projects per Standard tenant erode SaaS gross margins, whereas naive shared agents leak cross-tenant data via tool schemas and let one rogue tenant starve shared LLM rate limits.</a:t>
-            </a:r>
-            <a:endParaRPr lang="en-US" sz="720" dirty="0"/>
+              <a:t>Dedicated projects per Standard tenant erode SaaS gross margins, whereas naive shared agents leak cross-tenant data via tool schemas and let one.</a:t>
+            </a:r>
+            <a:endParaRPr lang="en-US" sz="680" dirty="0"/>
           </a:p>
         </p:txBody>
       </p:sp>
@@ -2577,8 +2577,8 @@
         </p:nvSpPr>
         <p:spPr>
           <a:xfrm>
-            <a:off x="2404872" y="4151376"/>
-            <a:ext cx="1307592" cy="365760"/>
+            <a:off x="2404872" y="4142232"/>
+            <a:ext cx="1307592" cy="384048"/>
           </a:xfrm>
           <a:prstGeom prst="rect">
             <a:avLst/>
@@ -2594,7 +2594,7 @@
               <a:buNone/>
             </a:pPr>
             <a:r>
-              <a:rPr lang="en-US" sz="800" b="1" dirty="0">
+              <a:rPr lang="en-US" sz="760" b="1" dirty="0">
                 <a:solidFill>
                   <a:srgbClr val="3C4043"/>
                 </a:solidFill>
@@ -2604,7 +2604,7 @@
               </a:rPr>
               <a:t>Core Primitives (ADK • MCP • ARD)</a:t>
             </a:r>
-            <a:endParaRPr lang="en-US" sz="800" dirty="0"/>
+            <a:endParaRPr lang="en-US" sz="760" dirty="0"/>
           </a:p>
         </p:txBody>
       </p:sp>
@@ -2616,7 +2616,7 @@
         </p:nvSpPr>
         <p:spPr>
           <a:xfrm>
-            <a:off x="2404872" y="4535424"/>
+            <a:off x="2404872" y="4544568"/>
             <a:ext cx="1307592" cy="1024128"/>
           </a:xfrm>
           <a:prstGeom prst="rect">
@@ -2635,7 +2635,7 @@
               <a:buNone/>
             </a:pPr>
             <a:r>
-              <a:rPr lang="en-US" sz="720" dirty="0">
+              <a:rPr lang="en-US" sz="680" dirty="0">
                 <a:solidFill>
                   <a:srgbClr val="5F6368"/>
                 </a:solidFill>
@@ -2645,7 +2645,7 @@
               </a:rPr>
               <a:t>ADK (OS syscall scheduler), MCP (POSIX tool driver ABI) &amp; ARD (chrooted VFS catalog) isolate every tenant turn across 5 cryptographic hops.</a:t>
             </a:r>
-            <a:endParaRPr lang="en-US" sz="720" dirty="0"/>
+            <a:endParaRPr lang="en-US" sz="680" dirty="0"/>
           </a:p>
         </p:txBody>
       </p:sp>
@@ -2704,8 +2704,8 @@
         </p:nvSpPr>
         <p:spPr>
           <a:xfrm>
-            <a:off x="3968496" y="4151376"/>
-            <a:ext cx="1307592" cy="365760"/>
+            <a:off x="3968496" y="4142232"/>
+            <a:ext cx="1307592" cy="384048"/>
           </a:xfrm>
           <a:prstGeom prst="rect">
             <a:avLst/>
@@ -2721,7 +2721,7 @@
               <a:buNone/>
             </a:pPr>
             <a:r>
-              <a:rPr lang="en-US" sz="800" b="1" dirty="0">
+              <a:rPr lang="en-US" sz="760" b="1" dirty="0">
                 <a:solidFill>
                   <a:srgbClr val="3C4043"/>
                 </a:solidFill>
@@ -2731,7 +2731,7 @@
               </a:rPr>
               <a:t>Three Topologies &amp; 80/20 Code Reuse</a:t>
             </a:r>
-            <a:endParaRPr lang="en-US" sz="800" dirty="0"/>
+            <a:endParaRPr lang="en-US" sz="760" dirty="0"/>
           </a:p>
         </p:txBody>
       </p:sp>
@@ -2743,7 +2743,7 @@
         </p:nvSpPr>
         <p:spPr>
           <a:xfrm>
-            <a:off x="3968496" y="4535424"/>
+            <a:off x="3968496" y="4544568"/>
             <a:ext cx="1307592" cy="1024128"/>
           </a:xfrm>
           <a:prstGeom prst="rect">
@@ -2762,7 +2762,7 @@
               <a:buNone/>
             </a:pPr>
             <a:r>
-              <a:rPr lang="en-US" sz="720" dirty="0">
+              <a:rPr lang="en-US" sz="680" dirty="0">
                 <a:solidFill>
                   <a:srgbClr val="5F6368"/>
                 </a:solidFill>
@@ -2770,9 +2770,9 @@
                 <a:ea typeface="Roboto" pitchFamily="34" charset="-122"/>
                 <a:cs typeface="Roboto" pitchFamily="34" charset="-120"/>
               </a:rPr>
-              <a:t>Pattern A (Pooled RLS + 90% prefix cache), Pattern B (Sovereign Silo VPC-SC + CMEK), and Pattern C (Dynamic Hybrid PSC + 0ms tier upgrade) share 80% identical Python ADK code.</a:t>
-            </a:r>
-            <a:endParaRPr lang="en-US" sz="720" dirty="0"/>
+              <a:t>Pattern A (Pooled RLS + 90% prefix cache), Pattern B (Sovereign Silo VPC-SC + CMEK), and Pattern C (Dynamic Hybrid PSC + 0ms tier upgrade) share.</a:t>
+            </a:r>
+            <a:endParaRPr lang="en-US" sz="680" dirty="0"/>
           </a:p>
         </p:txBody>
       </p:sp>
@@ -2831,8 +2831,8 @@
         </p:nvSpPr>
         <p:spPr>
           <a:xfrm>
-            <a:off x="5532120" y="4151376"/>
-            <a:ext cx="1307592" cy="365760"/>
+            <a:off x="5532120" y="4142232"/>
+            <a:ext cx="1307592" cy="384048"/>
           </a:xfrm>
           <a:prstGeom prst="rect">
             <a:avLst/>
@@ -2848,7 +2848,7 @@
               <a:buNone/>
             </a:pPr>
             <a:r>
-              <a:rPr lang="en-US" sz="800" b="1" dirty="0">
+              <a:rPr lang="en-US" sz="760" b="1" dirty="0">
                 <a:solidFill>
                   <a:srgbClr val="3C4043"/>
                 </a:solidFill>
@@ -2858,7 +2858,7 @@
               </a:rPr>
               <a:t>5-Hop Pipeline (~42ms p95 Overhead)</a:t>
             </a:r>
-            <a:endParaRPr lang="en-US" sz="800" dirty="0"/>
+            <a:endParaRPr lang="en-US" sz="760" dirty="0"/>
           </a:p>
         </p:txBody>
       </p:sp>
@@ -2870,7 +2870,7 @@
         </p:nvSpPr>
         <p:spPr>
           <a:xfrm>
-            <a:off x="5532120" y="4535424"/>
+            <a:off x="5532120" y="4544568"/>
             <a:ext cx="1307592" cy="1024128"/>
           </a:xfrm>
           <a:prstGeom prst="rect">
@@ -2889,7 +2889,7 @@
               <a:buNone/>
             </a:pPr>
             <a:r>
-              <a:rPr lang="en-US" sz="720" dirty="0">
+              <a:rPr lang="en-US" sz="680" dirty="0">
                 <a:solidFill>
                   <a:srgbClr val="5F6368"/>
                 </a:solidFill>
@@ -2897,9 +2897,9 @@
                 <a:ea typeface="Roboto" pitchFamily="34" charset="-122"/>
                 <a:cs typeface="Roboto" pitchFamily="34" charset="-120"/>
               </a:rPr>
-              <a:t>Enforces KMS-signed STS JWTs (&lt;0.15ms cached JWKS verify), ARD pruning, targeted Valkey SCAN+UNLINK L1 eviction, streaming Model Armor/DLP (~22ms), and AlloyDB FORCE RLS.</a:t>
-            </a:r>
-            <a:endParaRPr lang="en-US" sz="720" dirty="0"/>
+              <a:t>Enforces KMS-signed STS JWTs (&lt;0.15ms cached JWKS verify), ARD pruning, targeted Valkey SCAN+UNLINK L1 eviction, streaming Model Armor/DLP.</a:t>
+            </a:r>
+            <a:endParaRPr lang="en-US" sz="680" dirty="0"/>
           </a:p>
         </p:txBody>
       </p:sp>
@@ -3376,7 +3376,7 @@
                 <a:ea typeface="Google Sans" pitchFamily="34" charset="-122"/>
                 <a:cs typeface="Google Sans" pitchFamily="34" charset="-120"/>
               </a:rPr>
-              <a:t>L1 3 Layers -&gt; L2 4 Perimeters -&gt; L4 Wire</a:t>
+              <a:t>L1 3 Layers → L2 4 Perimeters → L4 Wire</a:t>
             </a:r>
             <a:endParaRPr lang="en-US" sz="850" dirty="0"/>
           </a:p>
@@ -6459,7 +6459,7 @@
                 <a:ea typeface="Roboto" pitchFamily="34" charset="-122"/>
                 <a:cs typeface="Roboto" pitchFamily="34" charset="-120"/>
               </a:rPr>
-              <a:t>Deploy core-cymbal-agent/ (24-File Reference Workbench) with &lt;0.15ms cached-JWKS STS JWT verification, ~3ms Valkey JTI deny-list, and {tenant}:{user} 3LO token vaulting.</a:t>
+              <a:t>Deploy core-cymbal-agent/ (27-File Reference Workbench) with &lt;0.15ms cached-JWKS STS JWT verification, ~3ms Valkey JTI deny-list, and {tenant}:{user} 3LO token vaulting.</a:t>
             </a:r>
             <a:endParaRPr lang="en-US" sz="900" dirty="0"/>
           </a:p>

--- a/slides/ws1-google-slides-design-plugin-editable-slides.pptx
+++ b/slides/ws1-google-slides-design-plugin-editable-slides.pptx
@@ -2475,7 +2475,7 @@
                 <a:ea typeface="Google Sans" pitchFamily="34" charset="-122"/>
                 <a:cs typeface="Google Sans" pitchFamily="34" charset="-120"/>
               </a:rPr>
-              <a:t>Why It Matters (The SaaS AI Dilemma)</a:t>
+              <a:t>Why It Matters (SaaS AI Dilemma)</a:t>
             </a:r>
             <a:endParaRPr lang="en-US" sz="760" dirty="0"/>
           </a:p>
@@ -2508,7 +2508,7 @@
               <a:buNone/>
             </a:pPr>
             <a:r>
-              <a:rPr lang="en-US" sz="680" dirty="0">
+              <a:rPr lang="en-US" sz="710" dirty="0">
                 <a:solidFill>
                   <a:srgbClr val="5F6368"/>
                 </a:solidFill>
@@ -2516,9 +2516,9 @@
                 <a:ea typeface="Roboto" pitchFamily="34" charset="-122"/>
                 <a:cs typeface="Roboto" pitchFamily="34" charset="-120"/>
               </a:rPr>
-              <a:t>Dedicated projects per Standard tenant erode SaaS gross margins, whereas naive shared agents leak cross-tenant data via tool schemas and let one.</a:t>
-            </a:r>
-            <a:endParaRPr lang="en-US" sz="680" dirty="0"/>
+              <a:t>Dedicated projects erode SaaS gross margins, while naive shared agents leak tool schemas and allow quota starvation.</a:t>
+            </a:r>
+            <a:endParaRPr lang="en-US" sz="710" dirty="0"/>
           </a:p>
         </p:txBody>
       </p:sp>
@@ -2635,7 +2635,7 @@
               <a:buNone/>
             </a:pPr>
             <a:r>
-              <a:rPr lang="en-US" sz="680" dirty="0">
+              <a:rPr lang="en-US" sz="710" dirty="0">
                 <a:solidFill>
                   <a:srgbClr val="5F6368"/>
                 </a:solidFill>
@@ -2643,9 +2643,9 @@
                 <a:ea typeface="Roboto" pitchFamily="34" charset="-122"/>
                 <a:cs typeface="Roboto" pitchFamily="34" charset="-120"/>
               </a:rPr>
-              <a:t>ADK (OS syscall scheduler), MCP (POSIX tool driver ABI) &amp; ARD (chrooted VFS catalog) isolate every tenant turn across 5 cryptographic hops.</a:t>
-            </a:r>
-            <a:endParaRPr lang="en-US" sz="680" dirty="0"/>
+              <a:t>ADK (syscall scheduler), MCP (tool driver ABI) &amp; ARD (chrooted catalog) isolate every tenant across 5 hops.</a:t>
+            </a:r>
+            <a:endParaRPr lang="en-US" sz="710" dirty="0"/>
           </a:p>
         </p:txBody>
       </p:sp>
@@ -2729,7 +2729,7 @@
                 <a:ea typeface="Google Sans" pitchFamily="34" charset="-122"/>
                 <a:cs typeface="Google Sans" pitchFamily="34" charset="-120"/>
               </a:rPr>
-              <a:t>Three Topologies &amp; 80/20 Code Reuse</a:t>
+              <a:t>Three Topologies &amp; 80/20 Reuse</a:t>
             </a:r>
             <a:endParaRPr lang="en-US" sz="760" dirty="0"/>
           </a:p>
@@ -2762,7 +2762,7 @@
               <a:buNone/>
             </a:pPr>
             <a:r>
-              <a:rPr lang="en-US" sz="680" dirty="0">
+              <a:rPr lang="en-US" sz="710" dirty="0">
                 <a:solidFill>
                   <a:srgbClr val="5F6368"/>
                 </a:solidFill>
@@ -2770,9 +2770,9 @@
                 <a:ea typeface="Roboto" pitchFamily="34" charset="-122"/>
                 <a:cs typeface="Roboto" pitchFamily="34" charset="-120"/>
               </a:rPr>
-              <a:t>Pattern A (Pooled RLS + 90% prefix cache), Pattern B (Sovereign Silo VPC-SC + CMEK), and Pattern C (Dynamic Hybrid PSC + 0ms tier upgrade) share.</a:t>
-            </a:r>
-            <a:endParaRPr lang="en-US" sz="680" dirty="0"/>
+              <a:t>Pattern A (Pooled RLS), Pattern B (Sovereign Silos), and Pattern C (Hybrid PSC) share 80% identical Python ADK code.</a:t>
+            </a:r>
+            <a:endParaRPr lang="en-US" sz="710" dirty="0"/>
           </a:p>
         </p:txBody>
       </p:sp>
@@ -2856,7 +2856,7 @@
                 <a:ea typeface="Google Sans" pitchFamily="34" charset="-122"/>
                 <a:cs typeface="Google Sans" pitchFamily="34" charset="-120"/>
               </a:rPr>
-              <a:t>5-Hop Pipeline (~42ms p95 Overhead)</a:t>
+              <a:t>5-Hop Pipeline (~42ms p95 Gate)</a:t>
             </a:r>
             <a:endParaRPr lang="en-US" sz="760" dirty="0"/>
           </a:p>
@@ -2889,7 +2889,7 @@
               <a:buNone/>
             </a:pPr>
             <a:r>
-              <a:rPr lang="en-US" sz="680" dirty="0">
+              <a:rPr lang="en-US" sz="710" dirty="0">
                 <a:solidFill>
                   <a:srgbClr val="5F6368"/>
                 </a:solidFill>
@@ -2897,9 +2897,9 @@
                 <a:ea typeface="Roboto" pitchFamily="34" charset="-122"/>
                 <a:cs typeface="Roboto" pitchFamily="34" charset="-120"/>
               </a:rPr>
-              <a:t>Enforces KMS-signed STS JWTs (&lt;0.15ms cached JWKS verify), ARD pruning, targeted Valkey SCAN+UNLINK L1 eviction, streaming Model Armor/DLP.</a:t>
-            </a:r>
-            <a:endParaRPr lang="en-US" sz="680" dirty="0"/>
+              <a:t>Enforces KMS-signed OBO/DPoP tokens, ARD pruning, Valkey bulkheads, Model Armor DLP, and AlloyDB FORCE RLS.</a:t>
+            </a:r>
+            <a:endParaRPr lang="en-US" sz="710" dirty="0"/>
           </a:p>
         </p:txBody>
       </p:sp>
@@ -3853,7 +3853,7 @@
                 <a:ea typeface="Google Sans" pitchFamily="34" charset="-122"/>
                 <a:cs typeface="Google Sans" pitchFamily="34" charset="-120"/>
               </a:rPr>
-              <a:t>Verified Across 3 GCP Projects (#248990048888 • #638420508320 • #887605034827) • 12/12 Forensic PASS</a:t>
+              <a:t>Verified Across 3 GCP Projects (#248990048888 • #638420508320 • #887605034827) • 13/13 Forensic PASS</a:t>
             </a:r>
             <a:endParaRPr lang="en-US" sz="720" dirty="0"/>
           </a:p>
@@ -4586,7 +4586,7 @@
                 <a:ea typeface="Roboto" pitchFamily="34" charset="-122"/>
                 <a:cs typeface="Roboto" pitchFamily="34" charset="-120"/>
               </a:rPr>
-              <a:t>• CLI Gate: run_deep_forensic_audit.py (12/12 PASS)</a:t>
+              <a:t>• CLI Gate: run_deep_forensic_audit.py (13/13 PASS)</a:t>
             </a:r>
             <a:endParaRPr lang="en-US" sz="840" dirty="0"/>
           </a:p>
@@ -5667,7 +5667,7 @@
                 <a:ea typeface="Roboto" pitchFamily="34" charset="-122"/>
                 <a:cs typeface="Roboto" pitchFamily="34" charset="-120"/>
               </a:rPr>
-              <a:t>Certifies 20/20 GCP runtime suites plus 30/30 Inter-Cloud AWS AgentCore MCP target flows (60/60 assertions, 12/12 forensic gates).</a:t>
+              <a:t>Certifies 20/20 GCP runtime suites plus 30/30 Inter-Cloud AWS AgentCore MCP target flows (60/60 assertions, 13/13 forensic gates).</a:t>
             </a:r>
             <a:endParaRPr lang="en-US" sz="860" dirty="0"/>
           </a:p>
@@ -7931,7 +7931,7 @@
                 <a:ea typeface="Roboto" pitchFamily="34" charset="-122"/>
                 <a:cs typeface="Roboto" pitchFamily="34" charset="-120"/>
               </a:rPr>
-              <a:t>Enforce python3 -B scripts/run_deep_forensic_audit.py (12/12 PASS • 107/107 Assertions) across 20/20 GCP suites and 30/30 Inter-Cloud 10-SaaS MCP target assertions.</a:t>
+              <a:t>Enforce python3 -B scripts/run_deep_forensic_audit.py (13/13 PASS • 107/107 Assertions) across 20/20 GCP suites and 30/30 Inter-Cloud 10-SaaS MCP target assertions.</a:t>
             </a:r>
             <a:endParaRPr lang="en-US" sz="980" dirty="0"/>
           </a:p>
@@ -8032,7 +8032,7 @@
                 <a:ea typeface="Roboto" pitchFamily="34" charset="-122"/>
                 <a:cs typeface="Roboto" pitchFamily="34" charset="-120"/>
               </a:rPr>
-              <a:t>Target &amp; SLA: SLA: 12/12 Forensic (107/107) • 20/20 GCP + 30/30 10-SaaS MCP</a:t>
+              <a:t>Target &amp; SLA: SLA: 13/13 Forensic (107/107) • 20/20 GCP + 30/30 10-SaaS MCP</a:t>
             </a:r>
             <a:endParaRPr lang="en-US" sz="750" dirty="0"/>
           </a:p>
@@ -10537,7 +10537,7 @@
                           <a:ea typeface="Roboto" pitchFamily="34" charset="-122"/>
                           <a:cs typeface="Roboto" pitchFamily="34" charset="-120"/>
                         </a:rPr>
-                        <a:t>12/12 Forensic + 107/107 Runtime Assertions PASS • 84.7% Token &amp; 74% TCO Savings • &lt;30s HA RTO</a:t>
+                        <a:t>13/13 Forensic + 107/107 Runtime Assertions PASS • 84.7% Token &amp; 74% TCO Savings • &lt;30s HA RTO</a:t>
                       </a:r>
                       <a:endParaRPr lang="en-US" sz="870" dirty="0">
                         <a:latin typeface="Roboto" charset="0"/>
@@ -20555,11 +20555,11 @@
         <p:spPr>
           <a:xfrm>
             <a:off x="7443216" y="1700784"/>
-            <a:ext cx="4382719" cy="512064"/>
+            <a:ext cx="4382719" cy="594360"/>
           </a:xfrm>
           <a:prstGeom prst="roundRect">
             <a:avLst>
-              <a:gd name="adj" fmla="val 10714"/>
+              <a:gd name="adj" fmla="val 9231"/>
             </a:avLst>
           </a:prstGeom>
           <a:solidFill>
@@ -20582,7 +20582,7 @@
         <p:spPr>
           <a:xfrm>
             <a:off x="7443216" y="1700784"/>
-            <a:ext cx="64008" cy="512064"/>
+            <a:ext cx="64008" cy="594360"/>
           </a:xfrm>
           <a:prstGeom prst="rect">
             <a:avLst/>
@@ -20679,7 +20679,7 @@
               <a:buNone/>
             </a:pPr>
             <a:r>
-              <a:rPr lang="en-US" sz="740" b="1" dirty="0">
+              <a:rPr lang="en-US" sz="730" b="1" dirty="0">
                 <a:solidFill>
                   <a:srgbClr val="3C4043"/>
                 </a:solidFill>
@@ -20689,7 +20689,7 @@
               </a:rPr>
               <a:t>1. Routing Hub (Ingress &amp; Identity PEP)</a:t>
             </a:r>
-            <a:endParaRPr lang="en-US" sz="740" dirty="0"/>
+            <a:endParaRPr lang="en-US" sz="730" dirty="0"/>
           </a:p>
         </p:txBody>
       </p:sp>
@@ -20701,8 +20701,8 @@
         </p:nvSpPr>
         <p:spPr>
           <a:xfrm>
-            <a:off x="7552944" y="1920240"/>
-            <a:ext cx="4218127" cy="265176"/>
+            <a:off x="7552944" y="1901952"/>
+            <a:ext cx="4236415" cy="374904"/>
           </a:xfrm>
           <a:prstGeom prst="rect">
             <a:avLst/>
@@ -20718,7 +20718,7 @@
               <a:buNone/>
             </a:pPr>
             <a:r>
-              <a:rPr lang="en-US" sz="670" dirty="0">
+              <a:rPr lang="en-US" sz="660" dirty="0">
                 <a:solidFill>
                   <a:srgbClr val="5F6368"/>
                 </a:solidFill>
@@ -20728,7 +20728,7 @@
               </a:rPr>
               <a:t>Terminates TLS at External ALB, enforces Cloud Armor WAF &amp; Model Armor screening, authenticates via IAP, and resolves tenant tier.</a:t>
             </a:r>
-            <a:endParaRPr lang="en-US" sz="670" dirty="0"/>
+            <a:endParaRPr lang="en-US" sz="660" dirty="0"/>
           </a:p>
         </p:txBody>
       </p:sp>
@@ -20740,12 +20740,12 @@
         </p:nvSpPr>
         <p:spPr>
           <a:xfrm>
-            <a:off x="7443216" y="2267712"/>
-            <a:ext cx="4382719" cy="512064"/>
+            <a:off x="7443216" y="2340864"/>
+            <a:ext cx="4382719" cy="594360"/>
           </a:xfrm>
           <a:prstGeom prst="roundRect">
             <a:avLst>
-              <a:gd name="adj" fmla="val 10714"/>
+              <a:gd name="adj" fmla="val 9231"/>
             </a:avLst>
           </a:prstGeom>
           <a:solidFill>
@@ -20767,8 +20767,8 @@
         </p:nvSpPr>
         <p:spPr>
           <a:xfrm>
-            <a:off x="7443216" y="2267712"/>
-            <a:ext cx="64008" cy="512064"/>
+            <a:off x="7443216" y="2340864"/>
+            <a:ext cx="64008" cy="594360"/>
           </a:xfrm>
           <a:prstGeom prst="rect">
             <a:avLst/>
@@ -20787,7 +20787,7 @@
         </p:nvSpPr>
         <p:spPr>
           <a:xfrm>
-            <a:off x="7552944" y="2313432"/>
+            <a:off x="7552944" y="2386584"/>
             <a:ext cx="804672" cy="155448"/>
           </a:xfrm>
           <a:prstGeom prst="roundRect">
@@ -20809,7 +20809,7 @@
         </p:nvSpPr>
         <p:spPr>
           <a:xfrm>
-            <a:off x="7552944" y="2313432"/>
+            <a:off x="7552944" y="2386584"/>
             <a:ext cx="804672" cy="155448"/>
           </a:xfrm>
           <a:prstGeom prst="rect">
@@ -20848,7 +20848,7 @@
         </p:nvSpPr>
         <p:spPr>
           <a:xfrm>
-            <a:off x="8412480" y="2295144"/>
+            <a:off x="8412480" y="2368296"/>
             <a:ext cx="3358591" cy="182880"/>
           </a:xfrm>
           <a:prstGeom prst="rect">
@@ -20865,7 +20865,7 @@
               <a:buNone/>
             </a:pPr>
             <a:r>
-              <a:rPr lang="en-US" sz="740" b="1" dirty="0">
+              <a:rPr lang="en-US" sz="730" b="1" dirty="0">
                 <a:solidFill>
                   <a:srgbClr val="3C4043"/>
                 </a:solidFill>
@@ -20875,7 +20875,7 @@
               </a:rPr>
               <a:t>2. Central Governance &amp; Security Hub</a:t>
             </a:r>
-            <a:endParaRPr lang="en-US" sz="740" dirty="0"/>
+            <a:endParaRPr lang="en-US" sz="730" dirty="0"/>
           </a:p>
         </p:txBody>
       </p:sp>
@@ -20887,8 +20887,8 @@
         </p:nvSpPr>
         <p:spPr>
           <a:xfrm>
-            <a:off x="7552944" y="2487168"/>
-            <a:ext cx="4218127" cy="265176"/>
+            <a:off x="7552944" y="2542032"/>
+            <a:ext cx="4236415" cy="374904"/>
           </a:xfrm>
           <a:prstGeom prst="rect">
             <a:avLst/>
@@ -20904,7 +20904,7 @@
               <a:buNone/>
             </a:pPr>
             <a:r>
-              <a:rPr lang="en-US" sz="670" dirty="0">
+              <a:rPr lang="en-US" sz="660" dirty="0">
                 <a:solidFill>
                   <a:srgbClr val="5F6368"/>
                 </a:solidFill>
@@ -20914,7 +20914,7 @@
               </a:rPr>
               <a:t>Centralizes Security Command Center posture monitoring, IAM Principal Access Boundaries, Cloud KMS keys, and BigQuery OTel FinOps.</a:t>
             </a:r>
-            <a:endParaRPr lang="en-US" sz="670" dirty="0"/>
+            <a:endParaRPr lang="en-US" sz="660" dirty="0"/>
           </a:p>
         </p:txBody>
       </p:sp>
@@ -20926,12 +20926,12 @@
         </p:nvSpPr>
         <p:spPr>
           <a:xfrm>
-            <a:off x="7443216" y="2834640"/>
-            <a:ext cx="4382719" cy="512064"/>
+            <a:off x="7443216" y="2980944"/>
+            <a:ext cx="4382719" cy="594360"/>
           </a:xfrm>
           <a:prstGeom prst="roundRect">
             <a:avLst>
-              <a:gd name="adj" fmla="val 10714"/>
+              <a:gd name="adj" fmla="val 9231"/>
             </a:avLst>
           </a:prstGeom>
           <a:solidFill>
@@ -20953,8 +20953,8 @@
         </p:nvSpPr>
         <p:spPr>
           <a:xfrm>
-            <a:off x="7443216" y="2834640"/>
-            <a:ext cx="64008" cy="512064"/>
+            <a:off x="7443216" y="2980944"/>
+            <a:ext cx="64008" cy="594360"/>
           </a:xfrm>
           <a:prstGeom prst="rect">
             <a:avLst/>
@@ -20973,7 +20973,7 @@
         </p:nvSpPr>
         <p:spPr>
           <a:xfrm>
-            <a:off x="7552944" y="2880360"/>
+            <a:off x="7552944" y="3026664"/>
             <a:ext cx="804672" cy="155448"/>
           </a:xfrm>
           <a:prstGeom prst="roundRect">
@@ -20995,7 +20995,7 @@
         </p:nvSpPr>
         <p:spPr>
           <a:xfrm>
-            <a:off x="7552944" y="2880360"/>
+            <a:off x="7552944" y="3026664"/>
             <a:ext cx="804672" cy="155448"/>
           </a:xfrm>
           <a:prstGeom prst="rect">
@@ -21034,7 +21034,7 @@
         </p:nvSpPr>
         <p:spPr>
           <a:xfrm>
-            <a:off x="8412480" y="2862072"/>
+            <a:off x="8412480" y="3008376"/>
             <a:ext cx="3358591" cy="182880"/>
           </a:xfrm>
           <a:prstGeom prst="rect">
@@ -21051,7 +21051,7 @@
               <a:buNone/>
             </a:pPr>
             <a:r>
-              <a:rPr lang="en-US" sz="740" b="1" dirty="0">
+              <a:rPr lang="en-US" sz="730" b="1" dirty="0">
                 <a:solidFill>
                   <a:srgbClr val="3C4043"/>
                 </a:solidFill>
@@ -21061,7 +21061,7 @@
               </a:rPr>
               <a:t>3. Pattern A: Pooled Shared Runtime Spoke</a:t>
             </a:r>
-            <a:endParaRPr lang="en-US" sz="740" dirty="0"/>
+            <a:endParaRPr lang="en-US" sz="730" dirty="0"/>
           </a:p>
         </p:txBody>
       </p:sp>
@@ -21073,8 +21073,8 @@
         </p:nvSpPr>
         <p:spPr>
           <a:xfrm>
-            <a:off x="7552944" y="3054096"/>
-            <a:ext cx="4218127" cy="265176"/>
+            <a:off x="7552944" y="3182112"/>
+            <a:ext cx="4236415" cy="374904"/>
           </a:xfrm>
           <a:prstGeom prst="rect">
             <a:avLst/>
@@ -21090,7 +21090,7 @@
               <a:buNone/>
             </a:pPr>
             <a:r>
-              <a:rPr lang="en-US" sz="670" dirty="0">
+              <a:rPr lang="en-US" sz="660" dirty="0">
                 <a:solidFill>
                   <a:srgbClr val="5F6368"/>
                 </a:solidFill>
@@ -21100,7 +21100,7 @@
               </a:rPr>
               <a:t>Executes high-density multi-tenant workloads on shared Cloud Run / Agent Engine with 90% shared prompt caching and AlloyDB RLS.</a:t>
             </a:r>
-            <a:endParaRPr lang="en-US" sz="670" dirty="0"/>
+            <a:endParaRPr lang="en-US" sz="660" dirty="0"/>
           </a:p>
         </p:txBody>
       </p:sp>
@@ -21112,12 +21112,12 @@
         </p:nvSpPr>
         <p:spPr>
           <a:xfrm>
-            <a:off x="7443216" y="3401568"/>
-            <a:ext cx="4382719" cy="512064"/>
+            <a:off x="7443216" y="3621024"/>
+            <a:ext cx="4382719" cy="594360"/>
           </a:xfrm>
           <a:prstGeom prst="roundRect">
             <a:avLst>
-              <a:gd name="adj" fmla="val 10714"/>
+              <a:gd name="adj" fmla="val 9231"/>
             </a:avLst>
           </a:prstGeom>
           <a:solidFill>
@@ -21139,8 +21139,8 @@
         </p:nvSpPr>
         <p:spPr>
           <a:xfrm>
-            <a:off x="7443216" y="3401568"/>
-            <a:ext cx="64008" cy="512064"/>
+            <a:off x="7443216" y="3621024"/>
+            <a:ext cx="64008" cy="594360"/>
           </a:xfrm>
           <a:prstGeom prst="rect">
             <a:avLst/>
@@ -21159,7 +21159,7 @@
         </p:nvSpPr>
         <p:spPr>
           <a:xfrm>
-            <a:off x="7552944" y="3447288"/>
+            <a:off x="7552944" y="3666744"/>
             <a:ext cx="804672" cy="155448"/>
           </a:xfrm>
           <a:prstGeom prst="roundRect">
@@ -21181,7 +21181,7 @@
         </p:nvSpPr>
         <p:spPr>
           <a:xfrm>
-            <a:off x="7552944" y="3447288"/>
+            <a:off x="7552944" y="3666744"/>
             <a:ext cx="804672" cy="155448"/>
           </a:xfrm>
           <a:prstGeom prst="rect">
@@ -21220,7 +21220,7 @@
         </p:nvSpPr>
         <p:spPr>
           <a:xfrm>
-            <a:off x="8412480" y="3429000"/>
+            <a:off x="8412480" y="3648456"/>
             <a:ext cx="3358591" cy="182880"/>
           </a:xfrm>
           <a:prstGeom prst="rect">
@@ -21237,7 +21237,7 @@
               <a:buNone/>
             </a:pPr>
             <a:r>
-              <a:rPr lang="en-US" sz="740" b="1" dirty="0">
+              <a:rPr lang="en-US" sz="730" b="1" dirty="0">
                 <a:solidFill>
                   <a:srgbClr val="3C4043"/>
                 </a:solidFill>
@@ -21247,7 +21247,7 @@
               </a:rPr>
               <a:t>4. Pattern B Silos &amp; Pattern C PSC Spokes</a:t>
             </a:r>
-            <a:endParaRPr lang="en-US" sz="740" dirty="0"/>
+            <a:endParaRPr lang="en-US" sz="730" dirty="0"/>
           </a:p>
         </p:txBody>
       </p:sp>
@@ -21259,8 +21259,8 @@
         </p:nvSpPr>
         <p:spPr>
           <a:xfrm>
-            <a:off x="7552944" y="3621024"/>
-            <a:ext cx="4218127" cy="265176"/>
+            <a:off x="7552944" y="3822192"/>
+            <a:ext cx="4236415" cy="374904"/>
           </a:xfrm>
           <a:prstGeom prst="rect">
             <a:avLst/>
@@ -21276,7 +21276,7 @@
               <a:buNone/>
             </a:pPr>
             <a:r>
-              <a:rPr lang="en-US" sz="670" dirty="0">
+              <a:rPr lang="en-US" sz="625" dirty="0">
                 <a:solidFill>
                   <a:srgbClr val="5F6368"/>
                 </a:solidFill>
@@ -21286,7 +21286,7 @@
               </a:rPr>
               <a:t>Isolates regulated tenants inside dedicated VPC-SC projects with Cloud KMS CMEK kill-switches or unidirectional PSC service attachments.</a:t>
             </a:r>
-            <a:endParaRPr lang="en-US" sz="670" dirty="0"/>
+            <a:endParaRPr lang="en-US" sz="625" dirty="0"/>
           </a:p>
         </p:txBody>
       </p:sp>
@@ -21298,8 +21298,8 @@
         </p:nvSpPr>
         <p:spPr>
           <a:xfrm>
-            <a:off x="7461504" y="4005072"/>
-            <a:ext cx="4346143" cy="164592"/>
+            <a:off x="7461504" y="4288536"/>
+            <a:ext cx="4346143" cy="155448"/>
           </a:xfrm>
           <a:prstGeom prst="rect">
             <a:avLst/>
@@ -21315,7 +21315,7 @@
               <a:buNone/>
             </a:pPr>
             <a:r>
-              <a:rPr lang="en-US" sz="720" b="1" dirty="0">
+              <a:rPr lang="en-US" sz="710" b="1" dirty="0">
                 <a:solidFill>
                   <a:srgbClr val="5F6368"/>
                 </a:solidFill>
@@ -21325,7 +21325,7 @@
               </a:rPr>
               <a:t>KEY ARCHITECTURAL WALKTHROUGH POINTS</a:t>
             </a:r>
-            <a:endParaRPr lang="en-US" sz="720" dirty="0"/>
+            <a:endParaRPr lang="en-US" sz="710" dirty="0"/>
           </a:p>
         </p:txBody>
       </p:sp>
@@ -21337,12 +21337,12 @@
         </p:nvSpPr>
         <p:spPr>
           <a:xfrm>
-            <a:off x="7443216" y="4187952"/>
-            <a:ext cx="4382719" cy="428854"/>
+            <a:off x="7443216" y="4453128"/>
+            <a:ext cx="4382719" cy="378562"/>
           </a:xfrm>
           <a:prstGeom prst="roundRect">
             <a:avLst>
-              <a:gd name="adj" fmla="val 12793"/>
+              <a:gd name="adj" fmla="val 14493"/>
             </a:avLst>
           </a:prstGeom>
           <a:solidFill>
@@ -21364,7 +21364,7 @@
         </p:nvSpPr>
         <p:spPr>
           <a:xfrm>
-            <a:off x="7516368" y="4301338"/>
+            <a:off x="7516368" y="4541825"/>
             <a:ext cx="219456" cy="201168"/>
           </a:xfrm>
           <a:prstGeom prst="roundRect">
@@ -21386,7 +21386,7 @@
         </p:nvSpPr>
         <p:spPr>
           <a:xfrm>
-            <a:off x="7516368" y="4301338"/>
+            <a:off x="7516368" y="4541825"/>
             <a:ext cx="219456" cy="201168"/>
           </a:xfrm>
           <a:prstGeom prst="rect">
@@ -21425,8 +21425,8 @@
         </p:nvSpPr>
         <p:spPr>
           <a:xfrm>
-            <a:off x="7790688" y="4215384"/>
-            <a:ext cx="3980383" cy="373990"/>
+            <a:off x="7790688" y="4471416"/>
+            <a:ext cx="3980383" cy="341986"/>
           </a:xfrm>
           <a:prstGeom prst="rect">
             <a:avLst/>
@@ -21442,7 +21442,7 @@
               <a:buNone/>
             </a:pPr>
             <a:r>
-              <a:rPr lang="en-US" sz="690" dirty="0">
+              <a:rPr lang="en-US" sz="675" dirty="0">
                 <a:solidFill>
                   <a:srgbClr val="5F6368"/>
                 </a:solidFill>
@@ -21452,7 +21452,7 @@
               </a:rPr>
               <a:t>Blue Perimeter 1 (Routing Hub — Steps 1–3 / Hop 1): Global ALB, Cloud Armor header strip, and IAP OIDC/DPoP exchange (~8ms p95) mint the KMS-signed STS JWT and route by tenant tier.</a:t>
             </a:r>
-            <a:endParaRPr lang="en-US" sz="690" dirty="0"/>
+            <a:endParaRPr lang="en-US" sz="675" dirty="0"/>
           </a:p>
         </p:txBody>
       </p:sp>
@@ -21464,12 +21464,12 @@
         </p:nvSpPr>
         <p:spPr>
           <a:xfrm>
-            <a:off x="7443216" y="4667098"/>
-            <a:ext cx="4382719" cy="428854"/>
+            <a:off x="7443216" y="4872838"/>
+            <a:ext cx="4382719" cy="378562"/>
           </a:xfrm>
           <a:prstGeom prst="roundRect">
             <a:avLst>
-              <a:gd name="adj" fmla="val 12793"/>
+              <a:gd name="adj" fmla="val 14493"/>
             </a:avLst>
           </a:prstGeom>
           <a:solidFill>
@@ -21491,7 +21491,7 @@
         </p:nvSpPr>
         <p:spPr>
           <a:xfrm>
-            <a:off x="7516368" y="4780483"/>
+            <a:off x="7516368" y="4961534"/>
             <a:ext cx="219456" cy="201168"/>
           </a:xfrm>
           <a:prstGeom prst="roundRect">
@@ -21513,7 +21513,7 @@
         </p:nvSpPr>
         <p:spPr>
           <a:xfrm>
-            <a:off x="7516368" y="4780483"/>
+            <a:off x="7516368" y="4961534"/>
             <a:ext cx="219456" cy="201168"/>
           </a:xfrm>
           <a:prstGeom prst="rect">
@@ -21552,8 +21552,8 @@
         </p:nvSpPr>
         <p:spPr>
           <a:xfrm>
-            <a:off x="7790688" y="4694530"/>
-            <a:ext cx="3980383" cy="373990"/>
+            <a:off x="7790688" y="4891126"/>
+            <a:ext cx="3980383" cy="341986"/>
           </a:xfrm>
           <a:prstGeom prst="rect">
             <a:avLst/>
@@ -21569,7 +21569,7 @@
               <a:buNone/>
             </a:pPr>
             <a:r>
-              <a:rPr lang="en-US" sz="690" dirty="0">
+              <a:rPr lang="en-US" sz="675" dirty="0">
                 <a:solidFill>
                   <a:srgbClr val="5F6368"/>
                 </a:solidFill>
@@ -21579,7 +21579,7 @@
               </a:rPr>
               <a:t>Green Perimeter 2 (Governance Hub — Hops 2 &amp; 5): Discovery Engine ARD catalog filter (~4ms), Cloud KMS CMEK liveness, Security Command Center, and async BigQuery OTel FinOps (~5ms).</a:t>
             </a:r>
-            <a:endParaRPr lang="en-US" sz="690" dirty="0"/>
+            <a:endParaRPr lang="en-US" sz="675" dirty="0"/>
           </a:p>
         </p:txBody>
       </p:sp>
@@ -21591,12 +21591,12 @@
         </p:nvSpPr>
         <p:spPr>
           <a:xfrm>
-            <a:off x="7443216" y="5145329"/>
-            <a:ext cx="4382719" cy="428854"/>
+            <a:off x="7443216" y="5291633"/>
+            <a:ext cx="4382719" cy="378562"/>
           </a:xfrm>
           <a:prstGeom prst="roundRect">
             <a:avLst>
-              <a:gd name="adj" fmla="val 12793"/>
+              <a:gd name="adj" fmla="val 14493"/>
             </a:avLst>
           </a:prstGeom>
           <a:solidFill>
@@ -21618,7 +21618,7 @@
         </p:nvSpPr>
         <p:spPr>
           <a:xfrm>
-            <a:off x="7516368" y="5258714"/>
+            <a:off x="7516368" y="5380330"/>
             <a:ext cx="219456" cy="201168"/>
           </a:xfrm>
           <a:prstGeom prst="roundRect">
@@ -21640,7 +21640,7 @@
         </p:nvSpPr>
         <p:spPr>
           <a:xfrm>
-            <a:off x="7516368" y="5258714"/>
+            <a:off x="7516368" y="5380330"/>
             <a:ext cx="219456" cy="201168"/>
           </a:xfrm>
           <a:prstGeom prst="rect">
@@ -21679,8 +21679,8 @@
         </p:nvSpPr>
         <p:spPr>
           <a:xfrm>
-            <a:off x="7790688" y="5172761"/>
-            <a:ext cx="3980383" cy="373990"/>
+            <a:off x="7790688" y="5309921"/>
+            <a:ext cx="3980383" cy="341986"/>
           </a:xfrm>
           <a:prstGeom prst="rect">
             <a:avLst/>
@@ -21696,7 +21696,7 @@
               <a:buNone/>
             </a:pPr>
             <a:r>
-              <a:rPr lang="en-US" sz="690" dirty="0">
+              <a:rPr lang="en-US" sz="675" dirty="0">
                 <a:solidFill>
                   <a:srgbClr val="5F6368"/>
                 </a:solidFill>
@@ -21706,7 +21706,7 @@
               </a:rPr>
               <a:t>Yellow Perimeter 3 (Pattern A Pool — Steps 4–7 / Hops 3–5): gVisor (runsc) sandbox, Valkey RPM bulkheads (~3ms), Model Armor/DLP screening (Steps 4 &amp; 6, ~22ms), Gemini 2.5 Pro 90% cache (Step 5) &amp; AlloyDB RLS.</a:t>
             </a:r>
-            <a:endParaRPr lang="en-US" sz="690" dirty="0"/>
+            <a:endParaRPr lang="en-US" sz="675" dirty="0"/>
           </a:p>
         </p:txBody>
       </p:sp>
@@ -21718,12 +21718,12 @@
         </p:nvSpPr>
         <p:spPr>
           <a:xfrm>
-            <a:off x="7443216" y="5624474"/>
-            <a:ext cx="4382719" cy="428854"/>
+            <a:off x="7443216" y="5711342"/>
+            <a:ext cx="4382719" cy="378562"/>
           </a:xfrm>
           <a:prstGeom prst="roundRect">
             <a:avLst>
-              <a:gd name="adj" fmla="val 12793"/>
+              <a:gd name="adj" fmla="val 14493"/>
             </a:avLst>
           </a:prstGeom>
           <a:solidFill>
@@ -21745,7 +21745,7 @@
         </p:nvSpPr>
         <p:spPr>
           <a:xfrm>
-            <a:off x="7516368" y="5737860"/>
+            <a:off x="7516368" y="5800039"/>
             <a:ext cx="219456" cy="201168"/>
           </a:xfrm>
           <a:prstGeom prst="roundRect">
@@ -21767,7 +21767,7 @@
         </p:nvSpPr>
         <p:spPr>
           <a:xfrm>
-            <a:off x="7516368" y="5737860"/>
+            <a:off x="7516368" y="5800039"/>
             <a:ext cx="219456" cy="201168"/>
           </a:xfrm>
           <a:prstGeom prst="rect">
@@ -21806,8 +21806,8 @@
         </p:nvSpPr>
         <p:spPr>
           <a:xfrm>
-            <a:off x="7790688" y="5651906"/>
-            <a:ext cx="3980383" cy="373990"/>
+            <a:off x="7790688" y="5729630"/>
+            <a:ext cx="3980383" cy="341986"/>
           </a:xfrm>
           <a:prstGeom prst="rect">
             <a:avLst/>
@@ -21823,7 +21823,7 @@
               <a:buNone/>
             </a:pPr>
             <a:r>
-              <a:rPr lang="en-US" sz="690" dirty="0">
+              <a:rPr lang="en-US" sz="675" dirty="0">
                 <a:solidFill>
                   <a:srgbClr val="5F6368"/>
                 </a:solidFill>
@@ -21833,7 +21833,7 @@
               </a:rPr>
               <a:t>Red Perimeter 4 (Pattern B Silos &amp; Pattern C PSC Spokes): Per-tenant VPC-SC perimeters, IAM PAB, Managed Vertex Dedicated PT vs. Private GKE Gemma 3 27B GPUs, &lt;60s CMEK kill-switch &amp; /28 PSC NAT.</a:t>
             </a:r>
-            <a:endParaRPr lang="en-US" sz="690" dirty="0"/>
+            <a:endParaRPr lang="en-US" sz="675" dirty="0"/>
           </a:p>
         </p:txBody>
       </p:sp>
@@ -21845,7 +21845,7 @@
         </p:nvSpPr>
         <p:spPr>
           <a:xfrm>
-            <a:off x="7443216" y="6126480"/>
+            <a:off x="7443216" y="6144768"/>
             <a:ext cx="4382719" cy="329184"/>
           </a:xfrm>
           <a:prstGeom prst="roundRect">
@@ -21872,7 +21872,7 @@
         </p:nvSpPr>
         <p:spPr>
           <a:xfrm>
-            <a:off x="7498080" y="6126480"/>
+            <a:off x="7498080" y="6144768"/>
             <a:ext cx="4272991" cy="329184"/>
           </a:xfrm>
           <a:prstGeom prst="rect">
@@ -22638,7 +22638,7 @@
         </p:nvSpPr>
         <p:spPr>
           <a:xfrm flipH="1">
-            <a:off x="2948940" y="2475281"/>
+            <a:off x="2948940" y="2414016"/>
             <a:ext cx="148133" cy="0"/>
           </a:xfrm>
           <a:prstGeom prst="line">
@@ -22663,7 +22663,7 @@
         <p:spPr>
           <a:xfrm flipV="1">
             <a:off x="2948940" y="2306117"/>
-            <a:ext cx="0" cy="169164"/>
+            <a:ext cx="0" cy="107899"/>
           </a:xfrm>
           <a:prstGeom prst="line">
             <a:avLst/>
@@ -22709,7 +22709,7 @@
         </p:nvSpPr>
         <p:spPr>
           <a:xfrm flipH="1">
-            <a:off x="2948940" y="2475281"/>
+            <a:off x="2948940" y="2535631"/>
             <a:ext cx="148133" cy="0"/>
           </a:xfrm>
           <a:prstGeom prst="line">
@@ -22733,8 +22733,8 @@
         </p:nvSpPr>
         <p:spPr>
           <a:xfrm>
-            <a:off x="2948940" y="2475281"/>
-            <a:ext cx="0" cy="195682"/>
+            <a:off x="2948940" y="2535631"/>
+            <a:ext cx="0" cy="135331"/>
           </a:xfrm>
           <a:prstGeom prst="line">
             <a:avLst/>
@@ -30027,7 +30027,7 @@
         </p:nvSpPr>
         <p:spPr>
           <a:xfrm>
-            <a:off x="7406640" y="4498848"/>
+            <a:off x="7406640" y="4407408"/>
             <a:ext cx="292608" cy="292608"/>
           </a:xfrm>
           <a:prstGeom prst="rect">
@@ -30066,12 +30066,12 @@
         </p:nvSpPr>
         <p:spPr>
           <a:xfrm>
-            <a:off x="6272784" y="4517136"/>
-            <a:ext cx="859536" cy="274320"/>
+            <a:off x="6272784" y="4425696"/>
+            <a:ext cx="859536" cy="256032"/>
           </a:xfrm>
           <a:prstGeom prst="roundRect">
             <a:avLst>
-              <a:gd name="adj" fmla="val 16667"/>
+              <a:gd name="adj" fmla="val 17857"/>
             </a:avLst>
           </a:prstGeom>
           <a:solidFill>
@@ -30088,8 +30088,8 @@
         </p:nvSpPr>
         <p:spPr>
           <a:xfrm>
-            <a:off x="6272784" y="4517136"/>
-            <a:ext cx="859536" cy="274320"/>
+            <a:off x="6272784" y="4425696"/>
+            <a:ext cx="859536" cy="256032"/>
           </a:xfrm>
           <a:prstGeom prst="rect">
             <a:avLst/>
@@ -30105,7 +30105,7 @@
               <a:buNone/>
             </a:pPr>
             <a:r>
-              <a:rPr lang="en-US" sz="800" b="1" dirty="0">
+              <a:rPr lang="en-US" sz="780" b="1" dirty="0">
                 <a:solidFill>
                   <a:srgbClr val="FFFFFF"/>
                 </a:solidFill>
@@ -30115,7 +30115,7 @@
               </a:rPr>
               <a:t>RLS + 3LO</a:t>
             </a:r>
-            <a:endParaRPr lang="en-US" sz="800" dirty="0"/>
+            <a:endParaRPr lang="en-US" sz="780" dirty="0"/>
           </a:p>
         </p:txBody>
       </p:sp>
@@ -30127,8 +30127,8 @@
         </p:nvSpPr>
         <p:spPr>
           <a:xfrm>
-            <a:off x="5321808" y="4846320"/>
-            <a:ext cx="1847088" cy="438912"/>
+            <a:off x="5248656" y="4718304"/>
+            <a:ext cx="1938528" cy="411480"/>
           </a:xfrm>
           <a:prstGeom prst="rect">
             <a:avLst/>
@@ -30144,7 +30144,7 @@
               <a:buNone/>
             </a:pPr>
             <a:r>
-              <a:rPr lang="en-US" sz="800" b="1" dirty="0">
+              <a:rPr lang="en-US" sz="770" b="1" dirty="0">
                 <a:solidFill>
                   <a:srgbClr val="3C4043"/>
                 </a:solidFill>
@@ -30154,14 +30154,14 @@
               </a:rPr>
               <a:t>Hop 5 binds AlloyDB</a:t>
             </a:r>
-            <a:endParaRPr lang="en-US" sz="800" dirty="0"/>
+            <a:endParaRPr lang="en-US" sz="770" dirty="0"/>
           </a:p>
           <a:p>
             <a:pPr indent="0" marL="0">
               <a:buNone/>
             </a:pPr>
             <a:r>
-              <a:rPr lang="en-US" sz="800" b="1" dirty="0">
+              <a:rPr lang="en-US" sz="770" b="1" dirty="0">
                 <a:solidFill>
                   <a:srgbClr val="3C4043"/>
                 </a:solidFill>
@@ -30171,14 +30171,14 @@
               </a:rPr>
               <a:t>RLS &amp; vaults per-user</a:t>
             </a:r>
-            <a:endParaRPr lang="en-US" sz="800" dirty="0"/>
+            <a:endParaRPr lang="en-US" sz="770" dirty="0"/>
           </a:p>
           <a:p>
             <a:pPr indent="0" marL="0">
               <a:buNone/>
             </a:pPr>
             <a:r>
-              <a:rPr lang="en-US" sz="800" b="1" dirty="0">
+              <a:rPr lang="en-US" sz="770" b="1" dirty="0">
                 <a:solidFill>
                   <a:srgbClr val="3C4043"/>
                 </a:solidFill>
@@ -30188,7 +30188,7 @@
               </a:rPr>
               <a:t>3LO ({tenant}:{user})</a:t>
             </a:r>
-            <a:endParaRPr lang="en-US" sz="800" dirty="0"/>
+            <a:endParaRPr lang="en-US" sz="770" dirty="0"/>
           </a:p>
         </p:txBody>
       </p:sp>
@@ -30200,7 +30200,7 @@
         </p:nvSpPr>
         <p:spPr>
           <a:xfrm>
-            <a:off x="7342632" y="4901184"/>
+            <a:off x="7342632" y="4809744"/>
             <a:ext cx="2139696" cy="0"/>
           </a:xfrm>
           <a:prstGeom prst="line">
@@ -30224,7 +30224,7 @@
         </p:nvSpPr>
         <p:spPr>
           <a:xfrm>
-            <a:off x="7735824" y="4681728"/>
+            <a:off x="7735824" y="4590288"/>
             <a:ext cx="1682496" cy="182880"/>
           </a:xfrm>
           <a:prstGeom prst="rect">
@@ -30241,7 +30241,7 @@
               <a:buNone/>
             </a:pPr>
             <a:r>
-              <a:rPr lang="en-US" sz="800" b="1" dirty="0">
+              <a:rPr lang="en-US" sz="780" b="1" dirty="0">
                 <a:solidFill>
                   <a:srgbClr val="0F2942"/>
                 </a:solidFill>
@@ -30251,7 +30251,7 @@
               </a:rPr>
               <a:t>SET LOCAL tenant_id</a:t>
             </a:r>
-            <a:endParaRPr lang="en-US" sz="800" dirty="0"/>
+            <a:endParaRPr lang="en-US" sz="780" dirty="0"/>
           </a:p>
         </p:txBody>
       </p:sp>

--- a/slides/ws1-google-slides-design-plugin-editable-slides.pptx
+++ b/slides/ws1-google-slides-design-plugin-editable-slides.pptx
@@ -621,7 +621,7 @@
           <a:p>
             <a:r>
               <a:rPr lang="en-US" dirty="0"/>
-              <a:t>To prove this architecture is running live rather than just on slides, here are authentic captures from our deployed Cloud Run revisions, Cloud Logging Explorer, and our Dual-Plane verification harness. On the Intra-Cloud plane, our 20/20 Google Cloud runtime suites verify zero cross-tenant RLS rows across HTTP 200, 403, 423, and 429 responses; on the Inter-Cloud plane, our 30/30 AWS Bedrock AgentCore MCP and 10-SaaS cross-cloud target harness passes all sixty assertions and all twelve automated forensic gates.</a:t>
+              <a:t>To prove this architecture is running live rather than just on slides, here are authentic captures from our deployed Cloud Run revisions in ramp-portal-dev and bbar-138hf0, Cloud Logging Explorer, Dual-Plane verification harness, and twenty before-versus-after 2880-by-1800 Retina third-party SaaS UIs including Metabase BI v0.50.26 and Trino Distributed SQL v440. On the Intra-Cloud plane, our 20/20 Google Cloud runtime suites verify zero cross-tenant RLS rows across HTTP 200, 403, 423, and 429 responses; on the Inter-Cloud plane, our 30/30 AWS Bedrock AgentCore MCP and 10-SaaS cross-cloud target harness passes all sixty assertions and all thirteen automated forensic gates.</a:t>
             </a:r>
             <a:endParaRPr lang="en-US" dirty="0"/>
           </a:p>
@@ -723,7 +723,7 @@
           <a:p>
             <a:r>
               <a:rPr lang="en-US" dirty="0"/>
-              <a:t>Finally, our closing slide consolidates the Google Cloud Well-Architected SLA scorecard directly into our five runnable GitHub milestones and five-part blog series launch plan. Every milestone card pairs its exact repository file path with its production SLA target: under 150-microsecond cached-JWKS verification and ~3ms JTI deny-lists in Part 1; ~42ms p95 five-hop overhead, ~420ms warm TTFT, and 84.7 percent token savings in Part 2; &lt;60s CMEK revocation, &lt;5s Valkey SCAN+UNLINK eviction, SET NX PX 5000 recovery, and &lt;30s cross-region failover RTO in Part 3; 74 percent portfolio TCO reduction and 0ms PSC cutover in Part 4; and 12/12 forensic plus 107/107 runtime assertions in Part 5.</a:t>
+              <a:t>Finally, our closing slide consolidates the Google Cloud Well-Architected SLA scorecard directly into our five runnable GitHub milestones and five-part blog series launch plan. Every milestone card pairs its exact repository file path with its production SLA target: under 150-microsecond cached-JWKS verification and ~3ms JTI deny-lists in Part 1; ~42ms p95 five-hop overhead, ~420ms warm TTFT, and 84.7 percent token savings in Part 2; &lt;60s CMEK revocation, &lt;5s Valkey SCAN+UNLINK eviction, SET NX PX 5000 recovery, and &lt;30s cross-region failover RTO in Part 3; 74 percent portfolio TCO reduction and 0ms PSC cutover in Part 4; and 13/13 forensic plus 107/107 runtime assertions in Part 5.</a:t>
             </a:r>
             <a:endParaRPr lang="en-US" dirty="0"/>
           </a:p>
@@ -3853,7 +3853,7 @@
                 <a:ea typeface="Google Sans" pitchFamily="34" charset="-122"/>
                 <a:cs typeface="Google Sans" pitchFamily="34" charset="-120"/>
               </a:rPr>
-              <a:t>Verified Across 3 GCP Projects (#248990048888 • #638420508320 • #887605034827) • 13/13 Forensic PASS</a:t>
+              <a:t>Verified on Live GCP (#248990048888 • #48439189383) &amp; AWS (#393036065405) • 13/13 Forensic PASS</a:t>
             </a:r>
             <a:endParaRPr lang="en-US" sz="720" dirty="0"/>
           </a:p>
@@ -3877,7 +3877,7 @@
           <a:ln/>
         </p:spPr>
         <p:txBody>
-          <a:bodyPr wrap="square" rtlCol="0" anchor="ctr"/>
+          <a:bodyPr wrap="none" rtlCol="0" anchor="ctr"/>
           <a:lstStyle/>
           <a:p>
             <a:pPr algn="l" indent="0" marL="0">
@@ -4513,7 +4513,7 @@
                 <a:ea typeface="Google Sans" pitchFamily="34" charset="-122"/>
                 <a:cs typeface="Google Sans" pitchFamily="34" charset="-120"/>
               </a:rPr>
-              <a:t>cymbal-control-plane (#248990048888) &amp; cymbal-pooled-prod (#638420508320) serving Pattern A/B/C endpoints (HTTP 200)</a:t>
+              <a:t>ramp-portal-dev (#248990048888) &amp; bbar-138hf0 (#48439189383) serving Pattern A/B/C endpoints (HTTP 200)</a:t>
             </a:r>
             <a:endParaRPr lang="en-US" sz="920" dirty="0"/>
           </a:p>
@@ -4552,7 +4552,7 @@
                 <a:ea typeface="Roboto" pitchFamily="34" charset="-122"/>
                 <a:cs typeface="Roboto" pitchFamily="34" charset="-120"/>
               </a:rPr>
-              <a:t>• Projects: cymbal-control-plane • cymbal-pooled-prod</a:t>
+              <a:t>• Live GCP: ramp-portal-dev (#248990048888) • bbar-138hf0 (#48439189383)</a:t>
             </a:r>
             <a:endParaRPr lang="en-US" sz="840" dirty="0"/>
           </a:p>
@@ -4728,7 +4728,7 @@
                 <a:ea typeface="Google Sans" pitchFamily="34" charset="-122"/>
                 <a:cs typeface="Google Sans" pitchFamily="34" charset="-120"/>
               </a:rPr>
-              <a:t>ACT III FORENSIC AUDIT 02 • DUAL-PLANE GCP 20/20 &amp; SAAS 30/30 PASS</a:t>
+              <a:t>ACT III FORENSIC AUDIT 02 • DUAL-PLANE GCP 20/20, SAAS 30/30 &amp; BEFORE/AFTER 3P UIs</a:t>
             </a:r>
             <a:endParaRPr lang="en-US" sz="820" dirty="0"/>
           </a:p>
@@ -4794,7 +4794,7 @@
                 <a:ea typeface="Google Sans" pitchFamily="34" charset="-122"/>
                 <a:cs typeface="Google Sans" pitchFamily="34" charset="-120"/>
               </a:rPr>
-              <a:t>Cloud Logging MQL &amp; Dual-Plane Harness verifying 20/20 GCP suites + 30/30 Inter-Cloud 10-SaaS MCP flows</a:t>
+              <a:t>Cloud Logging MQL + Metabase BI v0.50.26 &amp; Trino SQL v440 Before/After Retina UI captures (2880×1800)</a:t>
             </a:r>
             <a:endParaRPr lang="en-US" sz="920" dirty="0"/>
           </a:p>
@@ -4833,7 +4833,7 @@
                 <a:ea typeface="Roboto" pitchFamily="34" charset="-122"/>
                 <a:cs typeface="Roboto" pitchFamily="34" charset="-120"/>
               </a:rPr>
-              <a:t>• Query: rls_cross_tenant_rows=0 AND status=(200..429)</a:t>
+              <a:t>• Dual-Plane: 20/20 GCP + 30/30 10-SaaS MCP PASS</a:t>
             </a:r>
             <a:endParaRPr lang="en-US" sz="840" dirty="0"/>
           </a:p>
@@ -4850,7 +4850,7 @@
                 <a:ea typeface="Roboto" pitchFamily="34" charset="-122"/>
                 <a:cs typeface="Roboto" pitchFamily="34" charset="-120"/>
               </a:rPr>
-              <a:t>• Dual-Plane: 20/20 GCP + 30/30 10-SaaS MCP PASS</a:t>
+              <a:t>• 3P UIs (2880×1800): Metabase BI v0.50.26 &amp; Trino SQL v440</a:t>
             </a:r>
             <a:endParaRPr lang="en-US" sz="840" dirty="0"/>
           </a:p>
@@ -4867,7 +4867,7 @@
                 <a:ea typeface="Roboto" pitchFamily="34" charset="-122"/>
                 <a:cs typeface="Roboto" pitchFamily="34" charset="-120"/>
               </a:rPr>
-              <a:t>• Ledger: s3://cymbal-multi-tenant-audit-ledger-393036065405-us-east-1</a:t>
+              <a:t>• Ledger: s3://cymbal-aws-federation-393036065405-us-east-1</a:t>
             </a:r>
             <a:endParaRPr lang="en-US" sz="840" dirty="0"/>
           </a:p>
@@ -4884,7 +4884,7 @@
                 <a:ea typeface="Roboto" pitchFamily="34" charset="-122"/>
                 <a:cs typeface="Roboto" pitchFamily="34" charset="-120"/>
               </a:rPr>
-              <a:t>• Artifact: scripts/verify_5_third_party_saas_products.py</a:t>
+              <a:t>• Artifact: docs/genuine_3p_before_after_provenance_receipt.json</a:t>
             </a:r>
             <a:endParaRPr lang="en-US" sz="840" dirty="0"/>
           </a:p>
@@ -5070,7 +5070,7 @@
                 <a:ea typeface="Google Sans" pitchFamily="34" charset="-122"/>
                 <a:cs typeface="Google Sans" pitchFamily="34" charset="-120"/>
               </a:rPr>
-              <a:t>Patterns A, B &amp; C Verified Across 3 GCP Projects</a:t>
+              <a:t>Patterns A, B &amp; C Verified Across Live GCP &amp; AWS</a:t>
             </a:r>
             <a:endParaRPr lang="en-US" sz="1050" dirty="0"/>
           </a:p>
@@ -5109,7 +5109,7 @@
                 <a:ea typeface="Roboto" pitchFamily="34" charset="-122"/>
                 <a:cs typeface="Roboto" pitchFamily="34" charset="-120"/>
               </a:rPr>
-              <a:t>Live across cymbal-control-plane (#248990048888), cymbal-pooled-prod (#638420508320) &amp; cymbal-build-sandbox (#887605034827) inside gVisor sandboxes.</a:t>
+              <a:t>Live across ramp-portal-dev (#248990048888), bbar-138hf0 (#48439189383) &amp; AWS Account #393036065405 inside gVisor sandboxes.</a:t>
             </a:r>
             <a:endParaRPr lang="en-US" sz="860" dirty="0"/>
           </a:p>
@@ -5589,7 +5589,7 @@
                 <a:ea typeface="Google Sans" pitchFamily="34" charset="-122"/>
                 <a:cs typeface="Google Sans" pitchFamily="34" charset="-120"/>
               </a:rPr>
-              <a:t>AUDIT 04 • DUAL-PLANE 20/20 GCP + 30/30 SAAS</a:t>
+              <a:t>AUDIT 04 • 20 BEFORE/AFTER 3P UIs &amp; 30/30 SAAS</a:t>
             </a:r>
             <a:endParaRPr lang="en-US" sz="740" dirty="0"/>
           </a:p>
@@ -5628,7 +5628,7 @@
                 <a:ea typeface="Google Sans" pitchFamily="34" charset="-122"/>
                 <a:cs typeface="Google Sans" pitchFamily="34" charset="-120"/>
               </a:rPr>
-              <a:t>Intra-Cloud GCP + Inter-Cloud 10-SaaS MCP Proof</a:t>
+              <a:t>Metabase + Trino Before/After UIs &amp; 30/30 MCP PASS</a:t>
             </a:r>
             <a:endParaRPr lang="en-US" sz="1050" dirty="0"/>
           </a:p>
@@ -5667,7 +5667,7 @@
                 <a:ea typeface="Roboto" pitchFamily="34" charset="-122"/>
                 <a:cs typeface="Roboto" pitchFamily="34" charset="-120"/>
               </a:rPr>
-              <a:t>Certifies 20/20 GCP runtime suites plus 30/30 Inter-Cloud AWS AgentCore MCP target flows (60/60 assertions, 13/13 forensic gates).</a:t>
+              <a:t>Pairs 20/20 GCP + 30/30 AWS AgentCore MCP assertions with 20 genuine 2880×1800 Before/After Retina 3P SaaS UI proofs.</a:t>
             </a:r>
             <a:endParaRPr lang="en-US" sz="860" dirty="0"/>
           </a:p>
@@ -5691,14 +5691,14 @@
           <a:ln/>
         </p:spPr>
         <p:txBody>
-          <a:bodyPr wrap="square" rtlCol="0" anchor="ctr"/>
+          <a:bodyPr wrap="none" rtlCol="0" anchor="ctr"/>
           <a:lstStyle/>
           <a:p>
             <a:pPr algn="l" indent="0" marL="0">
               <a:buNone/>
             </a:pPr>
             <a:r>
-              <a:rPr lang="en-US" sz="780" b="1" dirty="0">
+              <a:rPr lang="en-US" sz="700" b="1" dirty="0">
                 <a:solidFill>
                   <a:srgbClr val="4285F4"/>
                 </a:solidFill>
@@ -5712,7 +5712,7 @@
               <a:buNone/>
             </a:pPr>
             <a:r>
-              <a:rPr lang="en-US" sz="760" dirty="0">
+              <a:rPr lang="en-US" sz="690" dirty="0">
                 <a:solidFill>
                   <a:srgbClr val="5F6368"/>
                 </a:solidFill>
@@ -5720,13 +5720,13 @@
                 <a:ea typeface="Roboto" pitchFamily="34" charset="-122"/>
                 <a:cs typeface="Roboto" pitchFamily="34" charset="-120"/>
               </a:rPr>
-              <a:t>Workstream 1 • Reference Architecture &amp; Cloud Architecture Center Doc PR  •  Act III Forensic Verification Audit: Grounded Google Cloud CLI &amp; Telemetry Receipts + 100% Editable Callouts  •  </a:t>
+              <a:t>Workstream 1 • Reference Architecture &amp; Cloud Architecture Center Doc PR  •  Act III Forensic Verification Audit: Grounded Google Cloud CLI &amp; Telemetry Receipts + 100%…  •  </a:t>
             </a:r>
             <a:pPr algn="l" indent="0" marL="0">
               <a:buNone/>
             </a:pPr>
             <a:r>
-              <a:rPr lang="en-US" sz="780" b="1" dirty="0">
+              <a:rPr lang="en-US" sz="700" b="1" dirty="0">
                 <a:solidFill>
                   <a:srgbClr val="3C4043"/>
                 </a:solidFill>
@@ -5736,7 +5736,7 @@
               </a:rPr>
               <a:t>Proprietary + Confidential</a:t>
             </a:r>
-            <a:endParaRPr lang="en-US" sz="780" dirty="0"/>
+            <a:endParaRPr lang="en-US" sz="700" dirty="0"/>
           </a:p>
         </p:txBody>
       </p:sp>
@@ -8244,7 +8244,7 @@
           <a:ln/>
         </p:spPr>
         <p:txBody>
-          <a:bodyPr wrap="square" rtlCol="0" anchor="ctr"/>
+          <a:bodyPr wrap="none" rtlCol="0" anchor="ctr"/>
           <a:lstStyle/>
           <a:p>
             <a:pPr algn="l" indent="0" marL="0">
@@ -11254,7 +11254,7 @@
           <a:ln/>
         </p:spPr>
         <p:txBody>
-          <a:bodyPr wrap="square" rtlCol="0" anchor="ctr"/>
+          <a:bodyPr wrap="none" rtlCol="0" anchor="ctr"/>
           <a:lstStyle/>
           <a:p>
             <a:pPr algn="l" indent="0" marL="0">
@@ -13439,7 +13439,7 @@
           <a:ln/>
         </p:spPr>
         <p:txBody>
-          <a:bodyPr wrap="square" rtlCol="0" anchor="ctr"/>
+          <a:bodyPr wrap="none" rtlCol="0" anchor="ctr"/>
           <a:lstStyle/>
           <a:p>
             <a:pPr algn="l" indent="0" marL="0">
@@ -16892,7 +16892,7 @@
           <a:ln/>
         </p:spPr>
         <p:txBody>
-          <a:bodyPr wrap="square" rtlCol="0" anchor="ctr"/>
+          <a:bodyPr wrap="none" rtlCol="0" anchor="ctr"/>
           <a:lstStyle/>
           <a:p>
             <a:pPr algn="l" indent="0" marL="0">
@@ -19838,14 +19838,14 @@
           <a:ln/>
         </p:spPr>
         <p:txBody>
-          <a:bodyPr wrap="square" rtlCol="0" anchor="ctr"/>
+          <a:bodyPr wrap="none" rtlCol="0" anchor="ctr"/>
           <a:lstStyle/>
           <a:p>
             <a:pPr algn="l" indent="0" marL="0">
               <a:buNone/>
             </a:pPr>
             <a:r>
-              <a:rPr lang="en-US" sz="780" b="1" dirty="0">
+              <a:rPr lang="en-US" sz="740" b="1" dirty="0">
                 <a:solidFill>
                   <a:srgbClr val="4285F4"/>
                 </a:solidFill>
@@ -19859,7 +19859,7 @@
               <a:buNone/>
             </a:pPr>
             <a:r>
-              <a:rPr lang="en-US" sz="760" dirty="0">
+              <a:rPr lang="en-US" sz="720" dirty="0">
                 <a:solidFill>
                   <a:srgbClr val="5F6368"/>
                 </a:solidFill>
@@ -19873,7 +19873,7 @@
               <a:buNone/>
             </a:pPr>
             <a:r>
-              <a:rPr lang="en-US" sz="780" b="1" dirty="0">
+              <a:rPr lang="en-US" sz="740" b="1" dirty="0">
                 <a:solidFill>
                   <a:srgbClr val="3C4043"/>
                 </a:solidFill>
@@ -19883,7 +19883,7 @@
               </a:rPr>
               <a:t>Proprietary + Confidential</a:t>
             </a:r>
-            <a:endParaRPr lang="en-US" sz="780" dirty="0"/>
+            <a:endParaRPr lang="en-US" sz="740" dirty="0"/>
           </a:p>
         </p:txBody>
       </p:sp>
@@ -20633,7 +20633,7 @@
           <a:ln/>
         </p:spPr>
         <p:txBody>
-          <a:bodyPr wrap="square" rtlCol="0" anchor="ctr"/>
+          <a:bodyPr wrap="none" rtlCol="0" anchor="ctr"/>
           <a:lstStyle/>
           <a:p>
             <a:pPr algn="ctr" indent="0" marL="0">
@@ -20819,7 +20819,7 @@
           <a:ln/>
         </p:spPr>
         <p:txBody>
-          <a:bodyPr wrap="square" rtlCol="0" anchor="ctr"/>
+          <a:bodyPr wrap="none" rtlCol="0" anchor="ctr"/>
           <a:lstStyle/>
           <a:p>
             <a:pPr algn="ctr" indent="0" marL="0">
@@ -21005,7 +21005,7 @@
           <a:ln/>
         </p:spPr>
         <p:txBody>
-          <a:bodyPr wrap="square" rtlCol="0" anchor="ctr"/>
+          <a:bodyPr wrap="none" rtlCol="0" anchor="ctr"/>
           <a:lstStyle/>
           <a:p>
             <a:pPr algn="ctr" indent="0" marL="0">
@@ -21191,7 +21191,7 @@
           <a:ln/>
         </p:spPr>
         <p:txBody>
-          <a:bodyPr wrap="square" rtlCol="0" anchor="ctr"/>
+          <a:bodyPr wrap="none" rtlCol="0" anchor="ctr"/>
           <a:lstStyle/>
           <a:p>
             <a:pPr algn="ctr" indent="0" marL="0">
@@ -21872,8 +21872,8 @@
         </p:nvSpPr>
         <p:spPr>
           <a:xfrm>
-            <a:off x="7498080" y="6144768"/>
-            <a:ext cx="4272991" cy="329184"/>
+            <a:off x="7479792" y="6144768"/>
+            <a:ext cx="4309567" cy="329184"/>
           </a:xfrm>
           <a:prstGeom prst="rect">
             <a:avLst/>
@@ -21889,7 +21889,7 @@
               <a:buNone/>
             </a:pPr>
             <a:r>
-              <a:rPr lang="en-US" sz="700" b="1" dirty="0">
+              <a:rPr lang="en-US" sz="610" b="1" dirty="0">
                 <a:solidFill>
                   <a:srgbClr val="0D652D"/>
                 </a:solidFill>
@@ -21897,9 +21897,9 @@
                 <a:ea typeface="Google Sans" pitchFamily="34" charset="-122"/>
                 <a:cs typeface="Google Sans" pitchFamily="34" charset="-120"/>
               </a:rPr>
-              <a:t>VERIFIED • 56 Editable Shapes • 23 Connectors • GCP: cymbal-pooled-prod (#638420508320)</a:t>
-            </a:r>
-            <a:endParaRPr lang="en-US" sz="700" dirty="0"/>
+              <a:t>VERIFIED • 56 Shapes • 23 Connectors • GCP: ramp-portal-dev (#248990048888) &amp; bbar-138hf0 (#48439189383)</a:t>
+            </a:r>
+            <a:endParaRPr lang="en-US" sz="610" dirty="0"/>
           </a:p>
         </p:txBody>
       </p:sp>
@@ -21965,29 +21965,27 @@
         </p:nvSpPr>
         <p:spPr>
           <a:xfrm>
-            <a:off x="1343254" y="1608430"/>
-            <a:ext cx="2255825" cy="137160"/>
-          </a:xfrm>
-          <a:prstGeom prst="rect">
-            <a:avLst/>
-          </a:prstGeom>
-          <a:noFill/>
-          <a:ln/>
-        </p:spPr>
-        <p:txBody>
-          <a:bodyPr wrap="none" lIns="0" tIns="0" rIns="0" bIns="0" rtlCol="0" anchor="t">
-            <a:normAutofit/>
-          </a:bodyPr>
+            <a:off x="1343254" y="1613916"/>
+            <a:ext cx="2745943" cy="111557"/>
+          </a:xfrm>
+          <a:prstGeom prst="rect">
+            <a:avLst/>
+          </a:prstGeom>
+          <a:noFill/>
+          <a:ln/>
+        </p:spPr>
+        <p:txBody>
+          <a:bodyPr wrap="none" lIns="0" tIns="0" rIns="0" bIns="0" rtlCol="0" anchor="ctr"/>
           <a:lstStyle/>
           <a:p>
             <a:pPr algn="l" indent="0" marL="0">
               <a:lnSpc>
-                <a:spcPct val="85000"/>
+                <a:spcPct val="100000"/>
               </a:lnSpc>
               <a:buNone/>
             </a:pPr>
             <a:r>
-              <a:rPr lang="en-US" sz="460" b="1" dirty="0">
+              <a:rPr lang="en-US" sz="440" b="1" dirty="0">
                 <a:solidFill>
                   <a:srgbClr val="202124"/>
                 </a:solidFill>
@@ -21997,7 +21995,7 @@
               </a:rPr>
               <a:t>Shared Control Plane (cymbal-pooled-prod)</a:t>
             </a:r>
-            <a:endParaRPr lang="en-US" sz="460" dirty="0"/>
+            <a:endParaRPr lang="en-US" sz="440" dirty="0"/>
           </a:p>
         </p:txBody>
       </p:sp>
@@ -22036,29 +22034,27 @@
         </p:nvSpPr>
         <p:spPr>
           <a:xfrm>
-            <a:off x="1412748" y="1764792"/>
-            <a:ext cx="2191817" cy="137160"/>
-          </a:xfrm>
-          <a:prstGeom prst="rect">
-            <a:avLst/>
-          </a:prstGeom>
-          <a:noFill/>
-          <a:ln/>
-        </p:spPr>
-        <p:txBody>
-          <a:bodyPr wrap="none" lIns="0" tIns="0" rIns="0" bIns="0" rtlCol="0" anchor="t">
-            <a:normAutofit/>
-          </a:bodyPr>
+            <a:off x="1412748" y="1770278"/>
+            <a:ext cx="2668219" cy="111557"/>
+          </a:xfrm>
+          <a:prstGeom prst="rect">
+            <a:avLst/>
+          </a:prstGeom>
+          <a:noFill/>
+          <a:ln/>
+        </p:spPr>
+        <p:txBody>
+          <a:bodyPr wrap="none" lIns="0" tIns="0" rIns="0" bIns="0" rtlCol="0" anchor="ctr"/>
           <a:lstStyle/>
           <a:p>
             <a:pPr algn="l" indent="0" marL="0">
               <a:lnSpc>
-                <a:spcPct val="85000"/>
+                <a:spcPct val="100000"/>
               </a:lnSpc>
               <a:buNone/>
             </a:pPr>
             <a:r>
-              <a:rPr lang="en-US" sz="460" b="1" dirty="0">
+              <a:rPr lang="en-US" sz="440" b="1" dirty="0">
                 <a:solidFill>
                   <a:srgbClr val="202124"/>
                 </a:solidFill>
@@ -22068,7 +22064,7 @@
               </a:rPr>
               <a:t>VPC &amp; 5-Hop Cryptographic Context Chain</a:t>
             </a:r>
-            <a:endParaRPr lang="en-US" sz="460" dirty="0"/>
+            <a:endParaRPr lang="en-US" sz="440" dirty="0"/>
           </a:p>
         </p:txBody>
       </p:sp>
@@ -22101,51 +22097,7 @@
       </p:sp>
       <p:sp>
         <p:nvSpPr>
-          <p:cNvPr id="73" name="Text 71"/>
-          <p:cNvSpPr/>
-          <p:nvPr/>
-        </p:nvSpPr>
-        <p:spPr>
-          <a:xfrm>
-            <a:off x="1491386" y="3798418"/>
-            <a:ext cx="2133295" cy="137160"/>
-          </a:xfrm>
-          <a:prstGeom prst="rect">
-            <a:avLst/>
-          </a:prstGeom>
-          <a:noFill/>
-          <a:ln/>
-        </p:spPr>
-        <p:txBody>
-          <a:bodyPr wrap="none" lIns="0" tIns="0" rIns="0" bIns="0" rtlCol="0" anchor="t">
-            <a:normAutofit/>
-          </a:bodyPr>
-          <a:lstStyle/>
-          <a:p>
-            <a:pPr algn="l" indent="0" marL="0">
-              <a:lnSpc>
-                <a:spcPct val="85000"/>
-              </a:lnSpc>
-              <a:buNone/>
-            </a:pPr>
-            <a:r>
-              <a:rPr lang="en-US" sz="410" b="1" dirty="0">
-                <a:solidFill>
-                  <a:srgbClr val="202124"/>
-                </a:solidFill>
-                <a:latin typeface="Arial" pitchFamily="34" charset="0"/>
-                <a:ea typeface="Arial" pitchFamily="34" charset="-122"/>
-                <a:cs typeface="Arial" pitchFamily="34" charset="-120"/>
-              </a:rPr>
-              <a:t>Pattern A: Pooled Shared Runtime (pattern_a_pooled_rls_entities)</a:t>
-            </a:r>
-            <a:endParaRPr lang="en-US" sz="410" dirty="0"/>
-          </a:p>
-        </p:txBody>
-      </p:sp>
-      <p:sp>
-        <p:nvSpPr>
-          <p:cNvPr id="74" name="Shape 72"/>
+          <p:cNvPr id="73" name="Shape 71"/>
           <p:cNvSpPr/>
           <p:nvPr/>
         </p:nvSpPr>
@@ -22172,51 +22124,7 @@
       </p:sp>
       <p:sp>
         <p:nvSpPr>
-          <p:cNvPr id="75" name="Text 73"/>
-          <p:cNvSpPr/>
-          <p:nvPr/>
-        </p:nvSpPr>
-        <p:spPr>
-          <a:xfrm>
-            <a:off x="3856025" y="3798418"/>
-            <a:ext cx="2133295" cy="137160"/>
-          </a:xfrm>
-          <a:prstGeom prst="rect">
-            <a:avLst/>
-          </a:prstGeom>
-          <a:noFill/>
-          <a:ln/>
-        </p:spPr>
-        <p:txBody>
-          <a:bodyPr wrap="none" lIns="0" tIns="0" rIns="0" bIns="0" rtlCol="0" anchor="t">
-            <a:normAutofit/>
-          </a:bodyPr>
-          <a:lstStyle/>
-          <a:p>
-            <a:pPr algn="l" indent="0" marL="0">
-              <a:lnSpc>
-                <a:spcPct val="85000"/>
-              </a:lnSpc>
-              <a:buNone/>
-            </a:pPr>
-            <a:r>
-              <a:rPr lang="en-US" sz="410" b="1" dirty="0">
-                <a:solidFill>
-                  <a:srgbClr val="202124"/>
-                </a:solidFill>
-                <a:latin typeface="Arial" pitchFamily="34" charset="0"/>
-                <a:ea typeface="Arial" pitchFamily="34" charset="-122"/>
-                <a:cs typeface="Arial" pitchFamily="34" charset="-120"/>
-              </a:rPr>
-              <a:t>Dedicated Spoke: Pattern B Silo or Pattern C PSC Spoke</a:t>
-            </a:r>
-            <a:endParaRPr lang="en-US" sz="410" dirty="0"/>
-          </a:p>
-        </p:txBody>
-      </p:sp>
-      <p:sp>
-        <p:nvSpPr>
-          <p:cNvPr id="76" name="Shape 74"/>
+          <p:cNvPr id="74" name="Shape 72"/>
           <p:cNvSpPr/>
           <p:nvPr/>
         </p:nvSpPr>
@@ -22243,35 +22151,33 @@
       </p:sp>
       <p:sp>
         <p:nvSpPr>
-          <p:cNvPr id="77" name="Text 75"/>
-          <p:cNvSpPr/>
-          <p:nvPr/>
-        </p:nvSpPr>
-        <p:spPr>
-          <a:xfrm>
-            <a:off x="1560881" y="3955694"/>
-            <a:ext cx="1994306" cy="192024"/>
-          </a:xfrm>
-          <a:prstGeom prst="rect">
-            <a:avLst/>
-          </a:prstGeom>
-          <a:noFill/>
-          <a:ln/>
-        </p:spPr>
-        <p:txBody>
-          <a:bodyPr wrap="square" lIns="0" tIns="0" rIns="0" bIns="0" rtlCol="0" anchor="t">
-            <a:normAutofit/>
-          </a:bodyPr>
+          <p:cNvPr id="75" name="Text 73"/>
+          <p:cNvSpPr/>
+          <p:nvPr/>
+        </p:nvSpPr>
+        <p:spPr>
+          <a:xfrm>
+            <a:off x="1560881" y="3970325"/>
+            <a:ext cx="1994306" cy="210312"/>
+          </a:xfrm>
+          <a:prstGeom prst="rect">
+            <a:avLst/>
+          </a:prstGeom>
+          <a:noFill/>
+          <a:ln/>
+        </p:spPr>
+        <p:txBody>
+          <a:bodyPr wrap="square" lIns="0" tIns="0" rIns="0" bIns="0" rtlCol="0" anchor="t"/>
           <a:lstStyle/>
           <a:p>
             <a:pPr algn="l" indent="0" marL="0">
               <a:lnSpc>
-                <a:spcPct val="85000"/>
+                <a:spcPct val="102000"/>
               </a:lnSpc>
               <a:buNone/>
             </a:pPr>
             <a:r>
-              <a:rPr lang="en-US" sz="490" b="1" dirty="0">
+              <a:rPr lang="en-US" sz="470" b="1" dirty="0">
                 <a:solidFill>
                   <a:srgbClr val="202124"/>
                 </a:solidFill>
@@ -22281,17 +22187,17 @@
               </a:rPr>
               <a:t>Tenant Pool (Shared Runtime)</a:t>
             </a:r>
-            <a:endParaRPr lang="en-US" sz="490" dirty="0"/>
+            <a:endParaRPr lang="en-US" sz="470" dirty="0"/>
           </a:p>
           <a:p>
             <a:pPr algn="l" indent="0" marL="0">
               <a:lnSpc>
-                <a:spcPct val="85000"/>
+                <a:spcPct val="102000"/>
               </a:lnSpc>
               <a:buNone/>
             </a:pPr>
             <a:r>
-              <a:rPr lang="en-US" sz="420" dirty="0">
+              <a:rPr lang="en-US" sz="400" dirty="0">
                 <a:solidFill>
                   <a:srgbClr val="202124"/>
                 </a:solidFill>
@@ -22301,13 +22207,13 @@
               </a:rPr>
               <a:t>FinVault (8k Cap) &amp; RetailStream (4k Cap)</a:t>
             </a:r>
-            <a:endParaRPr lang="en-US" sz="490" dirty="0"/>
-          </a:p>
-        </p:txBody>
-      </p:sp>
-      <p:sp>
-        <p:nvSpPr>
-          <p:cNvPr id="78" name="Shape 76"/>
+            <a:endParaRPr lang="en-US" sz="470" dirty="0"/>
+          </a:p>
+        </p:txBody>
+      </p:sp>
+      <p:sp>
+        <p:nvSpPr>
+          <p:cNvPr id="76" name="Shape 74"/>
           <p:cNvSpPr/>
           <p:nvPr/>
         </p:nvSpPr>
@@ -22334,35 +22240,33 @@
       </p:sp>
       <p:sp>
         <p:nvSpPr>
-          <p:cNvPr id="79" name="Text 77"/>
-          <p:cNvSpPr/>
-          <p:nvPr/>
-        </p:nvSpPr>
-        <p:spPr>
-          <a:xfrm>
-            <a:off x="3925519" y="3955694"/>
-            <a:ext cx="1994306" cy="192024"/>
-          </a:xfrm>
-          <a:prstGeom prst="rect">
-            <a:avLst/>
-          </a:prstGeom>
-          <a:noFill/>
-          <a:ln/>
-        </p:spPr>
-        <p:txBody>
-          <a:bodyPr wrap="square" lIns="0" tIns="0" rIns="0" bIns="0" rtlCol="0" anchor="t">
-            <a:normAutofit/>
-          </a:bodyPr>
+          <p:cNvPr id="77" name="Text 75"/>
+          <p:cNvSpPr/>
+          <p:nvPr/>
+        </p:nvSpPr>
+        <p:spPr>
+          <a:xfrm>
+            <a:off x="3925519" y="3970325"/>
+            <a:ext cx="1994306" cy="210312"/>
+          </a:xfrm>
+          <a:prstGeom prst="rect">
+            <a:avLst/>
+          </a:prstGeom>
+          <a:noFill/>
+          <a:ln/>
+        </p:spPr>
+        <p:txBody>
+          <a:bodyPr wrap="square" lIns="0" tIns="0" rIns="0" bIns="0" rtlCol="0" anchor="t"/>
           <a:lstStyle/>
           <a:p>
             <a:pPr algn="l" indent="0" marL="0">
               <a:lnSpc>
-                <a:spcPct val="85000"/>
+                <a:spcPct val="102000"/>
               </a:lnSpc>
               <a:buNone/>
             </a:pPr>
             <a:r>
-              <a:rPr lang="en-US" sz="490" b="1" dirty="0">
+              <a:rPr lang="en-US" sz="470" b="1" dirty="0">
                 <a:solidFill>
                   <a:srgbClr val="202124"/>
                 </a:solidFill>
@@ -22372,17 +22276,17 @@
               </a:rPr>
               <a:t>Dedicated Sovereign Tenant Silo</a:t>
             </a:r>
-            <a:endParaRPr lang="en-US" sz="490" dirty="0"/>
+            <a:endParaRPr lang="en-US" sz="470" dirty="0"/>
           </a:p>
           <a:p>
             <a:pPr algn="l" indent="0" marL="0">
               <a:lnSpc>
-                <a:spcPct val="85000"/>
+                <a:spcPct val="102000"/>
               </a:lnSpc>
               <a:buNone/>
             </a:pPr>
             <a:r>
-              <a:rPr lang="en-US" sz="420" dirty="0">
+              <a:rPr lang="en-US" sz="400" dirty="0">
                 <a:solidFill>
                   <a:srgbClr val="202124"/>
                 </a:solidFill>
@@ -22392,13 +22296,13 @@
               </a:rPr>
               <a:t>VPC-SC + IAM PAB + finvault-silo-cmek + PSC</a:t>
             </a:r>
-            <a:endParaRPr lang="en-US" sz="490" dirty="0"/>
-          </a:p>
-        </p:txBody>
-      </p:sp>
-      <p:sp>
-        <p:nvSpPr>
-          <p:cNvPr id="80" name="Shape 78"/>
+            <a:endParaRPr lang="en-US" sz="470" dirty="0"/>
+          </a:p>
+        </p:txBody>
+      </p:sp>
+      <p:sp>
+        <p:nvSpPr>
+          <p:cNvPr id="78" name="Shape 76"/>
           <p:cNvSpPr/>
           <p:nvPr/>
         </p:nvSpPr>
@@ -22425,35 +22329,33 @@
       </p:sp>
       <p:sp>
         <p:nvSpPr>
-          <p:cNvPr id="81" name="Text 79"/>
-          <p:cNvSpPr/>
-          <p:nvPr/>
-        </p:nvSpPr>
-        <p:spPr>
-          <a:xfrm>
-            <a:off x="1482242" y="1912010"/>
-            <a:ext cx="1847088" cy="192024"/>
-          </a:xfrm>
-          <a:prstGeom prst="rect">
-            <a:avLst/>
-          </a:prstGeom>
-          <a:noFill/>
-          <a:ln/>
-        </p:spPr>
-        <p:txBody>
-          <a:bodyPr wrap="square" lIns="0" tIns="0" rIns="0" bIns="0" rtlCol="0" anchor="t">
-            <a:normAutofit/>
-          </a:bodyPr>
+          <p:cNvPr id="79" name="Text 77"/>
+          <p:cNvSpPr/>
+          <p:nvPr/>
+        </p:nvSpPr>
+        <p:spPr>
+          <a:xfrm>
+            <a:off x="1482242" y="1926641"/>
+            <a:ext cx="1901952" cy="210312"/>
+          </a:xfrm>
+          <a:prstGeom prst="rect">
+            <a:avLst/>
+          </a:prstGeom>
+          <a:noFill/>
+          <a:ln/>
+        </p:spPr>
+        <p:txBody>
+          <a:bodyPr wrap="square" lIns="0" tIns="0" rIns="0" bIns="0" rtlCol="0" anchor="t"/>
           <a:lstStyle/>
           <a:p>
             <a:pPr algn="l" indent="0" marL="0">
               <a:lnSpc>
-                <a:spcPct val="85000"/>
+                <a:spcPct val="102000"/>
               </a:lnSpc>
               <a:buNone/>
             </a:pPr>
             <a:r>
-              <a:rPr lang="en-US" sz="490" b="1" dirty="0">
+              <a:rPr lang="en-US" sz="470" b="1" dirty="0">
                 <a:solidFill>
                   <a:srgbClr val="202124"/>
                 </a:solidFill>
@@ -22463,17 +22365,17 @@
               </a:rPr>
               <a:t>Routing hub (Hop 1 &amp; Hop 2 PEP/PDP)</a:t>
             </a:r>
-            <a:endParaRPr lang="en-US" sz="490" dirty="0"/>
+            <a:endParaRPr lang="en-US" sz="470" dirty="0"/>
           </a:p>
           <a:p>
             <a:pPr algn="l" indent="0" marL="0">
               <a:lnSpc>
-                <a:spcPct val="85000"/>
+                <a:spcPct val="102000"/>
               </a:lnSpc>
               <a:buNone/>
             </a:pPr>
             <a:r>
-              <a:rPr lang="en-US" sz="420" dirty="0">
+              <a:rPr lang="en-US" sz="400" dirty="0">
                 <a:solidFill>
                   <a:srgbClr val="202124"/>
                 </a:solidFill>
@@ -22483,13 +22385,13 @@
               </a:rPr>
               <a:t>Central ingress, OBO+DPoP KMS Sign &amp; Discovery Engine Catalog filter</a:t>
             </a:r>
-            <a:endParaRPr lang="en-US" sz="490" dirty="0"/>
-          </a:p>
-        </p:txBody>
-      </p:sp>
-      <p:sp>
-        <p:nvSpPr>
-          <p:cNvPr id="82" name="Shape 80"/>
+            <a:endParaRPr lang="en-US" sz="470" dirty="0"/>
+          </a:p>
+        </p:txBody>
+      </p:sp>
+      <p:sp>
+        <p:nvSpPr>
+          <p:cNvPr id="80" name="Shape 78"/>
           <p:cNvSpPr/>
           <p:nvPr/>
         </p:nvSpPr>
@@ -22516,35 +22418,33 @@
       </p:sp>
       <p:sp>
         <p:nvSpPr>
-          <p:cNvPr id="83" name="Text 81"/>
-          <p:cNvSpPr/>
-          <p:nvPr/>
-        </p:nvSpPr>
-        <p:spPr>
-          <a:xfrm>
-            <a:off x="4655210" y="1946758"/>
-            <a:ext cx="1315822" cy="192024"/>
-          </a:xfrm>
-          <a:prstGeom prst="rect">
-            <a:avLst/>
-          </a:prstGeom>
-          <a:noFill/>
-          <a:ln/>
-        </p:spPr>
-        <p:txBody>
-          <a:bodyPr wrap="square" lIns="0" tIns="0" rIns="0" bIns="0" rtlCol="0" anchor="t">
-            <a:normAutofit/>
-          </a:bodyPr>
+          <p:cNvPr id="81" name="Text 79"/>
+          <p:cNvSpPr/>
+          <p:nvPr/>
+        </p:nvSpPr>
+        <p:spPr>
+          <a:xfrm>
+            <a:off x="4655210" y="1961388"/>
+            <a:ext cx="1315822" cy="210312"/>
+          </a:xfrm>
+          <a:prstGeom prst="rect">
+            <a:avLst/>
+          </a:prstGeom>
+          <a:noFill/>
+          <a:ln/>
+        </p:spPr>
+        <p:txBody>
+          <a:bodyPr wrap="square" lIns="0" tIns="0" rIns="0" bIns="0" rtlCol="0" anchor="t"/>
           <a:lstStyle/>
           <a:p>
             <a:pPr algn="l" indent="0" marL="0">
               <a:lnSpc>
-                <a:spcPct val="85000"/>
+                <a:spcPct val="102000"/>
               </a:lnSpc>
               <a:buNone/>
             </a:pPr>
             <a:r>
-              <a:rPr lang="en-US" sz="490" b="1" dirty="0">
+              <a:rPr lang="en-US" sz="430" b="1" dirty="0">
                 <a:solidFill>
                   <a:srgbClr val="202124"/>
                 </a:solidFill>
@@ -22554,13 +22454,13 @@
               </a:rPr>
               <a:t>Central governance and FinOps observability hub</a:t>
             </a:r>
-            <a:endParaRPr lang="en-US" sz="490" dirty="0"/>
+            <a:endParaRPr lang="en-US" sz="430" dirty="0"/>
           </a:p>
         </p:txBody>
       </p:sp>
       <p:pic>
         <p:nvPicPr>
-          <p:cNvPr id="84" name="Image 0" descr="preencoded.png">    </p:cNvPr>
+          <p:cNvPr id="82" name="Image 0" descr="preencoded.png">    </p:cNvPr>
           <p:cNvPicPr>
             <a:picLocks noChangeAspect="1"/>
           </p:cNvPicPr>
@@ -22584,7 +22484,7 @@
       </p:pic>
       <p:sp>
         <p:nvSpPr>
-          <p:cNvPr id="85" name="Shape 82"/>
+          <p:cNvPr id="83" name="Shape 80"/>
           <p:cNvSpPr/>
           <p:nvPr/>
         </p:nvSpPr>
@@ -22608,7 +22508,7 @@
       </p:sp>
       <p:sp>
         <p:nvSpPr>
-          <p:cNvPr id="86" name="Shape 83"/>
+          <p:cNvPr id="84" name="Shape 81"/>
           <p:cNvSpPr/>
           <p:nvPr/>
         </p:nvSpPr>
@@ -22632,7 +22532,7 @@
       </p:sp>
       <p:sp>
         <p:nvSpPr>
-          <p:cNvPr id="87" name="Shape 84"/>
+          <p:cNvPr id="85" name="Shape 82"/>
           <p:cNvSpPr/>
           <p:nvPr/>
         </p:nvSpPr>
@@ -22656,7 +22556,7 @@
       </p:sp>
       <p:sp>
         <p:nvSpPr>
-          <p:cNvPr id="88" name="Shape 85"/>
+          <p:cNvPr id="86" name="Shape 83"/>
           <p:cNvSpPr/>
           <p:nvPr/>
         </p:nvSpPr>
@@ -22679,7 +22579,7 @@
       </p:sp>
       <p:sp>
         <p:nvSpPr>
-          <p:cNvPr id="89" name="Shape 86"/>
+          <p:cNvPr id="87" name="Shape 84"/>
           <p:cNvSpPr/>
           <p:nvPr/>
         </p:nvSpPr>
@@ -22703,7 +22603,7 @@
       </p:sp>
       <p:sp>
         <p:nvSpPr>
-          <p:cNvPr id="90" name="Shape 87"/>
+          <p:cNvPr id="88" name="Shape 85"/>
           <p:cNvSpPr/>
           <p:nvPr/>
         </p:nvSpPr>
@@ -22727,7 +22627,7 @@
       </p:sp>
       <p:sp>
         <p:nvSpPr>
-          <p:cNvPr id="91" name="Shape 88"/>
+          <p:cNvPr id="89" name="Shape 86"/>
           <p:cNvSpPr/>
           <p:nvPr/>
         </p:nvSpPr>
@@ -22750,7 +22650,7 @@
       </p:sp>
       <p:sp>
         <p:nvSpPr>
-          <p:cNvPr id="92" name="Shape 89"/>
+          <p:cNvPr id="90" name="Shape 87"/>
           <p:cNvSpPr/>
           <p:nvPr/>
         </p:nvSpPr>
@@ -22774,7 +22674,7 @@
       </p:sp>
       <p:sp>
         <p:nvSpPr>
-          <p:cNvPr id="93" name="Shape 90"/>
+          <p:cNvPr id="91" name="Shape 88"/>
           <p:cNvSpPr/>
           <p:nvPr/>
         </p:nvSpPr>
@@ -22799,7 +22699,7 @@
       </p:sp>
       <p:sp>
         <p:nvSpPr>
-          <p:cNvPr id="94" name="Shape 91"/>
+          <p:cNvPr id="92" name="Shape 89"/>
           <p:cNvSpPr/>
           <p:nvPr/>
         </p:nvSpPr>
@@ -22823,7 +22723,7 @@
       </p:sp>
       <p:sp>
         <p:nvSpPr>
-          <p:cNvPr id="95" name="Shape 92"/>
+          <p:cNvPr id="93" name="Shape 90"/>
           <p:cNvSpPr/>
           <p:nvPr/>
         </p:nvSpPr>
@@ -22847,7 +22747,7 @@
       </p:sp>
       <p:sp>
         <p:nvSpPr>
-          <p:cNvPr id="96" name="Shape 93"/>
+          <p:cNvPr id="94" name="Shape 91"/>
           <p:cNvSpPr/>
           <p:nvPr/>
         </p:nvSpPr>
@@ -22870,7 +22770,7 @@
       </p:sp>
       <p:sp>
         <p:nvSpPr>
-          <p:cNvPr id="97" name="Shape 94"/>
+          <p:cNvPr id="95" name="Shape 92"/>
           <p:cNvSpPr/>
           <p:nvPr/>
         </p:nvSpPr>
@@ -22893,7 +22793,7 @@
       </p:sp>
       <p:sp>
         <p:nvSpPr>
-          <p:cNvPr id="98" name="Shape 95"/>
+          <p:cNvPr id="96" name="Shape 93"/>
           <p:cNvSpPr/>
           <p:nvPr/>
         </p:nvSpPr>
@@ -22917,7 +22817,7 @@
       </p:sp>
       <p:sp>
         <p:nvSpPr>
-          <p:cNvPr id="99" name="Shape 96"/>
+          <p:cNvPr id="97" name="Shape 94"/>
           <p:cNvSpPr/>
           <p:nvPr/>
         </p:nvSpPr>
@@ -22941,7 +22841,7 @@
       </p:sp>
       <p:sp>
         <p:nvSpPr>
-          <p:cNvPr id="100" name="Shape 97"/>
+          <p:cNvPr id="98" name="Shape 95"/>
           <p:cNvSpPr/>
           <p:nvPr/>
         </p:nvSpPr>
@@ -22964,7 +22864,7 @@
       </p:sp>
       <p:sp>
         <p:nvSpPr>
-          <p:cNvPr id="101" name="Shape 98"/>
+          <p:cNvPr id="99" name="Shape 96"/>
           <p:cNvSpPr/>
           <p:nvPr/>
         </p:nvSpPr>
@@ -22988,7 +22888,7 @@
       </p:sp>
       <p:sp>
         <p:nvSpPr>
-          <p:cNvPr id="102" name="Shape 99"/>
+          <p:cNvPr id="100" name="Shape 97"/>
           <p:cNvSpPr/>
           <p:nvPr/>
         </p:nvSpPr>
@@ -23012,7 +22912,7 @@
       </p:sp>
       <p:sp>
         <p:nvSpPr>
-          <p:cNvPr id="103" name="Shape 100"/>
+          <p:cNvPr id="101" name="Shape 98"/>
           <p:cNvSpPr/>
           <p:nvPr/>
         </p:nvSpPr>
@@ -23035,7 +22935,7 @@
       </p:sp>
       <p:sp>
         <p:nvSpPr>
-          <p:cNvPr id="104" name="Shape 101"/>
+          <p:cNvPr id="102" name="Shape 99"/>
           <p:cNvSpPr/>
           <p:nvPr/>
         </p:nvSpPr>
@@ -23059,7 +22959,7 @@
       </p:sp>
       <p:sp>
         <p:nvSpPr>
-          <p:cNvPr id="105" name="Shape 102"/>
+          <p:cNvPr id="103" name="Shape 100"/>
           <p:cNvSpPr/>
           <p:nvPr/>
         </p:nvSpPr>
@@ -23082,7 +22982,7 @@
       </p:sp>
       <p:sp>
         <p:nvSpPr>
-          <p:cNvPr id="106" name="Shape 103"/>
+          <p:cNvPr id="104" name="Shape 101"/>
           <p:cNvSpPr/>
           <p:nvPr/>
         </p:nvSpPr>
@@ -23105,7 +23005,7 @@
       </p:sp>
       <p:sp>
         <p:nvSpPr>
-          <p:cNvPr id="107" name="Shape 104"/>
+          <p:cNvPr id="105" name="Shape 102"/>
           <p:cNvSpPr/>
           <p:nvPr/>
         </p:nvSpPr>
@@ -23129,7 +23029,7 @@
       </p:sp>
       <p:sp>
         <p:nvSpPr>
-          <p:cNvPr id="108" name="Shape 105"/>
+          <p:cNvPr id="106" name="Shape 103"/>
           <p:cNvSpPr/>
           <p:nvPr/>
         </p:nvSpPr>
@@ -23153,7 +23053,7 @@
       </p:sp>
       <p:sp>
         <p:nvSpPr>
-          <p:cNvPr id="109" name="Shape 106"/>
+          <p:cNvPr id="107" name="Shape 104"/>
           <p:cNvSpPr/>
           <p:nvPr/>
         </p:nvSpPr>
@@ -23176,7 +23076,7 @@
       </p:sp>
       <p:sp>
         <p:nvSpPr>
-          <p:cNvPr id="110" name="Shape 107"/>
+          <p:cNvPr id="108" name="Shape 105"/>
           <p:cNvSpPr/>
           <p:nvPr/>
         </p:nvSpPr>
@@ -23200,7 +23100,7 @@
       </p:sp>
       <p:sp>
         <p:nvSpPr>
-          <p:cNvPr id="111" name="Shape 108"/>
+          <p:cNvPr id="109" name="Shape 106"/>
           <p:cNvSpPr/>
           <p:nvPr/>
         </p:nvSpPr>
@@ -23224,7 +23124,7 @@
       </p:sp>
       <p:sp>
         <p:nvSpPr>
-          <p:cNvPr id="112" name="Shape 109"/>
+          <p:cNvPr id="110" name="Shape 107"/>
           <p:cNvSpPr/>
           <p:nvPr/>
         </p:nvSpPr>
@@ -23247,7 +23147,7 @@
       </p:sp>
       <p:sp>
         <p:nvSpPr>
-          <p:cNvPr id="113" name="Shape 110"/>
+          <p:cNvPr id="111" name="Shape 108"/>
           <p:cNvSpPr/>
           <p:nvPr/>
         </p:nvSpPr>
@@ -23271,7 +23171,7 @@
       </p:sp>
       <p:sp>
         <p:nvSpPr>
-          <p:cNvPr id="114" name="Shape 111"/>
+          <p:cNvPr id="112" name="Shape 109"/>
           <p:cNvSpPr/>
           <p:nvPr/>
         </p:nvSpPr>
@@ -23295,7 +23195,7 @@
       </p:sp>
       <p:sp>
         <p:nvSpPr>
-          <p:cNvPr id="115" name="Shape 112"/>
+          <p:cNvPr id="113" name="Shape 110"/>
           <p:cNvSpPr/>
           <p:nvPr/>
         </p:nvSpPr>
@@ -23319,7 +23219,7 @@
       </p:sp>
       <p:sp>
         <p:nvSpPr>
-          <p:cNvPr id="116" name="Shape 113"/>
+          <p:cNvPr id="114" name="Shape 111"/>
           <p:cNvSpPr/>
           <p:nvPr/>
         </p:nvSpPr>
@@ -23343,7 +23243,7 @@
       </p:sp>
       <p:sp>
         <p:nvSpPr>
-          <p:cNvPr id="117" name="Shape 114"/>
+          <p:cNvPr id="115" name="Shape 112"/>
           <p:cNvSpPr/>
           <p:nvPr/>
         </p:nvSpPr>
@@ -23367,7 +23267,7 @@
       </p:sp>
       <p:sp>
         <p:nvSpPr>
-          <p:cNvPr id="118" name="Shape 115"/>
+          <p:cNvPr id="116" name="Shape 113"/>
           <p:cNvSpPr/>
           <p:nvPr/>
         </p:nvSpPr>
@@ -23391,7 +23291,7 @@
       </p:sp>
       <p:sp>
         <p:nvSpPr>
-          <p:cNvPr id="119" name="Shape 116"/>
+          <p:cNvPr id="117" name="Shape 114"/>
           <p:cNvSpPr/>
           <p:nvPr/>
         </p:nvSpPr>
@@ -23414,7 +23314,7 @@
       </p:sp>
       <p:sp>
         <p:nvSpPr>
-          <p:cNvPr id="120" name="Shape 117"/>
+          <p:cNvPr id="118" name="Shape 115"/>
           <p:cNvSpPr/>
           <p:nvPr/>
         </p:nvSpPr>
@@ -23438,7 +23338,7 @@
       </p:sp>
       <p:sp>
         <p:nvSpPr>
-          <p:cNvPr id="121" name="Shape 118"/>
+          <p:cNvPr id="119" name="Shape 116"/>
           <p:cNvSpPr/>
           <p:nvPr/>
         </p:nvSpPr>
@@ -23462,7 +23362,7 @@
       </p:sp>
       <p:sp>
         <p:nvSpPr>
-          <p:cNvPr id="122" name="Shape 119"/>
+          <p:cNvPr id="120" name="Shape 117"/>
           <p:cNvSpPr/>
           <p:nvPr/>
         </p:nvSpPr>
@@ -23485,7 +23385,7 @@
       </p:sp>
       <p:sp>
         <p:nvSpPr>
-          <p:cNvPr id="123" name="Shape 120"/>
+          <p:cNvPr id="121" name="Shape 118"/>
           <p:cNvSpPr/>
           <p:nvPr/>
         </p:nvSpPr>
@@ -23509,7 +23409,7 @@
       </p:sp>
       <p:sp>
         <p:nvSpPr>
-          <p:cNvPr id="124" name="Shape 121"/>
+          <p:cNvPr id="122" name="Shape 119"/>
           <p:cNvSpPr/>
           <p:nvPr/>
         </p:nvSpPr>
@@ -23533,7 +23433,7 @@
       </p:sp>
       <p:sp>
         <p:nvSpPr>
-          <p:cNvPr id="125" name="Shape 122"/>
+          <p:cNvPr id="123" name="Shape 120"/>
           <p:cNvSpPr/>
           <p:nvPr/>
         </p:nvSpPr>
@@ -23557,7 +23457,7 @@
       </p:sp>
       <p:sp>
         <p:nvSpPr>
-          <p:cNvPr id="126" name="Shape 123"/>
+          <p:cNvPr id="124" name="Shape 121"/>
           <p:cNvSpPr/>
           <p:nvPr/>
         </p:nvSpPr>
@@ -23581,7 +23481,7 @@
       </p:sp>
       <p:sp>
         <p:nvSpPr>
-          <p:cNvPr id="127" name="Shape 124"/>
+          <p:cNvPr id="125" name="Shape 122"/>
           <p:cNvSpPr/>
           <p:nvPr/>
         </p:nvSpPr>
@@ -23605,7 +23505,131 @@
       </p:sp>
       <p:sp>
         <p:nvSpPr>
+          <p:cNvPr id="126" name="Shape 123"/>
+          <p:cNvSpPr/>
+          <p:nvPr/>
+        </p:nvSpPr>
+        <p:spPr>
+          <a:xfrm>
+            <a:off x="1473098" y="3802075"/>
+            <a:ext cx="1926641" cy="113386"/>
+          </a:xfrm>
+          <a:prstGeom prst="rect">
+            <a:avLst/>
+          </a:prstGeom>
+          <a:solidFill>
+            <a:srgbClr val="FFFFFF"/>
+          </a:solidFill>
+          <a:ln/>
+        </p:spPr>
+      </p:sp>
+      <p:sp>
+        <p:nvSpPr>
+          <p:cNvPr id="127" name="Text 124"/>
+          <p:cNvSpPr/>
+          <p:nvPr/>
+        </p:nvSpPr>
+        <p:spPr>
+          <a:xfrm>
+            <a:off x="1491386" y="3803904"/>
+            <a:ext cx="2133295" cy="111557"/>
+          </a:xfrm>
+          <a:prstGeom prst="rect">
+            <a:avLst/>
+          </a:prstGeom>
+          <a:noFill/>
+          <a:ln/>
+        </p:spPr>
+        <p:txBody>
+          <a:bodyPr wrap="none" lIns="0" tIns="0" rIns="0" bIns="0" rtlCol="0" anchor="ctr"/>
+          <a:lstStyle/>
+          <a:p>
+            <a:pPr algn="l" indent="0" marL="0">
+              <a:lnSpc>
+                <a:spcPct val="100000"/>
+              </a:lnSpc>
+              <a:buNone/>
+            </a:pPr>
+            <a:r>
+              <a:rPr lang="en-US" sz="400" b="1" dirty="0">
+                <a:solidFill>
+                  <a:srgbClr val="202124"/>
+                </a:solidFill>
+                <a:latin typeface="Arial" pitchFamily="34" charset="0"/>
+                <a:ea typeface="Arial" pitchFamily="34" charset="-122"/>
+                <a:cs typeface="Arial" pitchFamily="34" charset="-120"/>
+              </a:rPr>
+              <a:t>Pattern A: Pooled Shared Runtime (pattern_a_pooled_rls_entities)</a:t>
+            </a:r>
+            <a:endParaRPr lang="en-US" sz="400" dirty="0"/>
+          </a:p>
+        </p:txBody>
+      </p:sp>
+      <p:sp>
+        <p:nvSpPr>
           <p:cNvPr id="128" name="Shape 125"/>
+          <p:cNvSpPr/>
+          <p:nvPr/>
+        </p:nvSpPr>
+        <p:spPr>
+          <a:xfrm>
+            <a:off x="3837737" y="3802075"/>
+            <a:ext cx="1636776" cy="113386"/>
+          </a:xfrm>
+          <a:prstGeom prst="rect">
+            <a:avLst/>
+          </a:prstGeom>
+          <a:solidFill>
+            <a:srgbClr val="FFFFFF"/>
+          </a:solidFill>
+          <a:ln/>
+        </p:spPr>
+      </p:sp>
+      <p:sp>
+        <p:nvSpPr>
+          <p:cNvPr id="129" name="Text 126"/>
+          <p:cNvSpPr/>
+          <p:nvPr/>
+        </p:nvSpPr>
+        <p:spPr>
+          <a:xfrm>
+            <a:off x="3856025" y="3803904"/>
+            <a:ext cx="2133295" cy="111557"/>
+          </a:xfrm>
+          <a:prstGeom prst="rect">
+            <a:avLst/>
+          </a:prstGeom>
+          <a:noFill/>
+          <a:ln/>
+        </p:spPr>
+        <p:txBody>
+          <a:bodyPr wrap="none" lIns="0" tIns="0" rIns="0" bIns="0" rtlCol="0" anchor="ctr"/>
+          <a:lstStyle/>
+          <a:p>
+            <a:pPr algn="l" indent="0" marL="0">
+              <a:lnSpc>
+                <a:spcPct val="100000"/>
+              </a:lnSpc>
+              <a:buNone/>
+            </a:pPr>
+            <a:r>
+              <a:rPr lang="en-US" sz="400" b="1" dirty="0">
+                <a:solidFill>
+                  <a:srgbClr val="202124"/>
+                </a:solidFill>
+                <a:latin typeface="Arial" pitchFamily="34" charset="0"/>
+                <a:ea typeface="Arial" pitchFamily="34" charset="-122"/>
+                <a:cs typeface="Arial" pitchFamily="34" charset="-120"/>
+              </a:rPr>
+              <a:t>Dedicated Spoke: Pattern B Silo or Pattern C PSC Spoke</a:t>
+            </a:r>
+            <a:endParaRPr lang="en-US" sz="400" dirty="0"/>
+          </a:p>
+        </p:txBody>
+      </p:sp>
+      <p:sp>
+        <p:nvSpPr>
+          <p:cNvPr id="130" name="Shape 127"/>
           <p:cNvSpPr/>
           <p:nvPr/>
         </p:nvSpPr>
@@ -23632,7 +23656,7 @@
       </p:sp>
       <p:pic>
         <p:nvPicPr>
-          <p:cNvPr id="129" name="Image 1" descr="preencoded.png">    </p:cNvPr>
+          <p:cNvPr id="131" name="Image 1" descr="preencoded.png">    </p:cNvPr>
           <p:cNvPicPr>
             <a:picLocks noChangeAspect="1"/>
           </p:cNvPicPr>
@@ -23656,35 +23680,33 @@
       </p:pic>
       <p:sp>
         <p:nvSpPr>
-          <p:cNvPr id="130" name="Text 126"/>
+          <p:cNvPr id="132" name="Text 128"/>
           <p:cNvSpPr/>
           <p:nvPr/>
         </p:nvSpPr>
         <p:spPr>
           <a:xfrm>
             <a:off x="3372307" y="658368"/>
-            <a:ext cx="839419" cy="373990"/>
-          </a:xfrm>
-          <a:prstGeom prst="rect">
-            <a:avLst/>
-          </a:prstGeom>
-          <a:noFill/>
-          <a:ln/>
-        </p:spPr>
-        <p:txBody>
-          <a:bodyPr wrap="square" lIns="0" tIns="0" rIns="0" bIns="0" rtlCol="0" anchor="ctr">
-            <a:normAutofit/>
-          </a:bodyPr>
+            <a:ext cx="834847" cy="373990"/>
+          </a:xfrm>
+          <a:prstGeom prst="rect">
+            <a:avLst/>
+          </a:prstGeom>
+          <a:noFill/>
+          <a:ln/>
+        </p:spPr>
+        <p:txBody>
+          <a:bodyPr wrap="square" lIns="0" tIns="0" rIns="0" bIns="0" rtlCol="0" anchor="ctr"/>
           <a:lstStyle/>
           <a:p>
             <a:pPr algn="l" indent="0" marL="0">
               <a:lnSpc>
-                <a:spcPct val="88000"/>
+                <a:spcPct val="104000"/>
               </a:lnSpc>
               <a:buNone/>
             </a:pPr>
             <a:r>
-              <a:rPr lang="en-US" sz="520" b="1" dirty="0">
+              <a:rPr lang="en-US" sz="480" b="1" dirty="0">
                 <a:solidFill>
                   <a:srgbClr val="202124"/>
                 </a:solidFill>
@@ -23694,17 +23716,17 @@
               </a:rPr>
               <a:t>Competing B2B Tenants</a:t>
             </a:r>
-            <a:endParaRPr lang="en-US" sz="520" dirty="0"/>
+            <a:endParaRPr lang="en-US" sz="480" dirty="0"/>
           </a:p>
           <a:p>
             <a:pPr algn="l" indent="0" marL="0">
               <a:lnSpc>
-                <a:spcPct val="88000"/>
+                <a:spcPct val="104000"/>
               </a:lnSpc>
               <a:buNone/>
             </a:pPr>
             <a:r>
-              <a:rPr lang="en-US" sz="440" dirty="0">
+              <a:rPr lang="en-US" sz="410" dirty="0">
                 <a:solidFill>
                   <a:srgbClr val="3C4043"/>
                 </a:solidFill>
@@ -23714,13 +23736,13 @@
               </a:rPr>
               <a:t>FinVault (OIDC) &amp; RetailStream (Entra)</a:t>
             </a:r>
-            <a:endParaRPr lang="en-US" sz="520" dirty="0"/>
-          </a:p>
-        </p:txBody>
-      </p:sp>
-      <p:sp>
-        <p:nvSpPr>
-          <p:cNvPr id="131" name="Shape 127"/>
+            <a:endParaRPr lang="en-US" sz="480" dirty="0"/>
+          </a:p>
+        </p:txBody>
+      </p:sp>
+      <p:sp>
+        <p:nvSpPr>
+          <p:cNvPr id="133" name="Shape 129"/>
           <p:cNvSpPr/>
           <p:nvPr/>
         </p:nvSpPr>
@@ -23747,7 +23769,7 @@
       </p:sp>
       <p:pic>
         <p:nvPicPr>
-          <p:cNvPr id="132" name="Image 2" descr="preencoded.png">    </p:cNvPr>
+          <p:cNvPr id="134" name="Image 2" descr="preencoded.png">    </p:cNvPr>
           <p:cNvPicPr>
             <a:picLocks noChangeAspect="1"/>
           </p:cNvPicPr>
@@ -23771,35 +23793,33 @@
       </p:pic>
       <p:sp>
         <p:nvSpPr>
-          <p:cNvPr id="133" name="Text 128"/>
+          <p:cNvPr id="135" name="Text 130"/>
           <p:cNvSpPr/>
           <p:nvPr/>
         </p:nvSpPr>
         <p:spPr>
           <a:xfrm>
             <a:off x="3332988" y="2309774"/>
-            <a:ext cx="879653" cy="330098"/>
-          </a:xfrm>
-          <a:prstGeom prst="rect">
-            <a:avLst/>
-          </a:prstGeom>
-          <a:noFill/>
-          <a:ln/>
-        </p:spPr>
-        <p:txBody>
-          <a:bodyPr wrap="square" lIns="0" tIns="0" rIns="0" bIns="0" rtlCol="0" anchor="ctr">
-            <a:normAutofit/>
-          </a:bodyPr>
+            <a:ext cx="875081" cy="330098"/>
+          </a:xfrm>
+          <a:prstGeom prst="rect">
+            <a:avLst/>
+          </a:prstGeom>
+          <a:noFill/>
+          <a:ln/>
+        </p:spPr>
+        <p:txBody>
+          <a:bodyPr wrap="square" lIns="0" tIns="0" rIns="0" bIns="0" rtlCol="0" anchor="ctr"/>
           <a:lstStyle/>
           <a:p>
             <a:pPr algn="l" indent="0" marL="0">
               <a:lnSpc>
-                <a:spcPct val="85000"/>
+                <a:spcPct val="100000"/>
               </a:lnSpc>
               <a:buNone/>
             </a:pPr>
             <a:r>
-              <a:rPr lang="en-US" sz="500" b="1" dirty="0">
+              <a:rPr lang="en-US" sz="490" b="1" dirty="0">
                 <a:solidFill>
                   <a:srgbClr val="202124"/>
                 </a:solidFill>
@@ -23809,17 +23829,17 @@
               </a:rPr>
               <a:t>External Application Load Balancer</a:t>
             </a:r>
-            <a:endParaRPr lang="en-US" sz="500" dirty="0"/>
+            <a:endParaRPr lang="en-US" sz="490" dirty="0"/>
           </a:p>
           <a:p>
             <a:pPr algn="l" indent="0" marL="0">
               <a:lnSpc>
-                <a:spcPct val="85000"/>
+                <a:spcPct val="100000"/>
               </a:lnSpc>
               <a:buNone/>
             </a:pPr>
             <a:r>
-              <a:rPr lang="en-US" sz="430" dirty="0">
+              <a:rPr lang="en-US" sz="420" dirty="0">
                 <a:solidFill>
                   <a:srgbClr val="3C4043"/>
                 </a:solidFill>
@@ -23829,13 +23849,13 @@
               </a:rPr>
               <a:t>Cloud Load Balancing</a:t>
             </a:r>
-            <a:endParaRPr lang="en-US" sz="500" dirty="0"/>
-          </a:p>
-        </p:txBody>
-      </p:sp>
-      <p:sp>
-        <p:nvSpPr>
-          <p:cNvPr id="134" name="Shape 129"/>
+            <a:endParaRPr lang="en-US" sz="490" dirty="0"/>
+          </a:p>
+        </p:txBody>
+      </p:sp>
+      <p:sp>
+        <p:nvSpPr>
+          <p:cNvPr id="136" name="Shape 131"/>
           <p:cNvSpPr/>
           <p:nvPr/>
         </p:nvSpPr>
@@ -23862,7 +23882,7 @@
       </p:sp>
       <p:pic>
         <p:nvPicPr>
-          <p:cNvPr id="135" name="Image 3" descr="preencoded.png">    </p:cNvPr>
+          <p:cNvPr id="137" name="Image 3" descr="preencoded.png">    </p:cNvPr>
           <p:cNvPicPr>
             <a:picLocks noChangeAspect="1"/>
           </p:cNvPicPr>
@@ -23886,35 +23906,33 @@
       </p:pic>
       <p:sp>
         <p:nvSpPr>
-          <p:cNvPr id="136" name="Text 130"/>
+          <p:cNvPr id="138" name="Text 132"/>
           <p:cNvSpPr/>
           <p:nvPr/>
         </p:nvSpPr>
         <p:spPr>
           <a:xfrm>
             <a:off x="4940503" y="2197303"/>
-            <a:ext cx="950062" cy="312725"/>
-          </a:xfrm>
-          <a:prstGeom prst="rect">
-            <a:avLst/>
-          </a:prstGeom>
-          <a:noFill/>
-          <a:ln/>
-        </p:spPr>
-        <p:txBody>
-          <a:bodyPr wrap="square" lIns="0" tIns="0" rIns="0" bIns="0" rtlCol="0" anchor="ctr">
-            <a:normAutofit/>
-          </a:bodyPr>
+            <a:ext cx="945490" cy="312725"/>
+          </a:xfrm>
+          <a:prstGeom prst="rect">
+            <a:avLst/>
+          </a:prstGeom>
+          <a:noFill/>
+          <a:ln/>
+        </p:spPr>
+        <p:txBody>
+          <a:bodyPr wrap="square" lIns="0" tIns="0" rIns="0" bIns="0" rtlCol="0" anchor="ctr"/>
           <a:lstStyle/>
           <a:p>
             <a:pPr algn="l" indent="0" marL="0">
               <a:lnSpc>
-                <a:spcPct val="85000"/>
+                <a:spcPct val="100000"/>
               </a:lnSpc>
               <a:buNone/>
             </a:pPr>
             <a:r>
-              <a:rPr lang="en-US" sz="500" b="1" dirty="0">
+              <a:rPr lang="en-US" sz="490" b="1" dirty="0">
                 <a:solidFill>
                   <a:srgbClr val="202124"/>
                 </a:solidFill>
@@ -23924,17 +23942,17 @@
               </a:rPr>
               <a:t>Security Command Center</a:t>
             </a:r>
-            <a:endParaRPr lang="en-US" sz="500" dirty="0"/>
+            <a:endParaRPr lang="en-US" sz="490" dirty="0"/>
           </a:p>
           <a:p>
             <a:pPr algn="l" indent="0" marL="0">
               <a:lnSpc>
-                <a:spcPct val="85000"/>
+                <a:spcPct val="100000"/>
               </a:lnSpc>
               <a:buNone/>
             </a:pPr>
             <a:r>
-              <a:rPr lang="en-US" sz="430" dirty="0">
+              <a:rPr lang="en-US" sz="420" dirty="0">
                 <a:solidFill>
                   <a:srgbClr val="3C4043"/>
                 </a:solidFill>
@@ -23944,13 +23962,13 @@
               </a:rPr>
               <a:t>security_breach_audit_log</a:t>
             </a:r>
-            <a:endParaRPr lang="en-US" sz="500" dirty="0"/>
-          </a:p>
-        </p:txBody>
-      </p:sp>
-      <p:sp>
-        <p:nvSpPr>
-          <p:cNvPr id="137" name="Shape 131"/>
+            <a:endParaRPr lang="en-US" sz="490" dirty="0"/>
+          </a:p>
+        </p:txBody>
+      </p:sp>
+      <p:sp>
+        <p:nvSpPr>
+          <p:cNvPr id="139" name="Shape 133"/>
           <p:cNvSpPr/>
           <p:nvPr/>
         </p:nvSpPr>
@@ -23977,7 +23995,7 @@
       </p:sp>
       <p:pic>
         <p:nvPicPr>
-          <p:cNvPr id="138" name="Image 4" descr="preencoded.png">    </p:cNvPr>
+          <p:cNvPr id="140" name="Image 4" descr="preencoded.png">    </p:cNvPr>
           <p:cNvPicPr>
             <a:picLocks noChangeAspect="1"/>
           </p:cNvPicPr>
@@ -24001,35 +24019,33 @@
       </p:pic>
       <p:sp>
         <p:nvSpPr>
-          <p:cNvPr id="139" name="Text 132"/>
+          <p:cNvPr id="141" name="Text 134"/>
           <p:cNvSpPr/>
           <p:nvPr/>
         </p:nvSpPr>
         <p:spPr>
           <a:xfrm>
             <a:off x="4948733" y="2926994"/>
-            <a:ext cx="924458" cy="295351"/>
-          </a:xfrm>
-          <a:prstGeom prst="rect">
-            <a:avLst/>
-          </a:prstGeom>
-          <a:noFill/>
-          <a:ln/>
-        </p:spPr>
-        <p:txBody>
-          <a:bodyPr wrap="square" lIns="0" tIns="0" rIns="0" bIns="0" rtlCol="0" anchor="ctr">
-            <a:normAutofit/>
-          </a:bodyPr>
+            <a:ext cx="919886" cy="295351"/>
+          </a:xfrm>
+          <a:prstGeom prst="rect">
+            <a:avLst/>
+          </a:prstGeom>
+          <a:noFill/>
+          <a:ln/>
+        </p:spPr>
+        <p:txBody>
+          <a:bodyPr wrap="square" lIns="0" tIns="0" rIns="0" bIns="0" rtlCol="0" anchor="ctr"/>
           <a:lstStyle/>
           <a:p>
             <a:pPr algn="l" indent="0" marL="0">
               <a:lnSpc>
-                <a:spcPct val="85000"/>
+                <a:spcPct val="100000"/>
               </a:lnSpc>
               <a:buNone/>
             </a:pPr>
             <a:r>
-              <a:rPr lang="en-US" sz="500" b="1" dirty="0">
+              <a:rPr lang="en-US" sz="490" b="1" dirty="0">
                 <a:solidFill>
                   <a:srgbClr val="202124"/>
                 </a:solidFill>
@@ -24039,17 +24055,17 @@
               </a:rPr>
               <a:t>Cloud Logging &amp; BQ</a:t>
             </a:r>
-            <a:endParaRPr lang="en-US" sz="500" dirty="0"/>
+            <a:endParaRPr lang="en-US" sz="490" dirty="0"/>
           </a:p>
           <a:p>
             <a:pPr algn="l" indent="0" marL="0">
               <a:lnSpc>
-                <a:spcPct val="85000"/>
+                <a:spcPct val="100000"/>
               </a:lnSpc>
               <a:buNone/>
             </a:pPr>
             <a:r>
-              <a:rPr lang="en-US" sz="430" dirty="0">
+              <a:rPr lang="en-US" sz="420" dirty="0">
                 <a:solidFill>
                   <a:srgbClr val="3C4043"/>
                 </a:solidFill>
@@ -24059,13 +24075,13 @@
               </a:rPr>
               <a:t>tenant_telemetry_spans</a:t>
             </a:r>
-            <a:endParaRPr lang="en-US" sz="500" dirty="0"/>
-          </a:p>
-        </p:txBody>
-      </p:sp>
-      <p:sp>
-        <p:nvSpPr>
-          <p:cNvPr id="140" name="Shape 133"/>
+            <a:endParaRPr lang="en-US" sz="490" dirty="0"/>
+          </a:p>
+        </p:txBody>
+      </p:sp>
+      <p:sp>
+        <p:nvSpPr>
+          <p:cNvPr id="142" name="Shape 135"/>
           <p:cNvSpPr/>
           <p:nvPr/>
         </p:nvSpPr>
@@ -24092,7 +24108,7 @@
       </p:sp>
       <p:pic>
         <p:nvPicPr>
-          <p:cNvPr id="141" name="Image 5" descr="preencoded.png">    </p:cNvPr>
+          <p:cNvPr id="143" name="Image 5" descr="preencoded.png">    </p:cNvPr>
           <p:cNvPicPr>
             <a:picLocks noChangeAspect="1"/>
           </p:cNvPicPr>
@@ -24116,35 +24132,33 @@
       </p:pic>
       <p:sp>
         <p:nvSpPr>
-          <p:cNvPr id="142" name="Text 134"/>
+          <p:cNvPr id="144" name="Text 136"/>
           <p:cNvSpPr/>
           <p:nvPr/>
         </p:nvSpPr>
         <p:spPr>
           <a:xfrm>
             <a:off x="4956962" y="2570378"/>
-            <a:ext cx="907085" cy="295351"/>
-          </a:xfrm>
-          <a:prstGeom prst="rect">
-            <a:avLst/>
-          </a:prstGeom>
-          <a:noFill/>
-          <a:ln/>
-        </p:spPr>
-        <p:txBody>
-          <a:bodyPr wrap="square" lIns="0" tIns="0" rIns="0" bIns="0" rtlCol="0" anchor="ctr">
-            <a:normAutofit/>
-          </a:bodyPr>
+            <a:ext cx="902513" cy="295351"/>
+          </a:xfrm>
+          <a:prstGeom prst="rect">
+            <a:avLst/>
+          </a:prstGeom>
+          <a:noFill/>
+          <a:ln/>
+        </p:spPr>
+        <p:txBody>
+          <a:bodyPr wrap="square" lIns="0" tIns="0" rIns="0" bIns="0" rtlCol="0" anchor="ctr"/>
           <a:lstStyle/>
           <a:p>
             <a:pPr algn="l" indent="0" marL="0">
               <a:lnSpc>
-                <a:spcPct val="85000"/>
+                <a:spcPct val="100000"/>
               </a:lnSpc>
               <a:buNone/>
             </a:pPr>
             <a:r>
-              <a:rPr lang="en-US" sz="500" b="1" dirty="0">
+              <a:rPr lang="en-US" sz="490" b="1" dirty="0">
                 <a:solidFill>
                   <a:srgbClr val="202124"/>
                 </a:solidFill>
@@ -24154,17 +24168,17 @@
               </a:rPr>
               <a:t>Central IAM &amp; PAB</a:t>
             </a:r>
-            <a:endParaRPr lang="en-US" sz="500" dirty="0"/>
+            <a:endParaRPr lang="en-US" sz="490" dirty="0"/>
           </a:p>
           <a:p>
             <a:pPr algn="l" indent="0" marL="0">
               <a:lnSpc>
-                <a:spcPct val="85000"/>
+                <a:spcPct val="100000"/>
               </a:lnSpc>
               <a:buNone/>
             </a:pPr>
             <a:r>
-              <a:rPr lang="en-US" sz="430" dirty="0">
+              <a:rPr lang="en-US" sz="420" dirty="0">
                 <a:solidFill>
                   <a:srgbClr val="3C4043"/>
                 </a:solidFill>
@@ -24174,13 +24188,13 @@
               </a:rPr>
               <a:t>Agent Identity (2LO/3LO)</a:t>
             </a:r>
-            <a:endParaRPr lang="en-US" sz="500" dirty="0"/>
-          </a:p>
-        </p:txBody>
-      </p:sp>
-      <p:sp>
-        <p:nvSpPr>
-          <p:cNvPr id="143" name="Shape 135"/>
+            <a:endParaRPr lang="en-US" sz="490" dirty="0"/>
+          </a:p>
+        </p:txBody>
+      </p:sp>
+      <p:sp>
+        <p:nvSpPr>
+          <p:cNvPr id="145" name="Shape 137"/>
           <p:cNvSpPr/>
           <p:nvPr/>
         </p:nvSpPr>
@@ -24207,7 +24221,7 @@
       </p:sp>
       <p:pic>
         <p:nvPicPr>
-          <p:cNvPr id="144" name="Image 6" descr="preencoded.png">    </p:cNvPr>
+          <p:cNvPr id="146" name="Image 6" descr="preencoded.png">    </p:cNvPr>
           <p:cNvPicPr>
             <a:picLocks noChangeAspect="1"/>
           </p:cNvPicPr>
@@ -24231,35 +24245,33 @@
       </p:pic>
       <p:sp>
         <p:nvSpPr>
-          <p:cNvPr id="145" name="Text 136"/>
+          <p:cNvPr id="147" name="Text 138"/>
           <p:cNvSpPr/>
           <p:nvPr/>
         </p:nvSpPr>
         <p:spPr>
           <a:xfrm>
             <a:off x="2850185" y="4448556"/>
-            <a:ext cx="675742" cy="321869"/>
-          </a:xfrm>
-          <a:prstGeom prst="rect">
-            <a:avLst/>
-          </a:prstGeom>
-          <a:noFill/>
-          <a:ln/>
-        </p:spPr>
-        <p:txBody>
-          <a:bodyPr wrap="square" lIns="0" tIns="0" rIns="0" bIns="0" rtlCol="0" anchor="ctr">
-            <a:normAutofit/>
-          </a:bodyPr>
+            <a:ext cx="671170" cy="321869"/>
+          </a:xfrm>
+          <a:prstGeom prst="rect">
+            <a:avLst/>
+          </a:prstGeom>
+          <a:noFill/>
+          <a:ln/>
+        </p:spPr>
+        <p:txBody>
+          <a:bodyPr wrap="square" lIns="0" tIns="0" rIns="0" bIns="0" rtlCol="0" anchor="ctr"/>
           <a:lstStyle/>
           <a:p>
             <a:pPr algn="l" indent="0" marL="0">
               <a:lnSpc>
-                <a:spcPct val="85000"/>
+                <a:spcPct val="100000"/>
               </a:lnSpc>
               <a:buNone/>
             </a:pPr>
             <a:r>
-              <a:rPr lang="en-US" sz="500" b="1" dirty="0">
+              <a:rPr lang="en-US" sz="490" b="1" dirty="0">
                 <a:solidFill>
                   <a:srgbClr val="202124"/>
                 </a:solidFill>
@@ -24269,17 +24281,17 @@
               </a:rPr>
               <a:t>Vertex AI Agent Engine</a:t>
             </a:r>
-            <a:endParaRPr lang="en-US" sz="500" dirty="0"/>
+            <a:endParaRPr lang="en-US" sz="490" dirty="0"/>
           </a:p>
           <a:p>
             <a:pPr algn="l" indent="0" marL="0">
               <a:lnSpc>
-                <a:spcPct val="85000"/>
+                <a:spcPct val="100000"/>
               </a:lnSpc>
               <a:buNone/>
             </a:pPr>
             <a:r>
-              <a:rPr lang="en-US" sz="430" dirty="0">
+              <a:rPr lang="en-US" sz="420" dirty="0">
                 <a:solidFill>
                   <a:srgbClr val="3C4043"/>
                 </a:solidFill>
@@ -24289,13 +24301,13 @@
               </a:rPr>
               <a:t>gVisor + temp:tenant_id</a:t>
             </a:r>
-            <a:endParaRPr lang="en-US" sz="500" dirty="0"/>
-          </a:p>
-        </p:txBody>
-      </p:sp>
-      <p:sp>
-        <p:nvSpPr>
-          <p:cNvPr id="146" name="Shape 137"/>
+            <a:endParaRPr lang="en-US" sz="490" dirty="0"/>
+          </a:p>
+        </p:txBody>
+      </p:sp>
+      <p:sp>
+        <p:nvSpPr>
+          <p:cNvPr id="148" name="Shape 139"/>
           <p:cNvSpPr/>
           <p:nvPr/>
         </p:nvSpPr>
@@ -24322,7 +24334,7 @@
       </p:sp>
       <p:pic>
         <p:nvPicPr>
-          <p:cNvPr id="147" name="Image 7" descr="preencoded.png">    </p:cNvPr>
+          <p:cNvPr id="149" name="Image 7" descr="preencoded.png">    </p:cNvPr>
           <p:cNvPicPr>
             <a:picLocks noChangeAspect="1"/>
           </p:cNvPicPr>
@@ -24346,35 +24358,33 @@
       </p:pic>
       <p:sp>
         <p:nvSpPr>
-          <p:cNvPr id="148" name="Text 138"/>
+          <p:cNvPr id="150" name="Text 140"/>
           <p:cNvSpPr/>
           <p:nvPr/>
         </p:nvSpPr>
         <p:spPr>
           <a:xfrm>
             <a:off x="2850185" y="5074006"/>
-            <a:ext cx="675742" cy="321869"/>
-          </a:xfrm>
-          <a:prstGeom prst="rect">
-            <a:avLst/>
-          </a:prstGeom>
-          <a:noFill/>
-          <a:ln/>
-        </p:spPr>
-        <p:txBody>
-          <a:bodyPr wrap="square" lIns="0" tIns="0" rIns="0" bIns="0" rtlCol="0" anchor="ctr">
-            <a:normAutofit/>
-          </a:bodyPr>
+            <a:ext cx="671170" cy="321869"/>
+          </a:xfrm>
+          <a:prstGeom prst="rect">
+            <a:avLst/>
+          </a:prstGeom>
+          <a:noFill/>
+          <a:ln/>
+        </p:spPr>
+        <p:txBody>
+          <a:bodyPr wrap="square" lIns="0" tIns="0" rIns="0" bIns="0" rtlCol="0" anchor="ctr"/>
           <a:lstStyle/>
           <a:p>
             <a:pPr algn="l" indent="0" marL="0">
               <a:lnSpc>
-                <a:spcPct val="85000"/>
+                <a:spcPct val="100000"/>
               </a:lnSpc>
               <a:buNone/>
             </a:pPr>
             <a:r>
-              <a:rPr lang="en-US" sz="500" b="1" dirty="0">
+              <a:rPr lang="en-US" sz="490" b="1" dirty="0">
                 <a:solidFill>
                   <a:srgbClr val="202124"/>
                 </a:solidFill>
@@ -24384,17 +24394,17 @@
               </a:rPr>
               <a:t>MCP servers</a:t>
             </a:r>
-            <a:endParaRPr lang="en-US" sz="500" dirty="0"/>
+            <a:endParaRPr lang="en-US" sz="490" dirty="0"/>
           </a:p>
           <a:p>
             <a:pPr algn="l" indent="0" marL="0">
               <a:lnSpc>
-                <a:spcPct val="85000"/>
+                <a:spcPct val="100000"/>
               </a:lnSpc>
               <a:buNone/>
             </a:pPr>
             <a:r>
-              <a:rPr lang="en-US" sz="430" dirty="0">
+              <a:rPr lang="en-US" sz="420" dirty="0">
                 <a:solidFill>
                   <a:srgbClr val="3C4043"/>
                 </a:solidFill>
@@ -24404,13 +24414,13 @@
               </a:rPr>
               <a:t>2LO + 3LO OIDC/Entra</a:t>
             </a:r>
-            <a:endParaRPr lang="en-US" sz="500" dirty="0"/>
-          </a:p>
-        </p:txBody>
-      </p:sp>
-      <p:sp>
-        <p:nvSpPr>
-          <p:cNvPr id="149" name="Shape 139"/>
+            <a:endParaRPr lang="en-US" sz="490" dirty="0"/>
+          </a:p>
+        </p:txBody>
+      </p:sp>
+      <p:sp>
+        <p:nvSpPr>
+          <p:cNvPr id="151" name="Shape 141"/>
           <p:cNvSpPr/>
           <p:nvPr/>
         </p:nvSpPr>
@@ -24437,7 +24447,7 @@
       </p:sp>
       <p:pic>
         <p:nvPicPr>
-          <p:cNvPr id="150" name="Image 8" descr="preencoded.png">    </p:cNvPr>
+          <p:cNvPr id="152" name="Image 8" descr="preencoded.png">    </p:cNvPr>
           <p:cNvPicPr>
             <a:picLocks noChangeAspect="1"/>
           </p:cNvPicPr>
@@ -24461,35 +24471,33 @@
       </p:pic>
       <p:sp>
         <p:nvSpPr>
-          <p:cNvPr id="151" name="Text 140"/>
+          <p:cNvPr id="153" name="Text 142"/>
           <p:cNvSpPr/>
           <p:nvPr/>
         </p:nvSpPr>
         <p:spPr>
           <a:xfrm>
             <a:off x="2850185" y="5725973"/>
-            <a:ext cx="675742" cy="321869"/>
-          </a:xfrm>
-          <a:prstGeom prst="rect">
-            <a:avLst/>
-          </a:prstGeom>
-          <a:noFill/>
-          <a:ln/>
-        </p:spPr>
-        <p:txBody>
-          <a:bodyPr wrap="square" lIns="0" tIns="0" rIns="0" bIns="0" rtlCol="0" anchor="ctr">
-            <a:normAutofit/>
-          </a:bodyPr>
+            <a:ext cx="671170" cy="321869"/>
+          </a:xfrm>
+          <a:prstGeom prst="rect">
+            <a:avLst/>
+          </a:prstGeom>
+          <a:noFill/>
+          <a:ln/>
+        </p:spPr>
+        <p:txBody>
+          <a:bodyPr wrap="square" lIns="0" tIns="0" rIns="0" bIns="0" rtlCol="0" anchor="ctr"/>
           <a:lstStyle/>
           <a:p>
             <a:pPr algn="l" indent="0" marL="0">
               <a:lnSpc>
-                <a:spcPct val="85000"/>
+                <a:spcPct val="100000"/>
               </a:lnSpc>
               <a:buNone/>
             </a:pPr>
             <a:r>
-              <a:rPr lang="en-US" sz="500" b="1" dirty="0">
+              <a:rPr lang="en-US" sz="490" b="1" dirty="0">
                 <a:solidFill>
                   <a:srgbClr val="202124"/>
                 </a:solidFill>
@@ -24499,17 +24507,17 @@
               </a:rPr>
               <a:t>AlloyDB &amp; BQ RLS</a:t>
             </a:r>
-            <a:endParaRPr lang="en-US" sz="500" dirty="0"/>
+            <a:endParaRPr lang="en-US" sz="490" dirty="0"/>
           </a:p>
           <a:p>
             <a:pPr algn="l" indent="0" marL="0">
               <a:lnSpc>
-                <a:spcPct val="85000"/>
+                <a:spcPct val="100000"/>
               </a:lnSpc>
               <a:buNone/>
             </a:pPr>
             <a:r>
-              <a:rPr lang="en-US" sz="430" dirty="0">
+              <a:rPr lang="en-US" sz="373" dirty="0">
                 <a:solidFill>
                   <a:srgbClr val="3C4043"/>
                 </a:solidFill>
@@ -24519,13 +24527,13 @@
               </a:rPr>
               <a:t>tenant_pooled_rls_policy</a:t>
             </a:r>
-            <a:endParaRPr lang="en-US" sz="500" dirty="0"/>
-          </a:p>
-        </p:txBody>
-      </p:sp>
-      <p:sp>
-        <p:nvSpPr>
-          <p:cNvPr id="152" name="Shape 141"/>
+            <a:endParaRPr lang="en-US" sz="490" dirty="0"/>
+          </a:p>
+        </p:txBody>
+      </p:sp>
+      <p:sp>
+        <p:nvSpPr>
+          <p:cNvPr id="154" name="Shape 143"/>
           <p:cNvSpPr/>
           <p:nvPr/>
         </p:nvSpPr>
@@ -24552,7 +24560,7 @@
       </p:sp>
       <p:pic>
         <p:nvPicPr>
-          <p:cNvPr id="153" name="Image 9" descr="preencoded.png">    </p:cNvPr>
+          <p:cNvPr id="155" name="Image 9" descr="preencoded.png">    </p:cNvPr>
           <p:cNvPicPr>
             <a:picLocks noChangeAspect="1"/>
           </p:cNvPicPr>
@@ -24576,35 +24584,33 @@
       </p:pic>
       <p:sp>
         <p:nvSpPr>
-          <p:cNvPr id="154" name="Text 142"/>
+          <p:cNvPr id="156" name="Text 144"/>
           <p:cNvSpPr/>
           <p:nvPr/>
         </p:nvSpPr>
         <p:spPr>
           <a:xfrm>
             <a:off x="5213909" y="4448556"/>
-            <a:ext cx="675742" cy="321869"/>
-          </a:xfrm>
-          <a:prstGeom prst="rect">
-            <a:avLst/>
-          </a:prstGeom>
-          <a:noFill/>
-          <a:ln/>
-        </p:spPr>
-        <p:txBody>
-          <a:bodyPr wrap="square" lIns="0" tIns="0" rIns="0" bIns="0" rtlCol="0" anchor="ctr">
-            <a:normAutofit/>
-          </a:bodyPr>
+            <a:ext cx="671170" cy="321869"/>
+          </a:xfrm>
+          <a:prstGeom prst="rect">
+            <a:avLst/>
+          </a:prstGeom>
+          <a:noFill/>
+          <a:ln/>
+        </p:spPr>
+        <p:txBody>
+          <a:bodyPr wrap="square" lIns="0" tIns="0" rIns="0" bIns="0" rtlCol="0" anchor="ctr"/>
           <a:lstStyle/>
           <a:p>
             <a:pPr algn="l" indent="0" marL="0">
               <a:lnSpc>
-                <a:spcPct val="85000"/>
+                <a:spcPct val="100000"/>
               </a:lnSpc>
               <a:buNone/>
             </a:pPr>
             <a:r>
-              <a:rPr lang="en-US" sz="500" b="1" dirty="0">
+              <a:rPr lang="en-US" sz="490" b="1" dirty="0">
                 <a:solidFill>
                   <a:srgbClr val="202124"/>
                 </a:solidFill>
@@ -24614,17 +24620,17 @@
               </a:rPr>
               <a:t>Vertex AI Agent Engine</a:t>
             </a:r>
-            <a:endParaRPr lang="en-US" sz="500" dirty="0"/>
+            <a:endParaRPr lang="en-US" sz="490" dirty="0"/>
           </a:p>
           <a:p>
             <a:pPr algn="l" indent="0" marL="0">
               <a:lnSpc>
-                <a:spcPct val="85000"/>
+                <a:spcPct val="100000"/>
               </a:lnSpc>
               <a:buNone/>
             </a:pPr>
             <a:r>
-              <a:rPr lang="en-US" sz="430" dirty="0">
+              <a:rPr lang="en-US" sz="420" dirty="0">
                 <a:solidFill>
                   <a:srgbClr val="3C4043"/>
                 </a:solidFill>
@@ -24634,13 +24640,13 @@
               </a:rPr>
               <a:t>Dedicated Silo + Agent Alpha</a:t>
             </a:r>
-            <a:endParaRPr lang="en-US" sz="500" dirty="0"/>
-          </a:p>
-        </p:txBody>
-      </p:sp>
-      <p:sp>
-        <p:nvSpPr>
-          <p:cNvPr id="155" name="Shape 143"/>
+            <a:endParaRPr lang="en-US" sz="490" dirty="0"/>
+          </a:p>
+        </p:txBody>
+      </p:sp>
+      <p:sp>
+        <p:nvSpPr>
+          <p:cNvPr id="157" name="Shape 145"/>
           <p:cNvSpPr/>
           <p:nvPr/>
         </p:nvSpPr>
@@ -24667,7 +24673,7 @@
       </p:sp>
       <p:pic>
         <p:nvPicPr>
-          <p:cNvPr id="156" name="Image 10" descr="preencoded.png">    </p:cNvPr>
+          <p:cNvPr id="158" name="Image 10" descr="preencoded.png">    </p:cNvPr>
           <p:cNvPicPr>
             <a:picLocks noChangeAspect="1"/>
           </p:cNvPicPr>
@@ -24691,35 +24697,33 @@
       </p:pic>
       <p:sp>
         <p:nvSpPr>
-          <p:cNvPr id="157" name="Text 144"/>
+          <p:cNvPr id="159" name="Text 146"/>
           <p:cNvSpPr/>
           <p:nvPr/>
         </p:nvSpPr>
         <p:spPr>
           <a:xfrm>
             <a:off x="5213909" y="5074006"/>
-            <a:ext cx="675742" cy="321869"/>
-          </a:xfrm>
-          <a:prstGeom prst="rect">
-            <a:avLst/>
-          </a:prstGeom>
-          <a:noFill/>
-          <a:ln/>
-        </p:spPr>
-        <p:txBody>
-          <a:bodyPr wrap="square" lIns="0" tIns="0" rIns="0" bIns="0" rtlCol="0" anchor="ctr">
-            <a:normAutofit/>
-          </a:bodyPr>
+            <a:ext cx="671170" cy="321869"/>
+          </a:xfrm>
+          <a:prstGeom prst="rect">
+            <a:avLst/>
+          </a:prstGeom>
+          <a:noFill/>
+          <a:ln/>
+        </p:spPr>
+        <p:txBody>
+          <a:bodyPr wrap="square" lIns="0" tIns="0" rIns="0" bIns="0" rtlCol="0" anchor="ctr"/>
           <a:lstStyle/>
           <a:p>
             <a:pPr algn="l" indent="0" marL="0">
               <a:lnSpc>
-                <a:spcPct val="85000"/>
+                <a:spcPct val="100000"/>
               </a:lnSpc>
               <a:buNone/>
             </a:pPr>
             <a:r>
-              <a:rPr lang="en-US" sz="500" b="1" dirty="0">
+              <a:rPr lang="en-US" sz="490" b="1" dirty="0">
                 <a:solidFill>
                   <a:srgbClr val="202124"/>
                 </a:solidFill>
@@ -24729,17 +24733,17 @@
               </a:rPr>
               <a:t>MCP servers</a:t>
             </a:r>
-            <a:endParaRPr lang="en-US" sz="500" dirty="0"/>
+            <a:endParaRPr lang="en-US" sz="490" dirty="0"/>
           </a:p>
           <a:p>
             <a:pPr algn="l" indent="0" marL="0">
               <a:lnSpc>
-                <a:spcPct val="85000"/>
+                <a:spcPct val="100000"/>
               </a:lnSpc>
               <a:buNone/>
             </a:pPr>
             <a:r>
-              <a:rPr lang="en-US" sz="430" dirty="0">
+              <a:rPr lang="en-US" sz="420" dirty="0">
                 <a:solidFill>
                   <a:srgbClr val="3C4043"/>
                 </a:solidFill>
@@ -24749,13 +24753,13 @@
               </a:rPr>
               <a:t>Local Silo 3LO Connectors</a:t>
             </a:r>
-            <a:endParaRPr lang="en-US" sz="500" dirty="0"/>
-          </a:p>
-        </p:txBody>
-      </p:sp>
-      <p:sp>
-        <p:nvSpPr>
-          <p:cNvPr id="158" name="Shape 145"/>
+            <a:endParaRPr lang="en-US" sz="490" dirty="0"/>
+          </a:p>
+        </p:txBody>
+      </p:sp>
+      <p:sp>
+        <p:nvSpPr>
+          <p:cNvPr id="160" name="Shape 147"/>
           <p:cNvSpPr/>
           <p:nvPr/>
         </p:nvSpPr>
@@ -24782,7 +24786,7 @@
       </p:sp>
       <p:pic>
         <p:nvPicPr>
-          <p:cNvPr id="159" name="Image 11" descr="preencoded.png">    </p:cNvPr>
+          <p:cNvPr id="161" name="Image 11" descr="preencoded.png">    </p:cNvPr>
           <p:cNvPicPr>
             <a:picLocks noChangeAspect="1"/>
           </p:cNvPicPr>
@@ -24806,35 +24810,33 @@
       </p:pic>
       <p:sp>
         <p:nvSpPr>
-          <p:cNvPr id="160" name="Text 146"/>
+          <p:cNvPr id="162" name="Text 148"/>
           <p:cNvSpPr/>
           <p:nvPr/>
         </p:nvSpPr>
         <p:spPr>
           <a:xfrm>
             <a:off x="5213909" y="5725973"/>
-            <a:ext cx="675742" cy="321869"/>
-          </a:xfrm>
-          <a:prstGeom prst="rect">
-            <a:avLst/>
-          </a:prstGeom>
-          <a:noFill/>
-          <a:ln/>
-        </p:spPr>
-        <p:txBody>
-          <a:bodyPr wrap="square" lIns="0" tIns="0" rIns="0" bIns="0" rtlCol="0" anchor="ctr">
-            <a:normAutofit/>
-          </a:bodyPr>
+            <a:ext cx="671170" cy="321869"/>
+          </a:xfrm>
+          <a:prstGeom prst="rect">
+            <a:avLst/>
+          </a:prstGeom>
+          <a:noFill/>
+          <a:ln/>
+        </p:spPr>
+        <p:txBody>
+          <a:bodyPr wrap="square" lIns="0" tIns="0" rIns="0" bIns="0" rtlCol="0" anchor="ctr"/>
           <a:lstStyle/>
           <a:p>
             <a:pPr algn="l" indent="0" marL="0">
               <a:lnSpc>
-                <a:spcPct val="85000"/>
+                <a:spcPct val="100000"/>
               </a:lnSpc>
               <a:buNone/>
             </a:pPr>
             <a:r>
-              <a:rPr lang="en-US" sz="500" b="1" dirty="0">
+              <a:rPr lang="en-US" sz="490" b="1" dirty="0">
                 <a:solidFill>
                   <a:srgbClr val="202124"/>
                 </a:solidFill>
@@ -24844,17 +24846,17 @@
               </a:rPr>
               <a:t>CMEK Datastore</a:t>
             </a:r>
-            <a:endParaRPr lang="en-US" sz="500" dirty="0"/>
+            <a:endParaRPr lang="en-US" sz="490" dirty="0"/>
           </a:p>
           <a:p>
             <a:pPr algn="l" indent="0" marL="0">
               <a:lnSpc>
-                <a:spcPct val="85000"/>
+                <a:spcPct val="100000"/>
               </a:lnSpc>
               <a:buNone/>
             </a:pPr>
             <a:r>
-              <a:rPr lang="en-US" sz="430" dirty="0">
+              <a:rPr lang="en-US" sz="420" dirty="0">
                 <a:solidFill>
                   <a:srgbClr val="3C4043"/>
                 </a:solidFill>
@@ -24864,13 +24866,13 @@
               </a:rPr>
               <a:t>finvault-silo-cmek &amp; 423 Lock</a:t>
             </a:r>
-            <a:endParaRPr lang="en-US" sz="500" dirty="0"/>
-          </a:p>
-        </p:txBody>
-      </p:sp>
-      <p:sp>
-        <p:nvSpPr>
-          <p:cNvPr id="161" name="Shape 147"/>
+            <a:endParaRPr lang="en-US" sz="490" dirty="0"/>
+          </a:p>
+        </p:txBody>
+      </p:sp>
+      <p:sp>
+        <p:nvSpPr>
+          <p:cNvPr id="163" name="Shape 149"/>
           <p:cNvSpPr/>
           <p:nvPr/>
         </p:nvSpPr>
@@ -24897,7 +24899,7 @@
       </p:sp>
       <p:pic>
         <p:nvPicPr>
-          <p:cNvPr id="162" name="Image 12" descr="preencoded.png">    </p:cNvPr>
+          <p:cNvPr id="164" name="Image 12" descr="preencoded.png">    </p:cNvPr>
           <p:cNvPicPr>
             <a:picLocks noChangeAspect="1"/>
           </p:cNvPicPr>
@@ -24921,35 +24923,33 @@
       </p:pic>
       <p:sp>
         <p:nvSpPr>
-          <p:cNvPr id="163" name="Text 148"/>
+          <p:cNvPr id="165" name="Text 150"/>
           <p:cNvSpPr/>
           <p:nvPr/>
         </p:nvSpPr>
         <p:spPr>
           <a:xfrm>
             <a:off x="3414370" y="2953512"/>
-            <a:ext cx="737921" cy="287122"/>
-          </a:xfrm>
-          <a:prstGeom prst="rect">
-            <a:avLst/>
-          </a:prstGeom>
-          <a:noFill/>
-          <a:ln/>
-        </p:spPr>
-        <p:txBody>
-          <a:bodyPr wrap="square" lIns="0" tIns="0" rIns="0" bIns="0" rtlCol="0" anchor="ctr">
-            <a:normAutofit/>
-          </a:bodyPr>
+            <a:ext cx="733349" cy="287122"/>
+          </a:xfrm>
+          <a:prstGeom prst="rect">
+            <a:avLst/>
+          </a:prstGeom>
+          <a:noFill/>
+          <a:ln/>
+        </p:spPr>
+        <p:txBody>
+          <a:bodyPr wrap="square" lIns="0" tIns="0" rIns="0" bIns="0" rtlCol="0" anchor="ctr"/>
           <a:lstStyle/>
           <a:p>
             <a:pPr algn="l" indent="0" marL="0">
               <a:lnSpc>
-                <a:spcPct val="85000"/>
+                <a:spcPct val="100000"/>
               </a:lnSpc>
               <a:buNone/>
             </a:pPr>
             <a:r>
-              <a:rPr lang="en-US" sz="500" b="1" dirty="0">
+              <a:rPr lang="en-US" sz="490" b="1" dirty="0">
                 <a:solidFill>
                   <a:srgbClr val="202124"/>
                 </a:solidFill>
@@ -24959,17 +24959,17 @@
               </a:rPr>
               <a:t>Cloud Run</a:t>
             </a:r>
-            <a:endParaRPr lang="en-US" sz="500" dirty="0"/>
+            <a:endParaRPr lang="en-US" sz="490" dirty="0"/>
           </a:p>
           <a:p>
             <a:pPr algn="l" indent="0" marL="0">
               <a:lnSpc>
-                <a:spcPct val="85000"/>
+                <a:spcPct val="100000"/>
               </a:lnSpc>
               <a:buNone/>
             </a:pPr>
             <a:r>
-              <a:rPr lang="en-US" sz="430" dirty="0">
+              <a:rPr lang="en-US" sz="350" dirty="0">
                 <a:solidFill>
                   <a:srgbClr val="3C4043"/>
                 </a:solidFill>
@@ -24979,13 +24979,13 @@
               </a:rPr>
               <a:t>cymbal-multi-tenant-patterns</a:t>
             </a:r>
-            <a:endParaRPr lang="en-US" sz="500" dirty="0"/>
-          </a:p>
-        </p:txBody>
-      </p:sp>
-      <p:sp>
-        <p:nvSpPr>
-          <p:cNvPr id="164" name="Shape 149"/>
+            <a:endParaRPr lang="en-US" sz="490" dirty="0"/>
+          </a:p>
+        </p:txBody>
+      </p:sp>
+      <p:sp>
+        <p:nvSpPr>
+          <p:cNvPr id="166" name="Shape 151"/>
           <p:cNvSpPr/>
           <p:nvPr/>
         </p:nvSpPr>
@@ -25012,7 +25012,7 @@
       </p:sp>
       <p:pic>
         <p:nvPicPr>
-          <p:cNvPr id="165" name="Image 13" descr="preencoded.png">    </p:cNvPr>
+          <p:cNvPr id="167" name="Image 13" descr="preencoded.png">    </p:cNvPr>
           <p:cNvPicPr>
             <a:picLocks noChangeAspect="1"/>
           </p:cNvPicPr>
@@ -25036,35 +25036,33 @@
       </p:pic>
       <p:sp>
         <p:nvSpPr>
-          <p:cNvPr id="166" name="Text 150"/>
+          <p:cNvPr id="168" name="Text 152"/>
           <p:cNvSpPr/>
           <p:nvPr/>
         </p:nvSpPr>
         <p:spPr>
           <a:xfrm>
             <a:off x="1775765" y="4230929"/>
-            <a:ext cx="593446" cy="312725"/>
-          </a:xfrm>
-          <a:prstGeom prst="rect">
-            <a:avLst/>
-          </a:prstGeom>
-          <a:noFill/>
-          <a:ln/>
-        </p:spPr>
-        <p:txBody>
-          <a:bodyPr wrap="square" lIns="0" tIns="0" rIns="0" bIns="0" rtlCol="0" anchor="ctr">
-            <a:normAutofit/>
-          </a:bodyPr>
+            <a:ext cx="588874" cy="312725"/>
+          </a:xfrm>
+          <a:prstGeom prst="rect">
+            <a:avLst/>
+          </a:prstGeom>
+          <a:noFill/>
+          <a:ln/>
+        </p:spPr>
+        <p:txBody>
+          <a:bodyPr wrap="square" lIns="0" tIns="0" rIns="0" bIns="0" rtlCol="0" anchor="ctr"/>
           <a:lstStyle/>
           <a:p>
             <a:pPr algn="l" indent="0" marL="0">
               <a:lnSpc>
-                <a:spcPct val="85000"/>
+                <a:spcPct val="100000"/>
               </a:lnSpc>
               <a:buNone/>
             </a:pPr>
             <a:r>
-              <a:rPr lang="en-US" sz="500" b="1" dirty="0">
+              <a:rPr lang="en-US" sz="490" b="1" dirty="0">
                 <a:solidFill>
                   <a:srgbClr val="202124"/>
                 </a:solidFill>
@@ -25074,17 +25072,17 @@
               </a:rPr>
               <a:t>Model Armor</a:t>
             </a:r>
-            <a:endParaRPr lang="en-US" sz="500" dirty="0"/>
+            <a:endParaRPr lang="en-US" sz="490" dirty="0"/>
           </a:p>
           <a:p>
             <a:pPr algn="l" indent="0" marL="0">
               <a:lnSpc>
-                <a:spcPct val="85000"/>
+                <a:spcPct val="100000"/>
               </a:lnSpc>
               <a:buNone/>
             </a:pPr>
             <a:r>
-              <a:rPr lang="en-US" sz="430" dirty="0">
+              <a:rPr lang="en-US" sz="420" dirty="0">
                 <a:solidFill>
                   <a:srgbClr val="3C4043"/>
                 </a:solidFill>
@@ -25094,13 +25092,13 @@
               </a:rPr>
               <a:t>Tenant Rai Filters &amp; SDP PII</a:t>
             </a:r>
-            <a:endParaRPr lang="en-US" sz="500" dirty="0"/>
-          </a:p>
-        </p:txBody>
-      </p:sp>
-      <p:sp>
-        <p:nvSpPr>
-          <p:cNvPr id="167" name="Shape 151"/>
+            <a:endParaRPr lang="en-US" sz="490" dirty="0"/>
+          </a:p>
+        </p:txBody>
+      </p:sp>
+      <p:sp>
+        <p:nvSpPr>
+          <p:cNvPr id="169" name="Shape 153"/>
           <p:cNvSpPr/>
           <p:nvPr/>
         </p:nvSpPr>
@@ -25127,7 +25125,7 @@
       </p:sp>
       <p:pic>
         <p:nvPicPr>
-          <p:cNvPr id="168" name="Image 14" descr="preencoded.png">    </p:cNvPr>
+          <p:cNvPr id="170" name="Image 14" descr="preencoded.png">    </p:cNvPr>
           <p:cNvPicPr>
             <a:picLocks noChangeAspect="1"/>
           </p:cNvPicPr>
@@ -25151,35 +25149,33 @@
       </p:pic>
       <p:sp>
         <p:nvSpPr>
-          <p:cNvPr id="169" name="Text 152"/>
+          <p:cNvPr id="171" name="Text 154"/>
           <p:cNvSpPr/>
           <p:nvPr/>
         </p:nvSpPr>
         <p:spPr>
           <a:xfrm>
             <a:off x="1775765" y="5256886"/>
-            <a:ext cx="593446" cy="312725"/>
-          </a:xfrm>
-          <a:prstGeom prst="rect">
-            <a:avLst/>
-          </a:prstGeom>
-          <a:noFill/>
-          <a:ln/>
-        </p:spPr>
-        <p:txBody>
-          <a:bodyPr wrap="square" lIns="0" tIns="0" rIns="0" bIns="0" rtlCol="0" anchor="ctr">
-            <a:normAutofit/>
-          </a:bodyPr>
+            <a:ext cx="588874" cy="312725"/>
+          </a:xfrm>
+          <a:prstGeom prst="rect">
+            <a:avLst/>
+          </a:prstGeom>
+          <a:noFill/>
+          <a:ln/>
+        </p:spPr>
+        <p:txBody>
+          <a:bodyPr wrap="square" lIns="0" tIns="0" rIns="0" bIns="0" rtlCol="0" anchor="ctr"/>
           <a:lstStyle/>
           <a:p>
             <a:pPr algn="l" indent="0" marL="0">
               <a:lnSpc>
-                <a:spcPct val="85000"/>
+                <a:spcPct val="100000"/>
               </a:lnSpc>
               <a:buNone/>
             </a:pPr>
             <a:r>
-              <a:rPr lang="en-US" sz="500" b="1" dirty="0">
+              <a:rPr lang="en-US" sz="490" b="1" dirty="0">
                 <a:solidFill>
                   <a:srgbClr val="202124"/>
                 </a:solidFill>
@@ -25189,17 +25185,17 @@
               </a:rPr>
               <a:t>Gemini 2.5 Pro</a:t>
             </a:r>
-            <a:endParaRPr lang="en-US" sz="500" dirty="0"/>
+            <a:endParaRPr lang="en-US" sz="490" dirty="0"/>
           </a:p>
           <a:p>
             <a:pPr algn="l" indent="0" marL="0">
               <a:lnSpc>
-                <a:spcPct val="85000"/>
+                <a:spcPct val="100000"/>
               </a:lnSpc>
               <a:buNone/>
             </a:pPr>
             <a:r>
-              <a:rPr lang="en-US" sz="430" dirty="0">
+              <a:rPr lang="en-US" sz="420" dirty="0">
                 <a:solidFill>
                   <a:srgbClr val="3C4043"/>
                 </a:solidFill>
@@ -25209,13 +25205,13 @@
               </a:rPr>
               <a:t>90% Prefix Cache Savings</a:t>
             </a:r>
-            <a:endParaRPr lang="en-US" sz="500" dirty="0"/>
-          </a:p>
-        </p:txBody>
-      </p:sp>
-      <p:sp>
-        <p:nvSpPr>
-          <p:cNvPr id="170" name="Shape 153"/>
+            <a:endParaRPr lang="en-US" sz="490" dirty="0"/>
+          </a:p>
+        </p:txBody>
+      </p:sp>
+      <p:sp>
+        <p:nvSpPr>
+          <p:cNvPr id="172" name="Shape 155"/>
           <p:cNvSpPr/>
           <p:nvPr/>
         </p:nvSpPr>
@@ -25242,7 +25238,7 @@
       </p:sp>
       <p:pic>
         <p:nvPicPr>
-          <p:cNvPr id="171" name="Image 15" descr="preencoded.png">    </p:cNvPr>
+          <p:cNvPr id="173" name="Image 15" descr="preencoded.png">    </p:cNvPr>
           <p:cNvPicPr>
             <a:picLocks noChangeAspect="1"/>
           </p:cNvPicPr>
@@ -25266,35 +25262,33 @@
       </p:pic>
       <p:sp>
         <p:nvSpPr>
-          <p:cNvPr id="172" name="Text 154"/>
+          <p:cNvPr id="174" name="Text 156"/>
           <p:cNvSpPr/>
           <p:nvPr/>
         </p:nvSpPr>
         <p:spPr>
           <a:xfrm>
             <a:off x="4140403" y="4230929"/>
-            <a:ext cx="593446" cy="312725"/>
-          </a:xfrm>
-          <a:prstGeom prst="rect">
-            <a:avLst/>
-          </a:prstGeom>
-          <a:noFill/>
-          <a:ln/>
-        </p:spPr>
-        <p:txBody>
-          <a:bodyPr wrap="square" lIns="0" tIns="0" rIns="0" bIns="0" rtlCol="0" anchor="ctr">
-            <a:normAutofit/>
-          </a:bodyPr>
+            <a:ext cx="588874" cy="312725"/>
+          </a:xfrm>
+          <a:prstGeom prst="rect">
+            <a:avLst/>
+          </a:prstGeom>
+          <a:noFill/>
+          <a:ln/>
+        </p:spPr>
+        <p:txBody>
+          <a:bodyPr wrap="square" lIns="0" tIns="0" rIns="0" bIns="0" rtlCol="0" anchor="ctr"/>
           <a:lstStyle/>
           <a:p>
             <a:pPr algn="l" indent="0" marL="0">
               <a:lnSpc>
-                <a:spcPct val="85000"/>
+                <a:spcPct val="100000"/>
               </a:lnSpc>
               <a:buNone/>
             </a:pPr>
             <a:r>
-              <a:rPr lang="en-US" sz="500" b="1" dirty="0">
+              <a:rPr lang="en-US" sz="490" b="1" dirty="0">
                 <a:solidFill>
                   <a:srgbClr val="202124"/>
                 </a:solidFill>
@@ -25304,17 +25298,17 @@
               </a:rPr>
               <a:t>VPC-SC &amp; Model Armor</a:t>
             </a:r>
-            <a:endParaRPr lang="en-US" sz="500" dirty="0"/>
+            <a:endParaRPr lang="en-US" sz="490" dirty="0"/>
           </a:p>
           <a:p>
             <a:pPr algn="l" indent="0" marL="0">
               <a:lnSpc>
-                <a:spcPct val="85000"/>
+                <a:spcPct val="100000"/>
               </a:lnSpc>
               <a:buNone/>
             </a:pPr>
             <a:r>
-              <a:rPr lang="en-US" sz="430" dirty="0">
+              <a:rPr lang="en-US" sz="420" dirty="0">
                 <a:solidFill>
                   <a:srgbClr val="3C4043"/>
                 </a:solidFill>
@@ -25324,13 +25318,13 @@
               </a:rPr>
               <a:t>Sovereign Silo Guardrails</a:t>
             </a:r>
-            <a:endParaRPr lang="en-US" sz="500" dirty="0"/>
-          </a:p>
-        </p:txBody>
-      </p:sp>
-      <p:sp>
-        <p:nvSpPr>
-          <p:cNvPr id="173" name="Shape 155"/>
+            <a:endParaRPr lang="en-US" sz="490" dirty="0"/>
+          </a:p>
+        </p:txBody>
+      </p:sp>
+      <p:sp>
+        <p:nvSpPr>
+          <p:cNvPr id="175" name="Shape 157"/>
           <p:cNvSpPr/>
           <p:nvPr/>
         </p:nvSpPr>
@@ -25357,7 +25351,7 @@
       </p:sp>
       <p:pic>
         <p:nvPicPr>
-          <p:cNvPr id="174" name="Image 16" descr="preencoded.png">    </p:cNvPr>
+          <p:cNvPr id="176" name="Image 16" descr="preencoded.png">    </p:cNvPr>
           <p:cNvPicPr>
             <a:picLocks noChangeAspect="1"/>
           </p:cNvPicPr>
@@ -25381,35 +25375,33 @@
       </p:pic>
       <p:sp>
         <p:nvSpPr>
-          <p:cNvPr id="175" name="Text 156"/>
+          <p:cNvPr id="177" name="Text 158"/>
           <p:cNvSpPr/>
           <p:nvPr/>
         </p:nvSpPr>
         <p:spPr>
           <a:xfrm>
             <a:off x="4140403" y="4674413"/>
-            <a:ext cx="593446" cy="312725"/>
-          </a:xfrm>
-          <a:prstGeom prst="rect">
-            <a:avLst/>
-          </a:prstGeom>
-          <a:noFill/>
-          <a:ln/>
-        </p:spPr>
-        <p:txBody>
-          <a:bodyPr wrap="square" lIns="0" tIns="0" rIns="0" bIns="0" rtlCol="0" anchor="ctr">
-            <a:normAutofit/>
-          </a:bodyPr>
+            <a:ext cx="588874" cy="312725"/>
+          </a:xfrm>
+          <a:prstGeom prst="rect">
+            <a:avLst/>
+          </a:prstGeom>
+          <a:noFill/>
+          <a:ln/>
+        </p:spPr>
+        <p:txBody>
+          <a:bodyPr wrap="square" lIns="0" tIns="0" rIns="0" bIns="0" rtlCol="0" anchor="ctr"/>
           <a:lstStyle/>
           <a:p>
             <a:pPr algn="l" indent="0" marL="0">
               <a:lnSpc>
-                <a:spcPct val="85000"/>
+                <a:spcPct val="100000"/>
               </a:lnSpc>
               <a:buNone/>
             </a:pPr>
             <a:r>
-              <a:rPr lang="en-US" sz="500" b="1" dirty="0">
+              <a:rPr lang="en-US" sz="490" b="1" dirty="0">
                 <a:solidFill>
                   <a:srgbClr val="202124"/>
                 </a:solidFill>
@@ -25419,17 +25411,17 @@
               </a:rPr>
               <a:t>Gemini / Gemma 3</a:t>
             </a:r>
-            <a:endParaRPr lang="en-US" sz="500" dirty="0"/>
+            <a:endParaRPr lang="en-US" sz="490" dirty="0"/>
           </a:p>
           <a:p>
             <a:pPr algn="l" indent="0" marL="0">
               <a:lnSpc>
-                <a:spcPct val="85000"/>
+                <a:spcPct val="100000"/>
               </a:lnSpc>
               <a:buNone/>
             </a:pPr>
             <a:r>
-              <a:rPr lang="en-US" sz="430" dirty="0">
+              <a:rPr lang="en-US" sz="420" dirty="0">
                 <a:solidFill>
                   <a:srgbClr val="3C4043"/>
                 </a:solidFill>
@@ -25439,13 +25431,13 @@
               </a:rPr>
               <a:t>Dedicated PT or Private GKE</a:t>
             </a:r>
-            <a:endParaRPr lang="en-US" sz="500" dirty="0"/>
-          </a:p>
-        </p:txBody>
-      </p:sp>
-      <p:sp>
-        <p:nvSpPr>
-          <p:cNvPr id="176" name="Shape 157"/>
+            <a:endParaRPr lang="en-US" sz="490" dirty="0"/>
+          </a:p>
+        </p:txBody>
+      </p:sp>
+      <p:sp>
+        <p:nvSpPr>
+          <p:cNvPr id="178" name="Shape 159"/>
           <p:cNvSpPr/>
           <p:nvPr/>
         </p:nvSpPr>
@@ -25472,7 +25464,7 @@
       </p:sp>
       <p:pic>
         <p:nvPicPr>
-          <p:cNvPr id="177" name="Image 17" descr="preencoded.png">    </p:cNvPr>
+          <p:cNvPr id="179" name="Image 17" descr="preencoded.png">    </p:cNvPr>
           <p:cNvPicPr>
             <a:picLocks noChangeAspect="1"/>
           </p:cNvPicPr>
@@ -25496,35 +25488,33 @@
       </p:pic>
       <p:sp>
         <p:nvSpPr>
-          <p:cNvPr id="178" name="Text 158"/>
+          <p:cNvPr id="180" name="Text 160"/>
           <p:cNvSpPr/>
           <p:nvPr/>
         </p:nvSpPr>
         <p:spPr>
           <a:xfrm>
             <a:off x="1727302" y="2162556"/>
-            <a:ext cx="651053" cy="287122"/>
-          </a:xfrm>
-          <a:prstGeom prst="rect">
-            <a:avLst/>
-          </a:prstGeom>
-          <a:noFill/>
-          <a:ln/>
-        </p:spPr>
-        <p:txBody>
-          <a:bodyPr wrap="square" lIns="0" tIns="0" rIns="0" bIns="0" rtlCol="0" anchor="ctr">
-            <a:normAutofit/>
-          </a:bodyPr>
+            <a:ext cx="646481" cy="287122"/>
+          </a:xfrm>
+          <a:prstGeom prst="rect">
+            <a:avLst/>
+          </a:prstGeom>
+          <a:noFill/>
+          <a:ln/>
+        </p:spPr>
+        <p:txBody>
+          <a:bodyPr wrap="square" lIns="0" tIns="0" rIns="0" bIns="0" rtlCol="0" anchor="ctr"/>
           <a:lstStyle/>
           <a:p>
             <a:pPr algn="l" indent="0" marL="0">
               <a:lnSpc>
-                <a:spcPct val="85000"/>
+                <a:spcPct val="100000"/>
               </a:lnSpc>
               <a:buNone/>
             </a:pPr>
             <a:r>
-              <a:rPr lang="en-US" sz="500" b="1" dirty="0">
+              <a:rPr lang="en-US" sz="490" b="1" dirty="0">
                 <a:solidFill>
                   <a:srgbClr val="202124"/>
                 </a:solidFill>
@@ -25534,17 +25524,17 @@
               </a:rPr>
               <a:t>Google Cloud Armor</a:t>
             </a:r>
-            <a:endParaRPr lang="en-US" sz="500" dirty="0"/>
+            <a:endParaRPr lang="en-US" sz="490" dirty="0"/>
           </a:p>
           <a:p>
             <a:pPr algn="l" indent="0" marL="0">
               <a:lnSpc>
-                <a:spcPct val="85000"/>
+                <a:spcPct val="100000"/>
               </a:lnSpc>
               <a:buNone/>
             </a:pPr>
             <a:r>
-              <a:rPr lang="en-US" sz="430" dirty="0">
+              <a:rPr lang="en-US" sz="420" dirty="0">
                 <a:solidFill>
                   <a:srgbClr val="3C4043"/>
                 </a:solidFill>
@@ -25554,13 +25544,13 @@
               </a:rPr>
               <a:t>WAF &amp; DDoS • Strips X-Tenant-ID</a:t>
             </a:r>
-            <a:endParaRPr lang="en-US" sz="500" dirty="0"/>
-          </a:p>
-        </p:txBody>
-      </p:sp>
-      <p:sp>
-        <p:nvSpPr>
-          <p:cNvPr id="179" name="Shape 159"/>
+            <a:endParaRPr lang="en-US" sz="490" dirty="0"/>
+          </a:p>
+        </p:txBody>
+      </p:sp>
+      <p:sp>
+        <p:nvSpPr>
+          <p:cNvPr id="181" name="Shape 161"/>
           <p:cNvSpPr/>
           <p:nvPr/>
         </p:nvSpPr>
@@ -25587,7 +25577,7 @@
       </p:sp>
       <p:pic>
         <p:nvPicPr>
-          <p:cNvPr id="180" name="Image 18" descr="preencoded.png">    </p:cNvPr>
+          <p:cNvPr id="182" name="Image 18" descr="preencoded.png">    </p:cNvPr>
           <p:cNvPicPr>
             <a:picLocks noChangeAspect="1"/>
           </p:cNvPicPr>
@@ -25611,35 +25601,33 @@
       </p:pic>
       <p:sp>
         <p:nvSpPr>
-          <p:cNvPr id="181" name="Text 160"/>
+          <p:cNvPr id="183" name="Text 162"/>
           <p:cNvSpPr/>
           <p:nvPr/>
         </p:nvSpPr>
         <p:spPr>
           <a:xfrm>
             <a:off x="1727302" y="2527402"/>
-            <a:ext cx="651053" cy="287122"/>
-          </a:xfrm>
-          <a:prstGeom prst="rect">
-            <a:avLst/>
-          </a:prstGeom>
-          <a:noFill/>
-          <a:ln/>
-        </p:spPr>
-        <p:txBody>
-          <a:bodyPr wrap="square" lIns="0" tIns="0" rIns="0" bIns="0" rtlCol="0" anchor="ctr">
-            <a:normAutofit/>
-          </a:bodyPr>
+            <a:ext cx="646481" cy="287122"/>
+          </a:xfrm>
+          <a:prstGeom prst="rect">
+            <a:avLst/>
+          </a:prstGeom>
+          <a:noFill/>
+          <a:ln/>
+        </p:spPr>
+        <p:txBody>
+          <a:bodyPr wrap="square" lIns="0" tIns="0" rIns="0" bIns="0" rtlCol="0" anchor="ctr"/>
           <a:lstStyle/>
           <a:p>
             <a:pPr algn="l" indent="0" marL="0">
               <a:lnSpc>
-                <a:spcPct val="85000"/>
+                <a:spcPct val="100000"/>
               </a:lnSpc>
               <a:buNone/>
             </a:pPr>
             <a:r>
-              <a:rPr lang="en-US" sz="500" b="1" dirty="0">
+              <a:rPr lang="en-US" sz="490" b="1" dirty="0">
                 <a:solidFill>
                   <a:srgbClr val="202124"/>
                 </a:solidFill>
@@ -25649,17 +25637,17 @@
               </a:rPr>
               <a:t>Model Armor</a:t>
             </a:r>
-            <a:endParaRPr lang="en-US" sz="500" dirty="0"/>
+            <a:endParaRPr lang="en-US" sz="490" dirty="0"/>
           </a:p>
           <a:p>
             <a:pPr algn="l" indent="0" marL="0">
               <a:lnSpc>
-                <a:spcPct val="85000"/>
+                <a:spcPct val="100000"/>
               </a:lnSpc>
               <a:buNone/>
             </a:pPr>
             <a:r>
-              <a:rPr lang="en-US" sz="430" dirty="0">
+              <a:rPr lang="en-US" sz="420" dirty="0">
                 <a:solidFill>
                   <a:srgbClr val="3C4043"/>
                 </a:solidFill>
@@ -25669,13 +25657,13 @@
               </a:rPr>
               <a:t>Ingress Prompt Screen</a:t>
             </a:r>
-            <a:endParaRPr lang="en-US" sz="500" dirty="0"/>
-          </a:p>
-        </p:txBody>
-      </p:sp>
-      <p:sp>
-        <p:nvSpPr>
-          <p:cNvPr id="182" name="Shape 161"/>
+            <a:endParaRPr lang="en-US" sz="490" dirty="0"/>
+          </a:p>
+        </p:txBody>
+      </p:sp>
+      <p:sp>
+        <p:nvSpPr>
+          <p:cNvPr id="184" name="Shape 163"/>
           <p:cNvSpPr/>
           <p:nvPr/>
         </p:nvSpPr>
@@ -25702,7 +25690,7 @@
       </p:sp>
       <p:pic>
         <p:nvPicPr>
-          <p:cNvPr id="183" name="Image 19" descr="preencoded.png">    </p:cNvPr>
+          <p:cNvPr id="185" name="Image 19" descr="preencoded.png">    </p:cNvPr>
           <p:cNvPicPr>
             <a:picLocks noChangeAspect="1"/>
           </p:cNvPicPr>
@@ -25726,35 +25714,33 @@
       </p:pic>
       <p:sp>
         <p:nvSpPr>
-          <p:cNvPr id="184" name="Text 162"/>
+          <p:cNvPr id="186" name="Text 164"/>
           <p:cNvSpPr/>
           <p:nvPr/>
         </p:nvSpPr>
         <p:spPr>
           <a:xfrm>
             <a:off x="1762049" y="2953512"/>
-            <a:ext cx="616306" cy="287122"/>
-          </a:xfrm>
-          <a:prstGeom prst="rect">
-            <a:avLst/>
-          </a:prstGeom>
-          <a:noFill/>
-          <a:ln/>
-        </p:spPr>
-        <p:txBody>
-          <a:bodyPr wrap="square" lIns="0" tIns="0" rIns="0" bIns="0" rtlCol="0" anchor="ctr">
-            <a:normAutofit/>
-          </a:bodyPr>
+            <a:ext cx="611734" cy="287122"/>
+          </a:xfrm>
+          <a:prstGeom prst="rect">
+            <a:avLst/>
+          </a:prstGeom>
+          <a:noFill/>
+          <a:ln/>
+        </p:spPr>
+        <p:txBody>
+          <a:bodyPr wrap="square" lIns="0" tIns="0" rIns="0" bIns="0" rtlCol="0" anchor="ctr"/>
           <a:lstStyle/>
           <a:p>
             <a:pPr algn="l" indent="0" marL="0">
               <a:lnSpc>
-                <a:spcPct val="85000"/>
+                <a:spcPct val="100000"/>
               </a:lnSpc>
               <a:buNone/>
             </a:pPr>
             <a:r>
-              <a:rPr lang="en-US" sz="500" b="1" dirty="0">
+              <a:rPr lang="en-US" sz="490" b="1" dirty="0">
                 <a:solidFill>
                   <a:srgbClr val="202124"/>
                 </a:solidFill>
@@ -25764,17 +25750,17 @@
               </a:rPr>
               <a:t>RFC 8693 OBO + DPoP</a:t>
             </a:r>
-            <a:endParaRPr lang="en-US" sz="500" dirty="0"/>
+            <a:endParaRPr lang="en-US" sz="490" dirty="0"/>
           </a:p>
           <a:p>
             <a:pPr algn="l" indent="0" marL="0">
               <a:lnSpc>
-                <a:spcPct val="85000"/>
+                <a:spcPct val="100000"/>
               </a:lnSpc>
               <a:buNone/>
             </a:pPr>
             <a:r>
-              <a:rPr lang="en-US" sz="430" dirty="0">
+              <a:rPr lang="en-US" sz="420" dirty="0">
                 <a:solidFill>
                   <a:srgbClr val="3C4043"/>
                 </a:solidFill>
@@ -25784,13 +25770,13 @@
               </a:rPr>
               <a:t>KMS ECDSA P-256 Sign</a:t>
             </a:r>
-            <a:endParaRPr lang="en-US" sz="500" dirty="0"/>
-          </a:p>
-        </p:txBody>
-      </p:sp>
-      <p:sp>
-        <p:nvSpPr>
-          <p:cNvPr id="185" name="Shape 163"/>
+            <a:endParaRPr lang="en-US" sz="490" dirty="0"/>
+          </a:p>
+        </p:txBody>
+      </p:sp>
+      <p:sp>
+        <p:nvSpPr>
+          <p:cNvPr id="187" name="Shape 165"/>
           <p:cNvSpPr/>
           <p:nvPr/>
         </p:nvSpPr>
@@ -25815,7 +25801,7 @@
       </p:sp>
       <p:sp>
         <p:nvSpPr>
-          <p:cNvPr id="186" name="Text 164"/>
+          <p:cNvPr id="188" name="Text 166"/>
           <p:cNvSpPr/>
           <p:nvPr/>
         </p:nvSpPr>
@@ -25854,7 +25840,7 @@
       </p:sp>
       <p:sp>
         <p:nvSpPr>
-          <p:cNvPr id="187" name="Shape 165"/>
+          <p:cNvPr id="189" name="Shape 167"/>
           <p:cNvSpPr/>
           <p:nvPr/>
         </p:nvSpPr>
@@ -25879,7 +25865,7 @@
       </p:sp>
       <p:sp>
         <p:nvSpPr>
-          <p:cNvPr id="188" name="Text 166"/>
+          <p:cNvPr id="190" name="Text 168"/>
           <p:cNvSpPr/>
           <p:nvPr/>
         </p:nvSpPr>
@@ -25918,7 +25904,7 @@
       </p:sp>
       <p:sp>
         <p:nvSpPr>
-          <p:cNvPr id="189" name="Shape 167"/>
+          <p:cNvPr id="191" name="Shape 169"/>
           <p:cNvSpPr/>
           <p:nvPr/>
         </p:nvSpPr>
@@ -25943,7 +25929,7 @@
       </p:sp>
       <p:sp>
         <p:nvSpPr>
-          <p:cNvPr id="190" name="Text 168"/>
+          <p:cNvPr id="192" name="Text 170"/>
           <p:cNvSpPr/>
           <p:nvPr/>
         </p:nvSpPr>
@@ -25982,7 +25968,7 @@
       </p:sp>
       <p:sp>
         <p:nvSpPr>
-          <p:cNvPr id="191" name="Shape 169"/>
+          <p:cNvPr id="193" name="Shape 171"/>
           <p:cNvSpPr/>
           <p:nvPr/>
         </p:nvSpPr>
@@ -26007,7 +25993,7 @@
       </p:sp>
       <p:sp>
         <p:nvSpPr>
-          <p:cNvPr id="192" name="Text 170"/>
+          <p:cNvPr id="194" name="Text 172"/>
           <p:cNvSpPr/>
           <p:nvPr/>
         </p:nvSpPr>
@@ -26046,7 +26032,7 @@
       </p:sp>
       <p:sp>
         <p:nvSpPr>
-          <p:cNvPr id="193" name="Shape 171"/>
+          <p:cNvPr id="195" name="Shape 173"/>
           <p:cNvSpPr/>
           <p:nvPr/>
         </p:nvSpPr>
@@ -26071,7 +26057,7 @@
       </p:sp>
       <p:sp>
         <p:nvSpPr>
-          <p:cNvPr id="194" name="Text 172"/>
+          <p:cNvPr id="196" name="Text 174"/>
           <p:cNvSpPr/>
           <p:nvPr/>
         </p:nvSpPr>
@@ -26110,7 +26096,7 @@
       </p:sp>
       <p:sp>
         <p:nvSpPr>
-          <p:cNvPr id="195" name="Shape 173"/>
+          <p:cNvPr id="197" name="Shape 175"/>
           <p:cNvSpPr/>
           <p:nvPr/>
         </p:nvSpPr>
@@ -26135,7 +26121,7 @@
       </p:sp>
       <p:sp>
         <p:nvSpPr>
-          <p:cNvPr id="196" name="Text 174"/>
+          <p:cNvPr id="198" name="Text 176"/>
           <p:cNvSpPr/>
           <p:nvPr/>
         </p:nvSpPr>
@@ -26174,7 +26160,7 @@
       </p:sp>
       <p:sp>
         <p:nvSpPr>
-          <p:cNvPr id="197" name="Shape 175"/>
+          <p:cNvPr id="199" name="Shape 177"/>
           <p:cNvSpPr/>
           <p:nvPr/>
         </p:nvSpPr>
@@ -26199,7 +26185,7 @@
       </p:sp>
       <p:sp>
         <p:nvSpPr>
-          <p:cNvPr id="198" name="Text 176"/>
+          <p:cNvPr id="200" name="Text 178"/>
           <p:cNvSpPr/>
           <p:nvPr/>
         </p:nvSpPr>
@@ -26238,7 +26224,7 @@
       </p:sp>
       <p:sp>
         <p:nvSpPr>
-          <p:cNvPr id="199" name="Shape 177"/>
+          <p:cNvPr id="201" name="Shape 179"/>
           <p:cNvSpPr/>
           <p:nvPr/>
         </p:nvSpPr>
@@ -26263,7 +26249,7 @@
       </p:sp>
       <p:sp>
         <p:nvSpPr>
-          <p:cNvPr id="200" name="Text 178"/>
+          <p:cNvPr id="202" name="Text 180"/>
           <p:cNvSpPr/>
           <p:nvPr/>
         </p:nvSpPr>
@@ -26302,7 +26288,7 @@
       </p:sp>
       <p:sp>
         <p:nvSpPr>
-          <p:cNvPr id="201" name="Shape 179"/>
+          <p:cNvPr id="203" name="Shape 181"/>
           <p:cNvSpPr/>
           <p:nvPr/>
         </p:nvSpPr>
@@ -26327,7 +26313,7 @@
       </p:sp>
       <p:sp>
         <p:nvSpPr>
-          <p:cNvPr id="202" name="Text 180"/>
+          <p:cNvPr id="204" name="Text 182"/>
           <p:cNvSpPr/>
           <p:nvPr/>
         </p:nvSpPr>
@@ -26366,18 +26352,18 @@
       </p:sp>
       <p:sp>
         <p:nvSpPr>
-          <p:cNvPr id="203" name="Shape 181"/>
-          <p:cNvSpPr/>
-          <p:nvPr/>
-        </p:nvSpPr>
-        <p:spPr>
-          <a:xfrm>
-            <a:off x="5339182" y="3365906"/>
-            <a:ext cx="760781" cy="192024"/>
+          <p:cNvPr id="205" name="Shape 183"/>
+          <p:cNvSpPr/>
+          <p:nvPr/>
+        </p:nvSpPr>
+        <p:spPr>
+          <a:xfrm>
+            <a:off x="5339182" y="3353105"/>
+            <a:ext cx="760781" cy="217627"/>
           </a:xfrm>
           <a:prstGeom prst="roundRect">
             <a:avLst>
-              <a:gd name="adj" fmla="val 23810"/>
+              <a:gd name="adj" fmla="val 21008"/>
             </a:avLst>
           </a:prstGeom>
           <a:solidFill>
@@ -26393,35 +26379,33 @@
       </p:sp>
       <p:sp>
         <p:nvSpPr>
-          <p:cNvPr id="204" name="Text 182"/>
-          <p:cNvSpPr/>
-          <p:nvPr/>
-        </p:nvSpPr>
-        <p:spPr>
-          <a:xfrm>
-            <a:off x="5357470" y="3375050"/>
-            <a:ext cx="724205" cy="173736"/>
-          </a:xfrm>
-          <a:prstGeom prst="rect">
-            <a:avLst/>
-          </a:prstGeom>
-          <a:noFill/>
-          <a:ln/>
-        </p:spPr>
-        <p:txBody>
-          <a:bodyPr wrap="square" lIns="0" tIns="0" rIns="0" bIns="0" rtlCol="0" anchor="ctr">
-            <a:normAutofit/>
-          </a:bodyPr>
+          <p:cNvPr id="206" name="Text 184"/>
+          <p:cNvSpPr/>
+          <p:nvPr/>
+        </p:nvSpPr>
+        <p:spPr>
+          <a:xfrm>
+            <a:off x="5359298" y="3362249"/>
+            <a:ext cx="720547" cy="199339"/>
+          </a:xfrm>
+          <a:prstGeom prst="rect">
+            <a:avLst/>
+          </a:prstGeom>
+          <a:noFill/>
+          <a:ln/>
+        </p:spPr>
+        <p:txBody>
+          <a:bodyPr wrap="square" lIns="0" tIns="0" rIns="0" bIns="0" rtlCol="0" anchor="ctr"/>
           <a:lstStyle/>
           <a:p>
             <a:pPr algn="ctr" indent="0" marL="0">
               <a:lnSpc>
-                <a:spcPct val="86000"/>
+                <a:spcPct val="102000"/>
               </a:lnSpc>
               <a:buNone/>
             </a:pPr>
             <a:r>
-              <a:rPr lang="en-US" sz="470" b="1" dirty="0">
+              <a:rPr lang="en-US" sz="410" b="1" dirty="0">
                 <a:solidFill>
                   <a:srgbClr val="202124"/>
                 </a:solidFill>
@@ -26431,17 +26415,17 @@
               </a:rPr>
               <a:t>Security, OTel &amp; FinOps</a:t>
             </a:r>
-            <a:endParaRPr lang="en-US" sz="470" dirty="0"/>
+            <a:endParaRPr lang="en-US" sz="410" dirty="0"/>
           </a:p>
           <a:p>
             <a:pPr algn="ctr" indent="0" marL="0">
               <a:lnSpc>
-                <a:spcPct val="86000"/>
+                <a:spcPct val="102000"/>
               </a:lnSpc>
               <a:buNone/>
             </a:pPr>
             <a:r>
-              <a:rPr lang="en-US" sz="410" dirty="0">
+              <a:rPr lang="en-US" sz="375" dirty="0">
                 <a:solidFill>
                   <a:srgbClr val="202124"/>
                 </a:solidFill>
@@ -26451,24 +26435,24 @@
               </a:rPr>
               <a:t>chargeback telemetry</a:t>
             </a:r>
-            <a:endParaRPr lang="en-US" sz="470" dirty="0"/>
-          </a:p>
-        </p:txBody>
-      </p:sp>
-      <p:sp>
-        <p:nvSpPr>
-          <p:cNvPr id="205" name="Shape 183"/>
-          <p:cNvSpPr/>
-          <p:nvPr/>
-        </p:nvSpPr>
-        <p:spPr>
-          <a:xfrm>
-            <a:off x="2836469" y="4833518"/>
-            <a:ext cx="493776" cy="178308"/>
+            <a:endParaRPr lang="en-US" sz="410" dirty="0"/>
+          </a:p>
+        </p:txBody>
+      </p:sp>
+      <p:sp>
+        <p:nvSpPr>
+          <p:cNvPr id="207" name="Shape 185"/>
+          <p:cNvSpPr/>
+          <p:nvPr/>
+        </p:nvSpPr>
+        <p:spPr>
+          <a:xfrm>
+            <a:off x="2884932" y="4817974"/>
+            <a:ext cx="397764" cy="208483"/>
           </a:xfrm>
           <a:prstGeom prst="roundRect">
             <a:avLst>
-              <a:gd name="adj" fmla="val 25641"/>
+              <a:gd name="adj" fmla="val 21930"/>
             </a:avLst>
           </a:prstGeom>
           <a:solidFill>
@@ -26484,35 +26468,33 @@
       </p:sp>
       <p:sp>
         <p:nvSpPr>
-          <p:cNvPr id="206" name="Text 184"/>
-          <p:cNvSpPr/>
-          <p:nvPr/>
-        </p:nvSpPr>
-        <p:spPr>
-          <a:xfrm>
-            <a:off x="2854757" y="4842662"/>
-            <a:ext cx="457200" cy="160020"/>
-          </a:xfrm>
-          <a:prstGeom prst="rect">
-            <a:avLst/>
-          </a:prstGeom>
-          <a:noFill/>
-          <a:ln/>
-        </p:spPr>
-        <p:txBody>
-          <a:bodyPr wrap="square" lIns="0" tIns="0" rIns="0" bIns="0" rtlCol="0" anchor="ctr">
-            <a:normAutofit/>
-          </a:bodyPr>
+          <p:cNvPr id="208" name="Text 186"/>
+          <p:cNvSpPr/>
+          <p:nvPr/>
+        </p:nvSpPr>
+        <p:spPr>
+          <a:xfrm>
+            <a:off x="2905049" y="4827118"/>
+            <a:ext cx="357530" cy="190195"/>
+          </a:xfrm>
+          <a:prstGeom prst="rect">
+            <a:avLst/>
+          </a:prstGeom>
+          <a:noFill/>
+          <a:ln/>
+        </p:spPr>
+        <p:txBody>
+          <a:bodyPr wrap="square" lIns="0" tIns="0" rIns="0" bIns="0" rtlCol="0" anchor="ctr"/>
           <a:lstStyle/>
           <a:p>
             <a:pPr algn="ctr" indent="0" marL="0">
               <a:lnSpc>
-                <a:spcPct val="86000"/>
+                <a:spcPct val="102000"/>
               </a:lnSpc>
               <a:buNone/>
             </a:pPr>
             <a:r>
-              <a:rPr lang="en-US" sz="470" b="1" dirty="0">
+              <a:rPr lang="en-US" sz="410" b="1" dirty="0">
                 <a:solidFill>
                   <a:srgbClr val="202124"/>
                 </a:solidFill>
@@ -26522,17 +26504,17 @@
               </a:rPr>
               <a:t>Scoped</a:t>
             </a:r>
-            <a:endParaRPr lang="en-US" sz="470" dirty="0"/>
+            <a:endParaRPr lang="en-US" sz="410" dirty="0"/>
           </a:p>
           <a:p>
             <a:pPr algn="ctr" indent="0" marL="0">
               <a:lnSpc>
-                <a:spcPct val="86000"/>
+                <a:spcPct val="102000"/>
               </a:lnSpc>
               <a:buNone/>
             </a:pPr>
             <a:r>
-              <a:rPr lang="en-US" sz="410" dirty="0">
+              <a:rPr lang="en-US" sz="375" dirty="0">
                 <a:solidFill>
                   <a:srgbClr val="202124"/>
                 </a:solidFill>
@@ -26542,24 +26524,24 @@
               </a:rPr>
               <a:t>MCP &amp; RAG</a:t>
             </a:r>
-            <a:endParaRPr lang="en-US" sz="470" dirty="0"/>
-          </a:p>
-        </p:txBody>
-      </p:sp>
-      <p:sp>
-        <p:nvSpPr>
-          <p:cNvPr id="207" name="Shape 185"/>
-          <p:cNvSpPr/>
-          <p:nvPr/>
-        </p:nvSpPr>
-        <p:spPr>
-          <a:xfrm>
-            <a:off x="2766060" y="5468112"/>
-            <a:ext cx="634594" cy="178308"/>
+            <a:endParaRPr lang="en-US" sz="410" dirty="0"/>
+          </a:p>
+        </p:txBody>
+      </p:sp>
+      <p:sp>
+        <p:nvSpPr>
+          <p:cNvPr id="209" name="Shape 187"/>
+          <p:cNvSpPr/>
+          <p:nvPr/>
+        </p:nvSpPr>
+        <p:spPr>
+          <a:xfrm>
+            <a:off x="2815438" y="5452567"/>
+            <a:ext cx="534924" cy="208483"/>
           </a:xfrm>
           <a:prstGeom prst="roundRect">
             <a:avLst>
-              <a:gd name="adj" fmla="val 25641"/>
+              <a:gd name="adj" fmla="val 21930"/>
             </a:avLst>
           </a:prstGeom>
           <a:solidFill>
@@ -26575,35 +26557,33 @@
       </p:sp>
       <p:sp>
         <p:nvSpPr>
-          <p:cNvPr id="208" name="Text 186"/>
-          <p:cNvSpPr/>
-          <p:nvPr/>
-        </p:nvSpPr>
-        <p:spPr>
-          <a:xfrm>
-            <a:off x="2784348" y="5477256"/>
-            <a:ext cx="598018" cy="160020"/>
-          </a:xfrm>
-          <a:prstGeom prst="rect">
-            <a:avLst/>
-          </a:prstGeom>
-          <a:noFill/>
-          <a:ln/>
-        </p:spPr>
-        <p:txBody>
-          <a:bodyPr wrap="square" lIns="0" tIns="0" rIns="0" bIns="0" rtlCol="0" anchor="ctr">
-            <a:normAutofit/>
-          </a:bodyPr>
+          <p:cNvPr id="210" name="Text 188"/>
+          <p:cNvSpPr/>
+          <p:nvPr/>
+        </p:nvSpPr>
+        <p:spPr>
+          <a:xfrm>
+            <a:off x="2835554" y="5461711"/>
+            <a:ext cx="494690" cy="190195"/>
+          </a:xfrm>
+          <a:prstGeom prst="rect">
+            <a:avLst/>
+          </a:prstGeom>
+          <a:noFill/>
+          <a:ln/>
+        </p:spPr>
+        <p:txBody>
+          <a:bodyPr wrap="square" lIns="0" tIns="0" rIns="0" bIns="0" rtlCol="0" anchor="ctr"/>
           <a:lstStyle/>
           <a:p>
             <a:pPr algn="ctr" indent="0" marL="0">
               <a:lnSpc>
-                <a:spcPct val="86000"/>
+                <a:spcPct val="102000"/>
               </a:lnSpc>
               <a:buNone/>
             </a:pPr>
             <a:r>
-              <a:rPr lang="en-US" sz="470" b="1" dirty="0">
+              <a:rPr lang="en-US" sz="410" b="1" dirty="0">
                 <a:solidFill>
                   <a:srgbClr val="202124"/>
                 </a:solidFill>
@@ -26613,17 +26593,17 @@
               </a:rPr>
               <a:t>SET LOCAL</a:t>
             </a:r>
-            <a:endParaRPr lang="en-US" sz="470" dirty="0"/>
+            <a:endParaRPr lang="en-US" sz="410" dirty="0"/>
           </a:p>
           <a:p>
             <a:pPr algn="ctr" indent="0" marL="0">
               <a:lnSpc>
-                <a:spcPct val="86000"/>
+                <a:spcPct val="102000"/>
               </a:lnSpc>
               <a:buNone/>
             </a:pPr>
             <a:r>
-              <a:rPr lang="en-US" sz="410" dirty="0">
+              <a:rPr lang="en-US" sz="375" dirty="0">
                 <a:solidFill>
                   <a:srgbClr val="202124"/>
                 </a:solidFill>
@@ -26633,24 +26613,24 @@
               </a:rPr>
               <a:t>current_tenant</a:t>
             </a:r>
-            <a:endParaRPr lang="en-US" sz="470" dirty="0"/>
-          </a:p>
-        </p:txBody>
-      </p:sp>
-      <p:sp>
-        <p:nvSpPr>
-          <p:cNvPr id="209" name="Shape 187"/>
-          <p:cNvSpPr/>
-          <p:nvPr/>
-        </p:nvSpPr>
-        <p:spPr>
-          <a:xfrm>
-            <a:off x="5201107" y="4833518"/>
-            <a:ext cx="493776" cy="178308"/>
+            <a:endParaRPr lang="en-US" sz="410" dirty="0"/>
+          </a:p>
+        </p:txBody>
+      </p:sp>
+      <p:sp>
+        <p:nvSpPr>
+          <p:cNvPr id="211" name="Shape 189"/>
+          <p:cNvSpPr/>
+          <p:nvPr/>
+        </p:nvSpPr>
+        <p:spPr>
+          <a:xfrm>
+            <a:off x="5235854" y="4817974"/>
+            <a:ext cx="425196" cy="208483"/>
           </a:xfrm>
           <a:prstGeom prst="roundRect">
             <a:avLst>
-              <a:gd name="adj" fmla="val 25641"/>
+              <a:gd name="adj" fmla="val 21930"/>
             </a:avLst>
           </a:prstGeom>
           <a:solidFill>
@@ -26666,35 +26646,33 @@
       </p:sp>
       <p:sp>
         <p:nvSpPr>
-          <p:cNvPr id="210" name="Text 188"/>
-          <p:cNvSpPr/>
-          <p:nvPr/>
-        </p:nvSpPr>
-        <p:spPr>
-          <a:xfrm>
-            <a:off x="5219395" y="4842662"/>
-            <a:ext cx="457200" cy="160020"/>
-          </a:xfrm>
-          <a:prstGeom prst="rect">
-            <a:avLst/>
-          </a:prstGeom>
-          <a:noFill/>
-          <a:ln/>
-        </p:spPr>
-        <p:txBody>
-          <a:bodyPr wrap="square" lIns="0" tIns="0" rIns="0" bIns="0" rtlCol="0" anchor="ctr">
-            <a:normAutofit/>
-          </a:bodyPr>
+          <p:cNvPr id="212" name="Text 190"/>
+          <p:cNvSpPr/>
+          <p:nvPr/>
+        </p:nvSpPr>
+        <p:spPr>
+          <a:xfrm>
+            <a:off x="5255971" y="4827118"/>
+            <a:ext cx="384962" cy="190195"/>
+          </a:xfrm>
+          <a:prstGeom prst="rect">
+            <a:avLst/>
+          </a:prstGeom>
+          <a:noFill/>
+          <a:ln/>
+        </p:spPr>
+        <p:txBody>
+          <a:bodyPr wrap="square" lIns="0" tIns="0" rIns="0" bIns="0" rtlCol="0" anchor="ctr"/>
           <a:lstStyle/>
           <a:p>
             <a:pPr algn="ctr" indent="0" marL="0">
               <a:lnSpc>
-                <a:spcPct val="86000"/>
+                <a:spcPct val="102000"/>
               </a:lnSpc>
               <a:buNone/>
             </a:pPr>
             <a:r>
-              <a:rPr lang="en-US" sz="470" b="1" dirty="0">
+              <a:rPr lang="en-US" sz="410" b="1" dirty="0">
                 <a:solidFill>
                   <a:srgbClr val="202124"/>
                 </a:solidFill>
@@ -26704,17 +26682,17 @@
               </a:rPr>
               <a:t>Air-Gapped</a:t>
             </a:r>
-            <a:endParaRPr lang="en-US" sz="470" dirty="0"/>
+            <a:endParaRPr lang="en-US" sz="410" dirty="0"/>
           </a:p>
           <a:p>
             <a:pPr algn="ctr" indent="0" marL="0">
               <a:lnSpc>
-                <a:spcPct val="86000"/>
+                <a:spcPct val="102000"/>
               </a:lnSpc>
               <a:buNone/>
             </a:pPr>
             <a:r>
-              <a:rPr lang="en-US" sz="410" dirty="0">
+              <a:rPr lang="en-US" sz="375" dirty="0">
                 <a:solidFill>
                   <a:srgbClr val="202124"/>
                 </a:solidFill>
@@ -26724,24 +26702,24 @@
               </a:rPr>
               <a:t>Silo RAG</a:t>
             </a:r>
-            <a:endParaRPr lang="en-US" sz="470" dirty="0"/>
-          </a:p>
-        </p:txBody>
-      </p:sp>
-      <p:sp>
-        <p:nvSpPr>
-          <p:cNvPr id="211" name="Shape 189"/>
-          <p:cNvSpPr/>
-          <p:nvPr/>
-        </p:nvSpPr>
-        <p:spPr>
-          <a:xfrm>
-            <a:off x="5130698" y="5468112"/>
-            <a:ext cx="634594" cy="178308"/>
+            <a:endParaRPr lang="en-US" sz="410" dirty="0"/>
+          </a:p>
+        </p:txBody>
+      </p:sp>
+      <p:sp>
+        <p:nvSpPr>
+          <p:cNvPr id="213" name="Shape 191"/>
+          <p:cNvSpPr/>
+          <p:nvPr/>
+        </p:nvSpPr>
+        <p:spPr>
+          <a:xfrm>
+            <a:off x="5180076" y="5452567"/>
+            <a:ext cx="534924" cy="208483"/>
           </a:xfrm>
           <a:prstGeom prst="roundRect">
             <a:avLst>
-              <a:gd name="adj" fmla="val 25641"/>
+              <a:gd name="adj" fmla="val 21930"/>
             </a:avLst>
           </a:prstGeom>
           <a:solidFill>
@@ -26757,35 +26735,33 @@
       </p:sp>
       <p:sp>
         <p:nvSpPr>
-          <p:cNvPr id="212" name="Text 190"/>
-          <p:cNvSpPr/>
-          <p:nvPr/>
-        </p:nvSpPr>
-        <p:spPr>
-          <a:xfrm>
-            <a:off x="5148986" y="5477256"/>
-            <a:ext cx="598018" cy="160020"/>
-          </a:xfrm>
-          <a:prstGeom prst="rect">
-            <a:avLst/>
-          </a:prstGeom>
-          <a:noFill/>
-          <a:ln/>
-        </p:spPr>
-        <p:txBody>
-          <a:bodyPr wrap="square" lIns="0" tIns="0" rIns="0" bIns="0" rtlCol="0" anchor="ctr">
-            <a:normAutofit/>
-          </a:bodyPr>
+          <p:cNvPr id="214" name="Text 192"/>
+          <p:cNvSpPr/>
+          <p:nvPr/>
+        </p:nvSpPr>
+        <p:spPr>
+          <a:xfrm>
+            <a:off x="5200193" y="5461711"/>
+            <a:ext cx="494690" cy="190195"/>
+          </a:xfrm>
+          <a:prstGeom prst="rect">
+            <a:avLst/>
+          </a:prstGeom>
+          <a:noFill/>
+          <a:ln/>
+        </p:spPr>
+        <p:txBody>
+          <a:bodyPr wrap="square" lIns="0" tIns="0" rIns="0" bIns="0" rtlCol="0" anchor="ctr"/>
           <a:lstStyle/>
           <a:p>
             <a:pPr algn="ctr" indent="0" marL="0">
               <a:lnSpc>
-                <a:spcPct val="86000"/>
+                <a:spcPct val="102000"/>
               </a:lnSpc>
               <a:buNone/>
             </a:pPr>
             <a:r>
-              <a:rPr lang="en-US" sz="470" b="1" dirty="0">
+              <a:rPr lang="en-US" sz="410" b="1" dirty="0">
                 <a:solidFill>
                   <a:srgbClr val="202124"/>
                 </a:solidFill>
@@ -26795,17 +26771,17 @@
               </a:rPr>
               <a:t>CMEK-Encrypted</a:t>
             </a:r>
-            <a:endParaRPr lang="en-US" sz="470" dirty="0"/>
+            <a:endParaRPr lang="en-US" sz="410" dirty="0"/>
           </a:p>
           <a:p>
             <a:pPr algn="ctr" indent="0" marL="0">
               <a:lnSpc>
-                <a:spcPct val="86000"/>
+                <a:spcPct val="102000"/>
               </a:lnSpc>
               <a:buNone/>
             </a:pPr>
             <a:r>
-              <a:rPr lang="en-US" sz="410" dirty="0">
+              <a:rPr lang="en-US" sz="375" dirty="0">
                 <a:solidFill>
                   <a:srgbClr val="202124"/>
                 </a:solidFill>
@@ -26815,24 +26791,24 @@
               </a:rPr>
               <a:t>State &amp; Tools</a:t>
             </a:r>
-            <a:endParaRPr lang="en-US" sz="470" dirty="0"/>
-          </a:p>
-        </p:txBody>
-      </p:sp>
-      <p:sp>
-        <p:nvSpPr>
-          <p:cNvPr id="213" name="Shape 191"/>
-          <p:cNvSpPr/>
-          <p:nvPr/>
-        </p:nvSpPr>
-        <p:spPr>
-          <a:xfrm>
-            <a:off x="1853489" y="5618988"/>
-            <a:ext cx="493776" cy="178308"/>
+            <a:endParaRPr lang="en-US" sz="410" dirty="0"/>
+          </a:p>
+        </p:txBody>
+      </p:sp>
+      <p:sp>
+        <p:nvSpPr>
+          <p:cNvPr id="215" name="Shape 193"/>
+          <p:cNvSpPr/>
+          <p:nvPr/>
+        </p:nvSpPr>
+        <p:spPr>
+          <a:xfrm>
+            <a:off x="1757477" y="5604358"/>
+            <a:ext cx="397764" cy="208483"/>
           </a:xfrm>
           <a:prstGeom prst="roundRect">
             <a:avLst>
-              <a:gd name="adj" fmla="val 25641"/>
+              <a:gd name="adj" fmla="val 21930"/>
             </a:avLst>
           </a:prstGeom>
           <a:solidFill>
@@ -26848,35 +26824,33 @@
       </p:sp>
       <p:sp>
         <p:nvSpPr>
-          <p:cNvPr id="214" name="Text 192"/>
-          <p:cNvSpPr/>
-          <p:nvPr/>
-        </p:nvSpPr>
-        <p:spPr>
-          <a:xfrm>
-            <a:off x="1871777" y="5628132"/>
-            <a:ext cx="457200" cy="160020"/>
-          </a:xfrm>
-          <a:prstGeom prst="rect">
-            <a:avLst/>
-          </a:prstGeom>
-          <a:noFill/>
-          <a:ln/>
-        </p:spPr>
-        <p:txBody>
-          <a:bodyPr wrap="square" lIns="0" tIns="0" rIns="0" bIns="0" rtlCol="0" anchor="ctr">
-            <a:normAutofit/>
-          </a:bodyPr>
+          <p:cNvPr id="216" name="Text 194"/>
+          <p:cNvSpPr/>
+          <p:nvPr/>
+        </p:nvSpPr>
+        <p:spPr>
+          <a:xfrm>
+            <a:off x="1777594" y="5613502"/>
+            <a:ext cx="357530" cy="190195"/>
+          </a:xfrm>
+          <a:prstGeom prst="rect">
+            <a:avLst/>
+          </a:prstGeom>
+          <a:noFill/>
+          <a:ln/>
+        </p:spPr>
+        <p:txBody>
+          <a:bodyPr wrap="square" lIns="0" tIns="0" rIns="0" bIns="0" rtlCol="0" anchor="ctr"/>
           <a:lstStyle/>
           <a:p>
             <a:pPr algn="ctr" indent="0" marL="0">
               <a:lnSpc>
-                <a:spcPct val="86000"/>
+                <a:spcPct val="102000"/>
               </a:lnSpc>
               <a:buNone/>
             </a:pPr>
             <a:r>
-              <a:rPr lang="en-US" sz="470" b="1" dirty="0">
+              <a:rPr lang="en-US" sz="410" b="1" dirty="0">
                 <a:solidFill>
                   <a:srgbClr val="202124"/>
                 </a:solidFill>
@@ -26886,17 +26860,17 @@
               </a:rPr>
               <a:t>Generates</a:t>
             </a:r>
-            <a:endParaRPr lang="en-US" sz="470" dirty="0"/>
+            <a:endParaRPr lang="en-US" sz="410" dirty="0"/>
           </a:p>
           <a:p>
             <a:pPr algn="ctr" indent="0" marL="0">
               <a:lnSpc>
-                <a:spcPct val="86000"/>
+                <a:spcPct val="102000"/>
               </a:lnSpc>
               <a:buNone/>
             </a:pPr>
             <a:r>
-              <a:rPr lang="en-US" sz="410" dirty="0">
+              <a:rPr lang="en-US" sz="375" dirty="0">
                 <a:solidFill>
                   <a:srgbClr val="202124"/>
                 </a:solidFill>
@@ -26906,24 +26880,24 @@
               </a:rPr>
               <a:t>response</a:t>
             </a:r>
-            <a:endParaRPr lang="en-US" sz="470" dirty="0"/>
-          </a:p>
-        </p:txBody>
-      </p:sp>
-      <p:sp>
-        <p:nvSpPr>
-          <p:cNvPr id="215" name="Shape 193"/>
-          <p:cNvSpPr/>
-          <p:nvPr/>
-        </p:nvSpPr>
-        <p:spPr>
-          <a:xfrm>
-            <a:off x="3905402" y="3368650"/>
-            <a:ext cx="738835" cy="178308"/>
+            <a:endParaRPr lang="en-US" sz="410" dirty="0"/>
+          </a:p>
+        </p:txBody>
+      </p:sp>
+      <p:sp>
+        <p:nvSpPr>
+          <p:cNvPr id="217" name="Shape 195"/>
+          <p:cNvSpPr/>
+          <p:nvPr/>
+        </p:nvSpPr>
+        <p:spPr>
+          <a:xfrm>
+            <a:off x="3905402" y="3354019"/>
+            <a:ext cx="644652" cy="208483"/>
           </a:xfrm>
           <a:prstGeom prst="roundRect">
             <a:avLst>
-              <a:gd name="adj" fmla="val 25641"/>
+              <a:gd name="adj" fmla="val 21930"/>
             </a:avLst>
           </a:prstGeom>
           <a:solidFill>
@@ -26939,35 +26913,33 @@
       </p:sp>
       <p:sp>
         <p:nvSpPr>
-          <p:cNvPr id="216" name="Text 194"/>
-          <p:cNvSpPr/>
-          <p:nvPr/>
-        </p:nvSpPr>
-        <p:spPr>
-          <a:xfrm>
-            <a:off x="3923690" y="3377794"/>
-            <a:ext cx="702259" cy="160020"/>
-          </a:xfrm>
-          <a:prstGeom prst="rect">
-            <a:avLst/>
-          </a:prstGeom>
-          <a:noFill/>
-          <a:ln/>
-        </p:spPr>
-        <p:txBody>
-          <a:bodyPr wrap="square" lIns="0" tIns="0" rIns="0" bIns="0" rtlCol="0" anchor="ctr">
-            <a:normAutofit/>
-          </a:bodyPr>
+          <p:cNvPr id="218" name="Text 196"/>
+          <p:cNvSpPr/>
+          <p:nvPr/>
+        </p:nvSpPr>
+        <p:spPr>
+          <a:xfrm>
+            <a:off x="3925519" y="3363163"/>
+            <a:ext cx="604418" cy="190195"/>
+          </a:xfrm>
+          <a:prstGeom prst="rect">
+            <a:avLst/>
+          </a:prstGeom>
+          <a:noFill/>
+          <a:ln/>
+        </p:spPr>
+        <p:txBody>
+          <a:bodyPr wrap="square" lIns="0" tIns="0" rIns="0" bIns="0" rtlCol="0" anchor="ctr"/>
           <a:lstStyle/>
           <a:p>
             <a:pPr algn="ctr" indent="0" marL="0">
               <a:lnSpc>
-                <a:spcPct val="86000"/>
+                <a:spcPct val="102000"/>
               </a:lnSpc>
               <a:buNone/>
             </a:pPr>
             <a:r>
-              <a:rPr lang="en-US" sz="470" b="1" dirty="0">
+              <a:rPr lang="en-US" sz="410" b="1" dirty="0">
                 <a:solidFill>
                   <a:srgbClr val="202124"/>
                 </a:solidFill>
@@ -26977,17 +26949,17 @@
               </a:rPr>
               <a:t>Sanitized response</a:t>
             </a:r>
-            <a:endParaRPr lang="en-US" sz="470" dirty="0"/>
+            <a:endParaRPr lang="en-US" sz="410" dirty="0"/>
           </a:p>
           <a:p>
             <a:pPr algn="ctr" indent="0" marL="0">
               <a:lnSpc>
-                <a:spcPct val="86000"/>
+                <a:spcPct val="102000"/>
               </a:lnSpc>
               <a:buNone/>
             </a:pPr>
             <a:r>
-              <a:rPr lang="en-US" sz="410" dirty="0">
+              <a:rPr lang="en-US" sz="375" dirty="0">
                 <a:solidFill>
                   <a:srgbClr val="202124"/>
                 </a:solidFill>
@@ -26997,24 +26969,24 @@
               </a:rPr>
               <a:t>with SDP redaction</a:t>
             </a:r>
-            <a:endParaRPr lang="en-US" sz="470" dirty="0"/>
-          </a:p>
-        </p:txBody>
-      </p:sp>
-      <p:sp>
-        <p:nvSpPr>
-          <p:cNvPr id="217" name="Shape 195"/>
-          <p:cNvSpPr/>
-          <p:nvPr/>
-        </p:nvSpPr>
-        <p:spPr>
-          <a:xfrm>
-            <a:off x="2983687" y="3368650"/>
-            <a:ext cx="669341" cy="178308"/>
+            <a:endParaRPr lang="en-US" sz="410" dirty="0"/>
+          </a:p>
+        </p:txBody>
+      </p:sp>
+      <p:sp>
+        <p:nvSpPr>
+          <p:cNvPr id="219" name="Shape 197"/>
+          <p:cNvSpPr/>
+          <p:nvPr/>
+        </p:nvSpPr>
+        <p:spPr>
+          <a:xfrm>
+            <a:off x="2983687" y="3354019"/>
+            <a:ext cx="669341" cy="208483"/>
           </a:xfrm>
           <a:prstGeom prst="roundRect">
             <a:avLst>
-              <a:gd name="adj" fmla="val 25641"/>
+              <a:gd name="adj" fmla="val 21930"/>
             </a:avLst>
           </a:prstGeom>
           <a:solidFill>
@@ -27030,35 +27002,33 @@
       </p:sp>
       <p:sp>
         <p:nvSpPr>
-          <p:cNvPr id="218" name="Text 196"/>
-          <p:cNvSpPr/>
-          <p:nvPr/>
-        </p:nvSpPr>
-        <p:spPr>
-          <a:xfrm>
-            <a:off x="3001975" y="3377794"/>
-            <a:ext cx="632765" cy="160020"/>
-          </a:xfrm>
-          <a:prstGeom prst="rect">
-            <a:avLst/>
-          </a:prstGeom>
-          <a:noFill/>
-          <a:ln/>
-        </p:spPr>
-        <p:txBody>
-          <a:bodyPr wrap="square" lIns="0" tIns="0" rIns="0" bIns="0" rtlCol="0" anchor="ctr">
-            <a:normAutofit/>
-          </a:bodyPr>
+          <p:cNvPr id="220" name="Text 198"/>
+          <p:cNvSpPr/>
+          <p:nvPr/>
+        </p:nvSpPr>
+        <p:spPr>
+          <a:xfrm>
+            <a:off x="3003804" y="3363163"/>
+            <a:ext cx="629107" cy="190195"/>
+          </a:xfrm>
+          <a:prstGeom prst="rect">
+            <a:avLst/>
+          </a:prstGeom>
+          <a:noFill/>
+          <a:ln/>
+        </p:spPr>
+        <p:txBody>
+          <a:bodyPr wrap="square" lIns="0" tIns="0" rIns="0" bIns="0" rtlCol="0" anchor="ctr"/>
           <a:lstStyle/>
           <a:p>
             <a:pPr algn="ctr" indent="0" marL="0">
               <a:lnSpc>
-                <a:spcPct val="86000"/>
+                <a:spcPct val="102000"/>
               </a:lnSpc>
               <a:buNone/>
             </a:pPr>
             <a:r>
-              <a:rPr lang="en-US" sz="470" b="1" dirty="0">
+              <a:rPr lang="en-US" sz="410" b="1" dirty="0">
                 <a:solidFill>
                   <a:srgbClr val="202124"/>
                 </a:solidFill>
@@ -27068,17 +27038,17 @@
               </a:rPr>
               <a:t>Route by tenant tier</a:t>
             </a:r>
-            <a:endParaRPr lang="en-US" sz="470" dirty="0"/>
+            <a:endParaRPr lang="en-US" sz="410" dirty="0"/>
           </a:p>
           <a:p>
             <a:pPr algn="ctr" indent="0" marL="0">
               <a:lnSpc>
-                <a:spcPct val="86000"/>
+                <a:spcPct val="102000"/>
               </a:lnSpc>
               <a:buNone/>
             </a:pPr>
             <a:r>
-              <a:rPr lang="en-US" sz="410" dirty="0">
+              <a:rPr lang="en-US" sz="375" dirty="0">
                 <a:solidFill>
                   <a:srgbClr val="202124"/>
                 </a:solidFill>
@@ -27088,24 +27058,24 @@
               </a:rPr>
               <a:t>(Pool, Silo or PSC)</a:t>
             </a:r>
-            <a:endParaRPr lang="en-US" sz="470" dirty="0"/>
-          </a:p>
-        </p:txBody>
-      </p:sp>
-      <p:sp>
-        <p:nvSpPr>
-          <p:cNvPr id="219" name="Shape 197"/>
-          <p:cNvSpPr/>
-          <p:nvPr/>
-        </p:nvSpPr>
-        <p:spPr>
-          <a:xfrm>
-            <a:off x="2554834" y="2885846"/>
-            <a:ext cx="493776" cy="178308"/>
+            <a:endParaRPr lang="en-US" sz="410" dirty="0"/>
+          </a:p>
+        </p:txBody>
+      </p:sp>
+      <p:sp>
+        <p:nvSpPr>
+          <p:cNvPr id="221" name="Shape 199"/>
+          <p:cNvSpPr/>
+          <p:nvPr/>
+        </p:nvSpPr>
+        <p:spPr>
+          <a:xfrm>
+            <a:off x="2589581" y="2871216"/>
+            <a:ext cx="425196" cy="208483"/>
           </a:xfrm>
           <a:prstGeom prst="roundRect">
             <a:avLst>
-              <a:gd name="adj" fmla="val 25641"/>
+              <a:gd name="adj" fmla="val 21930"/>
             </a:avLst>
           </a:prstGeom>
           <a:solidFill>
@@ -27121,35 +27091,33 @@
       </p:sp>
       <p:sp>
         <p:nvSpPr>
-          <p:cNvPr id="220" name="Text 198"/>
-          <p:cNvSpPr/>
-          <p:nvPr/>
-        </p:nvSpPr>
-        <p:spPr>
-          <a:xfrm>
-            <a:off x="2573122" y="2894990"/>
-            <a:ext cx="457200" cy="160020"/>
-          </a:xfrm>
-          <a:prstGeom prst="rect">
-            <a:avLst/>
-          </a:prstGeom>
-          <a:noFill/>
-          <a:ln/>
-        </p:spPr>
-        <p:txBody>
-          <a:bodyPr wrap="square" lIns="0" tIns="0" rIns="0" bIns="0" rtlCol="0" anchor="ctr">
-            <a:normAutofit/>
-          </a:bodyPr>
+          <p:cNvPr id="222" name="Text 200"/>
+          <p:cNvSpPr/>
+          <p:nvPr/>
+        </p:nvSpPr>
+        <p:spPr>
+          <a:xfrm>
+            <a:off x="2609698" y="2880360"/>
+            <a:ext cx="384962" cy="190195"/>
+          </a:xfrm>
+          <a:prstGeom prst="rect">
+            <a:avLst/>
+          </a:prstGeom>
+          <a:noFill/>
+          <a:ln/>
+        </p:spPr>
+        <p:txBody>
+          <a:bodyPr wrap="square" lIns="0" tIns="0" rIns="0" bIns="0" rtlCol="0" anchor="ctr"/>
           <a:lstStyle/>
           <a:p>
             <a:pPr algn="ctr" indent="0" marL="0">
               <a:lnSpc>
-                <a:spcPct val="86000"/>
+                <a:spcPct val="102000"/>
               </a:lnSpc>
               <a:buNone/>
             </a:pPr>
             <a:r>
-              <a:rPr lang="en-US" sz="470" b="1" dirty="0">
+              <a:rPr lang="en-US" sz="410" b="1" dirty="0">
                 <a:solidFill>
                   <a:srgbClr val="202124"/>
                 </a:solidFill>
@@ -27159,17 +27127,17 @@
               </a:rPr>
               <a:t>OBO + KMS</a:t>
             </a:r>
-            <a:endParaRPr lang="en-US" sz="470" dirty="0"/>
+            <a:endParaRPr lang="en-US" sz="410" dirty="0"/>
           </a:p>
           <a:p>
             <a:pPr algn="ctr" indent="0" marL="0">
               <a:lnSpc>
-                <a:spcPct val="86000"/>
+                <a:spcPct val="102000"/>
               </a:lnSpc>
               <a:buNone/>
             </a:pPr>
             <a:r>
-              <a:rPr lang="en-US" sz="410" dirty="0">
+              <a:rPr lang="en-US" sz="375" dirty="0">
                 <a:solidFill>
                   <a:srgbClr val="202124"/>
                 </a:solidFill>
@@ -27179,24 +27147,24 @@
               </a:rPr>
               <a:t>ECDSA sign</a:t>
             </a:r>
-            <a:endParaRPr lang="en-US" sz="470" dirty="0"/>
-          </a:p>
-        </p:txBody>
-      </p:sp>
-      <p:sp>
-        <p:nvSpPr>
-          <p:cNvPr id="221" name="Shape 199"/>
-          <p:cNvSpPr/>
-          <p:nvPr/>
-        </p:nvSpPr>
-        <p:spPr>
-          <a:xfrm>
-            <a:off x="1757477" y="4608576"/>
-            <a:ext cx="686714" cy="132588"/>
+            <a:endParaRPr lang="en-US" sz="410" dirty="0"/>
+          </a:p>
+        </p:txBody>
+      </p:sp>
+      <p:sp>
+        <p:nvSpPr>
+          <p:cNvPr id="223" name="Shape 201"/>
+          <p:cNvSpPr/>
+          <p:nvPr/>
+        </p:nvSpPr>
+        <p:spPr>
+          <a:xfrm>
+            <a:off x="1757477" y="4605833"/>
+            <a:ext cx="589788" cy="138989"/>
           </a:xfrm>
           <a:prstGeom prst="roundRect">
             <a:avLst>
-              <a:gd name="adj" fmla="val 34483"/>
+              <a:gd name="adj" fmla="val 32895"/>
             </a:avLst>
           </a:prstGeom>
           <a:solidFill>
@@ -27212,35 +27180,33 @@
       </p:sp>
       <p:sp>
         <p:nvSpPr>
-          <p:cNvPr id="222" name="Text 200"/>
-          <p:cNvSpPr/>
-          <p:nvPr/>
-        </p:nvSpPr>
-        <p:spPr>
-          <a:xfrm>
-            <a:off x="1775765" y="4617720"/>
-            <a:ext cx="650138" cy="114300"/>
-          </a:xfrm>
-          <a:prstGeom prst="rect">
-            <a:avLst/>
-          </a:prstGeom>
-          <a:noFill/>
-          <a:ln/>
-        </p:spPr>
-        <p:txBody>
-          <a:bodyPr wrap="square" lIns="0" tIns="0" rIns="0" bIns="0" rtlCol="0" anchor="ctr">
-            <a:normAutofit/>
-          </a:bodyPr>
+          <p:cNvPr id="224" name="Text 202"/>
+          <p:cNvSpPr/>
+          <p:nvPr/>
+        </p:nvSpPr>
+        <p:spPr>
+          <a:xfrm>
+            <a:off x="1777594" y="4614977"/>
+            <a:ext cx="549554" cy="120701"/>
+          </a:xfrm>
+          <a:prstGeom prst="rect">
+            <a:avLst/>
+          </a:prstGeom>
+          <a:noFill/>
+          <a:ln/>
+        </p:spPr>
+        <p:txBody>
+          <a:bodyPr wrap="square" lIns="0" tIns="0" rIns="0" bIns="0" rtlCol="0" anchor="ctr"/>
           <a:lstStyle/>
           <a:p>
             <a:pPr algn="ctr" indent="0" marL="0">
               <a:lnSpc>
-                <a:spcPct val="86000"/>
+                <a:spcPct val="102000"/>
               </a:lnSpc>
               <a:buNone/>
             </a:pPr>
             <a:r>
-              <a:rPr lang="en-US" sz="470" b="1" dirty="0">
+              <a:rPr lang="en-US" sz="410" b="1" dirty="0">
                 <a:solidFill>
                   <a:srgbClr val="202124"/>
                 </a:solidFill>
@@ -27250,24 +27216,24 @@
               </a:rPr>
               <a:t>Sanitize request</a:t>
             </a:r>
-            <a:endParaRPr lang="en-US" sz="470" dirty="0"/>
-          </a:p>
-        </p:txBody>
-      </p:sp>
-      <p:sp>
-        <p:nvSpPr>
-          <p:cNvPr id="223" name="Shape 201"/>
-          <p:cNvSpPr/>
-          <p:nvPr/>
-        </p:nvSpPr>
-        <p:spPr>
-          <a:xfrm>
-            <a:off x="1757477" y="4817059"/>
-            <a:ext cx="686714" cy="132588"/>
+            <a:endParaRPr lang="en-US" sz="410" dirty="0"/>
+          </a:p>
+        </p:txBody>
+      </p:sp>
+      <p:sp>
+        <p:nvSpPr>
+          <p:cNvPr id="225" name="Shape 203"/>
+          <p:cNvSpPr/>
+          <p:nvPr/>
+        </p:nvSpPr>
+        <p:spPr>
+          <a:xfrm>
+            <a:off x="1757477" y="4814316"/>
+            <a:ext cx="617220" cy="138989"/>
           </a:xfrm>
           <a:prstGeom prst="roundRect">
             <a:avLst>
-              <a:gd name="adj" fmla="val 34483"/>
+              <a:gd name="adj" fmla="val 32895"/>
             </a:avLst>
           </a:prstGeom>
           <a:solidFill>
@@ -27283,35 +27249,33 @@
       </p:sp>
       <p:sp>
         <p:nvSpPr>
-          <p:cNvPr id="224" name="Text 202"/>
-          <p:cNvSpPr/>
-          <p:nvPr/>
-        </p:nvSpPr>
-        <p:spPr>
-          <a:xfrm>
-            <a:off x="1775765" y="4826203"/>
-            <a:ext cx="650138" cy="114300"/>
-          </a:xfrm>
-          <a:prstGeom prst="rect">
-            <a:avLst/>
-          </a:prstGeom>
-          <a:noFill/>
-          <a:ln/>
-        </p:spPr>
-        <p:txBody>
-          <a:bodyPr wrap="square" lIns="0" tIns="0" rIns="0" bIns="0" rtlCol="0" anchor="ctr">
-            <a:normAutofit/>
-          </a:bodyPr>
+          <p:cNvPr id="226" name="Text 204"/>
+          <p:cNvSpPr/>
+          <p:nvPr/>
+        </p:nvSpPr>
+        <p:spPr>
+          <a:xfrm>
+            <a:off x="1777594" y="4823460"/>
+            <a:ext cx="576986" cy="120701"/>
+          </a:xfrm>
+          <a:prstGeom prst="rect">
+            <a:avLst/>
+          </a:prstGeom>
+          <a:noFill/>
+          <a:ln/>
+        </p:spPr>
+        <p:txBody>
+          <a:bodyPr wrap="square" lIns="0" tIns="0" rIns="0" bIns="0" rtlCol="0" anchor="ctr"/>
           <a:lstStyle/>
           <a:p>
             <a:pPr algn="ctr" indent="0" marL="0">
               <a:lnSpc>
-                <a:spcPct val="86000"/>
+                <a:spcPct val="102000"/>
               </a:lnSpc>
               <a:buNone/>
             </a:pPr>
             <a:r>
-              <a:rPr lang="en-US" sz="470" b="1" dirty="0">
+              <a:rPr lang="en-US" sz="410" b="1" dirty="0">
                 <a:solidFill>
                   <a:srgbClr val="202124"/>
                 </a:solidFill>
@@ -27321,24 +27285,24 @@
               </a:rPr>
               <a:t>Sanitize response</a:t>
             </a:r>
-            <a:endParaRPr lang="en-US" sz="470" dirty="0"/>
-          </a:p>
-        </p:txBody>
-      </p:sp>
-      <p:sp>
-        <p:nvSpPr>
-          <p:cNvPr id="225" name="Shape 203"/>
-          <p:cNvSpPr/>
-          <p:nvPr/>
-        </p:nvSpPr>
-        <p:spPr>
-          <a:xfrm>
-            <a:off x="2435962" y="2094890"/>
-            <a:ext cx="495605" cy="178308"/>
+            <a:endParaRPr lang="en-US" sz="410" dirty="0"/>
+          </a:p>
+        </p:txBody>
+      </p:sp>
+      <p:sp>
+        <p:nvSpPr>
+          <p:cNvPr id="227" name="Shape 205"/>
+          <p:cNvSpPr/>
+          <p:nvPr/>
+        </p:nvSpPr>
+        <p:spPr>
+          <a:xfrm>
+            <a:off x="2443277" y="2080260"/>
+            <a:ext cx="480060" cy="208483"/>
           </a:xfrm>
           <a:prstGeom prst="roundRect">
             <a:avLst>
-              <a:gd name="adj" fmla="val 25641"/>
+              <a:gd name="adj" fmla="val 21930"/>
             </a:avLst>
           </a:prstGeom>
           <a:solidFill>
@@ -27354,35 +27318,33 @@
       </p:sp>
       <p:sp>
         <p:nvSpPr>
-          <p:cNvPr id="226" name="Text 204"/>
-          <p:cNvSpPr/>
-          <p:nvPr/>
-        </p:nvSpPr>
-        <p:spPr>
-          <a:xfrm>
-            <a:off x="2454250" y="2104034"/>
-            <a:ext cx="459029" cy="160020"/>
-          </a:xfrm>
-          <a:prstGeom prst="rect">
-            <a:avLst/>
-          </a:prstGeom>
-          <a:noFill/>
-          <a:ln/>
-        </p:spPr>
-        <p:txBody>
-          <a:bodyPr wrap="square" lIns="0" tIns="0" rIns="0" bIns="0" rtlCol="0" anchor="ctr">
-            <a:normAutofit/>
-          </a:bodyPr>
+          <p:cNvPr id="228" name="Text 206"/>
+          <p:cNvSpPr/>
+          <p:nvPr/>
+        </p:nvSpPr>
+        <p:spPr>
+          <a:xfrm>
+            <a:off x="2463394" y="2089404"/>
+            <a:ext cx="439826" cy="190195"/>
+          </a:xfrm>
+          <a:prstGeom prst="rect">
+            <a:avLst/>
+          </a:prstGeom>
+          <a:noFill/>
+          <a:ln/>
+        </p:spPr>
+        <p:txBody>
+          <a:bodyPr wrap="square" lIns="0" tIns="0" rIns="0" bIns="0" rtlCol="0" anchor="ctr"/>
           <a:lstStyle/>
           <a:p>
             <a:pPr algn="ctr" indent="0" marL="0">
               <a:lnSpc>
-                <a:spcPct val="86000"/>
+                <a:spcPct val="102000"/>
               </a:lnSpc>
               <a:buNone/>
             </a:pPr>
             <a:r>
-              <a:rPr lang="en-US" sz="470" b="1" dirty="0">
+              <a:rPr lang="en-US" sz="410" b="1" dirty="0">
                 <a:solidFill>
                   <a:srgbClr val="202124"/>
                 </a:solidFill>
@@ -27392,17 +27354,17 @@
               </a:rPr>
               <a:t>Header &amp; WAF</a:t>
             </a:r>
-            <a:endParaRPr lang="en-US" sz="470" dirty="0"/>
+            <a:endParaRPr lang="en-US" sz="410" dirty="0"/>
           </a:p>
           <a:p>
             <a:pPr algn="ctr" indent="0" marL="0">
               <a:lnSpc>
-                <a:spcPct val="86000"/>
+                <a:spcPct val="102000"/>
               </a:lnSpc>
               <a:buNone/>
             </a:pPr>
             <a:r>
-              <a:rPr lang="en-US" sz="410" dirty="0">
+              <a:rPr lang="en-US" sz="375" dirty="0">
                 <a:solidFill>
                   <a:srgbClr val="202124"/>
                 </a:solidFill>
@@ -27412,24 +27374,24 @@
               </a:rPr>
               <a:t>policies</a:t>
             </a:r>
-            <a:endParaRPr lang="en-US" sz="470" dirty="0"/>
-          </a:p>
-        </p:txBody>
-      </p:sp>
-      <p:sp>
-        <p:nvSpPr>
-          <p:cNvPr id="227" name="Shape 205"/>
-          <p:cNvSpPr/>
-          <p:nvPr/>
-        </p:nvSpPr>
-        <p:spPr>
-          <a:xfrm>
-            <a:off x="2436876" y="2639873"/>
-            <a:ext cx="493776" cy="178308"/>
+            <a:endParaRPr lang="en-US" sz="410" dirty="0"/>
+          </a:p>
+        </p:txBody>
+      </p:sp>
+      <p:sp>
+        <p:nvSpPr>
+          <p:cNvPr id="229" name="Shape 207"/>
+          <p:cNvSpPr/>
+          <p:nvPr/>
+        </p:nvSpPr>
+        <p:spPr>
+          <a:xfrm>
+            <a:off x="2498141" y="2625242"/>
+            <a:ext cx="370332" cy="208483"/>
           </a:xfrm>
           <a:prstGeom prst="roundRect">
             <a:avLst>
-              <a:gd name="adj" fmla="val 25641"/>
+              <a:gd name="adj" fmla="val 21930"/>
             </a:avLst>
           </a:prstGeom>
           <a:solidFill>
@@ -27445,35 +27407,33 @@
       </p:sp>
       <p:sp>
         <p:nvSpPr>
-          <p:cNvPr id="228" name="Text 206"/>
-          <p:cNvSpPr/>
-          <p:nvPr/>
-        </p:nvSpPr>
-        <p:spPr>
-          <a:xfrm>
-            <a:off x="2455164" y="2649017"/>
-            <a:ext cx="457200" cy="160020"/>
-          </a:xfrm>
-          <a:prstGeom prst="rect">
-            <a:avLst/>
-          </a:prstGeom>
-          <a:noFill/>
-          <a:ln/>
-        </p:spPr>
-        <p:txBody>
-          <a:bodyPr wrap="square" lIns="0" tIns="0" rIns="0" bIns="0" rtlCol="0" anchor="ctr">
-            <a:normAutofit/>
-          </a:bodyPr>
+          <p:cNvPr id="230" name="Text 208"/>
+          <p:cNvSpPr/>
+          <p:nvPr/>
+        </p:nvSpPr>
+        <p:spPr>
+          <a:xfrm>
+            <a:off x="2518258" y="2634386"/>
+            <a:ext cx="330098" cy="190195"/>
+          </a:xfrm>
+          <a:prstGeom prst="rect">
+            <a:avLst/>
+          </a:prstGeom>
+          <a:noFill/>
+          <a:ln/>
+        </p:spPr>
+        <p:txBody>
+          <a:bodyPr wrap="square" lIns="0" tIns="0" rIns="0" bIns="0" rtlCol="0" anchor="ctr"/>
           <a:lstStyle/>
           <a:p>
             <a:pPr algn="ctr" indent="0" marL="0">
               <a:lnSpc>
-                <a:spcPct val="86000"/>
+                <a:spcPct val="102000"/>
               </a:lnSpc>
               <a:buNone/>
             </a:pPr>
             <a:r>
-              <a:rPr lang="en-US" sz="470" b="1" dirty="0">
+              <a:rPr lang="en-US" sz="410" b="1" dirty="0">
                 <a:solidFill>
                   <a:srgbClr val="202124"/>
                 </a:solidFill>
@@ -27483,17 +27443,17 @@
               </a:rPr>
               <a:t>Sanitize</a:t>
             </a:r>
-            <a:endParaRPr lang="en-US" sz="470" dirty="0"/>
+            <a:endParaRPr lang="en-US" sz="410" dirty="0"/>
           </a:p>
           <a:p>
             <a:pPr algn="ctr" indent="0" marL="0">
               <a:lnSpc>
-                <a:spcPct val="86000"/>
+                <a:spcPct val="102000"/>
               </a:lnSpc>
               <a:buNone/>
             </a:pPr>
             <a:r>
-              <a:rPr lang="en-US" sz="410" dirty="0">
+              <a:rPr lang="en-US" sz="375" dirty="0">
                 <a:solidFill>
                   <a:srgbClr val="202124"/>
                 </a:solidFill>
@@ -27503,24 +27463,24 @@
               </a:rPr>
               <a:t>prompt</a:t>
             </a:r>
-            <a:endParaRPr lang="en-US" sz="470" dirty="0"/>
-          </a:p>
-        </p:txBody>
-      </p:sp>
-      <p:sp>
-        <p:nvSpPr>
-          <p:cNvPr id="229" name="Shape 207"/>
-          <p:cNvSpPr/>
-          <p:nvPr/>
-        </p:nvSpPr>
-        <p:spPr>
-          <a:xfrm>
-            <a:off x="3862426" y="1148486"/>
-            <a:ext cx="493776" cy="132588"/>
+            <a:endParaRPr lang="en-US" sz="410" dirty="0"/>
+          </a:p>
+        </p:txBody>
+      </p:sp>
+      <p:sp>
+        <p:nvSpPr>
+          <p:cNvPr id="231" name="Shape 209"/>
+          <p:cNvSpPr/>
+          <p:nvPr/>
+        </p:nvSpPr>
+        <p:spPr>
+          <a:xfrm>
+            <a:off x="3888029" y="1144829"/>
+            <a:ext cx="370332" cy="138989"/>
           </a:xfrm>
           <a:prstGeom prst="roundRect">
             <a:avLst>
-              <a:gd name="adj" fmla="val 34483"/>
+              <a:gd name="adj" fmla="val 32895"/>
             </a:avLst>
           </a:prstGeom>
           <a:solidFill>
@@ -27536,35 +27496,33 @@
       </p:sp>
       <p:sp>
         <p:nvSpPr>
-          <p:cNvPr id="230" name="Text 208"/>
-          <p:cNvSpPr/>
-          <p:nvPr/>
-        </p:nvSpPr>
-        <p:spPr>
-          <a:xfrm>
-            <a:off x="3880714" y="1157630"/>
-            <a:ext cx="457200" cy="114300"/>
-          </a:xfrm>
-          <a:prstGeom prst="rect">
-            <a:avLst/>
-          </a:prstGeom>
-          <a:noFill/>
-          <a:ln/>
-        </p:spPr>
-        <p:txBody>
-          <a:bodyPr wrap="square" lIns="0" tIns="0" rIns="0" bIns="0" rtlCol="0" anchor="ctr">
-            <a:normAutofit/>
-          </a:bodyPr>
+          <p:cNvPr id="232" name="Text 210"/>
+          <p:cNvSpPr/>
+          <p:nvPr/>
+        </p:nvSpPr>
+        <p:spPr>
+          <a:xfrm>
+            <a:off x="3908146" y="1153973"/>
+            <a:ext cx="330098" cy="120701"/>
+          </a:xfrm>
+          <a:prstGeom prst="rect">
+            <a:avLst/>
+          </a:prstGeom>
+          <a:noFill/>
+          <a:ln/>
+        </p:spPr>
+        <p:txBody>
+          <a:bodyPr wrap="square" lIns="0" tIns="0" rIns="0" bIns="0" rtlCol="0" anchor="ctr"/>
           <a:lstStyle/>
           <a:p>
             <a:pPr algn="ctr" indent="0" marL="0">
               <a:lnSpc>
-                <a:spcPct val="86000"/>
+                <a:spcPct val="102000"/>
               </a:lnSpc>
               <a:buNone/>
             </a:pPr>
             <a:r>
-              <a:rPr lang="en-US" sz="470" b="1" dirty="0">
+              <a:rPr lang="en-US" sz="410" b="1" dirty="0">
                 <a:solidFill>
                   <a:srgbClr val="202124"/>
                 </a:solidFill>
@@ -27574,24 +27532,24 @@
               </a:rPr>
               <a:t>Response</a:t>
             </a:r>
-            <a:endParaRPr lang="en-US" sz="470" dirty="0"/>
-          </a:p>
-        </p:txBody>
-      </p:sp>
-      <p:sp>
-        <p:nvSpPr>
-          <p:cNvPr id="231" name="Shape 209"/>
-          <p:cNvSpPr/>
-          <p:nvPr/>
-        </p:nvSpPr>
-        <p:spPr>
-          <a:xfrm>
-            <a:off x="3862426" y="2725826"/>
-            <a:ext cx="493776" cy="132588"/>
+            <a:endParaRPr lang="en-US" sz="410" dirty="0"/>
+          </a:p>
+        </p:txBody>
+      </p:sp>
+      <p:sp>
+        <p:nvSpPr>
+          <p:cNvPr id="233" name="Shape 211"/>
+          <p:cNvSpPr/>
+          <p:nvPr/>
+        </p:nvSpPr>
+        <p:spPr>
+          <a:xfrm>
+            <a:off x="3888029" y="2723083"/>
+            <a:ext cx="370332" cy="138989"/>
           </a:xfrm>
           <a:prstGeom prst="roundRect">
             <a:avLst>
-              <a:gd name="adj" fmla="val 34483"/>
+              <a:gd name="adj" fmla="val 32895"/>
             </a:avLst>
           </a:prstGeom>
           <a:solidFill>
@@ -27607,35 +27565,33 @@
       </p:sp>
       <p:sp>
         <p:nvSpPr>
-          <p:cNvPr id="232" name="Text 210"/>
-          <p:cNvSpPr/>
-          <p:nvPr/>
-        </p:nvSpPr>
-        <p:spPr>
-          <a:xfrm>
-            <a:off x="3880714" y="2734970"/>
-            <a:ext cx="457200" cy="114300"/>
-          </a:xfrm>
-          <a:prstGeom prst="rect">
-            <a:avLst/>
-          </a:prstGeom>
-          <a:noFill/>
-          <a:ln/>
-        </p:spPr>
-        <p:txBody>
-          <a:bodyPr wrap="square" lIns="0" tIns="0" rIns="0" bIns="0" rtlCol="0" anchor="ctr">
-            <a:normAutofit/>
-          </a:bodyPr>
+          <p:cNvPr id="234" name="Text 212"/>
+          <p:cNvSpPr/>
+          <p:nvPr/>
+        </p:nvSpPr>
+        <p:spPr>
+          <a:xfrm>
+            <a:off x="3908146" y="2732227"/>
+            <a:ext cx="330098" cy="120701"/>
+          </a:xfrm>
+          <a:prstGeom prst="rect">
+            <a:avLst/>
+          </a:prstGeom>
+          <a:noFill/>
+          <a:ln/>
+        </p:spPr>
+        <p:txBody>
+          <a:bodyPr wrap="square" lIns="0" tIns="0" rIns="0" bIns="0" rtlCol="0" anchor="ctr"/>
           <a:lstStyle/>
           <a:p>
             <a:pPr algn="ctr" indent="0" marL="0">
               <a:lnSpc>
-                <a:spcPct val="86000"/>
+                <a:spcPct val="102000"/>
               </a:lnSpc>
               <a:buNone/>
             </a:pPr>
             <a:r>
-              <a:rPr lang="en-US" sz="470" b="1" dirty="0">
+              <a:rPr lang="en-US" sz="410" b="1" dirty="0">
                 <a:solidFill>
                   <a:srgbClr val="202124"/>
                 </a:solidFill>
@@ -27645,24 +27601,24 @@
               </a:rPr>
               <a:t>Response</a:t>
             </a:r>
-            <a:endParaRPr lang="en-US" sz="470" dirty="0"/>
-          </a:p>
-        </p:txBody>
-      </p:sp>
-      <p:sp>
-        <p:nvSpPr>
-          <p:cNvPr id="233" name="Shape 211"/>
-          <p:cNvSpPr/>
-          <p:nvPr/>
-        </p:nvSpPr>
-        <p:spPr>
-          <a:xfrm>
-            <a:off x="3040380" y="1148486"/>
-            <a:ext cx="493776" cy="132588"/>
+            <a:endParaRPr lang="en-US" sz="410" dirty="0"/>
+          </a:p>
+        </p:txBody>
+      </p:sp>
+      <p:sp>
+        <p:nvSpPr>
+          <p:cNvPr id="235" name="Shape 213"/>
+          <p:cNvSpPr/>
+          <p:nvPr/>
+        </p:nvSpPr>
+        <p:spPr>
+          <a:xfrm>
+            <a:off x="3144622" y="1144829"/>
+            <a:ext cx="342900" cy="138989"/>
           </a:xfrm>
           <a:prstGeom prst="roundRect">
             <a:avLst>
-              <a:gd name="adj" fmla="val 34483"/>
+              <a:gd name="adj" fmla="val 32895"/>
             </a:avLst>
           </a:prstGeom>
           <a:solidFill>
@@ -27678,35 +27634,33 @@
       </p:sp>
       <p:sp>
         <p:nvSpPr>
-          <p:cNvPr id="234" name="Text 212"/>
-          <p:cNvSpPr/>
-          <p:nvPr/>
-        </p:nvSpPr>
-        <p:spPr>
-          <a:xfrm>
-            <a:off x="3058668" y="1157630"/>
-            <a:ext cx="457200" cy="114300"/>
-          </a:xfrm>
-          <a:prstGeom prst="rect">
-            <a:avLst/>
-          </a:prstGeom>
-          <a:noFill/>
-          <a:ln/>
-        </p:spPr>
-        <p:txBody>
-          <a:bodyPr wrap="square" lIns="0" tIns="0" rIns="0" bIns="0" rtlCol="0" anchor="ctr">
-            <a:normAutofit/>
-          </a:bodyPr>
+          <p:cNvPr id="236" name="Text 214"/>
+          <p:cNvSpPr/>
+          <p:nvPr/>
+        </p:nvSpPr>
+        <p:spPr>
+          <a:xfrm>
+            <a:off x="3164738" y="1153973"/>
+            <a:ext cx="302666" cy="120701"/>
+          </a:xfrm>
+          <a:prstGeom prst="rect">
+            <a:avLst/>
+          </a:prstGeom>
+          <a:noFill/>
+          <a:ln/>
+        </p:spPr>
+        <p:txBody>
+          <a:bodyPr wrap="square" lIns="0" tIns="0" rIns="0" bIns="0" rtlCol="0" anchor="ctr"/>
           <a:lstStyle/>
           <a:p>
             <a:pPr algn="ctr" indent="0" marL="0">
               <a:lnSpc>
-                <a:spcPct val="86000"/>
+                <a:spcPct val="102000"/>
               </a:lnSpc>
               <a:buNone/>
             </a:pPr>
             <a:r>
-              <a:rPr lang="en-US" sz="470" b="1" dirty="0">
+              <a:rPr lang="en-US" sz="410" b="1" dirty="0">
                 <a:solidFill>
                   <a:srgbClr val="202124"/>
                 </a:solidFill>
@@ -27716,24 +27670,24 @@
               </a:rPr>
               <a:t>Request</a:t>
             </a:r>
-            <a:endParaRPr lang="en-US" sz="470" dirty="0"/>
-          </a:p>
-        </p:txBody>
-      </p:sp>
-      <p:sp>
-        <p:nvSpPr>
-          <p:cNvPr id="235" name="Shape 213"/>
-          <p:cNvSpPr/>
-          <p:nvPr/>
-        </p:nvSpPr>
-        <p:spPr>
-          <a:xfrm>
-            <a:off x="3040380" y="2725826"/>
-            <a:ext cx="493776" cy="132588"/>
+            <a:endParaRPr lang="en-US" sz="410" dirty="0"/>
+          </a:p>
+        </p:txBody>
+      </p:sp>
+      <p:sp>
+        <p:nvSpPr>
+          <p:cNvPr id="237" name="Shape 215"/>
+          <p:cNvSpPr/>
+          <p:nvPr/>
+        </p:nvSpPr>
+        <p:spPr>
+          <a:xfrm>
+            <a:off x="3144622" y="2723083"/>
+            <a:ext cx="342900" cy="138989"/>
           </a:xfrm>
           <a:prstGeom prst="roundRect">
             <a:avLst>
-              <a:gd name="adj" fmla="val 34483"/>
+              <a:gd name="adj" fmla="val 32895"/>
             </a:avLst>
           </a:prstGeom>
           <a:solidFill>
@@ -27749,35 +27703,33 @@
       </p:sp>
       <p:sp>
         <p:nvSpPr>
-          <p:cNvPr id="236" name="Text 214"/>
-          <p:cNvSpPr/>
-          <p:nvPr/>
-        </p:nvSpPr>
-        <p:spPr>
-          <a:xfrm>
-            <a:off x="3058668" y="2734970"/>
-            <a:ext cx="457200" cy="114300"/>
-          </a:xfrm>
-          <a:prstGeom prst="rect">
-            <a:avLst/>
-          </a:prstGeom>
-          <a:noFill/>
-          <a:ln/>
-        </p:spPr>
-        <p:txBody>
-          <a:bodyPr wrap="square" lIns="0" tIns="0" rIns="0" bIns="0" rtlCol="0" anchor="ctr">
-            <a:normAutofit/>
-          </a:bodyPr>
+          <p:cNvPr id="238" name="Text 216"/>
+          <p:cNvSpPr/>
+          <p:nvPr/>
+        </p:nvSpPr>
+        <p:spPr>
+          <a:xfrm>
+            <a:off x="3164738" y="2732227"/>
+            <a:ext cx="302666" cy="120701"/>
+          </a:xfrm>
+          <a:prstGeom prst="rect">
+            <a:avLst/>
+          </a:prstGeom>
+          <a:noFill/>
+          <a:ln/>
+        </p:spPr>
+        <p:txBody>
+          <a:bodyPr wrap="square" lIns="0" tIns="0" rIns="0" bIns="0" rtlCol="0" anchor="ctr"/>
           <a:lstStyle/>
           <a:p>
             <a:pPr algn="ctr" indent="0" marL="0">
               <a:lnSpc>
-                <a:spcPct val="86000"/>
+                <a:spcPct val="102000"/>
               </a:lnSpc>
               <a:buNone/>
             </a:pPr>
             <a:r>
-              <a:rPr lang="en-US" sz="470" b="1" dirty="0">
+              <a:rPr lang="en-US" sz="410" b="1" dirty="0">
                 <a:solidFill>
                   <a:srgbClr val="202124"/>
                 </a:solidFill>
@@ -27787,13 +27739,13 @@
               </a:rPr>
               <a:t>Request</a:t>
             </a:r>
-            <a:endParaRPr lang="en-US" sz="470" dirty="0"/>
-          </a:p>
-        </p:txBody>
-      </p:sp>
-      <p:sp>
-        <p:nvSpPr>
-          <p:cNvPr id="237" name="Text 215"/>
+            <a:endParaRPr lang="en-US" sz="410" dirty="0"/>
+          </a:p>
+        </p:txBody>
+      </p:sp>
+      <p:sp>
+        <p:nvSpPr>
+          <p:cNvPr id="239" name="Text 217"/>
           <p:cNvSpPr/>
           <p:nvPr/>
         </p:nvSpPr>
@@ -27809,14 +27761,14 @@
           <a:ln/>
         </p:spPr>
         <p:txBody>
-          <a:bodyPr wrap="square" rtlCol="0" anchor="ctr"/>
+          <a:bodyPr wrap="none" rtlCol="0" anchor="ctr"/>
           <a:lstStyle/>
           <a:p>
             <a:pPr algn="l" indent="0" marL="0">
               <a:buNone/>
             </a:pPr>
             <a:r>
-              <a:rPr lang="en-US" sz="780" b="1" dirty="0">
+              <a:rPr lang="en-US" sz="700" b="1" dirty="0">
                 <a:solidFill>
                   <a:srgbClr val="4285F4"/>
                 </a:solidFill>
@@ -27830,7 +27782,7 @@
               <a:buNone/>
             </a:pPr>
             <a:r>
-              <a:rPr lang="en-US" sz="760" dirty="0">
+              <a:rPr lang="en-US" sz="690" dirty="0">
                 <a:solidFill>
                   <a:srgbClr val="5F6368"/>
                 </a:solidFill>
@@ -27844,7 +27796,7 @@
               <a:buNone/>
             </a:pPr>
             <a:r>
-              <a:rPr lang="en-US" sz="780" b="1" dirty="0">
+              <a:rPr lang="en-US" sz="700" b="1" dirty="0">
                 <a:solidFill>
                   <a:srgbClr val="3C4043"/>
                 </a:solidFill>
@@ -27854,7 +27806,7 @@
               </a:rPr>
               <a:t>Proprietary + Confidential</a:t>
             </a:r>
-            <a:endParaRPr lang="en-US" sz="780" dirty="0"/>
+            <a:endParaRPr lang="en-US" sz="700" dirty="0"/>
           </a:p>
         </p:txBody>
       </p:sp>
@@ -30749,14 +30701,14 @@
           <a:ln/>
         </p:spPr>
         <p:txBody>
-          <a:bodyPr wrap="square" rtlCol="0" anchor="ctr"/>
+          <a:bodyPr wrap="none" rtlCol="0" anchor="ctr"/>
           <a:lstStyle/>
           <a:p>
             <a:pPr algn="l" indent="0" marL="0">
               <a:buNone/>
             </a:pPr>
             <a:r>
-              <a:rPr lang="en-US" sz="780" b="1" dirty="0">
+              <a:rPr lang="en-US" sz="740" b="1" dirty="0">
                 <a:solidFill>
                   <a:srgbClr val="4285F4"/>
                 </a:solidFill>
@@ -30770,7 +30722,7 @@
               <a:buNone/>
             </a:pPr>
             <a:r>
-              <a:rPr lang="en-US" sz="760" dirty="0">
+              <a:rPr lang="en-US" sz="720" dirty="0">
                 <a:solidFill>
                   <a:srgbClr val="5F6368"/>
                 </a:solidFill>
@@ -30784,7 +30736,7 @@
               <a:buNone/>
             </a:pPr>
             <a:r>
-              <a:rPr lang="en-US" sz="780" b="1" dirty="0">
+              <a:rPr lang="en-US" sz="740" b="1" dirty="0">
                 <a:solidFill>
                   <a:srgbClr val="3C4043"/>
                 </a:solidFill>
@@ -30794,7 +30746,7 @@
               </a:rPr>
               <a:t>Proprietary + Confidential</a:t>
             </a:r>
-            <a:endParaRPr lang="en-US" sz="780" dirty="0"/>
+            <a:endParaRPr lang="en-US" sz="740" dirty="0"/>
           </a:p>
         </p:txBody>
       </p:sp>
@@ -32835,14 +32787,14 @@
           <a:ln/>
         </p:spPr>
         <p:txBody>
-          <a:bodyPr wrap="square" rtlCol="0" anchor="ctr"/>
+          <a:bodyPr wrap="none" rtlCol="0" anchor="ctr"/>
           <a:lstStyle/>
           <a:p>
             <a:pPr algn="l" indent="0" marL="0">
               <a:buNone/>
             </a:pPr>
             <a:r>
-              <a:rPr lang="en-US" sz="780" b="1" dirty="0">
+              <a:rPr lang="en-US" sz="740" b="1" dirty="0">
                 <a:solidFill>
                   <a:srgbClr val="4285F4"/>
                 </a:solidFill>
@@ -32856,7 +32808,7 @@
               <a:buNone/>
             </a:pPr>
             <a:r>
-              <a:rPr lang="en-US" sz="760" dirty="0">
+              <a:rPr lang="en-US" sz="720" dirty="0">
                 <a:solidFill>
                   <a:srgbClr val="5F6368"/>
                 </a:solidFill>
@@ -32870,7 +32822,7 @@
               <a:buNone/>
             </a:pPr>
             <a:r>
-              <a:rPr lang="en-US" sz="780" b="1" dirty="0">
+              <a:rPr lang="en-US" sz="740" b="1" dirty="0">
                 <a:solidFill>
                   <a:srgbClr val="3C4043"/>
                 </a:solidFill>
@@ -32880,7 +32832,7 @@
               </a:rPr>
               <a:t>Proprietary + Confidential</a:t>
             </a:r>
-            <a:endParaRPr lang="en-US" sz="780" dirty="0"/>
+            <a:endParaRPr lang="en-US" sz="740" dirty="0"/>
           </a:p>
         </p:txBody>
       </p:sp>
@@ -35845,7 +35797,7 @@
           <a:ln/>
         </p:spPr>
         <p:txBody>
-          <a:bodyPr wrap="square" rtlCol="0" anchor="ctr"/>
+          <a:bodyPr wrap="none" rtlCol="0" anchor="ctr"/>
           <a:lstStyle/>
           <a:p>
             <a:pPr algn="l" indent="0" marL="0">

--- a/slides/ws1-google-slides-design-plugin-editable-slides.pptx
+++ b/slides/ws1-google-slides-design-plugin-editable-slides.pptx
@@ -4923,7 +4923,7 @@
                 <a:ea typeface="Courier New" pitchFamily="34" charset="-122"/>
                 <a:cs typeface="Courier New" pitchFamily="34" charset="-120"/>
               </a:rPr>
-              <a:t>Source Module: scripts/verify_5_third_party_saas_products.py</a:t>
+              <a:t>Source Module: scripts/capture_genuine_3p_before_after_uis.mjs</a:t>
             </a:r>
             <a:endParaRPr lang="en-US" sz="720" dirty="0"/>
           </a:p>
@@ -22151,69 +22151,7 @@
       </p:sp>
       <p:sp>
         <p:nvSpPr>
-          <p:cNvPr id="75" name="Text 73"/>
-          <p:cNvSpPr/>
-          <p:nvPr/>
-        </p:nvSpPr>
-        <p:spPr>
-          <a:xfrm>
-            <a:off x="1560881" y="3970325"/>
-            <a:ext cx="1994306" cy="210312"/>
-          </a:xfrm>
-          <a:prstGeom prst="rect">
-            <a:avLst/>
-          </a:prstGeom>
-          <a:noFill/>
-          <a:ln/>
-        </p:spPr>
-        <p:txBody>
-          <a:bodyPr wrap="square" lIns="0" tIns="0" rIns="0" bIns="0" rtlCol="0" anchor="t"/>
-          <a:lstStyle/>
-          <a:p>
-            <a:pPr algn="l" indent="0" marL="0">
-              <a:lnSpc>
-                <a:spcPct val="102000"/>
-              </a:lnSpc>
-              <a:buNone/>
-            </a:pPr>
-            <a:r>
-              <a:rPr lang="en-US" sz="470" b="1" dirty="0">
-                <a:solidFill>
-                  <a:srgbClr val="202124"/>
-                </a:solidFill>
-                <a:latin typeface="Arial" pitchFamily="34" charset="0"/>
-                <a:ea typeface="Arial" pitchFamily="34" charset="-122"/>
-                <a:cs typeface="Arial" pitchFamily="34" charset="-120"/>
-              </a:rPr>
-              <a:t>Tenant Pool (Shared Runtime)</a:t>
-            </a:r>
-            <a:endParaRPr lang="en-US" sz="470" dirty="0"/>
-          </a:p>
-          <a:p>
-            <a:pPr algn="l" indent="0" marL="0">
-              <a:lnSpc>
-                <a:spcPct val="102000"/>
-              </a:lnSpc>
-              <a:buNone/>
-            </a:pPr>
-            <a:r>
-              <a:rPr lang="en-US" sz="400" dirty="0">
-                <a:solidFill>
-                  <a:srgbClr val="202124"/>
-                </a:solidFill>
-                <a:latin typeface="Arial" pitchFamily="34" charset="0"/>
-                <a:ea typeface="Arial" pitchFamily="34" charset="-122"/>
-                <a:cs typeface="Arial" pitchFamily="34" charset="-120"/>
-              </a:rPr>
-              <a:t>FinVault (8k Cap) &amp; RetailStream (4k Cap)</a:t>
-            </a:r>
-            <a:endParaRPr lang="en-US" sz="470" dirty="0"/>
-          </a:p>
-        </p:txBody>
-      </p:sp>
-      <p:sp>
-        <p:nvSpPr>
-          <p:cNvPr id="76" name="Shape 74"/>
+          <p:cNvPr id="75" name="Shape 73"/>
           <p:cNvSpPr/>
           <p:nvPr/>
         </p:nvSpPr>
@@ -22240,69 +22178,7 @@
       </p:sp>
       <p:sp>
         <p:nvSpPr>
-          <p:cNvPr id="77" name="Text 75"/>
-          <p:cNvSpPr/>
-          <p:nvPr/>
-        </p:nvSpPr>
-        <p:spPr>
-          <a:xfrm>
-            <a:off x="3925519" y="3970325"/>
-            <a:ext cx="1994306" cy="210312"/>
-          </a:xfrm>
-          <a:prstGeom prst="rect">
-            <a:avLst/>
-          </a:prstGeom>
-          <a:noFill/>
-          <a:ln/>
-        </p:spPr>
-        <p:txBody>
-          <a:bodyPr wrap="square" lIns="0" tIns="0" rIns="0" bIns="0" rtlCol="0" anchor="t"/>
-          <a:lstStyle/>
-          <a:p>
-            <a:pPr algn="l" indent="0" marL="0">
-              <a:lnSpc>
-                <a:spcPct val="102000"/>
-              </a:lnSpc>
-              <a:buNone/>
-            </a:pPr>
-            <a:r>
-              <a:rPr lang="en-US" sz="470" b="1" dirty="0">
-                <a:solidFill>
-                  <a:srgbClr val="202124"/>
-                </a:solidFill>
-                <a:latin typeface="Arial" pitchFamily="34" charset="0"/>
-                <a:ea typeface="Arial" pitchFamily="34" charset="-122"/>
-                <a:cs typeface="Arial" pitchFamily="34" charset="-120"/>
-              </a:rPr>
-              <a:t>Dedicated Sovereign Tenant Silo</a:t>
-            </a:r>
-            <a:endParaRPr lang="en-US" sz="470" dirty="0"/>
-          </a:p>
-          <a:p>
-            <a:pPr algn="l" indent="0" marL="0">
-              <a:lnSpc>
-                <a:spcPct val="102000"/>
-              </a:lnSpc>
-              <a:buNone/>
-            </a:pPr>
-            <a:r>
-              <a:rPr lang="en-US" sz="400" dirty="0">
-                <a:solidFill>
-                  <a:srgbClr val="202124"/>
-                </a:solidFill>
-                <a:latin typeface="Arial" pitchFamily="34" charset="0"/>
-                <a:ea typeface="Arial" pitchFamily="34" charset="-122"/>
-                <a:cs typeface="Arial" pitchFamily="34" charset="-120"/>
-              </a:rPr>
-              <a:t>VPC-SC + IAM PAB + finvault-silo-cmek + PSC</a:t>
-            </a:r>
-            <a:endParaRPr lang="en-US" sz="470" dirty="0"/>
-          </a:p>
-        </p:txBody>
-      </p:sp>
-      <p:sp>
-        <p:nvSpPr>
-          <p:cNvPr id="78" name="Shape 76"/>
+          <p:cNvPr id="76" name="Shape 74"/>
           <p:cNvSpPr/>
           <p:nvPr/>
         </p:nvSpPr>
@@ -22329,69 +22205,7 @@
       </p:sp>
       <p:sp>
         <p:nvSpPr>
-          <p:cNvPr id="79" name="Text 77"/>
-          <p:cNvSpPr/>
-          <p:nvPr/>
-        </p:nvSpPr>
-        <p:spPr>
-          <a:xfrm>
-            <a:off x="1482242" y="1926641"/>
-            <a:ext cx="1901952" cy="210312"/>
-          </a:xfrm>
-          <a:prstGeom prst="rect">
-            <a:avLst/>
-          </a:prstGeom>
-          <a:noFill/>
-          <a:ln/>
-        </p:spPr>
-        <p:txBody>
-          <a:bodyPr wrap="square" lIns="0" tIns="0" rIns="0" bIns="0" rtlCol="0" anchor="t"/>
-          <a:lstStyle/>
-          <a:p>
-            <a:pPr algn="l" indent="0" marL="0">
-              <a:lnSpc>
-                <a:spcPct val="102000"/>
-              </a:lnSpc>
-              <a:buNone/>
-            </a:pPr>
-            <a:r>
-              <a:rPr lang="en-US" sz="470" b="1" dirty="0">
-                <a:solidFill>
-                  <a:srgbClr val="202124"/>
-                </a:solidFill>
-                <a:latin typeface="Arial" pitchFamily="34" charset="0"/>
-                <a:ea typeface="Arial" pitchFamily="34" charset="-122"/>
-                <a:cs typeface="Arial" pitchFamily="34" charset="-120"/>
-              </a:rPr>
-              <a:t>Routing hub (Hop 1 &amp; Hop 2 PEP/PDP)</a:t>
-            </a:r>
-            <a:endParaRPr lang="en-US" sz="470" dirty="0"/>
-          </a:p>
-          <a:p>
-            <a:pPr algn="l" indent="0" marL="0">
-              <a:lnSpc>
-                <a:spcPct val="102000"/>
-              </a:lnSpc>
-              <a:buNone/>
-            </a:pPr>
-            <a:r>
-              <a:rPr lang="en-US" sz="400" dirty="0">
-                <a:solidFill>
-                  <a:srgbClr val="202124"/>
-                </a:solidFill>
-                <a:latin typeface="Arial" pitchFamily="34" charset="0"/>
-                <a:ea typeface="Arial" pitchFamily="34" charset="-122"/>
-                <a:cs typeface="Arial" pitchFamily="34" charset="-120"/>
-              </a:rPr>
-              <a:t>Central ingress, OBO+DPoP KMS Sign &amp; Discovery Engine Catalog filter</a:t>
-            </a:r>
-            <a:endParaRPr lang="en-US" sz="470" dirty="0"/>
-          </a:p>
-        </p:txBody>
-      </p:sp>
-      <p:sp>
-        <p:nvSpPr>
-          <p:cNvPr id="80" name="Shape 78"/>
+          <p:cNvPr id="77" name="Shape 75"/>
           <p:cNvSpPr/>
           <p:nvPr/>
         </p:nvSpPr>
@@ -22416,51 +22230,9 @@
           </a:ln>
         </p:spPr>
       </p:sp>
-      <p:sp>
-        <p:nvSpPr>
-          <p:cNvPr id="81" name="Text 79"/>
-          <p:cNvSpPr/>
-          <p:nvPr/>
-        </p:nvSpPr>
-        <p:spPr>
-          <a:xfrm>
-            <a:off x="4655210" y="1961388"/>
-            <a:ext cx="1315822" cy="210312"/>
-          </a:xfrm>
-          <a:prstGeom prst="rect">
-            <a:avLst/>
-          </a:prstGeom>
-          <a:noFill/>
-          <a:ln/>
-        </p:spPr>
-        <p:txBody>
-          <a:bodyPr wrap="square" lIns="0" tIns="0" rIns="0" bIns="0" rtlCol="0" anchor="t"/>
-          <a:lstStyle/>
-          <a:p>
-            <a:pPr algn="l" indent="0" marL="0">
-              <a:lnSpc>
-                <a:spcPct val="102000"/>
-              </a:lnSpc>
-              <a:buNone/>
-            </a:pPr>
-            <a:r>
-              <a:rPr lang="en-US" sz="430" b="1" dirty="0">
-                <a:solidFill>
-                  <a:srgbClr val="202124"/>
-                </a:solidFill>
-                <a:latin typeface="Arial" pitchFamily="34" charset="0"/>
-                <a:ea typeface="Arial" pitchFamily="34" charset="-122"/>
-                <a:cs typeface="Arial" pitchFamily="34" charset="-120"/>
-              </a:rPr>
-              <a:t>Central governance and FinOps observability hub</a:t>
-            </a:r>
-            <a:endParaRPr lang="en-US" sz="430" dirty="0"/>
-          </a:p>
-        </p:txBody>
-      </p:sp>
       <p:pic>
         <p:nvPicPr>
-          <p:cNvPr id="82" name="Image 0" descr="preencoded.png">    </p:cNvPr>
+          <p:cNvPr id="78" name="Image 0" descr="preencoded.png">    </p:cNvPr>
           <p:cNvPicPr>
             <a:picLocks noChangeAspect="1"/>
           </p:cNvPicPr>
@@ -22484,7 +22256,7 @@
       </p:pic>
       <p:sp>
         <p:nvSpPr>
-          <p:cNvPr id="83" name="Shape 80"/>
+          <p:cNvPr id="79" name="Shape 76"/>
           <p:cNvSpPr/>
           <p:nvPr/>
         </p:nvSpPr>
@@ -22508,7 +22280,7 @@
       </p:sp>
       <p:sp>
         <p:nvSpPr>
-          <p:cNvPr id="84" name="Shape 81"/>
+          <p:cNvPr id="80" name="Shape 77"/>
           <p:cNvSpPr/>
           <p:nvPr/>
         </p:nvSpPr>
@@ -22532,7 +22304,7 @@
       </p:sp>
       <p:sp>
         <p:nvSpPr>
-          <p:cNvPr id="85" name="Shape 82"/>
+          <p:cNvPr id="81" name="Shape 78"/>
           <p:cNvSpPr/>
           <p:nvPr/>
         </p:nvSpPr>
@@ -22556,7 +22328,7 @@
       </p:sp>
       <p:sp>
         <p:nvSpPr>
-          <p:cNvPr id="86" name="Shape 83"/>
+          <p:cNvPr id="82" name="Shape 79"/>
           <p:cNvSpPr/>
           <p:nvPr/>
         </p:nvSpPr>
@@ -22579,7 +22351,7 @@
       </p:sp>
       <p:sp>
         <p:nvSpPr>
-          <p:cNvPr id="87" name="Shape 84"/>
+          <p:cNvPr id="83" name="Shape 80"/>
           <p:cNvSpPr/>
           <p:nvPr/>
         </p:nvSpPr>
@@ -22603,7 +22375,7 @@
       </p:sp>
       <p:sp>
         <p:nvSpPr>
-          <p:cNvPr id="88" name="Shape 85"/>
+          <p:cNvPr id="84" name="Shape 81"/>
           <p:cNvSpPr/>
           <p:nvPr/>
         </p:nvSpPr>
@@ -22627,7 +22399,7 @@
       </p:sp>
       <p:sp>
         <p:nvSpPr>
-          <p:cNvPr id="89" name="Shape 86"/>
+          <p:cNvPr id="85" name="Shape 82"/>
           <p:cNvSpPr/>
           <p:nvPr/>
         </p:nvSpPr>
@@ -22650,7 +22422,7 @@
       </p:sp>
       <p:sp>
         <p:nvSpPr>
-          <p:cNvPr id="90" name="Shape 87"/>
+          <p:cNvPr id="86" name="Shape 83"/>
           <p:cNvSpPr/>
           <p:nvPr/>
         </p:nvSpPr>
@@ -22674,7 +22446,7 @@
       </p:sp>
       <p:sp>
         <p:nvSpPr>
-          <p:cNvPr id="91" name="Shape 88"/>
+          <p:cNvPr id="87" name="Shape 84"/>
           <p:cNvSpPr/>
           <p:nvPr/>
         </p:nvSpPr>
@@ -22699,7 +22471,7 @@
       </p:sp>
       <p:sp>
         <p:nvSpPr>
-          <p:cNvPr id="92" name="Shape 89"/>
+          <p:cNvPr id="88" name="Shape 85"/>
           <p:cNvSpPr/>
           <p:nvPr/>
         </p:nvSpPr>
@@ -22723,7 +22495,7 @@
       </p:sp>
       <p:sp>
         <p:nvSpPr>
-          <p:cNvPr id="93" name="Shape 90"/>
+          <p:cNvPr id="89" name="Shape 86"/>
           <p:cNvSpPr/>
           <p:nvPr/>
         </p:nvSpPr>
@@ -22747,7 +22519,7 @@
       </p:sp>
       <p:sp>
         <p:nvSpPr>
-          <p:cNvPr id="94" name="Shape 91"/>
+          <p:cNvPr id="90" name="Shape 87"/>
           <p:cNvSpPr/>
           <p:nvPr/>
         </p:nvSpPr>
@@ -22770,7 +22542,7 @@
       </p:sp>
       <p:sp>
         <p:nvSpPr>
-          <p:cNvPr id="95" name="Shape 92"/>
+          <p:cNvPr id="91" name="Shape 88"/>
           <p:cNvSpPr/>
           <p:nvPr/>
         </p:nvSpPr>
@@ -22793,7 +22565,7 @@
       </p:sp>
       <p:sp>
         <p:nvSpPr>
-          <p:cNvPr id="96" name="Shape 93"/>
+          <p:cNvPr id="92" name="Shape 89"/>
           <p:cNvSpPr/>
           <p:nvPr/>
         </p:nvSpPr>
@@ -22817,7 +22589,7 @@
       </p:sp>
       <p:sp>
         <p:nvSpPr>
-          <p:cNvPr id="97" name="Shape 94"/>
+          <p:cNvPr id="93" name="Shape 90"/>
           <p:cNvSpPr/>
           <p:nvPr/>
         </p:nvSpPr>
@@ -22841,7 +22613,7 @@
       </p:sp>
       <p:sp>
         <p:nvSpPr>
-          <p:cNvPr id="98" name="Shape 95"/>
+          <p:cNvPr id="94" name="Shape 91"/>
           <p:cNvSpPr/>
           <p:nvPr/>
         </p:nvSpPr>
@@ -22864,7 +22636,7 @@
       </p:sp>
       <p:sp>
         <p:nvSpPr>
-          <p:cNvPr id="99" name="Shape 96"/>
+          <p:cNvPr id="95" name="Shape 92"/>
           <p:cNvSpPr/>
           <p:nvPr/>
         </p:nvSpPr>
@@ -22888,7 +22660,7 @@
       </p:sp>
       <p:sp>
         <p:nvSpPr>
-          <p:cNvPr id="100" name="Shape 97"/>
+          <p:cNvPr id="96" name="Shape 93"/>
           <p:cNvSpPr/>
           <p:nvPr/>
         </p:nvSpPr>
@@ -22912,7 +22684,7 @@
       </p:sp>
       <p:sp>
         <p:nvSpPr>
-          <p:cNvPr id="101" name="Shape 98"/>
+          <p:cNvPr id="97" name="Shape 94"/>
           <p:cNvSpPr/>
           <p:nvPr/>
         </p:nvSpPr>
@@ -22935,7 +22707,7 @@
       </p:sp>
       <p:sp>
         <p:nvSpPr>
-          <p:cNvPr id="102" name="Shape 99"/>
+          <p:cNvPr id="98" name="Shape 95"/>
           <p:cNvSpPr/>
           <p:nvPr/>
         </p:nvSpPr>
@@ -22959,7 +22731,7 @@
       </p:sp>
       <p:sp>
         <p:nvSpPr>
-          <p:cNvPr id="103" name="Shape 100"/>
+          <p:cNvPr id="99" name="Shape 96"/>
           <p:cNvSpPr/>
           <p:nvPr/>
         </p:nvSpPr>
@@ -22982,7 +22754,7 @@
       </p:sp>
       <p:sp>
         <p:nvSpPr>
-          <p:cNvPr id="104" name="Shape 101"/>
+          <p:cNvPr id="100" name="Shape 97"/>
           <p:cNvSpPr/>
           <p:nvPr/>
         </p:nvSpPr>
@@ -23005,7 +22777,7 @@
       </p:sp>
       <p:sp>
         <p:nvSpPr>
-          <p:cNvPr id="105" name="Shape 102"/>
+          <p:cNvPr id="101" name="Shape 98"/>
           <p:cNvSpPr/>
           <p:nvPr/>
         </p:nvSpPr>
@@ -23029,7 +22801,7 @@
       </p:sp>
       <p:sp>
         <p:nvSpPr>
-          <p:cNvPr id="106" name="Shape 103"/>
+          <p:cNvPr id="102" name="Shape 99"/>
           <p:cNvSpPr/>
           <p:nvPr/>
         </p:nvSpPr>
@@ -23053,7 +22825,7 @@
       </p:sp>
       <p:sp>
         <p:nvSpPr>
-          <p:cNvPr id="107" name="Shape 104"/>
+          <p:cNvPr id="103" name="Shape 100"/>
           <p:cNvSpPr/>
           <p:nvPr/>
         </p:nvSpPr>
@@ -23076,7 +22848,7 @@
       </p:sp>
       <p:sp>
         <p:nvSpPr>
-          <p:cNvPr id="108" name="Shape 105"/>
+          <p:cNvPr id="104" name="Shape 101"/>
           <p:cNvSpPr/>
           <p:nvPr/>
         </p:nvSpPr>
@@ -23100,7 +22872,7 @@
       </p:sp>
       <p:sp>
         <p:nvSpPr>
-          <p:cNvPr id="109" name="Shape 106"/>
+          <p:cNvPr id="105" name="Shape 102"/>
           <p:cNvSpPr/>
           <p:nvPr/>
         </p:nvSpPr>
@@ -23124,7 +22896,7 @@
       </p:sp>
       <p:sp>
         <p:nvSpPr>
-          <p:cNvPr id="110" name="Shape 107"/>
+          <p:cNvPr id="106" name="Shape 103"/>
           <p:cNvSpPr/>
           <p:nvPr/>
         </p:nvSpPr>
@@ -23147,7 +22919,7 @@
       </p:sp>
       <p:sp>
         <p:nvSpPr>
-          <p:cNvPr id="111" name="Shape 108"/>
+          <p:cNvPr id="107" name="Shape 104"/>
           <p:cNvSpPr/>
           <p:nvPr/>
         </p:nvSpPr>
@@ -23171,7 +22943,7 @@
       </p:sp>
       <p:sp>
         <p:nvSpPr>
-          <p:cNvPr id="112" name="Shape 109"/>
+          <p:cNvPr id="108" name="Shape 105"/>
           <p:cNvSpPr/>
           <p:nvPr/>
         </p:nvSpPr>
@@ -23195,7 +22967,7 @@
       </p:sp>
       <p:sp>
         <p:nvSpPr>
-          <p:cNvPr id="113" name="Shape 110"/>
+          <p:cNvPr id="109" name="Shape 106"/>
           <p:cNvSpPr/>
           <p:nvPr/>
         </p:nvSpPr>
@@ -23219,7 +22991,7 @@
       </p:sp>
       <p:sp>
         <p:nvSpPr>
-          <p:cNvPr id="114" name="Shape 111"/>
+          <p:cNvPr id="110" name="Shape 107"/>
           <p:cNvSpPr/>
           <p:nvPr/>
         </p:nvSpPr>
@@ -23243,7 +23015,7 @@
       </p:sp>
       <p:sp>
         <p:nvSpPr>
-          <p:cNvPr id="115" name="Shape 112"/>
+          <p:cNvPr id="111" name="Shape 108"/>
           <p:cNvSpPr/>
           <p:nvPr/>
         </p:nvSpPr>
@@ -23267,7 +23039,7 @@
       </p:sp>
       <p:sp>
         <p:nvSpPr>
-          <p:cNvPr id="116" name="Shape 113"/>
+          <p:cNvPr id="112" name="Shape 109"/>
           <p:cNvSpPr/>
           <p:nvPr/>
         </p:nvSpPr>
@@ -23291,7 +23063,7 @@
       </p:sp>
       <p:sp>
         <p:nvSpPr>
-          <p:cNvPr id="117" name="Shape 114"/>
+          <p:cNvPr id="113" name="Shape 110"/>
           <p:cNvSpPr/>
           <p:nvPr/>
         </p:nvSpPr>
@@ -23314,7 +23086,7 @@
       </p:sp>
       <p:sp>
         <p:nvSpPr>
-          <p:cNvPr id="118" name="Shape 115"/>
+          <p:cNvPr id="114" name="Shape 111"/>
           <p:cNvSpPr/>
           <p:nvPr/>
         </p:nvSpPr>
@@ -23338,7 +23110,7 @@
       </p:sp>
       <p:sp>
         <p:nvSpPr>
-          <p:cNvPr id="119" name="Shape 116"/>
+          <p:cNvPr id="115" name="Shape 112"/>
           <p:cNvSpPr/>
           <p:nvPr/>
         </p:nvSpPr>
@@ -23362,7 +23134,7 @@
       </p:sp>
       <p:sp>
         <p:nvSpPr>
-          <p:cNvPr id="120" name="Shape 117"/>
+          <p:cNvPr id="116" name="Shape 113"/>
           <p:cNvSpPr/>
           <p:nvPr/>
         </p:nvSpPr>
@@ -23385,7 +23157,7 @@
       </p:sp>
       <p:sp>
         <p:nvSpPr>
-          <p:cNvPr id="121" name="Shape 118"/>
+          <p:cNvPr id="117" name="Shape 114"/>
           <p:cNvSpPr/>
           <p:nvPr/>
         </p:nvSpPr>
@@ -23409,7 +23181,7 @@
       </p:sp>
       <p:sp>
         <p:nvSpPr>
-          <p:cNvPr id="122" name="Shape 119"/>
+          <p:cNvPr id="118" name="Shape 115"/>
           <p:cNvSpPr/>
           <p:nvPr/>
         </p:nvSpPr>
@@ -23433,7 +23205,7 @@
       </p:sp>
       <p:sp>
         <p:nvSpPr>
-          <p:cNvPr id="123" name="Shape 120"/>
+          <p:cNvPr id="119" name="Shape 116"/>
           <p:cNvSpPr/>
           <p:nvPr/>
         </p:nvSpPr>
@@ -23457,7 +23229,7 @@
       </p:sp>
       <p:sp>
         <p:nvSpPr>
-          <p:cNvPr id="124" name="Shape 121"/>
+          <p:cNvPr id="120" name="Shape 117"/>
           <p:cNvSpPr/>
           <p:nvPr/>
         </p:nvSpPr>
@@ -23481,7 +23253,7 @@
       </p:sp>
       <p:sp>
         <p:nvSpPr>
-          <p:cNvPr id="125" name="Shape 122"/>
+          <p:cNvPr id="121" name="Shape 118"/>
           <p:cNvSpPr/>
           <p:nvPr/>
         </p:nvSpPr>
@@ -23505,13 +23277,13 @@
       </p:sp>
       <p:sp>
         <p:nvSpPr>
-          <p:cNvPr id="126" name="Shape 123"/>
-          <p:cNvSpPr/>
-          <p:nvPr/>
-        </p:nvSpPr>
-        <p:spPr>
-          <a:xfrm>
-            <a:off x="1473098" y="3802075"/>
+          <p:cNvPr id="122" name="Shape 119"/>
+          <p:cNvSpPr/>
+          <p:nvPr/>
+        </p:nvSpPr>
+        <p:spPr>
+          <a:xfrm>
+            <a:off x="1477670" y="3802075"/>
             <a:ext cx="1926641" cy="113386"/>
           </a:xfrm>
           <a:prstGeom prst="rect">
@@ -23525,7 +23297,7 @@
       </p:sp>
       <p:sp>
         <p:nvSpPr>
-          <p:cNvPr id="127" name="Text 124"/>
+          <p:cNvPr id="123" name="Text 120"/>
           <p:cNvSpPr/>
           <p:nvPr/>
         </p:nvSpPr>
@@ -23567,13 +23339,13 @@
       </p:sp>
       <p:sp>
         <p:nvSpPr>
-          <p:cNvPr id="128" name="Shape 125"/>
-          <p:cNvSpPr/>
-          <p:nvPr/>
-        </p:nvSpPr>
-        <p:spPr>
-          <a:xfrm>
-            <a:off x="3837737" y="3802075"/>
+          <p:cNvPr id="124" name="Shape 121"/>
+          <p:cNvSpPr/>
+          <p:nvPr/>
+        </p:nvSpPr>
+        <p:spPr>
+          <a:xfrm>
+            <a:off x="3842309" y="3802075"/>
             <a:ext cx="1636776" cy="113386"/>
           </a:xfrm>
           <a:prstGeom prst="rect">
@@ -23587,7 +23359,7 @@
       </p:sp>
       <p:sp>
         <p:nvSpPr>
-          <p:cNvPr id="129" name="Text 126"/>
+          <p:cNvPr id="125" name="Text 122"/>
           <p:cNvSpPr/>
           <p:nvPr/>
         </p:nvSpPr>
@@ -23629,7 +23401,315 @@
       </p:sp>
       <p:sp>
         <p:nvSpPr>
+          <p:cNvPr id="126" name="Shape 123"/>
+          <p:cNvSpPr/>
+          <p:nvPr/>
+        </p:nvSpPr>
+        <p:spPr>
+          <a:xfrm>
+            <a:off x="1547165" y="3964838"/>
+            <a:ext cx="1239926" cy="196596"/>
+          </a:xfrm>
+          <a:prstGeom prst="rect">
+            <a:avLst/>
+          </a:prstGeom>
+          <a:solidFill>
+            <a:srgbClr val="FEEFC3"/>
+          </a:solidFill>
+          <a:ln/>
+        </p:spPr>
+      </p:sp>
+      <p:sp>
+        <p:nvSpPr>
+          <p:cNvPr id="127" name="Text 124"/>
+          <p:cNvSpPr/>
+          <p:nvPr/>
+        </p:nvSpPr>
+        <p:spPr>
+          <a:xfrm>
+            <a:off x="1560881" y="3970325"/>
+            <a:ext cx="1994306" cy="210312"/>
+          </a:xfrm>
+          <a:prstGeom prst="rect">
+            <a:avLst/>
+          </a:prstGeom>
+          <a:noFill/>
+          <a:ln/>
+        </p:spPr>
+        <p:txBody>
+          <a:bodyPr wrap="square" lIns="0" tIns="0" rIns="0" bIns="0" rtlCol="0" anchor="t"/>
+          <a:lstStyle/>
+          <a:p>
+            <a:pPr algn="l" indent="0" marL="0">
+              <a:lnSpc>
+                <a:spcPct val="102000"/>
+              </a:lnSpc>
+              <a:buNone/>
+            </a:pPr>
+            <a:r>
+              <a:rPr lang="en-US" sz="470" b="1" dirty="0">
+                <a:solidFill>
+                  <a:srgbClr val="202124"/>
+                </a:solidFill>
+                <a:latin typeface="Arial" pitchFamily="34" charset="0"/>
+                <a:ea typeface="Arial" pitchFamily="34" charset="-122"/>
+                <a:cs typeface="Arial" pitchFamily="34" charset="-120"/>
+              </a:rPr>
+              <a:t>Tenant Pool (Shared Runtime)</a:t>
+            </a:r>
+            <a:endParaRPr lang="en-US" sz="470" dirty="0"/>
+          </a:p>
+          <a:p>
+            <a:pPr algn="l" indent="0" marL="0">
+              <a:lnSpc>
+                <a:spcPct val="102000"/>
+              </a:lnSpc>
+              <a:buNone/>
+            </a:pPr>
+            <a:r>
+              <a:rPr lang="en-US" sz="400" dirty="0">
+                <a:solidFill>
+                  <a:srgbClr val="202124"/>
+                </a:solidFill>
+                <a:latin typeface="Arial" pitchFamily="34" charset="0"/>
+                <a:ea typeface="Arial" pitchFamily="34" charset="-122"/>
+                <a:cs typeface="Arial" pitchFamily="34" charset="-120"/>
+              </a:rPr>
+              <a:t>FinVault (8k Cap) &amp; RetailStream (4k Cap)</a:t>
+            </a:r>
+            <a:endParaRPr lang="en-US" sz="470" dirty="0"/>
+          </a:p>
+        </p:txBody>
+      </p:sp>
+      <p:sp>
+        <p:nvSpPr>
+          <p:cNvPr id="128" name="Shape 125"/>
+          <p:cNvSpPr/>
+          <p:nvPr/>
+        </p:nvSpPr>
+        <p:spPr>
+          <a:xfrm>
+            <a:off x="3911803" y="3964838"/>
+            <a:ext cx="1296619" cy="196596"/>
+          </a:xfrm>
+          <a:prstGeom prst="rect">
+            <a:avLst/>
+          </a:prstGeom>
+          <a:solidFill>
+            <a:srgbClr val="FAD2CF"/>
+          </a:solidFill>
+          <a:ln/>
+        </p:spPr>
+      </p:sp>
+      <p:sp>
+        <p:nvSpPr>
+          <p:cNvPr id="129" name="Text 126"/>
+          <p:cNvSpPr/>
+          <p:nvPr/>
+        </p:nvSpPr>
+        <p:spPr>
+          <a:xfrm>
+            <a:off x="3925519" y="3970325"/>
+            <a:ext cx="1994306" cy="210312"/>
+          </a:xfrm>
+          <a:prstGeom prst="rect">
+            <a:avLst/>
+          </a:prstGeom>
+          <a:noFill/>
+          <a:ln/>
+        </p:spPr>
+        <p:txBody>
+          <a:bodyPr wrap="square" lIns="0" tIns="0" rIns="0" bIns="0" rtlCol="0" anchor="t"/>
+          <a:lstStyle/>
+          <a:p>
+            <a:pPr algn="l" indent="0" marL="0">
+              <a:lnSpc>
+                <a:spcPct val="102000"/>
+              </a:lnSpc>
+              <a:buNone/>
+            </a:pPr>
+            <a:r>
+              <a:rPr lang="en-US" sz="470" b="1" dirty="0">
+                <a:solidFill>
+                  <a:srgbClr val="202124"/>
+                </a:solidFill>
+                <a:latin typeface="Arial" pitchFamily="34" charset="0"/>
+                <a:ea typeface="Arial" pitchFamily="34" charset="-122"/>
+                <a:cs typeface="Arial" pitchFamily="34" charset="-120"/>
+              </a:rPr>
+              <a:t>Dedicated Sovereign Tenant Silo</a:t>
+            </a:r>
+            <a:endParaRPr lang="en-US" sz="470" dirty="0"/>
+          </a:p>
+          <a:p>
+            <a:pPr algn="l" indent="0" marL="0">
+              <a:lnSpc>
+                <a:spcPct val="102000"/>
+              </a:lnSpc>
+              <a:buNone/>
+            </a:pPr>
+            <a:r>
+              <a:rPr lang="en-US" sz="400" dirty="0">
+                <a:solidFill>
+                  <a:srgbClr val="202124"/>
+                </a:solidFill>
+                <a:latin typeface="Arial" pitchFamily="34" charset="0"/>
+                <a:ea typeface="Arial" pitchFamily="34" charset="-122"/>
+                <a:cs typeface="Arial" pitchFamily="34" charset="-120"/>
+              </a:rPr>
+              <a:t>VPC-SC + IAM PAB + finvault-silo-cmek + PSC</a:t>
+            </a:r>
+            <a:endParaRPr lang="en-US" sz="470" dirty="0"/>
+          </a:p>
+        </p:txBody>
+      </p:sp>
+      <p:sp>
+        <p:nvSpPr>
           <p:cNvPr id="130" name="Shape 127"/>
+          <p:cNvSpPr/>
+          <p:nvPr/>
+        </p:nvSpPr>
+        <p:spPr>
+          <a:xfrm>
+            <a:off x="1468526" y="1921154"/>
+            <a:ext cx="1901952" cy="196596"/>
+          </a:xfrm>
+          <a:prstGeom prst="rect">
+            <a:avLst/>
+          </a:prstGeom>
+          <a:solidFill>
+            <a:srgbClr val="AECBFA"/>
+          </a:solidFill>
+          <a:ln/>
+        </p:spPr>
+      </p:sp>
+      <p:sp>
+        <p:nvSpPr>
+          <p:cNvPr id="131" name="Text 128"/>
+          <p:cNvSpPr/>
+          <p:nvPr/>
+        </p:nvSpPr>
+        <p:spPr>
+          <a:xfrm>
+            <a:off x="1482242" y="1926641"/>
+            <a:ext cx="1901952" cy="210312"/>
+          </a:xfrm>
+          <a:prstGeom prst="rect">
+            <a:avLst/>
+          </a:prstGeom>
+          <a:noFill/>
+          <a:ln/>
+        </p:spPr>
+        <p:txBody>
+          <a:bodyPr wrap="square" lIns="0" tIns="0" rIns="0" bIns="0" rtlCol="0" anchor="t"/>
+          <a:lstStyle/>
+          <a:p>
+            <a:pPr algn="l" indent="0" marL="0">
+              <a:lnSpc>
+                <a:spcPct val="102000"/>
+              </a:lnSpc>
+              <a:buNone/>
+            </a:pPr>
+            <a:r>
+              <a:rPr lang="en-US" sz="470" b="1" dirty="0">
+                <a:solidFill>
+                  <a:srgbClr val="202124"/>
+                </a:solidFill>
+                <a:latin typeface="Arial" pitchFamily="34" charset="0"/>
+                <a:ea typeface="Arial" pitchFamily="34" charset="-122"/>
+                <a:cs typeface="Arial" pitchFamily="34" charset="-120"/>
+              </a:rPr>
+              <a:t>Routing hub (Hop 1 &amp; Hop 2 PEP/PDP)</a:t>
+            </a:r>
+            <a:endParaRPr lang="en-US" sz="470" dirty="0"/>
+          </a:p>
+          <a:p>
+            <a:pPr algn="l" indent="0" marL="0">
+              <a:lnSpc>
+                <a:spcPct val="102000"/>
+              </a:lnSpc>
+              <a:buNone/>
+            </a:pPr>
+            <a:r>
+              <a:rPr lang="en-US" sz="400" dirty="0">
+                <a:solidFill>
+                  <a:srgbClr val="202124"/>
+                </a:solidFill>
+                <a:latin typeface="Arial" pitchFamily="34" charset="0"/>
+                <a:ea typeface="Arial" pitchFamily="34" charset="-122"/>
+                <a:cs typeface="Arial" pitchFamily="34" charset="-120"/>
+              </a:rPr>
+              <a:t>Central ingress, OBO+DPoP KMS Sign &amp; Discovery Engine Catalog filter</a:t>
+            </a:r>
+            <a:endParaRPr lang="en-US" sz="470" dirty="0"/>
+          </a:p>
+        </p:txBody>
+      </p:sp>
+      <p:sp>
+        <p:nvSpPr>
+          <p:cNvPr id="132" name="Shape 129"/>
+          <p:cNvSpPr/>
+          <p:nvPr/>
+        </p:nvSpPr>
+        <p:spPr>
+          <a:xfrm>
+            <a:off x="4641494" y="1955902"/>
+            <a:ext cx="1315822" cy="118872"/>
+          </a:xfrm>
+          <a:prstGeom prst="rect">
+            <a:avLst/>
+          </a:prstGeom>
+          <a:solidFill>
+            <a:srgbClr val="CEEAD6"/>
+          </a:solidFill>
+          <a:ln/>
+        </p:spPr>
+      </p:sp>
+      <p:sp>
+        <p:nvSpPr>
+          <p:cNvPr id="133" name="Text 130"/>
+          <p:cNvSpPr/>
+          <p:nvPr/>
+        </p:nvSpPr>
+        <p:spPr>
+          <a:xfrm>
+            <a:off x="4655210" y="1961388"/>
+            <a:ext cx="1315822" cy="210312"/>
+          </a:xfrm>
+          <a:prstGeom prst="rect">
+            <a:avLst/>
+          </a:prstGeom>
+          <a:noFill/>
+          <a:ln/>
+        </p:spPr>
+        <p:txBody>
+          <a:bodyPr wrap="square" lIns="0" tIns="0" rIns="0" bIns="0" rtlCol="0" anchor="t"/>
+          <a:lstStyle/>
+          <a:p>
+            <a:pPr algn="l" indent="0" marL="0">
+              <a:lnSpc>
+                <a:spcPct val="102000"/>
+              </a:lnSpc>
+              <a:buNone/>
+            </a:pPr>
+            <a:r>
+              <a:rPr lang="en-US" sz="430" b="1" dirty="0">
+                <a:solidFill>
+                  <a:srgbClr val="202124"/>
+                </a:solidFill>
+                <a:latin typeface="Arial" pitchFamily="34" charset="0"/>
+                <a:ea typeface="Arial" pitchFamily="34" charset="-122"/>
+                <a:cs typeface="Arial" pitchFamily="34" charset="-120"/>
+              </a:rPr>
+              <a:t>Central governance and FinOps observability hub</a:t>
+            </a:r>
+            <a:endParaRPr lang="en-US" sz="430" dirty="0"/>
+          </a:p>
+        </p:txBody>
+      </p:sp>
+      <p:sp>
+        <p:nvSpPr>
+          <p:cNvPr id="134" name="Shape 131"/>
           <p:cNvSpPr/>
           <p:nvPr/>
         </p:nvSpPr>
@@ -23656,7 +23736,7 @@
       </p:sp>
       <p:pic>
         <p:nvPicPr>
-          <p:cNvPr id="131" name="Image 1" descr="preencoded.png">    </p:cNvPr>
+          <p:cNvPr id="135" name="Image 1" descr="preencoded.png">    </p:cNvPr>
           <p:cNvPicPr>
             <a:picLocks noChangeAspect="1"/>
           </p:cNvPicPr>
@@ -23680,7 +23760,7 @@
       </p:pic>
       <p:sp>
         <p:nvSpPr>
-          <p:cNvPr id="132" name="Text 128"/>
+          <p:cNvPr id="136" name="Text 132"/>
           <p:cNvSpPr/>
           <p:nvPr/>
         </p:nvSpPr>
@@ -23742,7 +23822,7 @@
       </p:sp>
       <p:sp>
         <p:nvSpPr>
-          <p:cNvPr id="133" name="Shape 129"/>
+          <p:cNvPr id="137" name="Shape 133"/>
           <p:cNvSpPr/>
           <p:nvPr/>
         </p:nvSpPr>
@@ -23769,7 +23849,7 @@
       </p:sp>
       <p:pic>
         <p:nvPicPr>
-          <p:cNvPr id="134" name="Image 2" descr="preencoded.png">    </p:cNvPr>
+          <p:cNvPr id="138" name="Image 2" descr="preencoded.png">    </p:cNvPr>
           <p:cNvPicPr>
             <a:picLocks noChangeAspect="1"/>
           </p:cNvPicPr>
@@ -23793,7 +23873,7 @@
       </p:pic>
       <p:sp>
         <p:nvSpPr>
-          <p:cNvPr id="135" name="Text 130"/>
+          <p:cNvPr id="139" name="Text 134"/>
           <p:cNvSpPr/>
           <p:nvPr/>
         </p:nvSpPr>
@@ -23855,7 +23935,7 @@
       </p:sp>
       <p:sp>
         <p:nvSpPr>
-          <p:cNvPr id="136" name="Shape 131"/>
+          <p:cNvPr id="140" name="Shape 135"/>
           <p:cNvSpPr/>
           <p:nvPr/>
         </p:nvSpPr>
@@ -23882,7 +23962,7 @@
       </p:sp>
       <p:pic>
         <p:nvPicPr>
-          <p:cNvPr id="137" name="Image 3" descr="preencoded.png">    </p:cNvPr>
+          <p:cNvPr id="141" name="Image 3" descr="preencoded.png">    </p:cNvPr>
           <p:cNvPicPr>
             <a:picLocks noChangeAspect="1"/>
           </p:cNvPicPr>
@@ -23906,7 +23986,7 @@
       </p:pic>
       <p:sp>
         <p:nvSpPr>
-          <p:cNvPr id="138" name="Text 132"/>
+          <p:cNvPr id="142" name="Text 136"/>
           <p:cNvSpPr/>
           <p:nvPr/>
         </p:nvSpPr>
@@ -23968,7 +24048,7 @@
       </p:sp>
       <p:sp>
         <p:nvSpPr>
-          <p:cNvPr id="139" name="Shape 133"/>
+          <p:cNvPr id="143" name="Shape 137"/>
           <p:cNvSpPr/>
           <p:nvPr/>
         </p:nvSpPr>
@@ -23995,7 +24075,7 @@
       </p:sp>
       <p:pic>
         <p:nvPicPr>
-          <p:cNvPr id="140" name="Image 4" descr="preencoded.png">    </p:cNvPr>
+          <p:cNvPr id="144" name="Image 4" descr="preencoded.png">    </p:cNvPr>
           <p:cNvPicPr>
             <a:picLocks noChangeAspect="1"/>
           </p:cNvPicPr>
@@ -24019,7 +24099,7 @@
       </p:pic>
       <p:sp>
         <p:nvSpPr>
-          <p:cNvPr id="141" name="Text 134"/>
+          <p:cNvPr id="145" name="Text 138"/>
           <p:cNvSpPr/>
           <p:nvPr/>
         </p:nvSpPr>
@@ -24081,7 +24161,7 @@
       </p:sp>
       <p:sp>
         <p:nvSpPr>
-          <p:cNvPr id="142" name="Shape 135"/>
+          <p:cNvPr id="146" name="Shape 139"/>
           <p:cNvSpPr/>
           <p:nvPr/>
         </p:nvSpPr>
@@ -24108,7 +24188,7 @@
       </p:sp>
       <p:pic>
         <p:nvPicPr>
-          <p:cNvPr id="143" name="Image 5" descr="preencoded.png">    </p:cNvPr>
+          <p:cNvPr id="147" name="Image 5" descr="preencoded.png">    </p:cNvPr>
           <p:cNvPicPr>
             <a:picLocks noChangeAspect="1"/>
           </p:cNvPicPr>
@@ -24132,7 +24212,7 @@
       </p:pic>
       <p:sp>
         <p:nvSpPr>
-          <p:cNvPr id="144" name="Text 136"/>
+          <p:cNvPr id="148" name="Text 140"/>
           <p:cNvSpPr/>
           <p:nvPr/>
         </p:nvSpPr>
@@ -24194,7 +24274,7 @@
       </p:sp>
       <p:sp>
         <p:nvSpPr>
-          <p:cNvPr id="145" name="Shape 137"/>
+          <p:cNvPr id="149" name="Shape 141"/>
           <p:cNvSpPr/>
           <p:nvPr/>
         </p:nvSpPr>
@@ -24221,7 +24301,7 @@
       </p:sp>
       <p:pic>
         <p:nvPicPr>
-          <p:cNvPr id="146" name="Image 6" descr="preencoded.png">    </p:cNvPr>
+          <p:cNvPr id="150" name="Image 6" descr="preencoded.png">    </p:cNvPr>
           <p:cNvPicPr>
             <a:picLocks noChangeAspect="1"/>
           </p:cNvPicPr>
@@ -24245,7 +24325,7 @@
       </p:pic>
       <p:sp>
         <p:nvSpPr>
-          <p:cNvPr id="147" name="Text 138"/>
+          <p:cNvPr id="151" name="Text 142"/>
           <p:cNvSpPr/>
           <p:nvPr/>
         </p:nvSpPr>
@@ -24307,7 +24387,7 @@
       </p:sp>
       <p:sp>
         <p:nvSpPr>
-          <p:cNvPr id="148" name="Shape 139"/>
+          <p:cNvPr id="152" name="Shape 143"/>
           <p:cNvSpPr/>
           <p:nvPr/>
         </p:nvSpPr>
@@ -24334,7 +24414,7 @@
       </p:sp>
       <p:pic>
         <p:nvPicPr>
-          <p:cNvPr id="149" name="Image 7" descr="preencoded.png">    </p:cNvPr>
+          <p:cNvPr id="153" name="Image 7" descr="preencoded.png">    </p:cNvPr>
           <p:cNvPicPr>
             <a:picLocks noChangeAspect="1"/>
           </p:cNvPicPr>
@@ -24358,7 +24438,7 @@
       </p:pic>
       <p:sp>
         <p:nvSpPr>
-          <p:cNvPr id="150" name="Text 140"/>
+          <p:cNvPr id="154" name="Text 144"/>
           <p:cNvSpPr/>
           <p:nvPr/>
         </p:nvSpPr>
@@ -24420,7 +24500,7 @@
       </p:sp>
       <p:sp>
         <p:nvSpPr>
-          <p:cNvPr id="151" name="Shape 141"/>
+          <p:cNvPr id="155" name="Shape 145"/>
           <p:cNvSpPr/>
           <p:nvPr/>
         </p:nvSpPr>
@@ -24447,7 +24527,7 @@
       </p:sp>
       <p:pic>
         <p:nvPicPr>
-          <p:cNvPr id="152" name="Image 8" descr="preencoded.png">    </p:cNvPr>
+          <p:cNvPr id="156" name="Image 8" descr="preencoded.png">    </p:cNvPr>
           <p:cNvPicPr>
             <a:picLocks noChangeAspect="1"/>
           </p:cNvPicPr>
@@ -24471,7 +24551,7 @@
       </p:pic>
       <p:sp>
         <p:nvSpPr>
-          <p:cNvPr id="153" name="Text 142"/>
+          <p:cNvPr id="157" name="Text 146"/>
           <p:cNvSpPr/>
           <p:nvPr/>
         </p:nvSpPr>
@@ -24533,7 +24613,7 @@
       </p:sp>
       <p:sp>
         <p:nvSpPr>
-          <p:cNvPr id="154" name="Shape 143"/>
+          <p:cNvPr id="158" name="Shape 147"/>
           <p:cNvSpPr/>
           <p:nvPr/>
         </p:nvSpPr>
@@ -24560,7 +24640,7 @@
       </p:sp>
       <p:pic>
         <p:nvPicPr>
-          <p:cNvPr id="155" name="Image 9" descr="preencoded.png">    </p:cNvPr>
+          <p:cNvPr id="159" name="Image 9" descr="preencoded.png">    </p:cNvPr>
           <p:cNvPicPr>
             <a:picLocks noChangeAspect="1"/>
           </p:cNvPicPr>
@@ -24584,7 +24664,7 @@
       </p:pic>
       <p:sp>
         <p:nvSpPr>
-          <p:cNvPr id="156" name="Text 144"/>
+          <p:cNvPr id="160" name="Text 148"/>
           <p:cNvSpPr/>
           <p:nvPr/>
         </p:nvSpPr>
@@ -24646,7 +24726,7 @@
       </p:sp>
       <p:sp>
         <p:nvSpPr>
-          <p:cNvPr id="157" name="Shape 145"/>
+          <p:cNvPr id="161" name="Shape 149"/>
           <p:cNvSpPr/>
           <p:nvPr/>
         </p:nvSpPr>
@@ -24673,7 +24753,7 @@
       </p:sp>
       <p:pic>
         <p:nvPicPr>
-          <p:cNvPr id="158" name="Image 10" descr="preencoded.png">    </p:cNvPr>
+          <p:cNvPr id="162" name="Image 10" descr="preencoded.png">    </p:cNvPr>
           <p:cNvPicPr>
             <a:picLocks noChangeAspect="1"/>
           </p:cNvPicPr>
@@ -24697,7 +24777,7 @@
       </p:pic>
       <p:sp>
         <p:nvSpPr>
-          <p:cNvPr id="159" name="Text 146"/>
+          <p:cNvPr id="163" name="Text 150"/>
           <p:cNvSpPr/>
           <p:nvPr/>
         </p:nvSpPr>
@@ -24759,7 +24839,7 @@
       </p:sp>
       <p:sp>
         <p:nvSpPr>
-          <p:cNvPr id="160" name="Shape 147"/>
+          <p:cNvPr id="164" name="Shape 151"/>
           <p:cNvSpPr/>
           <p:nvPr/>
         </p:nvSpPr>
@@ -24786,7 +24866,7 @@
       </p:sp>
       <p:pic>
         <p:nvPicPr>
-          <p:cNvPr id="161" name="Image 11" descr="preencoded.png">    </p:cNvPr>
+          <p:cNvPr id="165" name="Image 11" descr="preencoded.png">    </p:cNvPr>
           <p:cNvPicPr>
             <a:picLocks noChangeAspect="1"/>
           </p:cNvPicPr>
@@ -24810,7 +24890,7 @@
       </p:pic>
       <p:sp>
         <p:nvSpPr>
-          <p:cNvPr id="162" name="Text 148"/>
+          <p:cNvPr id="166" name="Text 152"/>
           <p:cNvSpPr/>
           <p:nvPr/>
         </p:nvSpPr>
@@ -24872,7 +24952,7 @@
       </p:sp>
       <p:sp>
         <p:nvSpPr>
-          <p:cNvPr id="163" name="Shape 149"/>
+          <p:cNvPr id="167" name="Shape 153"/>
           <p:cNvSpPr/>
           <p:nvPr/>
         </p:nvSpPr>
@@ -24899,7 +24979,7 @@
       </p:sp>
       <p:pic>
         <p:nvPicPr>
-          <p:cNvPr id="164" name="Image 12" descr="preencoded.png">    </p:cNvPr>
+          <p:cNvPr id="168" name="Image 12" descr="preencoded.png">    </p:cNvPr>
           <p:cNvPicPr>
             <a:picLocks noChangeAspect="1"/>
           </p:cNvPicPr>
@@ -24923,7 +25003,7 @@
       </p:pic>
       <p:sp>
         <p:nvSpPr>
-          <p:cNvPr id="165" name="Text 150"/>
+          <p:cNvPr id="169" name="Text 154"/>
           <p:cNvSpPr/>
           <p:nvPr/>
         </p:nvSpPr>
@@ -24985,7 +25065,7 @@
       </p:sp>
       <p:sp>
         <p:nvSpPr>
-          <p:cNvPr id="166" name="Shape 151"/>
+          <p:cNvPr id="170" name="Shape 155"/>
           <p:cNvSpPr/>
           <p:nvPr/>
         </p:nvSpPr>
@@ -25012,7 +25092,7 @@
       </p:sp>
       <p:pic>
         <p:nvPicPr>
-          <p:cNvPr id="167" name="Image 13" descr="preencoded.png">    </p:cNvPr>
+          <p:cNvPr id="171" name="Image 13" descr="preencoded.png">    </p:cNvPr>
           <p:cNvPicPr>
             <a:picLocks noChangeAspect="1"/>
           </p:cNvPicPr>
@@ -25036,7 +25116,7 @@
       </p:pic>
       <p:sp>
         <p:nvSpPr>
-          <p:cNvPr id="168" name="Text 152"/>
+          <p:cNvPr id="172" name="Text 156"/>
           <p:cNvSpPr/>
           <p:nvPr/>
         </p:nvSpPr>
@@ -25098,7 +25178,7 @@
       </p:sp>
       <p:sp>
         <p:nvSpPr>
-          <p:cNvPr id="169" name="Shape 153"/>
+          <p:cNvPr id="173" name="Shape 157"/>
           <p:cNvSpPr/>
           <p:nvPr/>
         </p:nvSpPr>
@@ -25125,7 +25205,7 @@
       </p:sp>
       <p:pic>
         <p:nvPicPr>
-          <p:cNvPr id="170" name="Image 14" descr="preencoded.png">    </p:cNvPr>
+          <p:cNvPr id="174" name="Image 14" descr="preencoded.png">    </p:cNvPr>
           <p:cNvPicPr>
             <a:picLocks noChangeAspect="1"/>
           </p:cNvPicPr>
@@ -25149,7 +25229,7 @@
       </p:pic>
       <p:sp>
         <p:nvSpPr>
-          <p:cNvPr id="171" name="Text 154"/>
+          <p:cNvPr id="175" name="Text 158"/>
           <p:cNvSpPr/>
           <p:nvPr/>
         </p:nvSpPr>
@@ -25211,7 +25291,7 @@
       </p:sp>
       <p:sp>
         <p:nvSpPr>
-          <p:cNvPr id="172" name="Shape 155"/>
+          <p:cNvPr id="176" name="Shape 159"/>
           <p:cNvSpPr/>
           <p:nvPr/>
         </p:nvSpPr>
@@ -25238,7 +25318,7 @@
       </p:sp>
       <p:pic>
         <p:nvPicPr>
-          <p:cNvPr id="173" name="Image 15" descr="preencoded.png">    </p:cNvPr>
+          <p:cNvPr id="177" name="Image 15" descr="preencoded.png">    </p:cNvPr>
           <p:cNvPicPr>
             <a:picLocks noChangeAspect="1"/>
           </p:cNvPicPr>
@@ -25262,7 +25342,7 @@
       </p:pic>
       <p:sp>
         <p:nvSpPr>
-          <p:cNvPr id="174" name="Text 156"/>
+          <p:cNvPr id="178" name="Text 160"/>
           <p:cNvSpPr/>
           <p:nvPr/>
         </p:nvSpPr>
@@ -25324,7 +25404,7 @@
       </p:sp>
       <p:sp>
         <p:nvSpPr>
-          <p:cNvPr id="175" name="Shape 157"/>
+          <p:cNvPr id="179" name="Shape 161"/>
           <p:cNvSpPr/>
           <p:nvPr/>
         </p:nvSpPr>
@@ -25351,7 +25431,7 @@
       </p:sp>
       <p:pic>
         <p:nvPicPr>
-          <p:cNvPr id="176" name="Image 16" descr="preencoded.png">    </p:cNvPr>
+          <p:cNvPr id="180" name="Image 16" descr="preencoded.png">    </p:cNvPr>
           <p:cNvPicPr>
             <a:picLocks noChangeAspect="1"/>
           </p:cNvPicPr>
@@ -25375,7 +25455,7 @@
       </p:pic>
       <p:sp>
         <p:nvSpPr>
-          <p:cNvPr id="177" name="Text 158"/>
+          <p:cNvPr id="181" name="Text 162"/>
           <p:cNvSpPr/>
           <p:nvPr/>
         </p:nvSpPr>
@@ -25437,7 +25517,7 @@
       </p:sp>
       <p:sp>
         <p:nvSpPr>
-          <p:cNvPr id="178" name="Shape 159"/>
+          <p:cNvPr id="182" name="Shape 163"/>
           <p:cNvSpPr/>
           <p:nvPr/>
         </p:nvSpPr>
@@ -25464,7 +25544,7 @@
       </p:sp>
       <p:pic>
         <p:nvPicPr>
-          <p:cNvPr id="179" name="Image 17" descr="preencoded.png">    </p:cNvPr>
+          <p:cNvPr id="183" name="Image 17" descr="preencoded.png">    </p:cNvPr>
           <p:cNvPicPr>
             <a:picLocks noChangeAspect="1"/>
           </p:cNvPicPr>
@@ -25488,7 +25568,7 @@
       </p:pic>
       <p:sp>
         <p:nvSpPr>
-          <p:cNvPr id="180" name="Text 160"/>
+          <p:cNvPr id="184" name="Text 164"/>
           <p:cNvSpPr/>
           <p:nvPr/>
         </p:nvSpPr>
@@ -25550,7 +25630,7 @@
       </p:sp>
       <p:sp>
         <p:nvSpPr>
-          <p:cNvPr id="181" name="Shape 161"/>
+          <p:cNvPr id="185" name="Shape 165"/>
           <p:cNvSpPr/>
           <p:nvPr/>
         </p:nvSpPr>
@@ -25577,7 +25657,7 @@
       </p:sp>
       <p:pic>
         <p:nvPicPr>
-          <p:cNvPr id="182" name="Image 18" descr="preencoded.png">    </p:cNvPr>
+          <p:cNvPr id="186" name="Image 18" descr="preencoded.png">    </p:cNvPr>
           <p:cNvPicPr>
             <a:picLocks noChangeAspect="1"/>
           </p:cNvPicPr>
@@ -25601,7 +25681,7 @@
       </p:pic>
       <p:sp>
         <p:nvSpPr>
-          <p:cNvPr id="183" name="Text 162"/>
+          <p:cNvPr id="187" name="Text 166"/>
           <p:cNvSpPr/>
           <p:nvPr/>
         </p:nvSpPr>
@@ -25663,7 +25743,7 @@
       </p:sp>
       <p:sp>
         <p:nvSpPr>
-          <p:cNvPr id="184" name="Shape 163"/>
+          <p:cNvPr id="188" name="Shape 167"/>
           <p:cNvSpPr/>
           <p:nvPr/>
         </p:nvSpPr>
@@ -25690,7 +25770,7 @@
       </p:sp>
       <p:pic>
         <p:nvPicPr>
-          <p:cNvPr id="185" name="Image 19" descr="preencoded.png">    </p:cNvPr>
+          <p:cNvPr id="189" name="Image 19" descr="preencoded.png">    </p:cNvPr>
           <p:cNvPicPr>
             <a:picLocks noChangeAspect="1"/>
           </p:cNvPicPr>
@@ -25714,7 +25794,7 @@
       </p:pic>
       <p:sp>
         <p:nvSpPr>
-          <p:cNvPr id="186" name="Text 164"/>
+          <p:cNvPr id="190" name="Text 168"/>
           <p:cNvSpPr/>
           <p:nvPr/>
         </p:nvSpPr>
@@ -25776,7 +25856,7 @@
       </p:sp>
       <p:sp>
         <p:nvSpPr>
-          <p:cNvPr id="187" name="Shape 165"/>
+          <p:cNvPr id="191" name="Shape 169"/>
           <p:cNvSpPr/>
           <p:nvPr/>
         </p:nvSpPr>
@@ -25801,7 +25881,7 @@
       </p:sp>
       <p:sp>
         <p:nvSpPr>
-          <p:cNvPr id="188" name="Text 166"/>
+          <p:cNvPr id="192" name="Text 170"/>
           <p:cNvSpPr/>
           <p:nvPr/>
         </p:nvSpPr>
@@ -25840,7 +25920,7 @@
       </p:sp>
       <p:sp>
         <p:nvSpPr>
-          <p:cNvPr id="189" name="Shape 167"/>
+          <p:cNvPr id="193" name="Shape 171"/>
           <p:cNvSpPr/>
           <p:nvPr/>
         </p:nvSpPr>
@@ -25865,7 +25945,7 @@
       </p:sp>
       <p:sp>
         <p:nvSpPr>
-          <p:cNvPr id="190" name="Text 168"/>
+          <p:cNvPr id="194" name="Text 172"/>
           <p:cNvSpPr/>
           <p:nvPr/>
         </p:nvSpPr>
@@ -25904,7 +25984,7 @@
       </p:sp>
       <p:sp>
         <p:nvSpPr>
-          <p:cNvPr id="191" name="Shape 169"/>
+          <p:cNvPr id="195" name="Shape 173"/>
           <p:cNvSpPr/>
           <p:nvPr/>
         </p:nvSpPr>
@@ -25929,7 +26009,7 @@
       </p:sp>
       <p:sp>
         <p:nvSpPr>
-          <p:cNvPr id="192" name="Text 170"/>
+          <p:cNvPr id="196" name="Text 174"/>
           <p:cNvSpPr/>
           <p:nvPr/>
         </p:nvSpPr>
@@ -25968,7 +26048,7 @@
       </p:sp>
       <p:sp>
         <p:nvSpPr>
-          <p:cNvPr id="193" name="Shape 171"/>
+          <p:cNvPr id="197" name="Shape 175"/>
           <p:cNvSpPr/>
           <p:nvPr/>
         </p:nvSpPr>
@@ -25993,7 +26073,7 @@
       </p:sp>
       <p:sp>
         <p:nvSpPr>
-          <p:cNvPr id="194" name="Text 172"/>
+          <p:cNvPr id="198" name="Text 176"/>
           <p:cNvSpPr/>
           <p:nvPr/>
         </p:nvSpPr>
@@ -26032,7 +26112,7 @@
       </p:sp>
       <p:sp>
         <p:nvSpPr>
-          <p:cNvPr id="195" name="Shape 173"/>
+          <p:cNvPr id="199" name="Shape 177"/>
           <p:cNvSpPr/>
           <p:nvPr/>
         </p:nvSpPr>
@@ -26057,7 +26137,7 @@
       </p:sp>
       <p:sp>
         <p:nvSpPr>
-          <p:cNvPr id="196" name="Text 174"/>
+          <p:cNvPr id="200" name="Text 178"/>
           <p:cNvSpPr/>
           <p:nvPr/>
         </p:nvSpPr>
@@ -26096,7 +26176,7 @@
       </p:sp>
       <p:sp>
         <p:nvSpPr>
-          <p:cNvPr id="197" name="Shape 175"/>
+          <p:cNvPr id="201" name="Shape 179"/>
           <p:cNvSpPr/>
           <p:nvPr/>
         </p:nvSpPr>
@@ -26121,7 +26201,7 @@
       </p:sp>
       <p:sp>
         <p:nvSpPr>
-          <p:cNvPr id="198" name="Text 176"/>
+          <p:cNvPr id="202" name="Text 180"/>
           <p:cNvSpPr/>
           <p:nvPr/>
         </p:nvSpPr>
@@ -26160,7 +26240,7 @@
       </p:sp>
       <p:sp>
         <p:nvSpPr>
-          <p:cNvPr id="199" name="Shape 177"/>
+          <p:cNvPr id="203" name="Shape 181"/>
           <p:cNvSpPr/>
           <p:nvPr/>
         </p:nvSpPr>
@@ -26185,7 +26265,7 @@
       </p:sp>
       <p:sp>
         <p:nvSpPr>
-          <p:cNvPr id="200" name="Text 178"/>
+          <p:cNvPr id="204" name="Text 182"/>
           <p:cNvSpPr/>
           <p:nvPr/>
         </p:nvSpPr>
@@ -26224,7 +26304,7 @@
       </p:sp>
       <p:sp>
         <p:nvSpPr>
-          <p:cNvPr id="201" name="Shape 179"/>
+          <p:cNvPr id="205" name="Shape 183"/>
           <p:cNvSpPr/>
           <p:nvPr/>
         </p:nvSpPr>
@@ -26249,7 +26329,7 @@
       </p:sp>
       <p:sp>
         <p:nvSpPr>
-          <p:cNvPr id="202" name="Text 180"/>
+          <p:cNvPr id="206" name="Text 184"/>
           <p:cNvSpPr/>
           <p:nvPr/>
         </p:nvSpPr>
@@ -26288,7 +26368,7 @@
       </p:sp>
       <p:sp>
         <p:nvSpPr>
-          <p:cNvPr id="203" name="Shape 181"/>
+          <p:cNvPr id="207" name="Shape 185"/>
           <p:cNvSpPr/>
           <p:nvPr/>
         </p:nvSpPr>
@@ -26313,7 +26393,7 @@
       </p:sp>
       <p:sp>
         <p:nvSpPr>
-          <p:cNvPr id="204" name="Text 182"/>
+          <p:cNvPr id="208" name="Text 186"/>
           <p:cNvSpPr/>
           <p:nvPr/>
         </p:nvSpPr>
@@ -26352,18 +26432,18 @@
       </p:sp>
       <p:sp>
         <p:nvSpPr>
-          <p:cNvPr id="205" name="Shape 183"/>
-          <p:cNvSpPr/>
-          <p:nvPr/>
-        </p:nvSpPr>
-        <p:spPr>
-          <a:xfrm>
-            <a:off x="5339182" y="3353105"/>
-            <a:ext cx="760781" cy="217627"/>
+          <p:cNvPr id="209" name="Shape 187"/>
+          <p:cNvSpPr/>
+          <p:nvPr/>
+        </p:nvSpPr>
+        <p:spPr>
+          <a:xfrm>
+            <a:off x="5339182" y="3390595"/>
+            <a:ext cx="736092" cy="142646"/>
           </a:xfrm>
           <a:prstGeom prst="roundRect">
             <a:avLst>
-              <a:gd name="adj" fmla="val 21008"/>
+              <a:gd name="adj" fmla="val 28846"/>
             </a:avLst>
           </a:prstGeom>
           <a:solidFill>
@@ -26379,14 +26459,14 @@
       </p:sp>
       <p:sp>
         <p:nvSpPr>
-          <p:cNvPr id="206" name="Text 184"/>
-          <p:cNvSpPr/>
-          <p:nvPr/>
-        </p:nvSpPr>
-        <p:spPr>
-          <a:xfrm>
-            <a:off x="5359298" y="3362249"/>
-            <a:ext cx="720547" cy="199339"/>
+          <p:cNvPr id="210" name="Text 188"/>
+          <p:cNvSpPr/>
+          <p:nvPr/>
+        </p:nvSpPr>
+        <p:spPr>
+          <a:xfrm>
+            <a:off x="5357470" y="3396082"/>
+            <a:ext cx="699516" cy="131674"/>
           </a:xfrm>
           <a:prstGeom prst="rect">
             <a:avLst/>
@@ -26400,12 +26480,12 @@
           <a:p>
             <a:pPr algn="ctr" indent="0" marL="0">
               <a:lnSpc>
-                <a:spcPct val="102000"/>
+                <a:spcPct val="100000"/>
               </a:lnSpc>
               <a:buNone/>
             </a:pPr>
             <a:r>
-              <a:rPr lang="en-US" sz="410" b="1" dirty="0">
+              <a:rPr lang="en-US" sz="385" b="1" dirty="0">
                 <a:solidFill>
                   <a:srgbClr val="202124"/>
                 </a:solidFill>
@@ -26415,17 +26495,17 @@
               </a:rPr>
               <a:t>Security, OTel &amp; FinOps</a:t>
             </a:r>
-            <a:endParaRPr lang="en-US" sz="410" dirty="0"/>
+            <a:endParaRPr lang="en-US" sz="385" dirty="0"/>
           </a:p>
           <a:p>
             <a:pPr algn="ctr" indent="0" marL="0">
               <a:lnSpc>
-                <a:spcPct val="102000"/>
+                <a:spcPct val="100000"/>
               </a:lnSpc>
               <a:buNone/>
             </a:pPr>
             <a:r>
-              <a:rPr lang="en-US" sz="375" dirty="0">
+              <a:rPr lang="en-US" sz="350" dirty="0">
                 <a:solidFill>
                   <a:srgbClr val="202124"/>
                 </a:solidFill>
@@ -26435,24 +26515,24 @@
               </a:rPr>
               <a:t>chargeback telemetry</a:t>
             </a:r>
-            <a:endParaRPr lang="en-US" sz="410" dirty="0"/>
-          </a:p>
-        </p:txBody>
-      </p:sp>
-      <p:sp>
-        <p:nvSpPr>
-          <p:cNvPr id="207" name="Shape 185"/>
-          <p:cNvSpPr/>
-          <p:nvPr/>
-        </p:nvSpPr>
-        <p:spPr>
-          <a:xfrm>
-            <a:off x="2884932" y="4817974"/>
-            <a:ext cx="397764" cy="208483"/>
+            <a:endParaRPr lang="en-US" sz="385" dirty="0"/>
+          </a:p>
+        </p:txBody>
+      </p:sp>
+      <p:sp>
+        <p:nvSpPr>
+          <p:cNvPr id="211" name="Shape 189"/>
+          <p:cNvSpPr/>
+          <p:nvPr/>
+        </p:nvSpPr>
+        <p:spPr>
+          <a:xfrm>
+            <a:off x="2896819" y="4850892"/>
+            <a:ext cx="372161" cy="142646"/>
           </a:xfrm>
           <a:prstGeom prst="roundRect">
             <a:avLst>
-              <a:gd name="adj" fmla="val 21930"/>
+              <a:gd name="adj" fmla="val 28846"/>
             </a:avLst>
           </a:prstGeom>
           <a:solidFill>
@@ -26468,14 +26548,14 @@
       </p:sp>
       <p:sp>
         <p:nvSpPr>
-          <p:cNvPr id="208" name="Text 186"/>
-          <p:cNvSpPr/>
-          <p:nvPr/>
-        </p:nvSpPr>
-        <p:spPr>
-          <a:xfrm>
-            <a:off x="2905049" y="4827118"/>
-            <a:ext cx="357530" cy="190195"/>
+          <p:cNvPr id="212" name="Text 190"/>
+          <p:cNvSpPr/>
+          <p:nvPr/>
+        </p:nvSpPr>
+        <p:spPr>
+          <a:xfrm>
+            <a:off x="2915107" y="4856378"/>
+            <a:ext cx="335585" cy="131674"/>
           </a:xfrm>
           <a:prstGeom prst="rect">
             <a:avLst/>
@@ -26489,12 +26569,12 @@
           <a:p>
             <a:pPr algn="ctr" indent="0" marL="0">
               <a:lnSpc>
-                <a:spcPct val="102000"/>
+                <a:spcPct val="100000"/>
               </a:lnSpc>
               <a:buNone/>
             </a:pPr>
             <a:r>
-              <a:rPr lang="en-US" sz="410" b="1" dirty="0">
+              <a:rPr lang="en-US" sz="385" b="1" dirty="0">
                 <a:solidFill>
                   <a:srgbClr val="202124"/>
                 </a:solidFill>
@@ -26504,17 +26584,17 @@
               </a:rPr>
               <a:t>Scoped</a:t>
             </a:r>
-            <a:endParaRPr lang="en-US" sz="410" dirty="0"/>
+            <a:endParaRPr lang="en-US" sz="385" dirty="0"/>
           </a:p>
           <a:p>
             <a:pPr algn="ctr" indent="0" marL="0">
               <a:lnSpc>
-                <a:spcPct val="102000"/>
+                <a:spcPct val="100000"/>
               </a:lnSpc>
               <a:buNone/>
             </a:pPr>
             <a:r>
-              <a:rPr lang="en-US" sz="375" dirty="0">
+              <a:rPr lang="en-US" sz="350" dirty="0">
                 <a:solidFill>
                   <a:srgbClr val="202124"/>
                 </a:solidFill>
@@ -26524,24 +26604,24 @@
               </a:rPr>
               <a:t>MCP &amp; RAG</a:t>
             </a:r>
-            <a:endParaRPr lang="en-US" sz="410" dirty="0"/>
-          </a:p>
-        </p:txBody>
-      </p:sp>
-      <p:sp>
-        <p:nvSpPr>
-          <p:cNvPr id="209" name="Shape 187"/>
-          <p:cNvSpPr/>
-          <p:nvPr/>
-        </p:nvSpPr>
-        <p:spPr>
-          <a:xfrm>
-            <a:off x="2815438" y="5452567"/>
-            <a:ext cx="534924" cy="208483"/>
+            <a:endParaRPr lang="en-US" sz="385" dirty="0"/>
+          </a:p>
+        </p:txBody>
+      </p:sp>
+      <p:sp>
+        <p:nvSpPr>
+          <p:cNvPr id="213" name="Shape 191"/>
+          <p:cNvSpPr/>
+          <p:nvPr/>
+        </p:nvSpPr>
+        <p:spPr>
+          <a:xfrm>
+            <a:off x="2831897" y="5485486"/>
+            <a:ext cx="502006" cy="142646"/>
           </a:xfrm>
           <a:prstGeom prst="roundRect">
             <a:avLst>
-              <a:gd name="adj" fmla="val 21930"/>
+              <a:gd name="adj" fmla="val 28846"/>
             </a:avLst>
           </a:prstGeom>
           <a:solidFill>
@@ -26557,14 +26637,14 @@
       </p:sp>
       <p:sp>
         <p:nvSpPr>
-          <p:cNvPr id="210" name="Text 188"/>
-          <p:cNvSpPr/>
-          <p:nvPr/>
-        </p:nvSpPr>
-        <p:spPr>
-          <a:xfrm>
-            <a:off x="2835554" y="5461711"/>
-            <a:ext cx="494690" cy="190195"/>
+          <p:cNvPr id="214" name="Text 192"/>
+          <p:cNvSpPr/>
+          <p:nvPr/>
+        </p:nvSpPr>
+        <p:spPr>
+          <a:xfrm>
+            <a:off x="2850185" y="5490972"/>
+            <a:ext cx="465430" cy="131674"/>
           </a:xfrm>
           <a:prstGeom prst="rect">
             <a:avLst/>
@@ -26578,12 +26658,12 @@
           <a:p>
             <a:pPr algn="ctr" indent="0" marL="0">
               <a:lnSpc>
-                <a:spcPct val="102000"/>
+                <a:spcPct val="100000"/>
               </a:lnSpc>
               <a:buNone/>
             </a:pPr>
             <a:r>
-              <a:rPr lang="en-US" sz="410" b="1" dirty="0">
+              <a:rPr lang="en-US" sz="385" b="1" dirty="0">
                 <a:solidFill>
                   <a:srgbClr val="202124"/>
                 </a:solidFill>
@@ -26593,17 +26673,17 @@
               </a:rPr>
               <a:t>SET LOCAL</a:t>
             </a:r>
-            <a:endParaRPr lang="en-US" sz="410" dirty="0"/>
+            <a:endParaRPr lang="en-US" sz="385" dirty="0"/>
           </a:p>
           <a:p>
             <a:pPr algn="ctr" indent="0" marL="0">
               <a:lnSpc>
-                <a:spcPct val="102000"/>
+                <a:spcPct val="100000"/>
               </a:lnSpc>
               <a:buNone/>
             </a:pPr>
             <a:r>
-              <a:rPr lang="en-US" sz="375" dirty="0">
+              <a:rPr lang="en-US" sz="350" dirty="0">
                 <a:solidFill>
                   <a:srgbClr val="202124"/>
                 </a:solidFill>
@@ -26613,24 +26693,24 @@
               </a:rPr>
               <a:t>current_tenant</a:t>
             </a:r>
-            <a:endParaRPr lang="en-US" sz="410" dirty="0"/>
-          </a:p>
-        </p:txBody>
-      </p:sp>
-      <p:sp>
-        <p:nvSpPr>
-          <p:cNvPr id="211" name="Shape 189"/>
-          <p:cNvSpPr/>
-          <p:nvPr/>
-        </p:nvSpPr>
-        <p:spPr>
-          <a:xfrm>
-            <a:off x="5235854" y="4817974"/>
-            <a:ext cx="425196" cy="208483"/>
+            <a:endParaRPr lang="en-US" sz="385" dirty="0"/>
+          </a:p>
+        </p:txBody>
+      </p:sp>
+      <p:sp>
+        <p:nvSpPr>
+          <p:cNvPr id="215" name="Shape 193"/>
+          <p:cNvSpPr/>
+          <p:nvPr/>
+        </p:nvSpPr>
+        <p:spPr>
+          <a:xfrm>
+            <a:off x="5248656" y="4850892"/>
+            <a:ext cx="397764" cy="142646"/>
           </a:xfrm>
           <a:prstGeom prst="roundRect">
             <a:avLst>
-              <a:gd name="adj" fmla="val 21930"/>
+              <a:gd name="adj" fmla="val 28846"/>
             </a:avLst>
           </a:prstGeom>
           <a:solidFill>
@@ -26646,14 +26726,14 @@
       </p:sp>
       <p:sp>
         <p:nvSpPr>
-          <p:cNvPr id="212" name="Text 190"/>
-          <p:cNvSpPr/>
-          <p:nvPr/>
-        </p:nvSpPr>
-        <p:spPr>
-          <a:xfrm>
-            <a:off x="5255971" y="4827118"/>
-            <a:ext cx="384962" cy="190195"/>
+          <p:cNvPr id="216" name="Text 194"/>
+          <p:cNvSpPr/>
+          <p:nvPr/>
+        </p:nvSpPr>
+        <p:spPr>
+          <a:xfrm>
+            <a:off x="5266944" y="4856378"/>
+            <a:ext cx="361188" cy="131674"/>
           </a:xfrm>
           <a:prstGeom prst="rect">
             <a:avLst/>
@@ -26667,12 +26747,12 @@
           <a:p>
             <a:pPr algn="ctr" indent="0" marL="0">
               <a:lnSpc>
-                <a:spcPct val="102000"/>
+                <a:spcPct val="100000"/>
               </a:lnSpc>
               <a:buNone/>
             </a:pPr>
             <a:r>
-              <a:rPr lang="en-US" sz="410" b="1" dirty="0">
+              <a:rPr lang="en-US" sz="385" b="1" dirty="0">
                 <a:solidFill>
                   <a:srgbClr val="202124"/>
                 </a:solidFill>
@@ -26682,17 +26762,17 @@
               </a:rPr>
               <a:t>Air-Gapped</a:t>
             </a:r>
-            <a:endParaRPr lang="en-US" sz="410" dirty="0"/>
+            <a:endParaRPr lang="en-US" sz="385" dirty="0"/>
           </a:p>
           <a:p>
             <a:pPr algn="ctr" indent="0" marL="0">
               <a:lnSpc>
-                <a:spcPct val="102000"/>
+                <a:spcPct val="100000"/>
               </a:lnSpc>
               <a:buNone/>
             </a:pPr>
             <a:r>
-              <a:rPr lang="en-US" sz="375" dirty="0">
+              <a:rPr lang="en-US" sz="350" dirty="0">
                 <a:solidFill>
                   <a:srgbClr val="202124"/>
                 </a:solidFill>
@@ -26702,24 +26782,24 @@
               </a:rPr>
               <a:t>Silo RAG</a:t>
             </a:r>
-            <a:endParaRPr lang="en-US" sz="410" dirty="0"/>
-          </a:p>
-        </p:txBody>
-      </p:sp>
-      <p:sp>
-        <p:nvSpPr>
-          <p:cNvPr id="213" name="Shape 191"/>
-          <p:cNvSpPr/>
-          <p:nvPr/>
-        </p:nvSpPr>
-        <p:spPr>
-          <a:xfrm>
-            <a:off x="5180076" y="5452567"/>
-            <a:ext cx="534924" cy="208483"/>
+            <a:endParaRPr lang="en-US" sz="385" dirty="0"/>
+          </a:p>
+        </p:txBody>
+      </p:sp>
+      <p:sp>
+        <p:nvSpPr>
+          <p:cNvPr id="217" name="Shape 195"/>
+          <p:cNvSpPr/>
+          <p:nvPr/>
+        </p:nvSpPr>
+        <p:spPr>
+          <a:xfrm>
+            <a:off x="5197450" y="5485486"/>
+            <a:ext cx="502006" cy="142646"/>
           </a:xfrm>
           <a:prstGeom prst="roundRect">
             <a:avLst>
-              <a:gd name="adj" fmla="val 21930"/>
+              <a:gd name="adj" fmla="val 28846"/>
             </a:avLst>
           </a:prstGeom>
           <a:solidFill>
@@ -26735,14 +26815,14 @@
       </p:sp>
       <p:sp>
         <p:nvSpPr>
-          <p:cNvPr id="214" name="Text 192"/>
-          <p:cNvSpPr/>
-          <p:nvPr/>
-        </p:nvSpPr>
-        <p:spPr>
-          <a:xfrm>
-            <a:off x="5200193" y="5461711"/>
-            <a:ext cx="494690" cy="190195"/>
+          <p:cNvPr id="218" name="Text 196"/>
+          <p:cNvSpPr/>
+          <p:nvPr/>
+        </p:nvSpPr>
+        <p:spPr>
+          <a:xfrm>
+            <a:off x="5215738" y="5490972"/>
+            <a:ext cx="465430" cy="131674"/>
           </a:xfrm>
           <a:prstGeom prst="rect">
             <a:avLst/>
@@ -26756,12 +26836,12 @@
           <a:p>
             <a:pPr algn="ctr" indent="0" marL="0">
               <a:lnSpc>
-                <a:spcPct val="102000"/>
+                <a:spcPct val="100000"/>
               </a:lnSpc>
               <a:buNone/>
             </a:pPr>
             <a:r>
-              <a:rPr lang="en-US" sz="410" b="1" dirty="0">
+              <a:rPr lang="en-US" sz="385" b="1" dirty="0">
                 <a:solidFill>
                   <a:srgbClr val="202124"/>
                 </a:solidFill>
@@ -26771,17 +26851,17 @@
               </a:rPr>
               <a:t>CMEK-Encrypted</a:t>
             </a:r>
-            <a:endParaRPr lang="en-US" sz="410" dirty="0"/>
+            <a:endParaRPr lang="en-US" sz="385" dirty="0"/>
           </a:p>
           <a:p>
             <a:pPr algn="ctr" indent="0" marL="0">
               <a:lnSpc>
-                <a:spcPct val="102000"/>
+                <a:spcPct val="100000"/>
               </a:lnSpc>
               <a:buNone/>
             </a:pPr>
             <a:r>
-              <a:rPr lang="en-US" sz="375" dirty="0">
+              <a:rPr lang="en-US" sz="350" dirty="0">
                 <a:solidFill>
                   <a:srgbClr val="202124"/>
                 </a:solidFill>
@@ -26791,24 +26871,24 @@
               </a:rPr>
               <a:t>State &amp; Tools</a:t>
             </a:r>
-            <a:endParaRPr lang="en-US" sz="410" dirty="0"/>
-          </a:p>
-        </p:txBody>
-      </p:sp>
-      <p:sp>
-        <p:nvSpPr>
-          <p:cNvPr id="215" name="Shape 193"/>
-          <p:cNvSpPr/>
-          <p:nvPr/>
-        </p:nvSpPr>
-        <p:spPr>
-          <a:xfrm>
-            <a:off x="1757477" y="5604358"/>
-            <a:ext cx="397764" cy="208483"/>
+            <a:endParaRPr lang="en-US" sz="385" dirty="0"/>
+          </a:p>
+        </p:txBody>
+      </p:sp>
+      <p:sp>
+        <p:nvSpPr>
+          <p:cNvPr id="219" name="Shape 197"/>
+          <p:cNvSpPr/>
+          <p:nvPr/>
+        </p:nvSpPr>
+        <p:spPr>
+          <a:xfrm>
+            <a:off x="1757477" y="5637276"/>
+            <a:ext cx="372161" cy="142646"/>
           </a:xfrm>
           <a:prstGeom prst="roundRect">
             <a:avLst>
-              <a:gd name="adj" fmla="val 21930"/>
+              <a:gd name="adj" fmla="val 28846"/>
             </a:avLst>
           </a:prstGeom>
           <a:solidFill>
@@ -26824,14 +26904,14 @@
       </p:sp>
       <p:sp>
         <p:nvSpPr>
-          <p:cNvPr id="216" name="Text 194"/>
-          <p:cNvSpPr/>
-          <p:nvPr/>
-        </p:nvSpPr>
-        <p:spPr>
-          <a:xfrm>
-            <a:off x="1777594" y="5613502"/>
-            <a:ext cx="357530" cy="190195"/>
+          <p:cNvPr id="220" name="Text 198"/>
+          <p:cNvSpPr/>
+          <p:nvPr/>
+        </p:nvSpPr>
+        <p:spPr>
+          <a:xfrm>
+            <a:off x="1775765" y="5642762"/>
+            <a:ext cx="335585" cy="131674"/>
           </a:xfrm>
           <a:prstGeom prst="rect">
             <a:avLst/>
@@ -26845,12 +26925,12 @@
           <a:p>
             <a:pPr algn="ctr" indent="0" marL="0">
               <a:lnSpc>
-                <a:spcPct val="102000"/>
+                <a:spcPct val="100000"/>
               </a:lnSpc>
               <a:buNone/>
             </a:pPr>
             <a:r>
-              <a:rPr lang="en-US" sz="410" b="1" dirty="0">
+              <a:rPr lang="en-US" sz="385" b="1" dirty="0">
                 <a:solidFill>
                   <a:srgbClr val="202124"/>
                 </a:solidFill>
@@ -26860,17 +26940,17 @@
               </a:rPr>
               <a:t>Generates</a:t>
             </a:r>
-            <a:endParaRPr lang="en-US" sz="410" dirty="0"/>
+            <a:endParaRPr lang="en-US" sz="385" dirty="0"/>
           </a:p>
           <a:p>
             <a:pPr algn="ctr" indent="0" marL="0">
               <a:lnSpc>
-                <a:spcPct val="102000"/>
+                <a:spcPct val="100000"/>
               </a:lnSpc>
               <a:buNone/>
             </a:pPr>
             <a:r>
-              <a:rPr lang="en-US" sz="375" dirty="0">
+              <a:rPr lang="en-US" sz="350" dirty="0">
                 <a:solidFill>
                   <a:srgbClr val="202124"/>
                 </a:solidFill>
@@ -26880,24 +26960,24 @@
               </a:rPr>
               <a:t>response</a:t>
             </a:r>
-            <a:endParaRPr lang="en-US" sz="410" dirty="0"/>
-          </a:p>
-        </p:txBody>
-      </p:sp>
-      <p:sp>
-        <p:nvSpPr>
-          <p:cNvPr id="217" name="Shape 195"/>
-          <p:cNvSpPr/>
-          <p:nvPr/>
-        </p:nvSpPr>
-        <p:spPr>
-          <a:xfrm>
-            <a:off x="3905402" y="3354019"/>
-            <a:ext cx="644652" cy="208483"/>
+            <a:endParaRPr lang="en-US" sz="385" dirty="0"/>
+          </a:p>
+        </p:txBody>
+      </p:sp>
+      <p:sp>
+        <p:nvSpPr>
+          <p:cNvPr id="221" name="Shape 199"/>
+          <p:cNvSpPr/>
+          <p:nvPr/>
+        </p:nvSpPr>
+        <p:spPr>
+          <a:xfrm>
+            <a:off x="3905402" y="3389681"/>
+            <a:ext cx="606247" cy="137160"/>
           </a:xfrm>
           <a:prstGeom prst="roundRect">
             <a:avLst>
-              <a:gd name="adj" fmla="val 21930"/>
+              <a:gd name="adj" fmla="val 30000"/>
             </a:avLst>
           </a:prstGeom>
           <a:solidFill>
@@ -26913,14 +26993,14 @@
       </p:sp>
       <p:sp>
         <p:nvSpPr>
-          <p:cNvPr id="218" name="Text 196"/>
-          <p:cNvSpPr/>
-          <p:nvPr/>
-        </p:nvSpPr>
-        <p:spPr>
-          <a:xfrm>
-            <a:off x="3925519" y="3363163"/>
-            <a:ext cx="604418" cy="190195"/>
+          <p:cNvPr id="222" name="Text 200"/>
+          <p:cNvSpPr/>
+          <p:nvPr/>
+        </p:nvSpPr>
+        <p:spPr>
+          <a:xfrm>
+            <a:off x="3923690" y="3395167"/>
+            <a:ext cx="569671" cy="126187"/>
           </a:xfrm>
           <a:prstGeom prst="rect">
             <a:avLst/>
@@ -26934,12 +27014,12 @@
           <a:p>
             <a:pPr algn="ctr" indent="0" marL="0">
               <a:lnSpc>
-                <a:spcPct val="102000"/>
+                <a:spcPct val="100000"/>
               </a:lnSpc>
               <a:buNone/>
             </a:pPr>
             <a:r>
-              <a:rPr lang="en-US" sz="410" b="1" dirty="0">
+              <a:rPr lang="en-US" sz="385" b="1" dirty="0">
                 <a:solidFill>
                   <a:srgbClr val="202124"/>
                 </a:solidFill>
@@ -26949,17 +27029,17 @@
               </a:rPr>
               <a:t>Sanitized response</a:t>
             </a:r>
-            <a:endParaRPr lang="en-US" sz="410" dirty="0"/>
+            <a:endParaRPr lang="en-US" sz="385" dirty="0"/>
           </a:p>
           <a:p>
             <a:pPr algn="ctr" indent="0" marL="0">
               <a:lnSpc>
-                <a:spcPct val="102000"/>
+                <a:spcPct val="100000"/>
               </a:lnSpc>
               <a:buNone/>
             </a:pPr>
             <a:r>
-              <a:rPr lang="en-US" sz="375" dirty="0">
+              <a:rPr lang="en-US" sz="350" dirty="0">
                 <a:solidFill>
                   <a:srgbClr val="202124"/>
                 </a:solidFill>
@@ -26969,24 +27049,24 @@
               </a:rPr>
               <a:t>with SDP redaction</a:t>
             </a:r>
-            <a:endParaRPr lang="en-US" sz="410" dirty="0"/>
-          </a:p>
-        </p:txBody>
-      </p:sp>
-      <p:sp>
-        <p:nvSpPr>
-          <p:cNvPr id="219" name="Shape 197"/>
-          <p:cNvSpPr/>
-          <p:nvPr/>
-        </p:nvSpPr>
-        <p:spPr>
-          <a:xfrm>
-            <a:off x="2983687" y="3354019"/>
-            <a:ext cx="669341" cy="208483"/>
+            <a:endParaRPr lang="en-US" sz="385" dirty="0"/>
+          </a:p>
+        </p:txBody>
+      </p:sp>
+      <p:sp>
+        <p:nvSpPr>
+          <p:cNvPr id="223" name="Shape 201"/>
+          <p:cNvSpPr/>
+          <p:nvPr/>
+        </p:nvSpPr>
+        <p:spPr>
+          <a:xfrm>
+            <a:off x="2983687" y="3389681"/>
+            <a:ext cx="658368" cy="137160"/>
           </a:xfrm>
           <a:prstGeom prst="roundRect">
             <a:avLst>
-              <a:gd name="adj" fmla="val 21930"/>
+              <a:gd name="adj" fmla="val 30000"/>
             </a:avLst>
           </a:prstGeom>
           <a:solidFill>
@@ -27002,14 +27082,14 @@
       </p:sp>
       <p:sp>
         <p:nvSpPr>
-          <p:cNvPr id="220" name="Text 198"/>
-          <p:cNvSpPr/>
-          <p:nvPr/>
-        </p:nvSpPr>
-        <p:spPr>
-          <a:xfrm>
-            <a:off x="3003804" y="3363163"/>
-            <a:ext cx="629107" cy="190195"/>
+          <p:cNvPr id="224" name="Text 202"/>
+          <p:cNvSpPr/>
+          <p:nvPr/>
+        </p:nvSpPr>
+        <p:spPr>
+          <a:xfrm>
+            <a:off x="3001975" y="3395167"/>
+            <a:ext cx="621792" cy="126187"/>
           </a:xfrm>
           <a:prstGeom prst="rect">
             <a:avLst/>
@@ -27023,12 +27103,12 @@
           <a:p>
             <a:pPr algn="ctr" indent="0" marL="0">
               <a:lnSpc>
-                <a:spcPct val="102000"/>
+                <a:spcPct val="100000"/>
               </a:lnSpc>
               <a:buNone/>
             </a:pPr>
             <a:r>
-              <a:rPr lang="en-US" sz="410" b="1" dirty="0">
+              <a:rPr lang="en-US" sz="385" b="1" dirty="0">
                 <a:solidFill>
                   <a:srgbClr val="202124"/>
                 </a:solidFill>
@@ -27038,17 +27118,17 @@
               </a:rPr>
               <a:t>Route by tenant tier</a:t>
             </a:r>
-            <a:endParaRPr lang="en-US" sz="410" dirty="0"/>
+            <a:endParaRPr lang="en-US" sz="385" dirty="0"/>
           </a:p>
           <a:p>
             <a:pPr algn="ctr" indent="0" marL="0">
               <a:lnSpc>
-                <a:spcPct val="102000"/>
+                <a:spcPct val="100000"/>
               </a:lnSpc>
               <a:buNone/>
             </a:pPr>
             <a:r>
-              <a:rPr lang="en-US" sz="375" dirty="0">
+              <a:rPr lang="en-US" sz="350" dirty="0">
                 <a:solidFill>
                   <a:srgbClr val="202124"/>
                 </a:solidFill>
@@ -27058,24 +27138,24 @@
               </a:rPr>
               <a:t>(Pool, Silo or PSC)</a:t>
             </a:r>
-            <a:endParaRPr lang="en-US" sz="410" dirty="0"/>
-          </a:p>
-        </p:txBody>
-      </p:sp>
-      <p:sp>
-        <p:nvSpPr>
-          <p:cNvPr id="221" name="Shape 199"/>
-          <p:cNvSpPr/>
-          <p:nvPr/>
-        </p:nvSpPr>
-        <p:spPr>
-          <a:xfrm>
-            <a:off x="2589581" y="2871216"/>
-            <a:ext cx="425196" cy="208483"/>
+            <a:endParaRPr lang="en-US" sz="385" dirty="0"/>
+          </a:p>
+        </p:txBody>
+      </p:sp>
+      <p:sp>
+        <p:nvSpPr>
+          <p:cNvPr id="225" name="Shape 203"/>
+          <p:cNvSpPr/>
+          <p:nvPr/>
+        </p:nvSpPr>
+        <p:spPr>
+          <a:xfrm>
+            <a:off x="2603297" y="2908706"/>
+            <a:ext cx="397764" cy="133502"/>
           </a:xfrm>
           <a:prstGeom prst="roundRect">
             <a:avLst>
-              <a:gd name="adj" fmla="val 21930"/>
+              <a:gd name="adj" fmla="val 30822"/>
             </a:avLst>
           </a:prstGeom>
           <a:solidFill>
@@ -27091,14 +27171,14 @@
       </p:sp>
       <p:sp>
         <p:nvSpPr>
-          <p:cNvPr id="222" name="Text 200"/>
-          <p:cNvSpPr/>
-          <p:nvPr/>
-        </p:nvSpPr>
-        <p:spPr>
-          <a:xfrm>
-            <a:off x="2609698" y="2880360"/>
-            <a:ext cx="384962" cy="190195"/>
+          <p:cNvPr id="226" name="Text 204"/>
+          <p:cNvSpPr/>
+          <p:nvPr/>
+        </p:nvSpPr>
+        <p:spPr>
+          <a:xfrm>
+            <a:off x="2621585" y="2914193"/>
+            <a:ext cx="361188" cy="122530"/>
           </a:xfrm>
           <a:prstGeom prst="rect">
             <a:avLst/>
@@ -27112,12 +27192,12 @@
           <a:p>
             <a:pPr algn="ctr" indent="0" marL="0">
               <a:lnSpc>
-                <a:spcPct val="102000"/>
+                <a:spcPct val="100000"/>
               </a:lnSpc>
               <a:buNone/>
             </a:pPr>
             <a:r>
-              <a:rPr lang="en-US" sz="410" b="1" dirty="0">
+              <a:rPr lang="en-US" sz="385" b="1" dirty="0">
                 <a:solidFill>
                   <a:srgbClr val="202124"/>
                 </a:solidFill>
@@ -27127,17 +27207,17 @@
               </a:rPr>
               <a:t>OBO + KMS</a:t>
             </a:r>
-            <a:endParaRPr lang="en-US" sz="410" dirty="0"/>
+            <a:endParaRPr lang="en-US" sz="385" dirty="0"/>
           </a:p>
           <a:p>
             <a:pPr algn="ctr" indent="0" marL="0">
               <a:lnSpc>
-                <a:spcPct val="102000"/>
+                <a:spcPct val="100000"/>
               </a:lnSpc>
               <a:buNone/>
             </a:pPr>
             <a:r>
-              <a:rPr lang="en-US" sz="375" dirty="0">
+              <a:rPr lang="en-US" sz="350" dirty="0">
                 <a:solidFill>
                   <a:srgbClr val="202124"/>
                 </a:solidFill>
@@ -27147,24 +27227,24 @@
               </a:rPr>
               <a:t>ECDSA sign</a:t>
             </a:r>
-            <a:endParaRPr lang="en-US" sz="410" dirty="0"/>
-          </a:p>
-        </p:txBody>
-      </p:sp>
-      <p:sp>
-        <p:nvSpPr>
-          <p:cNvPr id="223" name="Shape 201"/>
-          <p:cNvSpPr/>
-          <p:nvPr/>
-        </p:nvSpPr>
-        <p:spPr>
-          <a:xfrm>
-            <a:off x="1757477" y="4605833"/>
-            <a:ext cx="589788" cy="138989"/>
+            <a:endParaRPr lang="en-US" sz="385" dirty="0"/>
+          </a:p>
+        </p:txBody>
+      </p:sp>
+      <p:sp>
+        <p:nvSpPr>
+          <p:cNvPr id="227" name="Shape 205"/>
+          <p:cNvSpPr/>
+          <p:nvPr/>
+        </p:nvSpPr>
+        <p:spPr>
+          <a:xfrm>
+            <a:off x="1757477" y="4623206"/>
+            <a:ext cx="554126" cy="103327"/>
           </a:xfrm>
           <a:prstGeom prst="roundRect">
             <a:avLst>
-              <a:gd name="adj" fmla="val 32895"/>
+              <a:gd name="adj" fmla="val 39823"/>
             </a:avLst>
           </a:prstGeom>
           <a:solidFill>
@@ -27180,14 +27260,14 @@
       </p:sp>
       <p:sp>
         <p:nvSpPr>
-          <p:cNvPr id="224" name="Text 202"/>
-          <p:cNvSpPr/>
-          <p:nvPr/>
-        </p:nvSpPr>
-        <p:spPr>
-          <a:xfrm>
-            <a:off x="1777594" y="4614977"/>
-            <a:ext cx="549554" cy="120701"/>
+          <p:cNvPr id="228" name="Text 206"/>
+          <p:cNvSpPr/>
+          <p:nvPr/>
+        </p:nvSpPr>
+        <p:spPr>
+          <a:xfrm>
+            <a:off x="1775765" y="4628693"/>
+            <a:ext cx="517550" cy="92354"/>
           </a:xfrm>
           <a:prstGeom prst="rect">
             <a:avLst/>
@@ -27201,12 +27281,12 @@
           <a:p>
             <a:pPr algn="ctr" indent="0" marL="0">
               <a:lnSpc>
-                <a:spcPct val="102000"/>
+                <a:spcPct val="100000"/>
               </a:lnSpc>
               <a:buNone/>
             </a:pPr>
             <a:r>
-              <a:rPr lang="en-US" sz="410" b="1" dirty="0">
+              <a:rPr lang="en-US" sz="385" b="1" dirty="0">
                 <a:solidFill>
                   <a:srgbClr val="202124"/>
                 </a:solidFill>
@@ -27216,24 +27296,24 @@
               </a:rPr>
               <a:t>Sanitize request</a:t>
             </a:r>
-            <a:endParaRPr lang="en-US" sz="410" dirty="0"/>
-          </a:p>
-        </p:txBody>
-      </p:sp>
-      <p:sp>
-        <p:nvSpPr>
-          <p:cNvPr id="225" name="Shape 203"/>
-          <p:cNvSpPr/>
-          <p:nvPr/>
-        </p:nvSpPr>
-        <p:spPr>
-          <a:xfrm>
-            <a:off x="1757477" y="4814316"/>
-            <a:ext cx="617220" cy="138989"/>
+            <a:endParaRPr lang="en-US" sz="385" dirty="0"/>
+          </a:p>
+        </p:txBody>
+      </p:sp>
+      <p:sp>
+        <p:nvSpPr>
+          <p:cNvPr id="229" name="Shape 207"/>
+          <p:cNvSpPr/>
+          <p:nvPr/>
+        </p:nvSpPr>
+        <p:spPr>
+          <a:xfrm>
+            <a:off x="1757477" y="4831690"/>
+            <a:ext cx="580644" cy="103327"/>
           </a:xfrm>
           <a:prstGeom prst="roundRect">
             <a:avLst>
-              <a:gd name="adj" fmla="val 32895"/>
+              <a:gd name="adj" fmla="val 39823"/>
             </a:avLst>
           </a:prstGeom>
           <a:solidFill>
@@ -27249,14 +27329,14 @@
       </p:sp>
       <p:sp>
         <p:nvSpPr>
-          <p:cNvPr id="226" name="Text 204"/>
-          <p:cNvSpPr/>
-          <p:nvPr/>
-        </p:nvSpPr>
-        <p:spPr>
-          <a:xfrm>
-            <a:off x="1777594" y="4823460"/>
-            <a:ext cx="576986" cy="120701"/>
+          <p:cNvPr id="230" name="Text 208"/>
+          <p:cNvSpPr/>
+          <p:nvPr/>
+        </p:nvSpPr>
+        <p:spPr>
+          <a:xfrm>
+            <a:off x="1775765" y="4837176"/>
+            <a:ext cx="544068" cy="92354"/>
           </a:xfrm>
           <a:prstGeom prst="rect">
             <a:avLst/>
@@ -27270,12 +27350,12 @@
           <a:p>
             <a:pPr algn="ctr" indent="0" marL="0">
               <a:lnSpc>
-                <a:spcPct val="102000"/>
+                <a:spcPct val="100000"/>
               </a:lnSpc>
               <a:buNone/>
             </a:pPr>
             <a:r>
-              <a:rPr lang="en-US" sz="410" b="1" dirty="0">
+              <a:rPr lang="en-US" sz="385" b="1" dirty="0">
                 <a:solidFill>
                   <a:srgbClr val="202124"/>
                 </a:solidFill>
@@ -27285,24 +27365,24 @@
               </a:rPr>
               <a:t>Sanitize response</a:t>
             </a:r>
-            <a:endParaRPr lang="en-US" sz="410" dirty="0"/>
-          </a:p>
-        </p:txBody>
-      </p:sp>
-      <p:sp>
-        <p:nvSpPr>
-          <p:cNvPr id="227" name="Shape 205"/>
-          <p:cNvSpPr/>
-          <p:nvPr/>
-        </p:nvSpPr>
-        <p:spPr>
-          <a:xfrm>
-            <a:off x="2443277" y="2080260"/>
-            <a:ext cx="480060" cy="208483"/>
+            <a:endParaRPr lang="en-US" sz="385" dirty="0"/>
+          </a:p>
+        </p:txBody>
+      </p:sp>
+      <p:sp>
+        <p:nvSpPr>
+          <p:cNvPr id="231" name="Shape 209"/>
+          <p:cNvSpPr/>
+          <p:nvPr/>
+        </p:nvSpPr>
+        <p:spPr>
+          <a:xfrm>
+            <a:off x="2458822" y="2117750"/>
+            <a:ext cx="449885" cy="133502"/>
           </a:xfrm>
           <a:prstGeom prst="roundRect">
             <a:avLst>
-              <a:gd name="adj" fmla="val 21930"/>
+              <a:gd name="adj" fmla="val 30822"/>
             </a:avLst>
           </a:prstGeom>
           <a:solidFill>
@@ -27318,14 +27398,14 @@
       </p:sp>
       <p:sp>
         <p:nvSpPr>
-          <p:cNvPr id="228" name="Text 206"/>
-          <p:cNvSpPr/>
-          <p:nvPr/>
-        </p:nvSpPr>
-        <p:spPr>
-          <a:xfrm>
-            <a:off x="2463394" y="2089404"/>
-            <a:ext cx="439826" cy="190195"/>
+          <p:cNvPr id="232" name="Text 210"/>
+          <p:cNvSpPr/>
+          <p:nvPr/>
+        </p:nvSpPr>
+        <p:spPr>
+          <a:xfrm>
+            <a:off x="2477110" y="2123237"/>
+            <a:ext cx="413309" cy="122530"/>
           </a:xfrm>
           <a:prstGeom prst="rect">
             <a:avLst/>
@@ -27339,12 +27419,12 @@
           <a:p>
             <a:pPr algn="ctr" indent="0" marL="0">
               <a:lnSpc>
-                <a:spcPct val="102000"/>
+                <a:spcPct val="100000"/>
               </a:lnSpc>
               <a:buNone/>
             </a:pPr>
             <a:r>
-              <a:rPr lang="en-US" sz="410" b="1" dirty="0">
+              <a:rPr lang="en-US" sz="385" b="1" dirty="0">
                 <a:solidFill>
                   <a:srgbClr val="202124"/>
                 </a:solidFill>
@@ -27354,17 +27434,17 @@
               </a:rPr>
               <a:t>Header &amp; WAF</a:t>
             </a:r>
-            <a:endParaRPr lang="en-US" sz="410" dirty="0"/>
+            <a:endParaRPr lang="en-US" sz="385" dirty="0"/>
           </a:p>
           <a:p>
             <a:pPr algn="ctr" indent="0" marL="0">
               <a:lnSpc>
-                <a:spcPct val="102000"/>
+                <a:spcPct val="100000"/>
               </a:lnSpc>
               <a:buNone/>
             </a:pPr>
             <a:r>
-              <a:rPr lang="en-US" sz="375" dirty="0">
+              <a:rPr lang="en-US" sz="350" dirty="0">
                 <a:solidFill>
                   <a:srgbClr val="202124"/>
                 </a:solidFill>
@@ -27374,24 +27454,24 @@
               </a:rPr>
               <a:t>policies</a:t>
             </a:r>
-            <a:endParaRPr lang="en-US" sz="410" dirty="0"/>
-          </a:p>
-        </p:txBody>
-      </p:sp>
-      <p:sp>
-        <p:nvSpPr>
-          <p:cNvPr id="229" name="Shape 207"/>
-          <p:cNvSpPr/>
-          <p:nvPr/>
-        </p:nvSpPr>
-        <p:spPr>
-          <a:xfrm>
-            <a:off x="2498141" y="2625242"/>
-            <a:ext cx="370332" cy="208483"/>
+            <a:endParaRPr lang="en-US" sz="385" dirty="0"/>
+          </a:p>
+        </p:txBody>
+      </p:sp>
+      <p:sp>
+        <p:nvSpPr>
+          <p:cNvPr id="233" name="Shape 211"/>
+          <p:cNvSpPr/>
+          <p:nvPr/>
+        </p:nvSpPr>
+        <p:spPr>
+          <a:xfrm>
+            <a:off x="2510942" y="2717597"/>
+            <a:ext cx="345643" cy="133502"/>
           </a:xfrm>
           <a:prstGeom prst="roundRect">
             <a:avLst>
-              <a:gd name="adj" fmla="val 21930"/>
+              <a:gd name="adj" fmla="val 30822"/>
             </a:avLst>
           </a:prstGeom>
           <a:solidFill>
@@ -27407,14 +27487,14 @@
       </p:sp>
       <p:sp>
         <p:nvSpPr>
-          <p:cNvPr id="230" name="Text 208"/>
-          <p:cNvSpPr/>
-          <p:nvPr/>
-        </p:nvSpPr>
-        <p:spPr>
-          <a:xfrm>
-            <a:off x="2518258" y="2634386"/>
-            <a:ext cx="330098" cy="190195"/>
+          <p:cNvPr id="234" name="Text 212"/>
+          <p:cNvSpPr/>
+          <p:nvPr/>
+        </p:nvSpPr>
+        <p:spPr>
+          <a:xfrm>
+            <a:off x="2529230" y="2723083"/>
+            <a:ext cx="309067" cy="122530"/>
           </a:xfrm>
           <a:prstGeom prst="rect">
             <a:avLst/>
@@ -27428,12 +27508,12 @@
           <a:p>
             <a:pPr algn="ctr" indent="0" marL="0">
               <a:lnSpc>
-                <a:spcPct val="102000"/>
+                <a:spcPct val="100000"/>
               </a:lnSpc>
               <a:buNone/>
             </a:pPr>
             <a:r>
-              <a:rPr lang="en-US" sz="410" b="1" dirty="0">
+              <a:rPr lang="en-US" sz="385" b="1" dirty="0">
                 <a:solidFill>
                   <a:srgbClr val="202124"/>
                 </a:solidFill>
@@ -27443,17 +27523,17 @@
               </a:rPr>
               <a:t>Sanitize</a:t>
             </a:r>
-            <a:endParaRPr lang="en-US" sz="410" dirty="0"/>
+            <a:endParaRPr lang="en-US" sz="385" dirty="0"/>
           </a:p>
           <a:p>
             <a:pPr algn="ctr" indent="0" marL="0">
               <a:lnSpc>
-                <a:spcPct val="102000"/>
+                <a:spcPct val="100000"/>
               </a:lnSpc>
               <a:buNone/>
             </a:pPr>
             <a:r>
-              <a:rPr lang="en-US" sz="375" dirty="0">
+              <a:rPr lang="en-US" sz="350" dirty="0">
                 <a:solidFill>
                   <a:srgbClr val="202124"/>
                 </a:solidFill>
@@ -27463,24 +27543,24 @@
               </a:rPr>
               <a:t>prompt</a:t>
             </a:r>
-            <a:endParaRPr lang="en-US" sz="410" dirty="0"/>
-          </a:p>
-        </p:txBody>
-      </p:sp>
-      <p:sp>
-        <p:nvSpPr>
-          <p:cNvPr id="231" name="Shape 209"/>
-          <p:cNvSpPr/>
-          <p:nvPr/>
-        </p:nvSpPr>
-        <p:spPr>
-          <a:xfrm>
-            <a:off x="3888029" y="1144829"/>
-            <a:ext cx="370332" cy="138989"/>
+            <a:endParaRPr lang="en-US" sz="385" dirty="0"/>
+          </a:p>
+        </p:txBody>
+      </p:sp>
+      <p:sp>
+        <p:nvSpPr>
+          <p:cNvPr id="235" name="Shape 213"/>
+          <p:cNvSpPr/>
+          <p:nvPr/>
+        </p:nvSpPr>
+        <p:spPr>
+          <a:xfrm>
+            <a:off x="3888029" y="1163117"/>
+            <a:ext cx="345643" cy="103327"/>
           </a:xfrm>
           <a:prstGeom prst="roundRect">
             <a:avLst>
-              <a:gd name="adj" fmla="val 32895"/>
+              <a:gd name="adj" fmla="val 39823"/>
             </a:avLst>
           </a:prstGeom>
           <a:solidFill>
@@ -27496,14 +27576,14 @@
       </p:sp>
       <p:sp>
         <p:nvSpPr>
-          <p:cNvPr id="232" name="Text 210"/>
-          <p:cNvSpPr/>
-          <p:nvPr/>
-        </p:nvSpPr>
-        <p:spPr>
-          <a:xfrm>
-            <a:off x="3908146" y="1153973"/>
-            <a:ext cx="330098" cy="120701"/>
+          <p:cNvPr id="236" name="Text 214"/>
+          <p:cNvSpPr/>
+          <p:nvPr/>
+        </p:nvSpPr>
+        <p:spPr>
+          <a:xfrm>
+            <a:off x="3906317" y="1168603"/>
+            <a:ext cx="309067" cy="92354"/>
           </a:xfrm>
           <a:prstGeom prst="rect">
             <a:avLst/>
@@ -27517,12 +27597,12 @@
           <a:p>
             <a:pPr algn="ctr" indent="0" marL="0">
               <a:lnSpc>
-                <a:spcPct val="102000"/>
+                <a:spcPct val="100000"/>
               </a:lnSpc>
               <a:buNone/>
             </a:pPr>
             <a:r>
-              <a:rPr lang="en-US" sz="410" b="1" dirty="0">
+              <a:rPr lang="en-US" sz="385" b="1" dirty="0">
                 <a:solidFill>
                   <a:srgbClr val="202124"/>
                 </a:solidFill>
@@ -27532,24 +27612,24 @@
               </a:rPr>
               <a:t>Response</a:t>
             </a:r>
-            <a:endParaRPr lang="en-US" sz="410" dirty="0"/>
-          </a:p>
-        </p:txBody>
-      </p:sp>
-      <p:sp>
-        <p:nvSpPr>
-          <p:cNvPr id="233" name="Shape 211"/>
-          <p:cNvSpPr/>
-          <p:nvPr/>
-        </p:nvSpPr>
-        <p:spPr>
-          <a:xfrm>
-            <a:off x="3888029" y="2723083"/>
-            <a:ext cx="370332" cy="138989"/>
+            <a:endParaRPr lang="en-US" sz="385" dirty="0"/>
+          </a:p>
+        </p:txBody>
+      </p:sp>
+      <p:sp>
+        <p:nvSpPr>
+          <p:cNvPr id="237" name="Shape 215"/>
+          <p:cNvSpPr/>
+          <p:nvPr/>
+        </p:nvSpPr>
+        <p:spPr>
+          <a:xfrm>
+            <a:off x="3888029" y="2740457"/>
+            <a:ext cx="345643" cy="103327"/>
           </a:xfrm>
           <a:prstGeom prst="roundRect">
             <a:avLst>
-              <a:gd name="adj" fmla="val 32895"/>
+              <a:gd name="adj" fmla="val 39823"/>
             </a:avLst>
           </a:prstGeom>
           <a:solidFill>
@@ -27565,14 +27645,14 @@
       </p:sp>
       <p:sp>
         <p:nvSpPr>
-          <p:cNvPr id="234" name="Text 212"/>
-          <p:cNvSpPr/>
-          <p:nvPr/>
-        </p:nvSpPr>
-        <p:spPr>
-          <a:xfrm>
-            <a:off x="3908146" y="2732227"/>
-            <a:ext cx="330098" cy="120701"/>
+          <p:cNvPr id="238" name="Text 216"/>
+          <p:cNvSpPr/>
+          <p:nvPr/>
+        </p:nvSpPr>
+        <p:spPr>
+          <a:xfrm>
+            <a:off x="3906317" y="2745943"/>
+            <a:ext cx="309067" cy="92354"/>
           </a:xfrm>
           <a:prstGeom prst="rect">
             <a:avLst/>
@@ -27586,12 +27666,12 @@
           <a:p>
             <a:pPr algn="ctr" indent="0" marL="0">
               <a:lnSpc>
-                <a:spcPct val="102000"/>
+                <a:spcPct val="100000"/>
               </a:lnSpc>
               <a:buNone/>
             </a:pPr>
             <a:r>
-              <a:rPr lang="en-US" sz="410" b="1" dirty="0">
+              <a:rPr lang="en-US" sz="385" b="1" dirty="0">
                 <a:solidFill>
                   <a:srgbClr val="202124"/>
                 </a:solidFill>
@@ -27601,24 +27681,24 @@
               </a:rPr>
               <a:t>Response</a:t>
             </a:r>
-            <a:endParaRPr lang="en-US" sz="410" dirty="0"/>
-          </a:p>
-        </p:txBody>
-      </p:sp>
-      <p:sp>
-        <p:nvSpPr>
-          <p:cNvPr id="235" name="Shape 213"/>
-          <p:cNvSpPr/>
-          <p:nvPr/>
-        </p:nvSpPr>
-        <p:spPr>
-          <a:xfrm>
-            <a:off x="3144622" y="1144829"/>
-            <a:ext cx="342900" cy="138989"/>
+            <a:endParaRPr lang="en-US" sz="385" dirty="0"/>
+          </a:p>
+        </p:txBody>
+      </p:sp>
+      <p:sp>
+        <p:nvSpPr>
+          <p:cNvPr id="239" name="Shape 217"/>
+          <p:cNvSpPr/>
+          <p:nvPr/>
+        </p:nvSpPr>
+        <p:spPr>
+          <a:xfrm>
+            <a:off x="3167482" y="1163117"/>
+            <a:ext cx="320040" cy="103327"/>
           </a:xfrm>
           <a:prstGeom prst="roundRect">
             <a:avLst>
-              <a:gd name="adj" fmla="val 32895"/>
+              <a:gd name="adj" fmla="val 39823"/>
             </a:avLst>
           </a:prstGeom>
           <a:solidFill>
@@ -27634,14 +27714,14 @@
       </p:sp>
       <p:sp>
         <p:nvSpPr>
-          <p:cNvPr id="236" name="Text 214"/>
-          <p:cNvSpPr/>
-          <p:nvPr/>
-        </p:nvSpPr>
-        <p:spPr>
-          <a:xfrm>
-            <a:off x="3164738" y="1153973"/>
-            <a:ext cx="302666" cy="120701"/>
+          <p:cNvPr id="240" name="Text 218"/>
+          <p:cNvSpPr/>
+          <p:nvPr/>
+        </p:nvSpPr>
+        <p:spPr>
+          <a:xfrm>
+            <a:off x="3185770" y="1168603"/>
+            <a:ext cx="283464" cy="92354"/>
           </a:xfrm>
           <a:prstGeom prst="rect">
             <a:avLst/>
@@ -27655,12 +27735,12 @@
           <a:p>
             <a:pPr algn="ctr" indent="0" marL="0">
               <a:lnSpc>
-                <a:spcPct val="102000"/>
+                <a:spcPct val="100000"/>
               </a:lnSpc>
               <a:buNone/>
             </a:pPr>
             <a:r>
-              <a:rPr lang="en-US" sz="410" b="1" dirty="0">
+              <a:rPr lang="en-US" sz="385" b="1" dirty="0">
                 <a:solidFill>
                   <a:srgbClr val="202124"/>
                 </a:solidFill>
@@ -27670,24 +27750,24 @@
               </a:rPr>
               <a:t>Request</a:t>
             </a:r>
-            <a:endParaRPr lang="en-US" sz="410" dirty="0"/>
-          </a:p>
-        </p:txBody>
-      </p:sp>
-      <p:sp>
-        <p:nvSpPr>
-          <p:cNvPr id="237" name="Shape 215"/>
-          <p:cNvSpPr/>
-          <p:nvPr/>
-        </p:nvSpPr>
-        <p:spPr>
-          <a:xfrm>
-            <a:off x="3144622" y="2723083"/>
-            <a:ext cx="342900" cy="138989"/>
+            <a:endParaRPr lang="en-US" sz="385" dirty="0"/>
+          </a:p>
+        </p:txBody>
+      </p:sp>
+      <p:sp>
+        <p:nvSpPr>
+          <p:cNvPr id="241" name="Shape 219"/>
+          <p:cNvSpPr/>
+          <p:nvPr/>
+        </p:nvSpPr>
+        <p:spPr>
+          <a:xfrm>
+            <a:off x="3167482" y="2740457"/>
+            <a:ext cx="320040" cy="103327"/>
           </a:xfrm>
           <a:prstGeom prst="roundRect">
             <a:avLst>
-              <a:gd name="adj" fmla="val 32895"/>
+              <a:gd name="adj" fmla="val 39823"/>
             </a:avLst>
           </a:prstGeom>
           <a:solidFill>
@@ -27703,14 +27783,14 @@
       </p:sp>
       <p:sp>
         <p:nvSpPr>
-          <p:cNvPr id="238" name="Text 216"/>
-          <p:cNvSpPr/>
-          <p:nvPr/>
-        </p:nvSpPr>
-        <p:spPr>
-          <a:xfrm>
-            <a:off x="3164738" y="2732227"/>
-            <a:ext cx="302666" cy="120701"/>
+          <p:cNvPr id="242" name="Text 220"/>
+          <p:cNvSpPr/>
+          <p:nvPr/>
+        </p:nvSpPr>
+        <p:spPr>
+          <a:xfrm>
+            <a:off x="3185770" y="2745943"/>
+            <a:ext cx="283464" cy="92354"/>
           </a:xfrm>
           <a:prstGeom prst="rect">
             <a:avLst/>
@@ -27724,12 +27804,12 @@
           <a:p>
             <a:pPr algn="ctr" indent="0" marL="0">
               <a:lnSpc>
-                <a:spcPct val="102000"/>
+                <a:spcPct val="100000"/>
               </a:lnSpc>
               <a:buNone/>
             </a:pPr>
             <a:r>
-              <a:rPr lang="en-US" sz="410" b="1" dirty="0">
+              <a:rPr lang="en-US" sz="385" b="1" dirty="0">
                 <a:solidFill>
                   <a:srgbClr val="202124"/>
                 </a:solidFill>
@@ -27739,13 +27819,13 @@
               </a:rPr>
               <a:t>Request</a:t>
             </a:r>
-            <a:endParaRPr lang="en-US" sz="410" dirty="0"/>
-          </a:p>
-        </p:txBody>
-      </p:sp>
-      <p:sp>
-        <p:nvSpPr>
-          <p:cNvPr id="239" name="Text 217"/>
+            <a:endParaRPr lang="en-US" sz="385" dirty="0"/>
+          </a:p>
+        </p:txBody>
+      </p:sp>
+      <p:sp>
+        <p:nvSpPr>
+          <p:cNvPr id="243" name="Text 221"/>
           <p:cNvSpPr/>
           <p:nvPr/>
         </p:nvSpPr>

--- a/slides/ws1-google-slides-design-plugin-editable-slides.pptx
+++ b/slides/ws1-google-slides-design-plugin-editable-slides.pptx
@@ -3602,7 +3602,7 @@
                 <a:ea typeface="Google Sans" pitchFamily="34" charset="-122"/>
                 <a:cs typeface="Google Sans" pitchFamily="34" charset="-120"/>
               </a:rPr>
-              <a:t>Agenda, Personas &amp; 12-Dim Pattern Matrix</a:t>
+              <a:t>Problem, Personas &amp; Conceptual Model</a:t>
             </a:r>
             <a:endParaRPr lang="en-US" sz="850" dirty="0"/>
           </a:p>
@@ -3641,7 +3641,7 @@
                 <a:ea typeface="Roboto" pitchFamily="34" charset="-122"/>
                 <a:cs typeface="Roboto" pitchFamily="34" charset="-120"/>
               </a:rPr>
-              <a:t>Maps ADK/MCP/ARD to CS101 OS primitives; sets the 5-Act agenda (Slide 2), contrasts FinVault (600 RPM: Dedicated PT vs. GKE Gemma 3) &amp; RetailStream (120 RPM: 3LO vault, Slide 3), and compares Patterns A/B/C (Slide 4).</a:t>
+              <a:t>Maps ADK/MCP/ARD to CS101 OS primitives; sets the 5-Part agenda (Slide 2), contrasts FinVault &amp; RetailStream (Slide 3), and decouples the 80% 5-Hop Core from 20% Perimeter Delta (Slide 4).</a:t>
             </a:r>
             <a:endParaRPr lang="en-US" sz="780" dirty="0"/>
           </a:p>
@@ -3749,7 +3749,7 @@
                 <a:ea typeface="Google Sans" pitchFamily="34" charset="-122"/>
                 <a:cs typeface="Google Sans" pitchFamily="34" charset="-120"/>
               </a:rPr>
-              <a:t>PART 2 • SLIDES 5–6 &amp; 8</a:t>
+              <a:t>PART 2 • SLIDES 5–9</a:t>
             </a:r>
             <a:endParaRPr lang="en-US" sz="660" dirty="0"/>
           </a:p>
@@ -3788,7 +3788,7 @@
                 <a:ea typeface="Google Sans" pitchFamily="34" charset="-122"/>
                 <a:cs typeface="Google Sans" pitchFamily="34" charset="-120"/>
               </a:rPr>
-              <a:t>L1 3 Layers → L2 4 Perimeters → L4 Wire</a:t>
+              <a:t>Process Flow, L1 Layers, Matrix &amp; L2 Figures</a:t>
             </a:r>
             <a:endParaRPr lang="en-US" sz="850" dirty="0"/>
           </a:p>
@@ -3827,7 +3827,7 @@
                 <a:ea typeface="Roboto" pitchFamily="34" charset="-122"/>
                 <a:cs typeface="Roboto" pitchFamily="34" charset="-120"/>
               </a:rPr>
-              <a:t>Zooms macro-to-micro from the 3 Logical Security Layers (~42ms p95, Slide 5) into the 4 Physical VPC-SC Perimeters &amp; Steps 1–7 in Figure 1 (Slide 6) and &lt;0.15ms cached-JWKS STS JWT wire packet (Slide 8).</a:t>
+              <a:t>Traces the ~42ms p95 6-stage lifecycle (Slide 5), L1 3 Security Layers (Slide 6), 12-Dim Pattern A/B/C Matrix (Slide 7), and L2 Physical Figures 1 &amp; 2 (Slides 8–9).</a:t>
             </a:r>
             <a:endParaRPr lang="en-US" sz="780" dirty="0"/>
           </a:p>
@@ -3935,7 +3935,7 @@
                 <a:ea typeface="Google Sans" pitchFamily="34" charset="-122"/>
                 <a:cs typeface="Google Sans" pitchFamily="34" charset="-120"/>
               </a:rPr>
-              <a:t>PART 3 • SLIDE 7 (L3)</a:t>
+              <a:t>PART 3 • SLIDES 10–12</a:t>
             </a:r>
             <a:endParaRPr lang="en-US" sz="660" dirty="0"/>
           </a:p>
@@ -3974,7 +3974,7 @@
                 <a:ea typeface="Google Sans" pitchFamily="34" charset="-122"/>
                 <a:cs typeface="Google Sans" pitchFamily="34" charset="-120"/>
               </a:rPr>
-              <a:t>Merged L3 UML, Breakers &amp; Stampede Lock</a:t>
+              <a:t>L3 UML, L4 Wire JWT &amp; GAP-01..05 Controls</a:t>
             </a:r>
             <a:endParaRPr lang="en-US" sz="850" dirty="0"/>
           </a:p>
@@ -4013,7 +4013,7 @@
                 <a:ea typeface="Roboto" pitchFamily="34" charset="-122"/>
                 <a:cs typeface="Roboto" pitchFamily="34" charset="-120"/>
               </a:rPr>
-              <a:t>Unifies the 5-Actor chronological UML sequence (Hops 1–5 / UML Steps 1–6) with [Alt] fail-closed circuit breakers (HTTP 401–429), &lt;5s targeted Valkey SCAN+UNLINK, and SET NX PX 5000 single-flight recovery (Slide 7).</a:t>
+              <a:t>Unifies the 5-Actor UML sequence &amp; &lt;5s Valkey eviction (Slide 10), &lt;0.15ms cached-JWKS STS JWT wire packet (Slide 11), and feature-flagged GAP-01..05 sunset hooks (Slide 12).</a:t>
             </a:r>
             <a:endParaRPr lang="en-US" sz="780" dirty="0"/>
           </a:p>
@@ -4121,7 +4121,7 @@
                 <a:ea typeface="Google Sans" pitchFamily="34" charset="-122"/>
                 <a:cs typeface="Google Sans" pitchFamily="34" charset="-120"/>
               </a:rPr>
-              <a:t>PARTS 4–5 • SLIDES 9–11</a:t>
+              <a:t>PARTS 4–5 • SLIDES 13–15</a:t>
             </a:r>
             <a:endParaRPr lang="en-US" sz="660" dirty="0"/>
           </a:p>
@@ -4160,7 +4160,7 @@
                 <a:ea typeface="Google Sans" pitchFamily="34" charset="-122"/>
                 <a:cs typeface="Google Sans" pitchFamily="34" charset="-120"/>
               </a:rPr>
-              <a:t>GAP-01..05, Live GCP Proof &amp; Merged SLAs</a:t>
+              <a:t>Dual-Plane Proofs, Retina UIs &amp; SLAs</a:t>
             </a:r>
             <a:endParaRPr lang="en-US" sz="850" dirty="0"/>
           </a:p>
@@ -4199,7 +4199,7 @@
                 <a:ea typeface="Roboto" pitchFamily="34" charset="-122"/>
                 <a:cs typeface="Roboto" pitchFamily="34" charset="-120"/>
               </a:rPr>
-              <a:t>Details feature-flagged GAP-01..05 sunset hooks + BigQuery OTel SQL (Slide 9), live Cloud Run &amp; Cloud Logging proof (Slide 10), and merged Well-Architected SLAs + 5 runnable GitHub milestones (Slide 11).</a:t>
+              <a:t>Presents grounded GCP/AWS CLI telemetry (Slide 13), live 2880x1800 Retina Before/After 3P SaaS UIs (Slide 14), and Well-Architected SLAs + 5 GitHub milestones (Slide 15).</a:t>
             </a:r>
             <a:endParaRPr lang="en-US" sz="780" dirty="0"/>
           </a:p>
@@ -16220,7 +16220,7 @@
                 <a:ea typeface="Google Sans" pitchFamily="34" charset="-122"/>
                 <a:cs typeface="Google Sans" pitchFamily="34" charset="-120"/>
               </a:rPr>
-              <a:t>Part 2 (Slides 5, 6 &amp; 8) — 5-Hop Pipeline &amp; Pattern A Pool</a:t>
+              <a:t>Part 2 (Slides 5–9) — 5-Hop Pipeline &amp; Pattern A Pool</a:t>
             </a:r>
             <a:endParaRPr lang="en-US" sz="1040" dirty="0"/>
           </a:p>
@@ -16441,7 +16441,7 @@
                 <a:ea typeface="Google Sans" pitchFamily="34" charset="-122"/>
                 <a:cs typeface="Google Sans" pitchFamily="34" charset="-120"/>
               </a:rPr>
-              <a:t>Owner: Cloud Security &amp; IAM  •  Part 2: 5-Hop &amp; Pattern A</a:t>
+              <a:t>Owner: Cloud Security &amp; IAM  •  Part 2: 5-Hop &amp; Pattern A (Slides 5–9)</a:t>
             </a:r>
             <a:endParaRPr lang="en-US" sz="750" dirty="0"/>
           </a:p>
@@ -16588,7 +16588,7 @@
                 <a:ea typeface="Google Sans" pitchFamily="34" charset="-122"/>
                 <a:cs typeface="Google Sans" pitchFamily="34" charset="-120"/>
               </a:rPr>
-              <a:t>Part 3 (Slide 7) — Circuit Breakers, CMEK &amp; Valkey L1 Flush</a:t>
+              <a:t>Part 3 (Slide 10) — Circuit Breakers, CMEK &amp; Valkey L1 Flush</a:t>
             </a:r>
             <a:endParaRPr lang="en-US" sz="1040" dirty="0"/>
           </a:p>
@@ -16809,7 +16809,7 @@
                 <a:ea typeface="Google Sans" pitchFamily="34" charset="-122"/>
                 <a:cs typeface="Google Sans" pitchFamily="34" charset="-120"/>
               </a:rPr>
-              <a:t>Owner: Data &amp; FinOps SRE  •  Part 3: Breakers &amp; Silos (Slide 7)</a:t>
+              <a:t>Owner: Data &amp; FinOps SRE  •  Part 3: Breakers &amp; Silos (Slide 10)</a:t>
             </a:r>
             <a:endParaRPr lang="en-US" sz="750" dirty="0"/>
           </a:p>
@@ -16956,7 +16956,7 @@
                 <a:ea typeface="Google Sans" pitchFamily="34" charset="-122"/>
                 <a:cs typeface="Google Sans" pitchFamily="34" charset="-120"/>
               </a:rPr>
-              <a:t>Part 4 (Slide 9) — EAP Gap Controls &amp; Pattern C Hybrid FinOps</a:t>
+              <a:t>Part 4 (Slides 11–12) — EAP Gap Controls &amp; Pattern C Hybrid FinOps</a:t>
             </a:r>
             <a:endParaRPr lang="en-US" sz="1140" dirty="0"/>
           </a:p>
@@ -17177,7 +17177,7 @@
                 <a:ea typeface="Google Sans" pitchFamily="34" charset="-122"/>
                 <a:cs typeface="Google Sans" pitchFamily="34" charset="-120"/>
               </a:rPr>
-              <a:t>Owner: Tenant Onboarding  •  Part 4: Gaps &amp; Hybrid PSC (Slide 9)</a:t>
+              <a:t>Owner: Tenant Onboarding  •  Part 4: Gaps &amp; Hybrid PSC (Slides 11–12)</a:t>
             </a:r>
             <a:endParaRPr lang="en-US" sz="750" dirty="0"/>
           </a:p>
@@ -17324,7 +17324,7 @@
                 <a:ea typeface="Google Sans" pitchFamily="34" charset="-122"/>
                 <a:cs typeface="Google Sans" pitchFamily="34" charset="-120"/>
               </a:rPr>
-              <a:t>Part 5 (Slides 10–11) — Dual-Plane CI/CD Forensic Audit &amp; Day-2 Operations</a:t>
+              <a:t>Part 5 (Slides 13–15) — Dual-Plane CI/CD Forensic Audit &amp; Day-2 Operations</a:t>
             </a:r>
             <a:endParaRPr lang="en-US" sz="1140" dirty="0"/>
           </a:p>
@@ -17545,7 +17545,7 @@
                 <a:ea typeface="Google Sans" pitchFamily="34" charset="-122"/>
                 <a:cs typeface="Google Sans" pitchFamily="34" charset="-120"/>
               </a:rPr>
-              <a:t>Owner: Governance &amp; CISO  •  Part 5: Dual-Plane CI/CD Gate (Slides 10–11)</a:t>
+              <a:t>Owner: Governance &amp; CISO  •  Part 5: Dual-Plane CI/CD Gate (Slides 13–15)</a:t>
             </a:r>
             <a:endParaRPr lang="en-US" sz="750" dirty="0"/>
           </a:p>
@@ -18219,7 +18219,7 @@
                 <a:ea typeface="Google Sans" pitchFamily="34" charset="-122"/>
                 <a:cs typeface="Google Sans" pitchFamily="34" charset="-120"/>
               </a:rPr>
-              <a:t>Agenda &amp; 5-Part Series Navigation — Streamlined 11-Slide Architecture Roadmap</a:t>
+              <a:t>Agenda &amp; 5-Part Series Navigation — 15-Slide Architecture Roadmap</a:t>
             </a:r>
             <a:endParaRPr lang="en-US" sz="1800" dirty="0"/>
           </a:p>
@@ -18605,7 +18605,7 @@
                           <a:ea typeface="Google Sans" pitchFamily="34" charset="-122"/>
                           <a:cs typeface="Google Sans" pitchFamily="34" charset="-120"/>
                         </a:rPr>
-                        <a:t>Isolation Topologies</a:t>
+                        <a:t>Isolation Topologies &amp; Concepts</a:t>
                       </a:r>
                       <a:endParaRPr lang="en-US" sz="900" dirty="0">
                         <a:latin typeface="Google Sans" charset="0"/>
@@ -18879,7 +18879,7 @@
                           <a:ea typeface="Google Sans" pitchFamily="34" charset="-122"/>
                           <a:cs typeface="Google Sans" pitchFamily="34" charset="-120"/>
                         </a:rPr>
-                        <a:t>Part 2 • Slides 5, 6 &amp; 8</a:t>
+                        <a:t>Part 2 • Slides 5–9</a:t>
                       </a:r>
                       <a:endParaRPr lang="en-US" sz="900" dirty="0">
                         <a:latin typeface="Google Sans" charset="0"/>
@@ -18900,7 +18900,7 @@
                           <a:ea typeface="Google Sans" pitchFamily="34" charset="-122"/>
                           <a:cs typeface="Google Sans" pitchFamily="34" charset="-120"/>
                         </a:rPr>
-                        <a:t>5-Hop Pipeline (L1/L2/L4)</a:t>
+                        <a:t>5-Hop Lifecycle &amp; L1/L2 Blueprints</a:t>
                       </a:r>
                       <a:endParaRPr lang="en-US" sz="900" dirty="0">
                         <a:latin typeface="Google Sans" charset="0"/>
@@ -19174,7 +19174,7 @@
                           <a:ea typeface="Google Sans" pitchFamily="34" charset="-122"/>
                           <a:cs typeface="Google Sans" pitchFamily="34" charset="-120"/>
                         </a:rPr>
-                        <a:t>Part 3 • Slide 7</a:t>
+                        <a:t>Part 3 • Slide 10</a:t>
                       </a:r>
                       <a:endParaRPr lang="en-US" sz="900" dirty="0">
                         <a:latin typeface="Google Sans" charset="0"/>
@@ -19469,7 +19469,7 @@
                           <a:ea typeface="Google Sans" pitchFamily="34" charset="-122"/>
                           <a:cs typeface="Google Sans" pitchFamily="34" charset="-120"/>
                         </a:rPr>
-                        <a:t>Part 4 • Slide 9</a:t>
+                        <a:t>Part 4 • Slides 11–12</a:t>
                       </a:r>
                       <a:endParaRPr lang="en-US" sz="900" dirty="0">
                         <a:latin typeface="Google Sans" charset="0"/>
@@ -19490,7 +19490,7 @@
                           <a:ea typeface="Google Sans" pitchFamily="34" charset="-122"/>
                           <a:cs typeface="Google Sans" pitchFamily="34" charset="-120"/>
                         </a:rPr>
-                        <a:t>Mind the Gap (GAP-01..05)</a:t>
+                        <a:t>L4 Wire Protocol &amp; EAP Gap Controls</a:t>
                       </a:r>
                       <a:endParaRPr lang="en-US" sz="900" dirty="0">
                         <a:latin typeface="Google Sans" charset="0"/>
@@ -19764,7 +19764,7 @@
                           <a:ea typeface="Google Sans" pitchFamily="34" charset="-122"/>
                           <a:cs typeface="Google Sans" pitchFamily="34" charset="-120"/>
                         </a:rPr>
-                        <a:t>Part 5 • Slides 10–11</a:t>
+                        <a:t>Part 5 • Slides 13–15</a:t>
                       </a:r>
                       <a:endParaRPr lang="en-US" sz="900" dirty="0">
                         <a:latin typeface="Google Sans" charset="0"/>
@@ -19785,7 +19785,7 @@
                           <a:ea typeface="Google Sans" pitchFamily="34" charset="-122"/>
                           <a:cs typeface="Google Sans" pitchFamily="34" charset="-120"/>
                         </a:rPr>
-                        <a:t>CI/CD Audit &amp; SLAs</a:t>
+                        <a:t>Retina UI Proofs &amp; Well-Architected SLAs</a:t>
                       </a:r>
                       <a:endParaRPr lang="en-US" sz="900" dirty="0">
                         <a:latin typeface="Google Sans" charset="0"/>
@@ -20682,7 +20682,7 @@
                 <a:ea typeface="Roboto" pitchFamily="34" charset="-122"/>
                 <a:cs typeface="Roboto" pitchFamily="34" charset="-120"/>
               </a:rPr>
-              <a:t>Workstream 1 • Reference Architecture &amp; Cloud Architecture Center Doc PR  •  Streamlined 11-Slide Executive Deck &amp; 5-Part Editorial Blog Series Roadmap</a:t>
+              <a:t>Workstream 1 • Reference Architecture &amp; Cloud Architecture Center Doc PR  •  15-Slide Executive Architecture Deck &amp; 5-Part Editorial Blog Series Roadmap</a:t>
             </a:r>
             <a:endParaRPr lang="en-US" sz="880" dirty="0"/>
           </a:p>

--- a/slides/ws1-google-slides-design-plugin-editable-slides.pptx
+++ b/slides/ws1-google-slides-design-plugin-editable-slides.pptx
@@ -9733,7 +9733,7 @@
                 <a:ea typeface="Google Sans" pitchFamily="34" charset="-122"/>
                 <a:cs typeface="Google Sans" pitchFamily="34" charset="-120"/>
               </a:rPr>
-              <a:t>ACT IV • EAP PRODUCT GAP REGISTER (GAP-01..05) &amp; COMPENSATING CONTROLS</a:t>
+              <a:t>ACT III • EAP PRODUCT GAP REGISTER (GAP-01..05) &amp; COMPENSATING CONTROLS</a:t>
             </a:r>
             <a:endParaRPr lang="en-US" sz="1020" dirty="0"/>
           </a:p>
@@ -13017,7 +13017,7 @@
                 <a:ea typeface="Roboto" pitchFamily="34" charset="-122"/>
                 <a:cs typeface="Roboto" pitchFamily="34" charset="-120"/>
               </a:rPr>
-              <a:t>• Runtime: Cloud Run Gen2 (gVisor runsc, 100% traffic)</a:t>
+              <a:t>• Runtime: Cloud Run Gen2 (gVisor runsc, 100% traffic, 0 cold-start errors)</a:t>
             </a:r>
             <a:endParaRPr lang="en-US" sz="840" dirty="0"/>
           </a:p>
@@ -13034,7 +13034,41 @@
                 <a:ea typeface="Roboto" pitchFamily="34" charset="-122"/>
                 <a:cs typeface="Roboto" pitchFamily="34" charset="-120"/>
               </a:rPr>
-              <a:t>• CLI Gate: run_deep_forensic_audit.py (13/13 PASS)</a:t>
+              <a:t>• Edge &amp; STS Probe: Spoofed X-Tenant-Id -&gt; HTTP 403; Valid DPoP -&gt; HTTP 200</a:t>
+            </a:r>
+            <a:endParaRPr lang="en-US" sz="840" dirty="0"/>
+          </a:p>
+          <a:p>
+            <a:pPr indent="0" marL="0">
+              <a:buNone/>
+            </a:pPr>
+            <a:r>
+              <a:rPr lang="en-US" sz="840" dirty="0">
+                <a:solidFill>
+                  <a:srgbClr val="5F6368"/>
+                </a:solidFill>
+                <a:latin typeface="Roboto" pitchFamily="34" charset="0"/>
+                <a:ea typeface="Roboto" pitchFamily="34" charset="-122"/>
+                <a:cs typeface="Roboto" pitchFamily="34" charset="-120"/>
+              </a:rPr>
+              <a:t>• AlloyDB RLS Proof: SET LOCAL app.current_tenant_id -&gt; 0 foreign rows returned</a:t>
+            </a:r>
+            <a:endParaRPr lang="en-US" sz="840" dirty="0"/>
+          </a:p>
+          <a:p>
+            <a:pPr indent="0" marL="0">
+              <a:buNone/>
+            </a:pPr>
+            <a:r>
+              <a:rPr lang="en-US" sz="840" dirty="0">
+                <a:solidFill>
+                  <a:srgbClr val="5F6368"/>
+                </a:solidFill>
+                <a:latin typeface="Roboto" pitchFamily="34" charset="0"/>
+                <a:ea typeface="Roboto" pitchFamily="34" charset="-122"/>
+                <a:cs typeface="Roboto" pitchFamily="34" charset="-120"/>
+              </a:rPr>
+              <a:t>• CLI Gate: python3 -B scripts/run_deep_forensic_audit.py (13/13 PASS • 107/107)</a:t>
             </a:r>
             <a:endParaRPr lang="en-US" sz="840" dirty="0"/>
           </a:p>
@@ -13298,7 +13332,24 @@
                 <a:ea typeface="Roboto" pitchFamily="34" charset="-122"/>
                 <a:cs typeface="Roboto" pitchFamily="34" charset="-120"/>
               </a:rPr>
-              <a:t>• 3P UIs (2880×1800): Metabase BI v0.50.26 &amp; Trino SQL v440</a:t>
+              <a:t>• AWS AgentCore MCP: 10/10 SaaS targets READY (30/30 cross-cloud flows PASS)</a:t>
+            </a:r>
+            <a:endParaRPr lang="en-US" sz="840" dirty="0"/>
+          </a:p>
+          <a:p>
+            <a:pPr indent="0" marL="0">
+              <a:buNone/>
+            </a:pPr>
+            <a:r>
+              <a:rPr lang="en-US" sz="840" dirty="0">
+                <a:solidFill>
+                  <a:srgbClr val="5F6368"/>
+                </a:solidFill>
+                <a:latin typeface="Roboto" pitchFamily="34" charset="0"/>
+                <a:ea typeface="Roboto" pitchFamily="34" charset="-122"/>
+                <a:cs typeface="Roboto" pitchFamily="34" charset="-120"/>
+              </a:rPr>
+              <a:t>• 3P UIs (2880×1800): Metabase BI v0.50.26 &amp; Trino SQL v440 (20/20 Before/After)</a:t>
             </a:r>
             <a:endParaRPr lang="en-US" sz="840" dirty="0"/>
           </a:p>
@@ -18258,7 +18309,7 @@
                 <a:ea typeface="Roboto" pitchFamily="34" charset="-122"/>
                 <a:cs typeface="Roboto" pitchFamily="34" charset="-120"/>
               </a:rPr>
-              <a:t>Streamlined 11-slide executive deck &amp; 5-part blog series roadmap: macro-to-micro L1→L2→L3→L4 hierarchy with zero redundant slides.</a:t>
+              <a:t>15-slide executive deck &amp; 5-part blog series roadmap: Conceptual → Process → L1–L4 Technical → Dual-Plane Proofs &amp; SLAs.</a:t>
             </a:r>
             <a:endParaRPr lang="en-US" sz="980" dirty="0"/>
           </a:p>
@@ -20119,7 +20170,7 @@
               <a:buNone/>
             </a:pPr>
             <a:r>
-              <a:rPr lang="en-US" sz="760" b="1" dirty="0">
+              <a:rPr lang="en-US" sz="820" b="1" dirty="0">
                 <a:solidFill>
                   <a:srgbClr val="3C4043"/>
                 </a:solidFill>
@@ -20127,9 +20178,9 @@
                 <a:ea typeface="Google Sans" pitchFamily="34" charset="-122"/>
                 <a:cs typeface="Google Sans" pitchFamily="34" charset="-120"/>
               </a:rPr>
-              <a:t>1. Macro-to-Micro L1 → L2 → L3 → L4 Flow</a:t>
-            </a:r>
-            <a:endParaRPr lang="en-US" sz="760" dirty="0"/>
+              <a:t>1. Conceptual → Process → L1–L4 Flow</a:t>
+            </a:r>
+            <a:endParaRPr lang="en-US" sz="820" dirty="0"/>
           </a:p>
         </p:txBody>
       </p:sp>
@@ -20168,7 +20219,7 @@
                 <a:ea typeface="Roboto" pitchFamily="34" charset="-122"/>
                 <a:cs typeface="Roboto" pitchFamily="34" charset="-120"/>
               </a:rPr>
-              <a:t>Restores strict top-down abstraction: L1 Logical (Slide 5) → L2 Physical Blueprint (Slide 6) → L3 Process &amp; Breakers (Slide 7) → L4 Wire JWT (Slide 8).</a:t>
+              <a:t>Progresses from Conceptual (Slide 4) &amp; Process (Slide 5) to L1 Logical (Slide 6), L2 Blueprints (Slides 8–9), L3 UML (Slide 10) &amp; L4 Wire (Slide 11).</a:t>
             </a:r>
             <a:endParaRPr lang="en-US" sz="740" dirty="0"/>
           </a:p>
@@ -20297,7 +20348,7 @@
                 <a:ea typeface="Roboto" pitchFamily="34" charset="-122"/>
                 <a:cs typeface="Roboto" pitchFamily="34" charset="-120"/>
               </a:rPr>
-              <a:t>Separates Slide 5’s 3 Logical Security Layers (Ingress, 5-Hop Control Plane, Data Planes) from Slide 6’s 4 Physical VPC-SC Network Perimeters.</a:t>
+              <a:t>Separates Slide 6’s 3 Logical Security Layers (Ingress, 5-Hop Control Plane, Data Planes) from Slides 8–9’s 4 Physical VPC-SC Network Perimeters.</a:t>
             </a:r>
             <a:endParaRPr lang="en-US" sz="740" dirty="0"/>
           </a:p>
@@ -20385,7 +20436,7 @@
                 <a:ea typeface="Google Sans" pitchFamily="34" charset="-122"/>
                 <a:cs typeface="Google Sans" pitchFamily="34" charset="-120"/>
               </a:rPr>
-              <a:t>3. Merged L3 UML &amp; Circuit Breakers (Slide 7)</a:t>
+              <a:t>3. Merged L3 UML &amp; Circuit Breakers (Slide 10)</a:t>
             </a:r>
             <a:endParaRPr lang="en-US" sz="760" dirty="0"/>
           </a:p>
@@ -20514,7 +20565,7 @@
                 <a:ea typeface="Google Sans" pitchFamily="34" charset="-122"/>
                 <a:cs typeface="Google Sans" pitchFamily="34" charset="-120"/>
               </a:rPr>
-              <a:t>4. Merged SLAs &amp; 5-Part Roadmap (Slide 11)</a:t>
+              <a:t>4. Dual-Plane Proofs &amp; SLAs (Slides 13–15)</a:t>
             </a:r>
             <a:endParaRPr lang="en-US" sz="760" dirty="0"/>
           </a:p>
@@ -20555,7 +20606,7 @@
                 <a:ea typeface="Roboto" pitchFamily="34" charset="-122"/>
                 <a:cs typeface="Roboto" pitchFamily="34" charset="-120"/>
               </a:rPr>
-              <a:t>Consolidates all Well-Architected SLAs (~42ms 5-Hop, 84.7% token savings, 74% TCO reduction, &lt;30s RTO) directly into the 5 runnable milestones.</a:t>
+              <a:t>Pairs grounded GCP/AWS CLI telemetry (Slide 13) &amp; 2880x1800 Retina 3P SaaS UIs (Slide 14) with Well-Architected SLAs &amp; 5 milestones (Slide 15).</a:t>
             </a:r>
             <a:endParaRPr lang="en-US" sz="740" dirty="0"/>
           </a:p>
@@ -30819,7 +30870,7 @@
                 <a:ea typeface="Roboto" pitchFamily="34" charset="-122"/>
                 <a:cs typeface="Roboto" pitchFamily="34" charset="-120"/>
               </a:rPr>
-              <a:t>Workstream 1 L1 Logical Taxonomy (3 Logical Security Layers → 4 Physical VPC-SC Perimeters on Slide 6)  •  ~42ms p95 5-Hop Control Plane  •  </a:t>
+              <a:t>Workstream 1 L1 Logical Taxonomy (3 Logical Security Layers → 4 Physical VPC-SC Perimeters on Slides 8–9)  •  ~42ms p95 5-Hop Control Plane  •  </a:t>
             </a:r>
             <a:pPr algn="l" indent="0" marL="0">
               <a:buNone/>
